--- a/Presentations/4.True Randomness Testing & Random Number Generators.pptx
+++ b/Presentations/4.True Randomness Testing & Random Number Generators.pptx
@@ -1926,7 +1926,7 @@
           <a:p>
             <a:fld id="{5BCAD085-E8A6-8845-BD4E-CB4CCA059FC4}" type="datetimeFigureOut">
               <a:rPr lang="en-US" smtClean="0"/>
-              <a:t>2/27/26</a:t>
+              <a:t>3/5/26</a:t>
             </a:fld>
             <a:endParaRPr lang="en-US"/>
           </a:p>
@@ -2094,7 +2094,7 @@
           <a:p>
             <a:fld id="{5BCAD085-E8A6-8845-BD4E-CB4CCA059FC4}" type="datetimeFigureOut">
               <a:rPr lang="en-US" smtClean="0"/>
-              <a:t>2/27/26</a:t>
+              <a:t>3/5/26</a:t>
             </a:fld>
             <a:endParaRPr lang="en-US"/>
           </a:p>
@@ -2272,7 +2272,7 @@
           <a:p>
             <a:fld id="{5BCAD085-E8A6-8845-BD4E-CB4CCA059FC4}" type="datetimeFigureOut">
               <a:rPr lang="en-US" smtClean="0"/>
-              <a:t>2/27/26</a:t>
+              <a:t>3/5/26</a:t>
             </a:fld>
             <a:endParaRPr lang="en-US"/>
           </a:p>
@@ -2440,7 +2440,7 @@
           <a:p>
             <a:fld id="{5BCAD085-E8A6-8845-BD4E-CB4CCA059FC4}" type="datetimeFigureOut">
               <a:rPr lang="en-US" smtClean="0"/>
-              <a:t>2/27/26</a:t>
+              <a:t>3/5/26</a:t>
             </a:fld>
             <a:endParaRPr lang="en-US"/>
           </a:p>
@@ -2685,7 +2685,7 @@
           <a:p>
             <a:fld id="{5BCAD085-E8A6-8845-BD4E-CB4CCA059FC4}" type="datetimeFigureOut">
               <a:rPr lang="en-US" smtClean="0"/>
-              <a:t>2/27/26</a:t>
+              <a:t>3/5/26</a:t>
             </a:fld>
             <a:endParaRPr lang="en-US"/>
           </a:p>
@@ -2970,7 +2970,7 @@
           <a:p>
             <a:fld id="{5BCAD085-E8A6-8845-BD4E-CB4CCA059FC4}" type="datetimeFigureOut">
               <a:rPr lang="en-US" smtClean="0"/>
-              <a:t>2/27/26</a:t>
+              <a:t>3/5/26</a:t>
             </a:fld>
             <a:endParaRPr lang="en-US"/>
           </a:p>
@@ -3389,7 +3389,7 @@
           <a:p>
             <a:fld id="{5BCAD085-E8A6-8845-BD4E-CB4CCA059FC4}" type="datetimeFigureOut">
               <a:rPr lang="en-US" smtClean="0"/>
-              <a:t>2/27/26</a:t>
+              <a:t>3/5/26</a:t>
             </a:fld>
             <a:endParaRPr lang="en-US"/>
           </a:p>
@@ -3506,7 +3506,7 @@
           <a:p>
             <a:fld id="{5BCAD085-E8A6-8845-BD4E-CB4CCA059FC4}" type="datetimeFigureOut">
               <a:rPr lang="en-US" smtClean="0"/>
-              <a:t>2/27/26</a:t>
+              <a:t>3/5/26</a:t>
             </a:fld>
             <a:endParaRPr lang="en-US"/>
           </a:p>
@@ -3601,7 +3601,7 @@
           <a:p>
             <a:fld id="{5BCAD085-E8A6-8845-BD4E-CB4CCA059FC4}" type="datetimeFigureOut">
               <a:rPr lang="en-US" smtClean="0"/>
-              <a:t>2/27/26</a:t>
+              <a:t>3/5/26</a:t>
             </a:fld>
             <a:endParaRPr lang="en-US"/>
           </a:p>
@@ -3876,7 +3876,7 @@
           <a:p>
             <a:fld id="{5BCAD085-E8A6-8845-BD4E-CB4CCA059FC4}" type="datetimeFigureOut">
               <a:rPr lang="en-US" smtClean="0"/>
-              <a:t>2/27/26</a:t>
+              <a:t>3/5/26</a:t>
             </a:fld>
             <a:endParaRPr lang="en-US"/>
           </a:p>
@@ -4128,7 +4128,7 @@
           <a:p>
             <a:fld id="{5BCAD085-E8A6-8845-BD4E-CB4CCA059FC4}" type="datetimeFigureOut">
               <a:rPr lang="en-US" smtClean="0"/>
-              <a:t>2/27/26</a:t>
+              <a:t>3/5/26</a:t>
             </a:fld>
             <a:endParaRPr lang="en-US"/>
           </a:p>
@@ -4339,7 +4339,7 @@
           <a:p>
             <a:fld id="{5BCAD085-E8A6-8845-BD4E-CB4CCA059FC4}" type="datetimeFigureOut">
               <a:rPr lang="en-US" smtClean="0"/>
-              <a:t>2/27/26</a:t>
+              <a:t>3/5/26</a:t>
             </a:fld>
             <a:endParaRPr lang="en-US"/>
           </a:p>
@@ -16860,8 +16860,8 @@
         </p:nvSpPr>
         <p:spPr>
           <a:xfrm>
-            <a:off x="800079" y="6072491"/>
-            <a:ext cx="11059823" cy="370871"/>
+            <a:off x="800079" y="6065726"/>
+            <a:ext cx="11290078" cy="384401"/>
           </a:xfrm>
           <a:prstGeom prst="rect">
             <a:avLst/>
@@ -16886,13 +16886,49 @@
               </a:spcAft>
             </a:pPr>
             <a:r>
-              <a:rPr sz="2000" b="0">
+              <a:rPr sz="2000" b="0" dirty="0">
                 <a:solidFill>
                   <a:srgbClr val="8A92A8"/>
                 </a:solidFill>
                 <a:latin typeface="Inter"/>
               </a:rPr>
-              <a:t>"Random numbers are the sine qua non of modern computational systems and secure communications."</a:t>
+              <a:t>"Random numbers are the </a:t>
+            </a:r>
+            <a:r>
+              <a:rPr lang="en-US" sz="2000" b="1" dirty="0">
+                <a:solidFill>
+                  <a:srgbClr val="8A92A8"/>
+                </a:solidFill>
+                <a:latin typeface="Inter"/>
+              </a:rPr>
+              <a:t>"</a:t>
+            </a:r>
+            <a:r>
+              <a:rPr lang="en-US" sz="2400" b="1" dirty="0">
+                <a:solidFill>
+                  <a:schemeClr val="bg1"/>
+                </a:solidFill>
+                <a:latin typeface="Inter"/>
+              </a:rPr>
+              <a:t>must-have</a:t>
+            </a:r>
+            <a:r>
+              <a:rPr lang="en-US" sz="2000" b="1" dirty="0">
+                <a:solidFill>
+                  <a:srgbClr val="8A92A8"/>
+                </a:solidFill>
+                <a:latin typeface="Inter"/>
+              </a:rPr>
+              <a:t>”</a:t>
+            </a:r>
+            <a:r>
+              <a:rPr sz="2000" b="0" dirty="0">
+                <a:solidFill>
+                  <a:srgbClr val="8A92A8"/>
+                </a:solidFill>
+                <a:latin typeface="Inter"/>
+              </a:rPr>
+              <a:t> of modern computational systems and secure communications."</a:t>
             </a:r>
           </a:p>
         </p:txBody>

--- a/Presentations/4.True Randomness Testing & Random Number Generators.pptx
+++ b/Presentations/4.True Randomness Testing & Random Number Generators.pptx
@@ -14305,7 +14305,7 @@
         </p:nvSpPr>
         <p:spPr>
           <a:xfrm>
-            <a:off x="609584" y="972780"/>
+            <a:off x="2728669" y="826348"/>
             <a:ext cx="4857292" cy="413255"/>
           </a:xfrm>
           <a:prstGeom prst="rect">
@@ -14331,76 +14331,13 @@
               </a:spcAft>
             </a:pPr>
             <a:r>
-              <a:rPr sz="2400" b="1">
+              <a:rPr sz="2400" b="1" dirty="0">
                 <a:solidFill>
                   <a:srgbClr val="00D4FF"/>
                 </a:solidFill>
                 <a:latin typeface="Space Grotesk"/>
               </a:rPr>
               <a:t>Can We Generate True Randomness?</a:t>
-            </a:r>
-          </a:p>
-        </p:txBody>
-      </p:sp>
-      <p:sp>
-        <p:nvSpPr>
-          <p:cNvPr id="6" name="TextBox 5"/>
-          <p:cNvSpPr txBox="1"/>
-          <p:nvPr/>
-        </p:nvSpPr>
-        <p:spPr>
-          <a:xfrm>
-            <a:off x="647162" y="1518776"/>
-            <a:ext cx="3933726" cy="1373966"/>
-          </a:xfrm>
-          <a:prstGeom prst="rect">
-            <a:avLst/>
-          </a:prstGeom>
-          <a:noFill/>
-        </p:spPr>
-        <p:txBody>
-          <a:bodyPr wrap="square" lIns="73152" tIns="54864" rIns="73152" bIns="54864" anchor="ctr">
-            <a:spAutoFit/>
-          </a:bodyPr>
-          <a:lstStyle/>
-          <a:p>
-            <a:pPr algn="l">
-              <a:lnSpc>
-                <a:spcPts val="2535"/>
-              </a:lnSpc>
-              <a:spcBef>
-                <a:spcPts val="0"/>
-              </a:spcBef>
-              <a:spcAft>
-                <a:spcPts val="0"/>
-              </a:spcAft>
-            </a:pPr>
-            <a:r>
-              <a:rPr sz="2000" b="0" dirty="0">
-                <a:solidFill>
-                  <a:srgbClr val="B0B8D4"/>
-                </a:solidFill>
-                <a:latin typeface="Inter"/>
-              </a:rPr>
-              <a:t> The term </a:t>
-            </a:r>
-            <a:r>
-              <a:rPr sz="2000" b="1" dirty="0">
-                <a:solidFill>
-                  <a:srgbClr val="FFFFFF"/>
-                </a:solidFill>
-                <a:latin typeface="Inter"/>
-              </a:rPr>
-              <a:t>"Random Number Generator"</a:t>
-            </a:r>
-            <a:r>
-              <a:rPr sz="2000" b="0" dirty="0">
-                <a:solidFill>
-                  <a:srgbClr val="B0B8D4"/>
-                </a:solidFill>
-                <a:latin typeface="Inter"/>
-              </a:rPr>
-              <a:t> is fundamentally a mathematical and computational oxymoron. </a:t>
             </a:r>
           </a:p>
         </p:txBody>
@@ -14428,7 +14365,7 @@
         </p:blipFill>
         <p:spPr>
           <a:xfrm>
-            <a:off x="5858520" y="1031300"/>
+            <a:off x="5858520" y="1524785"/>
             <a:ext cx="304792" cy="216876"/>
           </a:xfrm>
           <a:prstGeom prst="rect">
@@ -14444,7 +14381,7 @@
         </p:nvSpPr>
         <p:spPr>
           <a:xfrm>
-            <a:off x="6353808" y="925497"/>
+            <a:off x="6353808" y="1418982"/>
             <a:ext cx="2795317" cy="418961"/>
           </a:xfrm>
           <a:prstGeom prst="rect">
@@ -14489,7 +14426,7 @@
         </p:nvSpPr>
         <p:spPr>
           <a:xfrm>
-            <a:off x="6353808" y="1435014"/>
+            <a:off x="6353808" y="1928499"/>
             <a:ext cx="5629134" cy="685800"/>
           </a:xfrm>
           <a:prstGeom prst="rect">
@@ -14564,7 +14501,7 @@
       </p:sp>
       <p:pic>
         <p:nvPicPr>
-          <p:cNvPr id="14" name="Picture 13" descr="image.png"/>
+          <p:cNvPr id="17" name="Picture 16" descr="image.png"/>
           <p:cNvPicPr>
             <a:picLocks noChangeAspect="1"/>
           </p:cNvPicPr>
@@ -14585,8 +14522,8 @@
         </p:blipFill>
         <p:spPr>
           <a:xfrm>
-            <a:off x="5858520" y="2507675"/>
-            <a:ext cx="304792" cy="216876"/>
+            <a:off x="114296" y="1460052"/>
+            <a:ext cx="304792" cy="246184"/>
           </a:xfrm>
           <a:prstGeom prst="rect">
             <a:avLst/>
@@ -14595,14 +14532,14 @@
       </p:pic>
       <p:sp>
         <p:nvSpPr>
-          <p:cNvPr id="15" name="TextBox 14"/>
+          <p:cNvPr id="18" name="TextBox 17"/>
           <p:cNvSpPr txBox="1"/>
           <p:nvPr/>
         </p:nvSpPr>
         <p:spPr>
           <a:xfrm>
-            <a:off x="6353808" y="2401871"/>
-            <a:ext cx="2361159" cy="418961"/>
+            <a:off x="609584" y="1368903"/>
+            <a:ext cx="2376805" cy="418961"/>
           </a:xfrm>
           <a:prstGeom prst="rect">
             <a:avLst/>
@@ -14633,21 +14570,21 @@
                 </a:solidFill>
                 <a:latin typeface="Inter"/>
               </a:rPr>
-              <a:t>Quantum Challenges</a:t>
-            </a:r>
-          </a:p>
-        </p:txBody>
-      </p:sp>
-      <p:sp>
-        <p:nvSpPr>
-          <p:cNvPr id="16" name="TextBox 15"/>
+              <a:t>Proving Randomness</a:t>
+            </a:r>
+          </a:p>
+        </p:txBody>
+      </p:sp>
+      <p:sp>
+        <p:nvSpPr>
+          <p:cNvPr id="19" name="TextBox 18"/>
           <p:cNvSpPr txBox="1"/>
           <p:nvPr/>
         </p:nvSpPr>
         <p:spPr>
           <a:xfrm>
-            <a:off x="6353808" y="2953532"/>
-            <a:ext cx="5629134" cy="1277786"/>
+            <a:off x="711181" y="1870961"/>
+            <a:ext cx="5629134" cy="976036"/>
           </a:xfrm>
           <a:prstGeom prst="rect">
             <a:avLst/>
@@ -14672,144 +14609,23 @@
               </a:spcAft>
             </a:pPr>
             <a:r>
-              <a:rPr b="0">
+              <a:rPr b="0" dirty="0">
                 <a:solidFill>
                   <a:srgbClr val="B0B8D4"/>
                 </a:solidFill>
                 <a:latin typeface="Inter"/>
               </a:rPr>
-              <a:t>Even physical processes, including quantum experiments, present challenges in definitively proving true randomness versus unpredictability due to entropy or incomplete system knowledge</a:t>
+              <a:t>Distinguishing true randomness from unpredictability remains a fundamental challenge in computational systems and cryptography</a:t>
             </a:r>
           </a:p>
         </p:txBody>
       </p:sp>
       <p:pic>
         <p:nvPicPr>
-          <p:cNvPr id="17" name="Picture 16" descr="image.png"/>
-          <p:cNvPicPr>
-            <a:picLocks noChangeAspect="1"/>
-          </p:cNvPicPr>
-          <p:nvPr/>
-        </p:nvPicPr>
-        <p:blipFill>
-          <a:blip r:embed="rId4" cstate="email">
-            <a:alphaModFix/>
-            <a:extLst>
-              <a:ext uri="{28A0092B-C50C-407E-A947-70E740481C1C}">
-                <a14:useLocalDpi xmlns:a14="http://schemas.microsoft.com/office/drawing/2010/main"/>
-              </a:ext>
-            </a:extLst>
-          </a:blip>
-          <a:stretch>
-            <a:fillRect/>
-          </a:stretch>
-        </p:blipFill>
-        <p:spPr>
-          <a:xfrm>
-            <a:off x="114296" y="3303363"/>
-            <a:ext cx="304792" cy="246184"/>
-          </a:xfrm>
-          <a:prstGeom prst="rect">
-            <a:avLst/>
-          </a:prstGeom>
-        </p:spPr>
-      </p:pic>
-      <p:sp>
-        <p:nvSpPr>
-          <p:cNvPr id="18" name="TextBox 17"/>
-          <p:cNvSpPr txBox="1"/>
-          <p:nvPr/>
-        </p:nvSpPr>
-        <p:spPr>
-          <a:xfrm>
-            <a:off x="609584" y="3212214"/>
-            <a:ext cx="2376805" cy="418961"/>
-          </a:xfrm>
-          <a:prstGeom prst="rect">
-            <a:avLst/>
-          </a:prstGeom>
-          <a:noFill/>
-        </p:spPr>
-        <p:txBody>
-          <a:bodyPr wrap="none" lIns="73152" tIns="54864" rIns="73152" bIns="54864" anchor="ctr">
-            <a:spAutoFit/>
-          </a:bodyPr>
-          <a:lstStyle/>
-          <a:p>
-            <a:pPr algn="l">
-              <a:lnSpc>
-                <a:spcPts val="2535"/>
-              </a:lnSpc>
-              <a:spcBef>
-                <a:spcPts val="0"/>
-              </a:spcBef>
-              <a:spcAft>
-                <a:spcPts val="780"/>
-              </a:spcAft>
-            </a:pPr>
-            <a:r>
-              <a:rPr sz="2000" b="1">
-                <a:solidFill>
-                  <a:srgbClr val="FFFFFF"/>
-                </a:solidFill>
-                <a:latin typeface="Inter"/>
-              </a:rPr>
-              <a:t>Proving Randomness</a:t>
-            </a:r>
-          </a:p>
-        </p:txBody>
-      </p:sp>
-      <p:sp>
-        <p:nvSpPr>
-          <p:cNvPr id="19" name="TextBox 18"/>
-          <p:cNvSpPr txBox="1"/>
-          <p:nvPr/>
-        </p:nvSpPr>
-        <p:spPr>
-          <a:xfrm>
-            <a:off x="609584" y="3743300"/>
-            <a:ext cx="5629134" cy="976036"/>
-          </a:xfrm>
-          <a:prstGeom prst="rect">
-            <a:avLst/>
-          </a:prstGeom>
-          <a:noFill/>
-        </p:spPr>
-        <p:txBody>
-          <a:bodyPr wrap="square" lIns="73152" tIns="54864" rIns="73152" bIns="54864" anchor="ctr">
-            <a:spAutoFit/>
-          </a:bodyPr>
-          <a:lstStyle/>
-          <a:p>
-            <a:pPr algn="l">
-              <a:lnSpc>
-                <a:spcPts val="2275"/>
-              </a:lnSpc>
-              <a:spcBef>
-                <a:spcPts val="0"/>
-              </a:spcBef>
-              <a:spcAft>
-                <a:spcPts val="0"/>
-              </a:spcAft>
-            </a:pPr>
-            <a:r>
-              <a:rPr b="0">
-                <a:solidFill>
-                  <a:srgbClr val="B0B8D4"/>
-                </a:solidFill>
-                <a:latin typeface="Inter"/>
-              </a:rPr>
-              <a:t>Distinguishing true randomness from unpredictability remains a fundamental challenge in computational systems and cryptography</a:t>
-            </a:r>
-          </a:p>
-        </p:txBody>
-      </p:sp>
-      <p:pic>
-        <p:nvPicPr>
-          <p:cNvPr id="20" name="Picture 19">
+          <p:cNvPr id="4" name="Picture 3">
             <a:extLst>
               <a:ext uri="{FF2B5EF4-FFF2-40B4-BE49-F238E27FC236}">
-                <a16:creationId xmlns:a16="http://schemas.microsoft.com/office/drawing/2014/main" id="{199891DE-4828-0516-95E8-38051C082609}"/>
+                <a16:creationId xmlns:a16="http://schemas.microsoft.com/office/drawing/2014/main" id="{ED2D42D6-6904-8DDE-56D9-0F00E850BC7D}"/>
               </a:ext>
             </a:extLst>
           </p:cNvPr>
@@ -14819,21 +14635,15 @@
           <p:nvPr/>
         </p:nvPicPr>
         <p:blipFill>
-          <a:blip r:embed="rId5" cstate="email">
-            <a:extLst>
-              <a:ext uri="{28A0092B-C50C-407E-A947-70E740481C1C}">
-                <a14:useLocalDpi xmlns:a14="http://schemas.microsoft.com/office/drawing/2010/main"/>
-              </a:ext>
-            </a:extLst>
-          </a:blip>
+          <a:blip r:embed="rId4"/>
           <a:stretch>
             <a:fillRect/>
           </a:stretch>
         </p:blipFill>
         <p:spPr>
           <a:xfrm>
-            <a:off x="1157103" y="4831461"/>
-            <a:ext cx="9607929" cy="1733389"/>
+            <a:off x="756725" y="2860535"/>
+            <a:ext cx="10854703" cy="3883166"/>
           </a:xfrm>
           <a:prstGeom prst="rect">
             <a:avLst/>
@@ -15905,10 +15715,10 @@
       </p:sp>
       <p:pic>
         <p:nvPicPr>
-          <p:cNvPr id="34" name="Picture 33">
+          <p:cNvPr id="16" name="Picture 15">
             <a:extLst>
               <a:ext uri="{FF2B5EF4-FFF2-40B4-BE49-F238E27FC236}">
-                <a16:creationId xmlns:a16="http://schemas.microsoft.com/office/drawing/2014/main" id="{EE5853D5-1E54-A1FC-B117-025C17136E40}"/>
+                <a16:creationId xmlns:a16="http://schemas.microsoft.com/office/drawing/2014/main" id="{8A4FCB3F-3844-BA00-4384-0E239E06B5B1}"/>
               </a:ext>
             </a:extLst>
           </p:cNvPr>
@@ -15931,8 +15741,8 @@
         </p:blipFill>
         <p:spPr>
           <a:xfrm>
-            <a:off x="609584" y="4109200"/>
-            <a:ext cx="10576158" cy="2133386"/>
+            <a:off x="952475" y="4469695"/>
+            <a:ext cx="10150954" cy="2095155"/>
           </a:xfrm>
           <a:prstGeom prst="rect">
             <a:avLst/>
@@ -16071,7 +15881,7 @@
         </p:nvSpPr>
         <p:spPr>
           <a:xfrm>
-            <a:off x="609584" y="1619250"/>
+            <a:off x="609584" y="748399"/>
             <a:ext cx="5181470" cy="1619250"/>
           </a:xfrm>
           <a:prstGeom prst="roundRect">
@@ -16134,7 +15944,7 @@
         </p:blipFill>
         <p:spPr>
           <a:xfrm>
-            <a:off x="838179" y="1930598"/>
+            <a:off x="838179" y="1059747"/>
             <a:ext cx="380990" cy="291703"/>
           </a:xfrm>
           <a:prstGeom prst="rect">
@@ -16150,7 +15960,7 @@
         </p:nvSpPr>
         <p:spPr>
           <a:xfrm>
-            <a:off x="1371565" y="1808451"/>
+            <a:off x="1371565" y="937600"/>
             <a:ext cx="4357475" cy="478849"/>
           </a:xfrm>
           <a:prstGeom prst="rect">
@@ -16195,7 +16005,7 @@
         </p:nvSpPr>
         <p:spPr>
           <a:xfrm>
-            <a:off x="1371565" y="2312897"/>
+            <a:off x="1371565" y="1442046"/>
             <a:ext cx="4190895" cy="708207"/>
           </a:xfrm>
           <a:prstGeom prst="rect">
@@ -16240,7 +16050,7 @@
         </p:nvSpPr>
         <p:spPr>
           <a:xfrm>
-            <a:off x="609584" y="3543300"/>
+            <a:off x="609584" y="2672449"/>
             <a:ext cx="5181470" cy="1619250"/>
           </a:xfrm>
           <a:prstGeom prst="roundRect">
@@ -16303,7 +16113,7 @@
         </p:blipFill>
         <p:spPr>
           <a:xfrm>
-            <a:off x="838179" y="3884414"/>
+            <a:off x="838179" y="3013563"/>
             <a:ext cx="380990" cy="232171"/>
           </a:xfrm>
           <a:prstGeom prst="rect">
@@ -16319,7 +16129,7 @@
         </p:nvSpPr>
         <p:spPr>
           <a:xfrm>
-            <a:off x="1371565" y="3732502"/>
+            <a:off x="1371565" y="2861651"/>
             <a:ext cx="1314719" cy="478849"/>
           </a:xfrm>
           <a:prstGeom prst="rect">
@@ -16364,7 +16174,7 @@
         </p:nvSpPr>
         <p:spPr>
           <a:xfrm>
-            <a:off x="1371565" y="4236946"/>
+            <a:off x="1371565" y="3366095"/>
             <a:ext cx="4190895" cy="708207"/>
           </a:xfrm>
           <a:prstGeom prst="rect">
@@ -16409,7 +16219,7 @@
         </p:nvSpPr>
         <p:spPr>
           <a:xfrm>
-            <a:off x="6400639" y="1790700"/>
+            <a:off x="6400639" y="919849"/>
             <a:ext cx="5181470" cy="1276350"/>
           </a:xfrm>
           <a:prstGeom prst="roundRect">
@@ -16472,7 +16282,7 @@
         </p:blipFill>
         <p:spPr>
           <a:xfrm>
-            <a:off x="6629234" y="2078235"/>
+            <a:off x="6629234" y="1207384"/>
             <a:ext cx="380990" cy="339328"/>
           </a:xfrm>
           <a:prstGeom prst="rect">
@@ -16488,7 +16298,7 @@
         </p:nvSpPr>
         <p:spPr>
           <a:xfrm>
-            <a:off x="7162620" y="1979901"/>
+            <a:off x="7162620" y="1109050"/>
             <a:ext cx="2443746" cy="478849"/>
           </a:xfrm>
           <a:prstGeom prst="rect">
@@ -16533,7 +16343,7 @@
         </p:nvSpPr>
         <p:spPr>
           <a:xfrm>
-            <a:off x="7162620" y="2460374"/>
+            <a:off x="7162620" y="1676608"/>
             <a:ext cx="5420843" cy="413255"/>
           </a:xfrm>
           <a:prstGeom prst="rect">
@@ -16596,7 +16406,7 @@
         </p:nvSpPr>
         <p:spPr>
           <a:xfrm>
-            <a:off x="6400639" y="3371850"/>
+            <a:off x="6400639" y="2500999"/>
             <a:ext cx="5181470" cy="1619250"/>
           </a:xfrm>
           <a:prstGeom prst="roundRect">
@@ -16659,7 +16469,7 @@
         </p:blipFill>
         <p:spPr>
           <a:xfrm>
-            <a:off x="6629234" y="3683198"/>
+            <a:off x="6629234" y="2812347"/>
             <a:ext cx="380990" cy="291703"/>
           </a:xfrm>
           <a:prstGeom prst="rect">
@@ -16675,7 +16485,7 @@
         </p:nvSpPr>
         <p:spPr>
           <a:xfrm>
-            <a:off x="7162620" y="3561052"/>
+            <a:off x="7162620" y="2690201"/>
             <a:ext cx="4370877" cy="478849"/>
           </a:xfrm>
           <a:prstGeom prst="rect">
@@ -16720,7 +16530,7 @@
         </p:nvSpPr>
         <p:spPr>
           <a:xfrm>
-            <a:off x="7162620" y="4065495"/>
+            <a:off x="7162620" y="3194644"/>
             <a:ext cx="4190895" cy="708207"/>
           </a:xfrm>
           <a:prstGeom prst="rect">
@@ -16757,182 +16567,42 @@
           </a:p>
         </p:txBody>
       </p:sp>
-      <p:sp>
-        <p:nvSpPr>
-          <p:cNvPr id="20" name="Rounded Rectangle 19"/>
-          <p:cNvSpPr/>
-          <p:nvPr/>
-        </p:nvSpPr>
-        <p:spPr>
-          <a:xfrm>
-            <a:off x="609584" y="5962650"/>
-            <a:ext cx="10972525" cy="590549"/>
-          </a:xfrm>
-          <a:prstGeom prst="roundRect">
-            <a:avLst>
-              <a:gd name="adj" fmla="val 25806"/>
-            </a:avLst>
-          </a:prstGeom>
-          <a:solidFill>
-            <a:srgbClr val="00D4FF">
-              <a:alpha val="8000"/>
-            </a:srgbClr>
-          </a:solidFill>
-          <a:ln>
-            <a:noFill/>
-          </a:ln>
-        </p:spPr>
-        <p:style>
-          <a:lnRef idx="1">
-            <a:schemeClr val="accent1"/>
-          </a:lnRef>
-          <a:fillRef idx="3">
-            <a:schemeClr val="accent1"/>
-          </a:fillRef>
-          <a:effectRef idx="2">
-            <a:schemeClr val="accent1"/>
-          </a:effectRef>
-          <a:fontRef idx="minor">
-            <a:schemeClr val="lt1"/>
-          </a:fontRef>
-        </p:style>
-        <p:txBody>
-          <a:bodyPr rtlCol="0" anchor="ctr"/>
-          <a:lstStyle/>
-          <a:p>
-            <a:pPr algn="ctr"/>
-            <a:endParaRPr sz="3600"/>
-          </a:p>
-        </p:txBody>
-      </p:sp>
-      <p:sp>
-        <p:nvSpPr>
-          <p:cNvPr id="21" name="Round Same Side Corner Rectangle 20"/>
-          <p:cNvSpPr/>
-          <p:nvPr/>
-        </p:nvSpPr>
-        <p:spPr>
-          <a:xfrm rot="16200000">
-            <a:off x="380350" y="6191884"/>
-            <a:ext cx="590549" cy="132080"/>
-          </a:xfrm>
-          <a:prstGeom prst="round2SameRect">
-            <a:avLst>
-              <a:gd name="adj1" fmla="val 50000"/>
-              <a:gd name="adj2" fmla="val 0"/>
-            </a:avLst>
-          </a:prstGeom>
-          <a:solidFill>
-            <a:srgbClr val="00D4FF"/>
-          </a:solidFill>
-          <a:ln>
-            <a:noFill/>
-          </a:ln>
-        </p:spPr>
-        <p:style>
-          <a:lnRef idx="1">
-            <a:schemeClr val="accent1"/>
-          </a:lnRef>
-          <a:fillRef idx="3">
-            <a:schemeClr val="accent1"/>
-          </a:fillRef>
-          <a:effectRef idx="2">
-            <a:schemeClr val="accent1"/>
-          </a:effectRef>
-          <a:fontRef idx="minor">
-            <a:schemeClr val="lt1"/>
-          </a:fontRef>
-        </p:style>
-        <p:txBody>
-          <a:bodyPr rtlCol="0" anchor="ctr"/>
-          <a:lstStyle/>
-          <a:p>
-            <a:pPr algn="ctr"/>
-            <a:endParaRPr sz="3600"/>
-          </a:p>
-        </p:txBody>
-      </p:sp>
-      <p:sp>
-        <p:nvSpPr>
-          <p:cNvPr id="22" name="TextBox 21"/>
-          <p:cNvSpPr txBox="1"/>
-          <p:nvPr/>
-        </p:nvSpPr>
-        <p:spPr>
-          <a:xfrm>
-            <a:off x="800079" y="6065726"/>
-            <a:ext cx="11290078" cy="384401"/>
-          </a:xfrm>
-          <a:prstGeom prst="rect">
-            <a:avLst/>
-          </a:prstGeom>
-          <a:noFill/>
-        </p:spPr>
-        <p:txBody>
-          <a:bodyPr wrap="none" lIns="73152" tIns="54864" rIns="73152" bIns="54864" anchor="ctr">
-            <a:spAutoFit/>
-          </a:bodyPr>
-          <a:lstStyle/>
-          <a:p>
-            <a:pPr algn="l">
-              <a:lnSpc>
-                <a:spcPts val="1950"/>
-              </a:lnSpc>
-              <a:spcBef>
-                <a:spcPts val="0"/>
-              </a:spcBef>
-              <a:spcAft>
-                <a:spcPts val="0"/>
-              </a:spcAft>
-            </a:pPr>
-            <a:r>
-              <a:rPr sz="2000" b="0" dirty="0">
-                <a:solidFill>
-                  <a:srgbClr val="8A92A8"/>
-                </a:solidFill>
-                <a:latin typeface="Inter"/>
-              </a:rPr>
-              <a:t>"Random numbers are the </a:t>
-            </a:r>
-            <a:r>
-              <a:rPr lang="en-US" sz="2000" b="1" dirty="0">
-                <a:solidFill>
-                  <a:srgbClr val="8A92A8"/>
-                </a:solidFill>
-                <a:latin typeface="Inter"/>
-              </a:rPr>
-              <a:t>"</a:t>
-            </a:r>
-            <a:r>
-              <a:rPr lang="en-US" sz="2400" b="1" dirty="0">
-                <a:solidFill>
-                  <a:schemeClr val="bg1"/>
-                </a:solidFill>
-                <a:latin typeface="Inter"/>
-              </a:rPr>
-              <a:t>must-have</a:t>
-            </a:r>
-            <a:r>
-              <a:rPr lang="en-US" sz="2000" b="1" dirty="0">
-                <a:solidFill>
-                  <a:srgbClr val="8A92A8"/>
-                </a:solidFill>
-                <a:latin typeface="Inter"/>
-              </a:rPr>
-              <a:t>”</a:t>
-            </a:r>
-            <a:r>
-              <a:rPr sz="2000" b="0" dirty="0">
-                <a:solidFill>
-                  <a:srgbClr val="8A92A8"/>
-                </a:solidFill>
-                <a:latin typeface="Inter"/>
-              </a:rPr>
-              <a:t> of modern computational systems and secure communications."</a:t>
-            </a:r>
-          </a:p>
-        </p:txBody>
-      </p:sp>
+      <p:pic>
+        <p:nvPicPr>
+          <p:cNvPr id="23" name="Picture 22">
+            <a:extLst>
+              <a:ext uri="{FF2B5EF4-FFF2-40B4-BE49-F238E27FC236}">
+                <a16:creationId xmlns:a16="http://schemas.microsoft.com/office/drawing/2014/main" id="{7FCBA89F-91C8-E32C-BEF6-5C617B3806F1}"/>
+              </a:ext>
+            </a:extLst>
+          </p:cNvPr>
+          <p:cNvPicPr>
+            <a:picLocks noChangeAspect="1"/>
+          </p:cNvPicPr>
+          <p:nvPr/>
+        </p:nvPicPr>
+        <p:blipFill>
+          <a:blip r:embed="rId6" cstate="email">
+            <a:extLst>
+              <a:ext uri="{28A0092B-C50C-407E-A947-70E740481C1C}">
+                <a14:useLocalDpi xmlns:a14="http://schemas.microsoft.com/office/drawing/2010/main"/>
+              </a:ext>
+            </a:extLst>
+          </a:blip>
+          <a:stretch>
+            <a:fillRect/>
+          </a:stretch>
+        </p:blipFill>
+        <p:spPr>
+          <a:xfrm>
+            <a:off x="838179" y="4478577"/>
+            <a:ext cx="10576158" cy="2133386"/>
+          </a:xfrm>
+          <a:prstGeom prst="rect">
+            <a:avLst/>
+          </a:prstGeom>
+        </p:spPr>
+      </p:pic>
     </p:spTree>
   </p:cSld>
   <p:clrMapOvr>

--- a/Presentations/4.True Randomness Testing & Random Number Generators.pptx
+++ b/Presentations/4.True Randomness Testing & Random Number Generators.pptx
@@ -14,11 +14,10 @@
     <p:sldId id="264" r:id="rId8"/>
     <p:sldId id="263" r:id="rId9"/>
     <p:sldId id="265" r:id="rId10"/>
-    <p:sldId id="267" r:id="rId11"/>
-    <p:sldId id="268" r:id="rId12"/>
-    <p:sldId id="269" r:id="rId13"/>
-    <p:sldId id="272" r:id="rId14"/>
-    <p:sldId id="273" r:id="rId15"/>
+    <p:sldId id="268" r:id="rId11"/>
+    <p:sldId id="269" r:id="rId12"/>
+    <p:sldId id="272" r:id="rId13"/>
+    <p:sldId id="273" r:id="rId14"/>
   </p:sldIdLst>
   <p:sldSz cx="12192000" cy="6858000"/>
   <p:notesSz cx="6858000" cy="9144000"/>
@@ -5004,21 +5003,30 @@
               </a:spcAft>
             </a:pPr>
             <a:r>
-              <a:rPr sz="2000" b="0">
+              <a:rPr sz="2000" b="0" dirty="0">
                 <a:solidFill>
                   <a:srgbClr val="B0B8D4"/>
                 </a:solidFill>
                 <a:latin typeface="Inter"/>
               </a:rPr>
-              <a:t> NIST SP 800-22, Dieharder, VQR &amp; QPP Projects</a:t>
-            </a:r>
-            <a:r>
-              <a:rPr sz="2000"/>
+              <a:t> NIST SP 800-22, </a:t>
+            </a:r>
+            <a:r>
+              <a:rPr sz="2000" b="0" dirty="0" err="1">
+                <a:solidFill>
+                  <a:srgbClr val="B0B8D4"/>
+                </a:solidFill>
+                <a:latin typeface="Inter"/>
+              </a:rPr>
+              <a:t>Dieharder</a:t>
+            </a:r>
+            <a:r>
+              <a:rPr sz="2000" dirty="0"/>
               <a:t>
 </a:t>
             </a:r>
             <a:r>
-              <a:rPr sz="2000" b="0">
+              <a:rPr sz="2000" b="0" dirty="0">
                 <a:solidFill>
                   <a:srgbClr val="B0B8D4"/>
                 </a:solidFill>
@@ -5027,7 +5035,7 @@
               <a:t> </a:t>
             </a:r>
             <a:r>
-              <a:rPr b="0">
+              <a:rPr b="0" dirty="0">
                 <a:solidFill>
                   <a:srgbClr val="8A92A8"/>
                 </a:solidFill>
@@ -5036,7 +5044,7 @@
               <a:t>A Comprehensive Overview of RNG Testing and Quantum Approaches</a:t>
             </a:r>
             <a:r>
-              <a:rPr sz="2000" b="0">
+              <a:rPr sz="2000" b="0" dirty="0">
                 <a:solidFill>
                   <a:srgbClr val="B0B8D4"/>
                 </a:solidFill>
@@ -5075,7 +5083,7 @@
         </p:blipFill>
         <p:spPr>
           <a:xfrm>
-            <a:off x="10115542" y="134048"/>
+            <a:off x="10115542" y="1674746"/>
             <a:ext cx="1955800" cy="1623885"/>
           </a:xfrm>
           <a:prstGeom prst="rect">
@@ -5116,7 +5124,7 @@
         </p:blipFill>
         <p:spPr>
           <a:xfrm>
-            <a:off x="10115542" y="1709736"/>
+            <a:off x="10115542" y="3250434"/>
             <a:ext cx="1955800" cy="912037"/>
           </a:xfrm>
           <a:prstGeom prst="rect">
@@ -5157,7 +5165,7 @@
         </p:blipFill>
         <p:spPr>
           <a:xfrm>
-            <a:off x="10115542" y="2547936"/>
+            <a:off x="10115542" y="4088634"/>
             <a:ext cx="1955800" cy="954103"/>
           </a:xfrm>
           <a:prstGeom prst="rect">
@@ -5261,7 +5269,7 @@
         <p:spPr>
           <a:xfrm>
             <a:off x="609584" y="114300"/>
-            <a:ext cx="5533886" cy="571500"/>
+            <a:ext cx="5972025" cy="571500"/>
           </a:xfrm>
           <a:prstGeom prst="rect">
             <a:avLst/>
@@ -5292,109 +5300,14 @@
                 </a:solidFill>
                 <a:latin typeface="Space Grotesk"/>
               </a:rPr>
-              <a:t>Examples of RNG Performance</a:t>
-            </a:r>
-          </a:p>
-        </p:txBody>
-      </p:sp>
-      <p:sp>
-        <p:nvSpPr>
-          <p:cNvPr id="4" name="Rounded Rectangle 3"/>
-          <p:cNvSpPr/>
-          <p:nvPr/>
-        </p:nvSpPr>
-        <p:spPr>
-          <a:xfrm>
-            <a:off x="609584" y="1114425"/>
-            <a:ext cx="3505112" cy="5143500"/>
-          </a:xfrm>
-          <a:prstGeom prst="roundRect">
-            <a:avLst>
-              <a:gd name="adj" fmla="val 4347"/>
-            </a:avLst>
-          </a:prstGeom>
-          <a:solidFill>
-            <a:srgbClr val="22C55E">
-              <a:alpha val="10000"/>
-            </a:srgbClr>
-          </a:solidFill>
-          <a:ln w="16510">
-            <a:solidFill>
-              <a:srgbClr val="22C55E"/>
-            </a:solidFill>
-          </a:ln>
-        </p:spPr>
-        <p:style>
-          <a:lnRef idx="1">
-            <a:schemeClr val="accent1"/>
-          </a:lnRef>
-          <a:fillRef idx="3">
-            <a:schemeClr val="accent1"/>
-          </a:fillRef>
-          <a:effectRef idx="2">
-            <a:schemeClr val="accent1"/>
-          </a:effectRef>
-          <a:fontRef idx="minor">
-            <a:schemeClr val="lt1"/>
-          </a:fontRef>
-        </p:style>
-        <p:txBody>
-          <a:bodyPr rtlCol="0" anchor="ctr"/>
-          <a:lstStyle/>
-          <a:p>
-            <a:pPr algn="ctr"/>
-            <a:endParaRPr sz="2800"/>
-          </a:p>
-        </p:txBody>
-      </p:sp>
-      <p:sp>
-        <p:nvSpPr>
-          <p:cNvPr id="5" name="TextBox 4"/>
-          <p:cNvSpPr txBox="1"/>
-          <p:nvPr/>
-        </p:nvSpPr>
-        <p:spPr>
-          <a:xfrm>
-            <a:off x="857228" y="1336504"/>
-            <a:ext cx="1474891" cy="508344"/>
-          </a:xfrm>
-          <a:prstGeom prst="rect">
-            <a:avLst/>
-          </a:prstGeom>
-          <a:noFill/>
-        </p:spPr>
-        <p:txBody>
-          <a:bodyPr wrap="none" lIns="73152" tIns="54864" rIns="73152" bIns="54864" anchor="ctr">
-            <a:spAutoFit/>
-          </a:bodyPr>
-          <a:lstStyle/>
-          <a:p>
-            <a:pPr algn="l">
-              <a:lnSpc>
-                <a:spcPts val="3120"/>
-              </a:lnSpc>
-              <a:spcBef>
-                <a:spcPts val="0"/>
-              </a:spcBef>
-              <a:spcAft>
-                <a:spcPts val="0"/>
-              </a:spcAft>
-            </a:pPr>
-            <a:r>
-              <a:rPr sz="2800" b="1">
-                <a:solidFill>
-                  <a:srgbClr val="22C55E"/>
-                </a:solidFill>
-                <a:latin typeface="Space Grotesk"/>
-              </a:rPr>
-              <a:t>mt19937</a:t>
+              <a:t>Modern Perspectives &amp; Critiques</a:t>
             </a:r>
           </a:p>
         </p:txBody>
       </p:sp>
       <p:pic>
         <p:nvPicPr>
-          <p:cNvPr id="6" name="Picture 5" descr="image.png"/>
+          <p:cNvPr id="4" name="Picture 3" descr="image.png"/>
           <p:cNvPicPr>
             <a:picLocks noChangeAspect="1"/>
           </p:cNvPicPr>
@@ -5415,8 +5328,8 @@
         </p:blipFill>
         <p:spPr>
           <a:xfrm>
-            <a:off x="3486062" y="1428452"/>
-            <a:ext cx="380990" cy="324445"/>
+            <a:off x="609584" y="1286607"/>
+            <a:ext cx="304792" cy="246184"/>
           </a:xfrm>
           <a:prstGeom prst="rect">
             <a:avLst/>
@@ -5425,23 +5338,68 @@
       </p:pic>
       <p:sp>
         <p:nvSpPr>
-          <p:cNvPr id="7" name="Rounded Rectangle 6"/>
+          <p:cNvPr id="5" name="TextBox 4"/>
+          <p:cNvSpPr txBox="1"/>
+          <p:nvPr/>
+        </p:nvSpPr>
+        <p:spPr>
+          <a:xfrm>
+            <a:off x="1028674" y="1169457"/>
+            <a:ext cx="6838347" cy="470963"/>
+          </a:xfrm>
+          <a:prstGeom prst="rect">
+            <a:avLst/>
+          </a:prstGeom>
+          <a:noFill/>
+        </p:spPr>
+        <p:txBody>
+          <a:bodyPr wrap="none" lIns="73152" tIns="54864" rIns="73152" bIns="54864" anchor="ctr">
+            <a:spAutoFit/>
+          </a:bodyPr>
+          <a:lstStyle/>
+          <a:p>
+            <a:pPr algn="l">
+              <a:lnSpc>
+                <a:spcPts val="2925"/>
+              </a:lnSpc>
+              <a:spcBef>
+                <a:spcPts val="0"/>
+              </a:spcBef>
+              <a:spcAft>
+                <a:spcPts val="0"/>
+              </a:spcAft>
+            </a:pPr>
+            <a:r>
+              <a:rPr sz="2400" b="1">
+                <a:solidFill>
+                  <a:srgbClr val="FFFFFF"/>
+                </a:solidFill>
+                <a:latin typeface="Space Grotesk"/>
+              </a:rPr>
+              <a:t>Critiques of Traditional Black-Box Testing (SP 800-22)</a:t>
+            </a:r>
+          </a:p>
+        </p:txBody>
+      </p:sp>
+      <p:sp>
+        <p:nvSpPr>
+          <p:cNvPr id="6" name="Rounded Rectangle 5"/>
           <p:cNvSpPr/>
           <p:nvPr/>
         </p:nvSpPr>
         <p:spPr>
           <a:xfrm>
-            <a:off x="857228" y="1971675"/>
-            <a:ext cx="1771605" cy="361950"/>
+            <a:off x="609584" y="1847849"/>
+            <a:ext cx="5371965" cy="1390650"/>
           </a:xfrm>
           <a:prstGeom prst="roundRect">
             <a:avLst>
-              <a:gd name="adj" fmla="val 52626315"/>
+              <a:gd name="adj" fmla="val 10958"/>
             </a:avLst>
           </a:prstGeom>
           <a:solidFill>
-            <a:srgbClr val="22C55E">
-              <a:alpha val="20000"/>
+            <a:srgbClr val="EF4444">
+              <a:alpha val="8000"/>
             </a:srgbClr>
           </a:solidFill>
           <a:ln>
@@ -5473,52 +5431,54 @@
       </p:sp>
       <p:sp>
         <p:nvSpPr>
-          <p:cNvPr id="8" name="TextBox 7"/>
-          <p:cNvSpPr txBox="1"/>
-          <p:nvPr/>
-        </p:nvSpPr>
-        <p:spPr>
-          <a:xfrm>
-            <a:off x="1009624" y="1974011"/>
-            <a:ext cx="1525931" cy="357277"/>
-          </a:xfrm>
-          <a:prstGeom prst="rect">
-            <a:avLst/>
-          </a:prstGeom>
-          <a:noFill/>
-        </p:spPr>
-        <p:txBody>
-          <a:bodyPr wrap="none" lIns="73152" tIns="54864" rIns="73152" bIns="54864" anchor="ctr">
-            <a:spAutoFit/>
-          </a:bodyPr>
-          <a:lstStyle/>
-          <a:p>
-            <a:pPr algn="l">
-              <a:lnSpc>
-                <a:spcPts val="1950"/>
-              </a:lnSpc>
-              <a:spcBef>
-                <a:spcPts val="0"/>
-              </a:spcBef>
-              <a:spcAft>
-                <a:spcPts val="0"/>
-              </a:spcAft>
-            </a:pPr>
-            <a:r>
-              <a:rPr sz="1600" b="1">
-                <a:solidFill>
-                  <a:srgbClr val="22C55E"/>
-                </a:solidFill>
-                <a:latin typeface="Inter"/>
-              </a:rPr>
-              <a:t>Good Generator</a:t>
-            </a:r>
+          <p:cNvPr id="7" name="Round Same Side Corner Rectangle 6"/>
+          <p:cNvSpPr/>
+          <p:nvPr/>
+        </p:nvSpPr>
+        <p:spPr>
+          <a:xfrm rot="16200000">
+            <a:off x="-19701" y="2477134"/>
+            <a:ext cx="1390650" cy="132080"/>
+          </a:xfrm>
+          <a:prstGeom prst="round2SameRect">
+            <a:avLst>
+              <a:gd name="adj1" fmla="val 50000"/>
+              <a:gd name="adj2" fmla="val 0"/>
+            </a:avLst>
+          </a:prstGeom>
+          <a:solidFill>
+            <a:srgbClr val="EF4444"/>
+          </a:solidFill>
+          <a:ln>
+            <a:noFill/>
+          </a:ln>
+        </p:spPr>
+        <p:style>
+          <a:lnRef idx="1">
+            <a:schemeClr val="accent1"/>
+          </a:lnRef>
+          <a:fillRef idx="3">
+            <a:schemeClr val="accent1"/>
+          </a:fillRef>
+          <a:effectRef idx="2">
+            <a:schemeClr val="accent1"/>
+          </a:effectRef>
+          <a:fontRef idx="minor">
+            <a:schemeClr val="lt1"/>
+          </a:fontRef>
+        </p:style>
+        <p:txBody>
+          <a:bodyPr rtlCol="0" anchor="ctr"/>
+          <a:lstStyle/>
+          <a:p>
+            <a:pPr algn="ctr"/>
+            <a:endParaRPr sz="2800"/>
           </a:p>
         </p:txBody>
       </p:sp>
       <p:pic>
         <p:nvPicPr>
-          <p:cNvPr id="9" name="Picture 8" descr="image.png"/>
+          <p:cNvPr id="8" name="Picture 7" descr="image.png"/>
           <p:cNvPicPr>
             <a:picLocks noChangeAspect="1"/>
           </p:cNvPicPr>
@@ -5539,8 +5499,8 @@
         </p:blipFill>
         <p:spPr>
           <a:xfrm>
-            <a:off x="857228" y="2588838"/>
-            <a:ext cx="190495" cy="137272"/>
+            <a:off x="838179" y="2102167"/>
+            <a:ext cx="228594" cy="177164"/>
           </a:xfrm>
           <a:prstGeom prst="rect">
             <a:avLst/>
@@ -5549,14 +5509,14 @@
       </p:pic>
       <p:sp>
         <p:nvSpPr>
-          <p:cNvPr id="10" name="TextBox 9"/>
+          <p:cNvPr id="9" name="TextBox 8"/>
           <p:cNvSpPr txBox="1"/>
           <p:nvPr/>
         </p:nvSpPr>
         <p:spPr>
           <a:xfrm>
-            <a:off x="1123921" y="2488362"/>
-            <a:ext cx="487634" cy="357277"/>
+            <a:off x="1181070" y="2013382"/>
+            <a:ext cx="2199961" cy="383310"/>
           </a:xfrm>
           <a:prstGeom prst="rect">
             <a:avLst/>
@@ -5571,37 +5531,37 @@
           <a:p>
             <a:pPr algn="l">
               <a:lnSpc>
-                <a:spcPts val="1950"/>
+                <a:spcPts val="2210"/>
               </a:lnSpc>
               <a:spcBef>
                 <a:spcPts val="0"/>
               </a:spcBef>
               <a:spcAft>
-                <a:spcPts val="0"/>
+                <a:spcPts val="520"/>
               </a:spcAft>
             </a:pPr>
             <a:r>
-              <a:rPr sz="1600" b="1">
+              <a:rPr b="1">
                 <a:solidFill>
                   <a:srgbClr val="FFFFFF"/>
                 </a:solidFill>
                 <a:latin typeface="Inter"/>
               </a:rPr>
-              <a:t>Fast</a:t>
-            </a:r>
-          </a:p>
-        </p:txBody>
-      </p:sp>
-      <p:sp>
-        <p:nvSpPr>
-          <p:cNvPr id="11" name="TextBox 10"/>
+              <a:t>Outdated Foundation</a:t>
+            </a:r>
+          </a:p>
+        </p:txBody>
+      </p:sp>
+      <p:sp>
+        <p:nvSpPr>
+          <p:cNvPr id="10" name="TextBox 9"/>
           <p:cNvSpPr txBox="1"/>
           <p:nvPr/>
         </p:nvSpPr>
         <p:spPr>
           <a:xfrm>
-            <a:off x="1123921" y="2810908"/>
-            <a:ext cx="1407052" cy="331309"/>
+            <a:off x="1181070" y="2426558"/>
+            <a:ext cx="4609984" cy="623761"/>
           </a:xfrm>
           <a:prstGeom prst="rect">
             <a:avLst/>
@@ -5609,37 +5569,132 @@
           <a:noFill/>
         </p:spPr>
         <p:txBody>
-          <a:bodyPr wrap="none" lIns="73152" tIns="54864" rIns="73152" bIns="54864" anchor="ctr">
+          <a:bodyPr wrap="square" lIns="73152" tIns="54864" rIns="73152" bIns="54864" anchor="ctr">
             <a:spAutoFit/>
           </a:bodyPr>
           <a:lstStyle/>
           <a:p>
             <a:pPr algn="l">
               <a:lnSpc>
-                <a:spcPts val="1755"/>
+                <a:spcPts val="2015"/>
               </a:lnSpc>
               <a:spcBef>
-                <a:spcPts val="260"/>
+                <a:spcPts val="0"/>
               </a:spcBef>
               <a:spcAft>
                 <a:spcPts val="0"/>
               </a:spcAft>
             </a:pPr>
             <a:r>
-              <a:rPr sz="1400" b="0">
-                <a:solidFill>
-                  <a:srgbClr val="8A92A8"/>
+              <a:rPr b="0">
+                <a:solidFill>
+                  <a:srgbClr val="B0B8D4"/>
                 </a:solidFill>
                 <a:latin typeface="Inter"/>
               </a:rPr>
-              <a:t>28×10⁷ rands/sec</a:t>
-            </a:r>
+              <a:t>Predates modern cryptography and information theory</a:t>
+            </a:r>
+          </a:p>
+        </p:txBody>
+      </p:sp>
+      <p:sp>
+        <p:nvSpPr>
+          <p:cNvPr id="11" name="Rounded Rectangle 10"/>
+          <p:cNvSpPr/>
+          <p:nvPr/>
+        </p:nvSpPr>
+        <p:spPr>
+          <a:xfrm>
+            <a:off x="609584" y="3390899"/>
+            <a:ext cx="5371965" cy="1390650"/>
+          </a:xfrm>
+          <a:prstGeom prst="roundRect">
+            <a:avLst>
+              <a:gd name="adj" fmla="val 10958"/>
+            </a:avLst>
+          </a:prstGeom>
+          <a:solidFill>
+            <a:srgbClr val="EF4444">
+              <a:alpha val="8000"/>
+            </a:srgbClr>
+          </a:solidFill>
+          <a:ln>
+            <a:noFill/>
+          </a:ln>
+        </p:spPr>
+        <p:style>
+          <a:lnRef idx="1">
+            <a:schemeClr val="accent1"/>
+          </a:lnRef>
+          <a:fillRef idx="3">
+            <a:schemeClr val="accent1"/>
+          </a:fillRef>
+          <a:effectRef idx="2">
+            <a:schemeClr val="accent1"/>
+          </a:effectRef>
+          <a:fontRef idx="minor">
+            <a:schemeClr val="lt1"/>
+          </a:fontRef>
+        </p:style>
+        <p:txBody>
+          <a:bodyPr rtlCol="0" anchor="ctr"/>
+          <a:lstStyle/>
+          <a:p>
+            <a:pPr algn="ctr"/>
+            <a:endParaRPr sz="2800"/>
+          </a:p>
+        </p:txBody>
+      </p:sp>
+      <p:sp>
+        <p:nvSpPr>
+          <p:cNvPr id="12" name="Round Same Side Corner Rectangle 11"/>
+          <p:cNvSpPr/>
+          <p:nvPr/>
+        </p:nvSpPr>
+        <p:spPr>
+          <a:xfrm rot="16200000">
+            <a:off x="-19701" y="4020184"/>
+            <a:ext cx="1390650" cy="132080"/>
+          </a:xfrm>
+          <a:prstGeom prst="round2SameRect">
+            <a:avLst>
+              <a:gd name="adj1" fmla="val 50000"/>
+              <a:gd name="adj2" fmla="val 0"/>
+            </a:avLst>
+          </a:prstGeom>
+          <a:solidFill>
+            <a:srgbClr val="EF4444"/>
+          </a:solidFill>
+          <a:ln>
+            <a:noFill/>
+          </a:ln>
+        </p:spPr>
+        <p:style>
+          <a:lnRef idx="1">
+            <a:schemeClr val="accent1"/>
+          </a:lnRef>
+          <a:fillRef idx="3">
+            <a:schemeClr val="accent1"/>
+          </a:fillRef>
+          <a:effectRef idx="2">
+            <a:schemeClr val="accent1"/>
+          </a:effectRef>
+          <a:fontRef idx="minor">
+            <a:schemeClr val="lt1"/>
+          </a:fontRef>
+        </p:style>
+        <p:txBody>
+          <a:bodyPr rtlCol="0" anchor="ctr"/>
+          <a:lstStyle/>
+          <a:p>
+            <a:pPr algn="ctr"/>
+            <a:endParaRPr sz="2800"/>
           </a:p>
         </p:txBody>
       </p:sp>
       <p:pic>
         <p:nvPicPr>
-          <p:cNvPr id="12" name="Picture 11" descr="image.png"/>
+          <p:cNvPr id="13" name="Picture 12" descr="image.png"/>
           <p:cNvPicPr>
             <a:picLocks noChangeAspect="1"/>
           </p:cNvPicPr>
@@ -5660,8 +5715,8 @@
         </p:blipFill>
         <p:spPr>
           <a:xfrm>
-            <a:off x="857228" y="3271557"/>
-            <a:ext cx="190495" cy="162485"/>
+            <a:off x="838179" y="3662362"/>
+            <a:ext cx="228594" cy="142875"/>
           </a:xfrm>
           <a:prstGeom prst="rect">
             <a:avLst/>
@@ -5670,14 +5725,14 @@
       </p:pic>
       <p:sp>
         <p:nvSpPr>
-          <p:cNvPr id="13" name="TextBox 12"/>
+          <p:cNvPr id="14" name="TextBox 13"/>
           <p:cNvSpPr txBox="1"/>
           <p:nvPr/>
         </p:nvSpPr>
         <p:spPr>
           <a:xfrm>
-            <a:off x="1123921" y="3183686"/>
-            <a:ext cx="1390637" cy="357277"/>
+            <a:off x="1181070" y="3556433"/>
+            <a:ext cx="1451744" cy="383310"/>
           </a:xfrm>
           <a:prstGeom prst="rect">
             <a:avLst/>
@@ -5692,37 +5747,37 @@
           <a:p>
             <a:pPr algn="l">
               <a:lnSpc>
-                <a:spcPts val="1950"/>
+                <a:spcPts val="2210"/>
               </a:lnSpc>
               <a:spcBef>
                 <a:spcPts val="0"/>
               </a:spcBef>
               <a:spcAft>
-                <a:spcPts val="0"/>
+                <a:spcPts val="520"/>
               </a:spcAft>
             </a:pPr>
             <a:r>
-              <a:rPr sz="1600" b="1">
+              <a:rPr b="1">
                 <a:solidFill>
                   <a:srgbClr val="FFFFFF"/>
                 </a:solidFill>
                 <a:latin typeface="Inter"/>
               </a:rPr>
-              <a:t>Bit Persistence</a:t>
-            </a:r>
-          </a:p>
-        </p:txBody>
-      </p:sp>
-      <p:sp>
-        <p:nvSpPr>
-          <p:cNvPr id="14" name="TextBox 13"/>
+              <a:t>Limited Focus</a:t>
+            </a:r>
+          </a:p>
+        </p:txBody>
+      </p:sp>
+      <p:sp>
+        <p:nvSpPr>
+          <p:cNvPr id="15" name="TextBox 14"/>
           <p:cNvSpPr txBox="1"/>
           <p:nvPr/>
         </p:nvSpPr>
         <p:spPr>
           <a:xfrm>
-            <a:off x="1123921" y="3506234"/>
-            <a:ext cx="1901803" cy="331309"/>
+            <a:off x="1181070" y="3969607"/>
+            <a:ext cx="4609984" cy="623761"/>
           </a:xfrm>
           <a:prstGeom prst="rect">
             <a:avLst/>
@@ -5730,37 +5785,132 @@
           <a:noFill/>
         </p:spPr>
         <p:txBody>
-          <a:bodyPr wrap="none" lIns="73152" tIns="54864" rIns="73152" bIns="54864" anchor="ctr">
+          <a:bodyPr wrap="square" lIns="73152" tIns="54864" rIns="73152" bIns="54864" anchor="ctr">
             <a:spAutoFit/>
           </a:bodyPr>
           <a:lstStyle/>
           <a:p>
             <a:pPr algn="l">
               <a:lnSpc>
-                <a:spcPts val="1755"/>
+                <a:spcPts val="2015"/>
               </a:lnSpc>
               <a:spcBef>
-                <a:spcPts val="260"/>
+                <a:spcPts val="0"/>
               </a:spcBef>
               <a:spcAft>
                 <a:spcPts val="0"/>
               </a:spcAft>
             </a:pPr>
             <a:r>
-              <a:rPr sz="1400" b="0">
-                <a:solidFill>
-                  <a:srgbClr val="8A92A8"/>
+              <a:rPr b="0">
+                <a:solidFill>
+                  <a:srgbClr val="B0B8D4"/>
                 </a:solidFill>
                 <a:latin typeface="Inter"/>
               </a:rPr>
-              <a:t>PASSED • No bits repeat</a:t>
-            </a:r>
+              <a:t>Focuses on statistical properties, not cryptographic security</a:t>
+            </a:r>
+          </a:p>
+        </p:txBody>
+      </p:sp>
+      <p:sp>
+        <p:nvSpPr>
+          <p:cNvPr id="16" name="Rounded Rectangle 15"/>
+          <p:cNvSpPr/>
+          <p:nvPr/>
+        </p:nvSpPr>
+        <p:spPr>
+          <a:xfrm>
+            <a:off x="609584" y="4924424"/>
+            <a:ext cx="5371965" cy="1390650"/>
+          </a:xfrm>
+          <a:prstGeom prst="roundRect">
+            <a:avLst>
+              <a:gd name="adj" fmla="val 10958"/>
+            </a:avLst>
+          </a:prstGeom>
+          <a:solidFill>
+            <a:srgbClr val="EF4444">
+              <a:alpha val="8000"/>
+            </a:srgbClr>
+          </a:solidFill>
+          <a:ln>
+            <a:noFill/>
+          </a:ln>
+        </p:spPr>
+        <p:style>
+          <a:lnRef idx="1">
+            <a:schemeClr val="accent1"/>
+          </a:lnRef>
+          <a:fillRef idx="3">
+            <a:schemeClr val="accent1"/>
+          </a:fillRef>
+          <a:effectRef idx="2">
+            <a:schemeClr val="accent1"/>
+          </a:effectRef>
+          <a:fontRef idx="minor">
+            <a:schemeClr val="lt1"/>
+          </a:fontRef>
+        </p:style>
+        <p:txBody>
+          <a:bodyPr rtlCol="0" anchor="ctr"/>
+          <a:lstStyle/>
+          <a:p>
+            <a:pPr algn="ctr"/>
+            <a:endParaRPr sz="2800"/>
+          </a:p>
+        </p:txBody>
+      </p:sp>
+      <p:sp>
+        <p:nvSpPr>
+          <p:cNvPr id="17" name="Round Same Side Corner Rectangle 16"/>
+          <p:cNvSpPr/>
+          <p:nvPr/>
+        </p:nvSpPr>
+        <p:spPr>
+          <a:xfrm rot="16200000">
+            <a:off x="-19701" y="5553709"/>
+            <a:ext cx="1390650" cy="132080"/>
+          </a:xfrm>
+          <a:prstGeom prst="round2SameRect">
+            <a:avLst>
+              <a:gd name="adj1" fmla="val 50000"/>
+              <a:gd name="adj2" fmla="val 0"/>
+            </a:avLst>
+          </a:prstGeom>
+          <a:solidFill>
+            <a:srgbClr val="EF4444"/>
+          </a:solidFill>
+          <a:ln>
+            <a:noFill/>
+          </a:ln>
+        </p:spPr>
+        <p:style>
+          <a:lnRef idx="1">
+            <a:schemeClr val="accent1"/>
+          </a:lnRef>
+          <a:fillRef idx="3">
+            <a:schemeClr val="accent1"/>
+          </a:fillRef>
+          <a:effectRef idx="2">
+            <a:schemeClr val="accent1"/>
+          </a:effectRef>
+          <a:fontRef idx="minor">
+            <a:schemeClr val="lt1"/>
+          </a:fontRef>
+        </p:style>
+        <p:txBody>
+          <a:bodyPr rtlCol="0" anchor="ctr"/>
+          <a:lstStyle/>
+          <a:p>
+            <a:pPr algn="ctr"/>
+            <a:endParaRPr sz="2800"/>
           </a:p>
         </p:txBody>
       </p:sp>
       <p:pic>
         <p:nvPicPr>
-          <p:cNvPr id="15" name="Picture 14" descr="image.png"/>
+          <p:cNvPr id="18" name="Picture 17" descr="image.png"/>
           <p:cNvPicPr>
             <a:picLocks noChangeAspect="1"/>
           </p:cNvPicPr>
@@ -5781,8 +5931,8 @@
         </p:blipFill>
         <p:spPr>
           <a:xfrm>
-            <a:off x="857228" y="3986492"/>
-            <a:ext cx="190495" cy="123264"/>
+            <a:off x="838179" y="5164455"/>
+            <a:ext cx="228594" cy="205739"/>
           </a:xfrm>
           <a:prstGeom prst="rect">
             <a:avLst/>
@@ -5791,14 +5941,14 @@
       </p:pic>
       <p:sp>
         <p:nvSpPr>
-          <p:cNvPr id="16" name="TextBox 15"/>
+          <p:cNvPr id="19" name="TextBox 18"/>
           <p:cNvSpPr txBox="1"/>
           <p:nvPr/>
         </p:nvSpPr>
         <p:spPr>
           <a:xfrm>
-            <a:off x="1123921" y="3879012"/>
-            <a:ext cx="1445460" cy="357277"/>
+            <a:off x="1181070" y="5089958"/>
+            <a:ext cx="2495620" cy="383310"/>
           </a:xfrm>
           <a:prstGeom prst="rect">
             <a:avLst/>
@@ -5813,37 +5963,37 @@
           <a:p>
             <a:pPr algn="l">
               <a:lnSpc>
-                <a:spcPts val="1950"/>
+                <a:spcPts val="2210"/>
               </a:lnSpc>
               <a:spcBef>
                 <a:spcPts val="0"/>
               </a:spcBef>
               <a:spcAft>
-                <a:spcPts val="0"/>
+                <a:spcPts val="520"/>
               </a:spcAft>
             </a:pPr>
             <a:r>
-              <a:rPr sz="1600" b="1">
+              <a:rPr b="1">
                 <a:solidFill>
                   <a:srgbClr val="FFFFFF"/>
                 </a:solidFill>
                 <a:latin typeface="Inter"/>
               </a:rPr>
-              <a:t>Bit Distribution</a:t>
-            </a:r>
-          </a:p>
-        </p:txBody>
-      </p:sp>
-      <p:sp>
-        <p:nvSpPr>
-          <p:cNvPr id="17" name="TextBox 16"/>
+              <a:t>Missing Security Context</a:t>
+            </a:r>
+          </a:p>
+        </p:txBody>
+      </p:sp>
+      <p:sp>
+        <p:nvSpPr>
+          <p:cNvPr id="20" name="TextBox 19"/>
           <p:cNvSpPr txBox="1"/>
           <p:nvPr/>
         </p:nvSpPr>
         <p:spPr>
           <a:xfrm>
-            <a:off x="1123921" y="4201558"/>
-            <a:ext cx="1820819" cy="331309"/>
+            <a:off x="1181070" y="5512657"/>
+            <a:ext cx="4609984" cy="623761"/>
           </a:xfrm>
           <a:prstGeom prst="rect">
             <a:avLst/>
@@ -5851,37 +6001,132 @@
           <a:noFill/>
         </p:spPr>
         <p:txBody>
-          <a:bodyPr wrap="none" lIns="73152" tIns="54864" rIns="73152" bIns="54864" anchor="ctr">
+          <a:bodyPr wrap="square" lIns="73152" tIns="54864" rIns="73152" bIns="54864" anchor="ctr">
             <a:spAutoFit/>
           </a:bodyPr>
           <a:lstStyle/>
           <a:p>
             <a:pPr algn="l">
               <a:lnSpc>
-                <a:spcPts val="1755"/>
+                <a:spcPts val="2015"/>
               </a:lnSpc>
               <a:spcBef>
-                <a:spcPts val="260"/>
+                <a:spcPts val="0"/>
               </a:spcBef>
               <a:spcAft>
                 <a:spcPts val="0"/>
               </a:spcAft>
             </a:pPr>
             <a:r>
-              <a:rPr sz="1400" b="0">
-                <a:solidFill>
-                  <a:srgbClr val="8A92A8"/>
+              <a:rPr b="0">
+                <a:solidFill>
+                  <a:srgbClr val="B0B8D4"/>
                 </a:solidFill>
                 <a:latin typeface="Inter"/>
               </a:rPr>
-              <a:t>5-bit random, not 6-bit</a:t>
-            </a:r>
+              <a:t>Fails to consider computational hardness of breaking generators</a:t>
+            </a:r>
+          </a:p>
+        </p:txBody>
+      </p:sp>
+      <p:sp>
+        <p:nvSpPr>
+          <p:cNvPr id="21" name="Rounded Rectangle 20"/>
+          <p:cNvSpPr/>
+          <p:nvPr/>
+        </p:nvSpPr>
+        <p:spPr>
+          <a:xfrm>
+            <a:off x="6210144" y="1847849"/>
+            <a:ext cx="5371965" cy="1390650"/>
+          </a:xfrm>
+          <a:prstGeom prst="roundRect">
+            <a:avLst>
+              <a:gd name="adj" fmla="val 10958"/>
+            </a:avLst>
+          </a:prstGeom>
+          <a:solidFill>
+            <a:srgbClr val="EF4444">
+              <a:alpha val="8000"/>
+            </a:srgbClr>
+          </a:solidFill>
+          <a:ln>
+            <a:noFill/>
+          </a:ln>
+        </p:spPr>
+        <p:style>
+          <a:lnRef idx="1">
+            <a:schemeClr val="accent1"/>
+          </a:lnRef>
+          <a:fillRef idx="3">
+            <a:schemeClr val="accent1"/>
+          </a:fillRef>
+          <a:effectRef idx="2">
+            <a:schemeClr val="accent1"/>
+          </a:effectRef>
+          <a:fontRef idx="minor">
+            <a:schemeClr val="lt1"/>
+          </a:fontRef>
+        </p:style>
+        <p:txBody>
+          <a:bodyPr rtlCol="0" anchor="ctr"/>
+          <a:lstStyle/>
+          <a:p>
+            <a:pPr algn="ctr"/>
+            <a:endParaRPr sz="2800"/>
+          </a:p>
+        </p:txBody>
+      </p:sp>
+      <p:sp>
+        <p:nvSpPr>
+          <p:cNvPr id="22" name="Round Same Side Corner Rectangle 21"/>
+          <p:cNvSpPr/>
+          <p:nvPr/>
+        </p:nvSpPr>
+        <p:spPr>
+          <a:xfrm rot="16200000">
+            <a:off x="5580859" y="2477134"/>
+            <a:ext cx="1390650" cy="132080"/>
+          </a:xfrm>
+          <a:prstGeom prst="round2SameRect">
+            <a:avLst>
+              <a:gd name="adj1" fmla="val 50000"/>
+              <a:gd name="adj2" fmla="val 0"/>
+            </a:avLst>
+          </a:prstGeom>
+          <a:solidFill>
+            <a:srgbClr val="EF4444"/>
+          </a:solidFill>
+          <a:ln>
+            <a:noFill/>
+          </a:ln>
+        </p:spPr>
+        <p:style>
+          <a:lnRef idx="1">
+            <a:schemeClr val="accent1"/>
+          </a:lnRef>
+          <a:fillRef idx="3">
+            <a:schemeClr val="accent1"/>
+          </a:fillRef>
+          <a:effectRef idx="2">
+            <a:schemeClr val="accent1"/>
+          </a:effectRef>
+          <a:fontRef idx="minor">
+            <a:schemeClr val="lt1"/>
+          </a:fontRef>
+        </p:style>
+        <p:txBody>
+          <a:bodyPr rtlCol="0" anchor="ctr"/>
+          <a:lstStyle/>
+          <a:p>
+            <a:pPr algn="ctr"/>
+            <a:endParaRPr sz="2800"/>
           </a:p>
         </p:txBody>
       </p:sp>
       <p:pic>
         <p:nvPicPr>
-          <p:cNvPr id="18" name="Picture 17" descr="image.png"/>
+          <p:cNvPr id="23" name="Picture 22" descr="image.png"/>
           <p:cNvPicPr>
             <a:picLocks noChangeAspect="1"/>
           </p:cNvPicPr>
@@ -5902,8 +6147,8 @@
         </p:blipFill>
         <p:spPr>
           <a:xfrm>
-            <a:off x="857228" y="4667810"/>
-            <a:ext cx="190495" cy="151279"/>
+            <a:off x="6438739" y="2102167"/>
+            <a:ext cx="228594" cy="177164"/>
           </a:xfrm>
           <a:prstGeom prst="rect">
             <a:avLst/>
@@ -5912,14 +6157,14 @@
       </p:pic>
       <p:sp>
         <p:nvSpPr>
-          <p:cNvPr id="19" name="TextBox 18"/>
+          <p:cNvPr id="24" name="TextBox 23"/>
           <p:cNvSpPr txBox="1"/>
           <p:nvPr/>
         </p:nvSpPr>
         <p:spPr>
           <a:xfrm>
-            <a:off x="1123921" y="4574336"/>
-            <a:ext cx="1287340" cy="357277"/>
+            <a:off x="6781630" y="2013382"/>
+            <a:ext cx="1748043" cy="383310"/>
           </a:xfrm>
           <a:prstGeom prst="rect">
             <a:avLst/>
@@ -5934,37 +6179,37 @@
           <a:p>
             <a:pPr algn="l">
               <a:lnSpc>
-                <a:spcPts val="1950"/>
+                <a:spcPts val="2210"/>
               </a:lnSpc>
               <a:spcBef>
                 <a:spcPts val="0"/>
               </a:spcBef>
               <a:spcAft>
-                <a:spcPts val="0"/>
+                <a:spcPts val="520"/>
               </a:spcAft>
             </a:pPr>
             <a:r>
-              <a:rPr sz="1600" b="1">
+              <a:rPr b="1">
                 <a:solidFill>
                   <a:srgbClr val="FFFFFF"/>
                 </a:solidFill>
                 <a:latin typeface="Inter"/>
               </a:rPr>
-              <a:t>Diehard Tests</a:t>
-            </a:r>
-          </a:p>
-        </p:txBody>
-      </p:sp>
-      <p:sp>
-        <p:nvSpPr>
-          <p:cNvPr id="20" name="TextBox 19"/>
+              <a:t>False Confidence</a:t>
+            </a:r>
+          </a:p>
+        </p:txBody>
+      </p:sp>
+      <p:sp>
+        <p:nvSpPr>
+          <p:cNvPr id="25" name="TextBox 24"/>
           <p:cNvSpPr txBox="1"/>
           <p:nvPr/>
         </p:nvSpPr>
         <p:spPr>
           <a:xfrm>
-            <a:off x="1123921" y="4896884"/>
-            <a:ext cx="2233625" cy="331309"/>
+            <a:off x="6781630" y="2426558"/>
+            <a:ext cx="4609984" cy="623761"/>
           </a:xfrm>
           <a:prstGeom prst="rect">
             <a:avLst/>
@@ -5972,59 +6217,75 @@
           <a:noFill/>
         </p:spPr>
         <p:txBody>
-          <a:bodyPr wrap="none" lIns="73152" tIns="54864" rIns="73152" bIns="54864" anchor="ctr">
+          <a:bodyPr wrap="square" lIns="73152" tIns="54864" rIns="73152" bIns="54864" anchor="ctr">
             <a:spAutoFit/>
           </a:bodyPr>
           <a:lstStyle/>
           <a:p>
             <a:pPr algn="l">
               <a:lnSpc>
-                <a:spcPts val="1755"/>
+                <a:spcPts val="2015"/>
               </a:lnSpc>
               <a:spcBef>
-                <a:spcPts val="260"/>
+                <a:spcPts val="0"/>
               </a:spcBef>
               <a:spcAft>
                 <a:spcPts val="0"/>
               </a:spcAft>
             </a:pPr>
             <a:r>
-              <a:rPr sz="1400" b="0">
-                <a:solidFill>
-                  <a:srgbClr val="8A92A8"/>
+              <a:rPr b="0">
+                <a:solidFill>
+                  <a:srgbClr val="B0B8D4"/>
                 </a:solidFill>
                 <a:latin typeface="Inter"/>
               </a:rPr>
-              <a:t>Most passed, some marginal</a:t>
-            </a:r>
-          </a:p>
-        </p:txBody>
-      </p:sp>
-      <p:sp>
-        <p:nvSpPr>
-          <p:cNvPr id="21" name="Rounded Rectangle 20"/>
+              <a:t>Weak generators can pass, creating </a:t>
+            </a:r>
+            <a:r>
+              <a:rPr b="0">
+                <a:solidFill>
+                  <a:srgbClr val="EF4444"/>
+                </a:solidFill>
+                <a:latin typeface="Inter"/>
+              </a:rPr>
+              <a:t>false confidence</a:t>
+            </a:r>
+            <a:r>
+              <a:rPr b="0">
+                <a:solidFill>
+                  <a:srgbClr val="B0B8D4"/>
+                </a:solidFill>
+                <a:latin typeface="Inter"/>
+              </a:rPr>
+              <a:t> in insecure systems</a:t>
+            </a:r>
+          </a:p>
+        </p:txBody>
+      </p:sp>
+      <p:sp>
+        <p:nvSpPr>
+          <p:cNvPr id="26" name="Rounded Rectangle 25"/>
           <p:cNvSpPr/>
           <p:nvPr/>
         </p:nvSpPr>
         <p:spPr>
           <a:xfrm>
-            <a:off x="4343291" y="1114425"/>
-            <a:ext cx="3505112" cy="5143500"/>
+            <a:off x="6210144" y="3390899"/>
+            <a:ext cx="5371965" cy="1390650"/>
           </a:xfrm>
           <a:prstGeom prst="roundRect">
             <a:avLst>
-              <a:gd name="adj" fmla="val 4347"/>
+              <a:gd name="adj" fmla="val 10958"/>
             </a:avLst>
           </a:prstGeom>
           <a:solidFill>
             <a:srgbClr val="EF4444">
-              <a:alpha val="10000"/>
+              <a:alpha val="8000"/>
             </a:srgbClr>
           </a:solidFill>
-          <a:ln w="16510">
-            <a:solidFill>
-              <a:srgbClr val="EF4444"/>
-            </a:solidFill>
+          <a:ln>
+            <a:noFill/>
           </a:ln>
         </p:spPr>
         <p:style>
@@ -6052,52 +6313,54 @@
       </p:sp>
       <p:sp>
         <p:nvSpPr>
-          <p:cNvPr id="22" name="TextBox 21"/>
-          <p:cNvSpPr txBox="1"/>
-          <p:nvPr/>
-        </p:nvSpPr>
-        <p:spPr>
-          <a:xfrm>
-            <a:off x="4590935" y="1336504"/>
-            <a:ext cx="1023101" cy="508344"/>
-          </a:xfrm>
-          <a:prstGeom prst="rect">
-            <a:avLst/>
-          </a:prstGeom>
-          <a:noFill/>
-        </p:spPr>
-        <p:txBody>
-          <a:bodyPr wrap="none" lIns="73152" tIns="54864" rIns="73152" bIns="54864" anchor="ctr">
-            <a:spAutoFit/>
-          </a:bodyPr>
-          <a:lstStyle/>
-          <a:p>
-            <a:pPr algn="l">
-              <a:lnSpc>
-                <a:spcPts val="3120"/>
-              </a:lnSpc>
-              <a:spcBef>
-                <a:spcPts val="0"/>
-              </a:spcBef>
-              <a:spcAft>
-                <a:spcPts val="0"/>
-              </a:spcAft>
-            </a:pPr>
-            <a:r>
-              <a:rPr sz="2800" b="1">
-                <a:solidFill>
-                  <a:srgbClr val="EF4444"/>
-                </a:solidFill>
-                <a:latin typeface="Space Grotesk"/>
-              </a:rPr>
-              <a:t>randu</a:t>
-            </a:r>
+          <p:cNvPr id="27" name="Round Same Side Corner Rectangle 26"/>
+          <p:cNvSpPr/>
+          <p:nvPr/>
+        </p:nvSpPr>
+        <p:spPr>
+          <a:xfrm rot="16200000">
+            <a:off x="5580859" y="4020184"/>
+            <a:ext cx="1390650" cy="132080"/>
+          </a:xfrm>
+          <a:prstGeom prst="round2SameRect">
+            <a:avLst>
+              <a:gd name="adj1" fmla="val 50000"/>
+              <a:gd name="adj2" fmla="val 0"/>
+            </a:avLst>
+          </a:prstGeom>
+          <a:solidFill>
+            <a:srgbClr val="EF4444"/>
+          </a:solidFill>
+          <a:ln>
+            <a:noFill/>
+          </a:ln>
+        </p:spPr>
+        <p:style>
+          <a:lnRef idx="1">
+            <a:schemeClr val="accent1"/>
+          </a:lnRef>
+          <a:fillRef idx="3">
+            <a:schemeClr val="accent1"/>
+          </a:fillRef>
+          <a:effectRef idx="2">
+            <a:schemeClr val="accent1"/>
+          </a:effectRef>
+          <a:fontRef idx="minor">
+            <a:schemeClr val="lt1"/>
+          </a:fontRef>
+        </p:style>
+        <p:txBody>
+          <a:bodyPr rtlCol="0" anchor="ctr"/>
+          <a:lstStyle/>
+          <a:p>
+            <a:pPr algn="ctr"/>
+            <a:endParaRPr sz="2800"/>
           </a:p>
         </p:txBody>
       </p:sp>
       <p:pic>
         <p:nvPicPr>
-          <p:cNvPr id="23" name="Picture 22" descr="image.png"/>
+          <p:cNvPr id="28" name="Picture 27" descr="image.png"/>
           <p:cNvPicPr>
             <a:picLocks noChangeAspect="1"/>
           </p:cNvPicPr>
@@ -6118,8 +6381,8 @@
         </p:blipFill>
         <p:spPr>
           <a:xfrm>
-            <a:off x="7219769" y="1428452"/>
-            <a:ext cx="380990" cy="324445"/>
+            <a:off x="6438739" y="3625215"/>
+            <a:ext cx="228594" cy="217170"/>
           </a:xfrm>
           <a:prstGeom prst="rect">
             <a:avLst/>
@@ -6128,27 +6391,119 @@
       </p:pic>
       <p:sp>
         <p:nvSpPr>
-          <p:cNvPr id="24" name="Rounded Rectangle 23"/>
+          <p:cNvPr id="29" name="TextBox 28"/>
+          <p:cNvSpPr txBox="1"/>
+          <p:nvPr/>
+        </p:nvSpPr>
+        <p:spPr>
+          <a:xfrm>
+            <a:off x="6781630" y="3556433"/>
+            <a:ext cx="2048125" cy="383310"/>
+          </a:xfrm>
+          <a:prstGeom prst="rect">
+            <a:avLst/>
+          </a:prstGeom>
+          <a:noFill/>
+        </p:spPr>
+        <p:txBody>
+          <a:bodyPr wrap="none" lIns="73152" tIns="54864" rIns="73152" bIns="54864" anchor="ctr">
+            <a:spAutoFit/>
+          </a:bodyPr>
+          <a:lstStyle/>
+          <a:p>
+            <a:pPr algn="l">
+              <a:lnSpc>
+                <a:spcPts val="2210"/>
+              </a:lnSpc>
+              <a:spcBef>
+                <a:spcPts val="0"/>
+              </a:spcBef>
+              <a:spcAft>
+                <a:spcPts val="520"/>
+              </a:spcAft>
+            </a:pPr>
+            <a:r>
+              <a:rPr b="1">
+                <a:solidFill>
+                  <a:srgbClr val="FFFFFF"/>
+                </a:solidFill>
+                <a:latin typeface="Inter"/>
+              </a:rPr>
+              <a:t>Incomplete Security</a:t>
+            </a:r>
+          </a:p>
+        </p:txBody>
+      </p:sp>
+      <p:sp>
+        <p:nvSpPr>
+          <p:cNvPr id="30" name="TextBox 29"/>
+          <p:cNvSpPr txBox="1"/>
+          <p:nvPr/>
+        </p:nvSpPr>
+        <p:spPr>
+          <a:xfrm>
+            <a:off x="6781630" y="3969607"/>
+            <a:ext cx="4609984" cy="623761"/>
+          </a:xfrm>
+          <a:prstGeom prst="rect">
+            <a:avLst/>
+          </a:prstGeom>
+          <a:noFill/>
+        </p:spPr>
+        <p:txBody>
+          <a:bodyPr wrap="square" lIns="73152" tIns="54864" rIns="73152" bIns="54864" anchor="ctr">
+            <a:spAutoFit/>
+          </a:bodyPr>
+          <a:lstStyle/>
+          <a:p>
+            <a:pPr algn="l">
+              <a:lnSpc>
+                <a:spcPts val="2015"/>
+              </a:lnSpc>
+              <a:spcBef>
+                <a:spcPts val="0"/>
+              </a:spcBef>
+              <a:spcAft>
+                <a:spcPts val="0"/>
+              </a:spcAft>
+            </a:pPr>
+            <a:r>
+              <a:rPr b="0">
+                <a:solidFill>
+                  <a:srgbClr val="B0B8D4"/>
+                </a:solidFill>
+                <a:latin typeface="Inter"/>
+              </a:rPr>
+              <a:t>Inadequate addressing of physical/interface security and backdoors</a:t>
+            </a:r>
+          </a:p>
+        </p:txBody>
+      </p:sp>
+      <p:sp>
+        <p:nvSpPr>
+          <p:cNvPr id="31" name="Rounded Rectangle 30"/>
           <p:cNvSpPr/>
           <p:nvPr/>
         </p:nvSpPr>
         <p:spPr>
           <a:xfrm>
-            <a:off x="4590935" y="1971675"/>
-            <a:ext cx="1628734" cy="361950"/>
+            <a:off x="6210144" y="4924424"/>
+            <a:ext cx="5371965" cy="1181099"/>
           </a:xfrm>
           <a:prstGeom prst="roundRect">
             <a:avLst>
-              <a:gd name="adj" fmla="val 52626315"/>
+              <a:gd name="adj" fmla="val 12903"/>
             </a:avLst>
           </a:prstGeom>
           <a:solidFill>
-            <a:srgbClr val="EF4444">
-              <a:alpha val="20000"/>
+            <a:srgbClr val="00D4FF">
+              <a:alpha val="10000"/>
             </a:srgbClr>
           </a:solidFill>
-          <a:ln>
-            <a:noFill/>
+          <a:ln w="16510">
+            <a:solidFill>
+              <a:srgbClr val="00D4FF"/>
+            </a:solidFill>
           </a:ln>
         </p:spPr>
         <p:style>
@@ -6174,54 +6529,9 @@
           </a:p>
         </p:txBody>
       </p:sp>
-      <p:sp>
-        <p:nvSpPr>
-          <p:cNvPr id="25" name="TextBox 24"/>
-          <p:cNvSpPr txBox="1"/>
-          <p:nvPr/>
-        </p:nvSpPr>
-        <p:spPr>
-          <a:xfrm>
-            <a:off x="4743331" y="1974011"/>
-            <a:ext cx="1389676" cy="357277"/>
-          </a:xfrm>
-          <a:prstGeom prst="rect">
-            <a:avLst/>
-          </a:prstGeom>
-          <a:noFill/>
-        </p:spPr>
-        <p:txBody>
-          <a:bodyPr wrap="none" lIns="73152" tIns="54864" rIns="73152" bIns="54864" anchor="ctr">
-            <a:spAutoFit/>
-          </a:bodyPr>
-          <a:lstStyle/>
-          <a:p>
-            <a:pPr algn="l">
-              <a:lnSpc>
-                <a:spcPts val="1950"/>
-              </a:lnSpc>
-              <a:spcBef>
-                <a:spcPts val="0"/>
-              </a:spcBef>
-              <a:spcAft>
-                <a:spcPts val="0"/>
-              </a:spcAft>
-            </a:pPr>
-            <a:r>
-              <a:rPr sz="1600" b="1">
-                <a:solidFill>
-                  <a:srgbClr val="EF4444"/>
-                </a:solidFill>
-                <a:latin typeface="Inter"/>
-              </a:rPr>
-              <a:t>Bad Generator</a:t>
-            </a:r>
-          </a:p>
-        </p:txBody>
-      </p:sp>
       <p:pic>
         <p:nvPicPr>
-          <p:cNvPr id="26" name="Picture 25" descr="image.png"/>
+          <p:cNvPr id="32" name="Picture 31" descr="image.png"/>
           <p:cNvPicPr>
             <a:picLocks noChangeAspect="1"/>
           </p:cNvPicPr>
@@ -6242,8 +6552,8 @@
         </p:blipFill>
         <p:spPr>
           <a:xfrm>
-            <a:off x="4590935" y="2588838"/>
-            <a:ext cx="190495" cy="137272"/>
+            <a:off x="6457788" y="5401917"/>
+            <a:ext cx="266693" cy="226115"/>
           </a:xfrm>
           <a:prstGeom prst="rect">
             <a:avLst/>
@@ -6252,14 +6562,14 @@
       </p:pic>
       <p:sp>
         <p:nvSpPr>
-          <p:cNvPr id="27" name="TextBox 26"/>
+          <p:cNvPr id="33" name="TextBox 32"/>
           <p:cNvSpPr txBox="1"/>
           <p:nvPr/>
         </p:nvSpPr>
         <p:spPr>
           <a:xfrm>
-            <a:off x="4857628" y="2488362"/>
-            <a:ext cx="487634" cy="357277"/>
+            <a:off x="6838779" y="5164623"/>
+            <a:ext cx="4495687" cy="700705"/>
           </a:xfrm>
           <a:prstGeom prst="rect">
             <a:avLst/>
@@ -6267,14 +6577,14 @@
           <a:noFill/>
         </p:spPr>
         <p:txBody>
-          <a:bodyPr wrap="none" lIns="73152" tIns="54864" rIns="73152" bIns="54864" anchor="ctr">
+          <a:bodyPr wrap="square" lIns="73152" tIns="54864" rIns="73152" bIns="54864" anchor="ctr">
             <a:spAutoFit/>
           </a:bodyPr>
           <a:lstStyle/>
           <a:p>
             <a:pPr algn="l">
               <a:lnSpc>
-                <a:spcPts val="1950"/>
+                <a:spcPts val="2340"/>
               </a:lnSpc>
               <a:spcBef>
                 <a:spcPts val="0"/>
@@ -6284,1124 +6594,13 @@
               </a:spcAft>
             </a:pPr>
             <a:r>
-              <a:rPr sz="1600" b="1">
-                <a:solidFill>
-                  <a:srgbClr val="FFFFFF"/>
+              <a:rPr sz="2000" b="1">
+                <a:solidFill>
+                  <a:srgbClr val="00D4FF"/>
                 </a:solidFill>
                 <a:latin typeface="Inter"/>
               </a:rPr>
-              <a:t>Fast</a:t>
-            </a:r>
-          </a:p>
-        </p:txBody>
-      </p:sp>
-      <p:sp>
-        <p:nvSpPr>
-          <p:cNvPr id="28" name="TextBox 27"/>
-          <p:cNvSpPr txBox="1"/>
-          <p:nvPr/>
-        </p:nvSpPr>
-        <p:spPr>
-          <a:xfrm>
-            <a:off x="4857628" y="2810908"/>
-            <a:ext cx="1407052" cy="331309"/>
-          </a:xfrm>
-          <a:prstGeom prst="rect">
-            <a:avLst/>
-          </a:prstGeom>
-          <a:noFill/>
-        </p:spPr>
-        <p:txBody>
-          <a:bodyPr wrap="none" lIns="73152" tIns="54864" rIns="73152" bIns="54864" anchor="ctr">
-            <a:spAutoFit/>
-          </a:bodyPr>
-          <a:lstStyle/>
-          <a:p>
-            <a:pPr algn="l">
-              <a:lnSpc>
-                <a:spcPts val="1755"/>
-              </a:lnSpc>
-              <a:spcBef>
-                <a:spcPts val="260"/>
-              </a:spcBef>
-              <a:spcAft>
-                <a:spcPts val="0"/>
-              </a:spcAft>
-            </a:pPr>
-            <a:r>
-              <a:rPr sz="1400" b="0">
-                <a:solidFill>
-                  <a:srgbClr val="8A92A8"/>
-                </a:solidFill>
-                <a:latin typeface="Inter"/>
-              </a:rPr>
-              <a:t>39×10⁷ rands/sec</a:t>
-            </a:r>
-          </a:p>
-        </p:txBody>
-      </p:sp>
-      <p:pic>
-        <p:nvPicPr>
-          <p:cNvPr id="29" name="Picture 28" descr="image.png"/>
-          <p:cNvPicPr>
-            <a:picLocks noChangeAspect="1"/>
-          </p:cNvPicPr>
-          <p:nvPr/>
-        </p:nvPicPr>
-        <p:blipFill>
-          <a:blip r:embed="rId9" cstate="email">
-            <a:alphaModFix/>
-            <a:extLst>
-              <a:ext uri="{28A0092B-C50C-407E-A947-70E740481C1C}">
-                <a14:useLocalDpi xmlns:a14="http://schemas.microsoft.com/office/drawing/2010/main"/>
-              </a:ext>
-            </a:extLst>
-          </a:blip>
-          <a:stretch>
-            <a:fillRect/>
-          </a:stretch>
-        </p:blipFill>
-        <p:spPr>
-          <a:xfrm>
-            <a:off x="4590935" y="3271557"/>
-            <a:ext cx="190495" cy="162485"/>
-          </a:xfrm>
-          <a:prstGeom prst="rect">
-            <a:avLst/>
-          </a:prstGeom>
-        </p:spPr>
-      </p:pic>
-      <p:sp>
-        <p:nvSpPr>
-          <p:cNvPr id="30" name="TextBox 29"/>
-          <p:cNvSpPr txBox="1"/>
-          <p:nvPr/>
-        </p:nvSpPr>
-        <p:spPr>
-          <a:xfrm>
-            <a:off x="4857628" y="3183686"/>
-            <a:ext cx="1390637" cy="357277"/>
-          </a:xfrm>
-          <a:prstGeom prst="rect">
-            <a:avLst/>
-          </a:prstGeom>
-          <a:noFill/>
-        </p:spPr>
-        <p:txBody>
-          <a:bodyPr wrap="none" lIns="73152" tIns="54864" rIns="73152" bIns="54864" anchor="ctr">
-            <a:spAutoFit/>
-          </a:bodyPr>
-          <a:lstStyle/>
-          <a:p>
-            <a:pPr algn="l">
-              <a:lnSpc>
-                <a:spcPts val="1950"/>
-              </a:lnSpc>
-              <a:spcBef>
-                <a:spcPts val="0"/>
-              </a:spcBef>
-              <a:spcAft>
-                <a:spcPts val="0"/>
-              </a:spcAft>
-            </a:pPr>
-            <a:r>
-              <a:rPr sz="1600" b="1">
-                <a:solidFill>
-                  <a:srgbClr val="FFFFFF"/>
-                </a:solidFill>
-                <a:latin typeface="Inter"/>
-              </a:rPr>
-              <a:t>Bit Persistence</a:t>
-            </a:r>
-          </a:p>
-        </p:txBody>
-      </p:sp>
-      <p:sp>
-        <p:nvSpPr>
-          <p:cNvPr id="31" name="TextBox 30"/>
-          <p:cNvSpPr txBox="1"/>
-          <p:nvPr/>
-        </p:nvSpPr>
-        <p:spPr>
-          <a:xfrm>
-            <a:off x="4857628" y="3506234"/>
-            <a:ext cx="2289601" cy="331309"/>
-          </a:xfrm>
-          <a:prstGeom prst="rect">
-            <a:avLst/>
-          </a:prstGeom>
-          <a:noFill/>
-        </p:spPr>
-        <p:txBody>
-          <a:bodyPr wrap="none" lIns="73152" tIns="54864" rIns="73152" bIns="54864" anchor="ctr">
-            <a:spAutoFit/>
-          </a:bodyPr>
-          <a:lstStyle/>
-          <a:p>
-            <a:pPr algn="l">
-              <a:lnSpc>
-                <a:spcPts val="1755"/>
-              </a:lnSpc>
-              <a:spcBef>
-                <a:spcPts val="260"/>
-              </a:spcBef>
-              <a:spcAft>
-                <a:spcPts val="0"/>
-              </a:spcAft>
-            </a:pPr>
-            <a:r>
-              <a:rPr sz="1400" b="0">
-                <a:solidFill>
-                  <a:srgbClr val="8A92A8"/>
-                </a:solidFill>
-                <a:latin typeface="Inter"/>
-              </a:rPr>
-              <a:t>FAILED • 2 LSBs never change</a:t>
-            </a:r>
-          </a:p>
-        </p:txBody>
-      </p:sp>
-      <p:pic>
-        <p:nvPicPr>
-          <p:cNvPr id="32" name="Picture 31" descr="image.png"/>
-          <p:cNvPicPr>
-            <a:picLocks noChangeAspect="1"/>
-          </p:cNvPicPr>
-          <p:nvPr/>
-        </p:nvPicPr>
-        <p:blipFill>
-          <a:blip r:embed="rId10" cstate="email">
-            <a:alphaModFix/>
-            <a:extLst>
-              <a:ext uri="{28A0092B-C50C-407E-A947-70E740481C1C}">
-                <a14:useLocalDpi xmlns:a14="http://schemas.microsoft.com/office/drawing/2010/main"/>
-              </a:ext>
-            </a:extLst>
-          </a:blip>
-          <a:stretch>
-            <a:fillRect/>
-          </a:stretch>
-        </p:blipFill>
-        <p:spPr>
-          <a:xfrm>
-            <a:off x="4590935" y="3986492"/>
-            <a:ext cx="190495" cy="123264"/>
-          </a:xfrm>
-          <a:prstGeom prst="rect">
-            <a:avLst/>
-          </a:prstGeom>
-        </p:spPr>
-      </p:pic>
-      <p:sp>
-        <p:nvSpPr>
-          <p:cNvPr id="33" name="TextBox 32"/>
-          <p:cNvSpPr txBox="1"/>
-          <p:nvPr/>
-        </p:nvSpPr>
-        <p:spPr>
-          <a:xfrm>
-            <a:off x="4857628" y="3879012"/>
-            <a:ext cx="1445460" cy="357277"/>
-          </a:xfrm>
-          <a:prstGeom prst="rect">
-            <a:avLst/>
-          </a:prstGeom>
-          <a:noFill/>
-        </p:spPr>
-        <p:txBody>
-          <a:bodyPr wrap="none" lIns="73152" tIns="54864" rIns="73152" bIns="54864" anchor="ctr">
-            <a:spAutoFit/>
-          </a:bodyPr>
-          <a:lstStyle/>
-          <a:p>
-            <a:pPr algn="l">
-              <a:lnSpc>
-                <a:spcPts val="1950"/>
-              </a:lnSpc>
-              <a:spcBef>
-                <a:spcPts val="0"/>
-              </a:spcBef>
-              <a:spcAft>
-                <a:spcPts val="0"/>
-              </a:spcAft>
-            </a:pPr>
-            <a:r>
-              <a:rPr sz="1600" b="1">
-                <a:solidFill>
-                  <a:srgbClr val="FFFFFF"/>
-                </a:solidFill>
-                <a:latin typeface="Inter"/>
-              </a:rPr>
-              <a:t>Bit Distribution</a:t>
-            </a:r>
-          </a:p>
-        </p:txBody>
-      </p:sp>
-      <p:sp>
-        <p:nvSpPr>
-          <p:cNvPr id="34" name="TextBox 33"/>
-          <p:cNvSpPr txBox="1"/>
-          <p:nvPr/>
-        </p:nvSpPr>
-        <p:spPr>
-          <a:xfrm>
-            <a:off x="4857628" y="4201558"/>
-            <a:ext cx="1806970" cy="331309"/>
-          </a:xfrm>
-          <a:prstGeom prst="rect">
-            <a:avLst/>
-          </a:prstGeom>
-          <a:noFill/>
-        </p:spPr>
-        <p:txBody>
-          <a:bodyPr wrap="none" lIns="73152" tIns="54864" rIns="73152" bIns="54864" anchor="ctr">
-            <a:spAutoFit/>
-          </a:bodyPr>
-          <a:lstStyle/>
-          <a:p>
-            <a:pPr algn="l">
-              <a:lnSpc>
-                <a:spcPts val="1755"/>
-              </a:lnSpc>
-              <a:spcBef>
-                <a:spcPts val="260"/>
-              </a:spcBef>
-              <a:spcAft>
-                <a:spcPts val="0"/>
-              </a:spcAft>
-            </a:pPr>
-            <a:r>
-              <a:rPr sz="1400" b="0">
-                <a:solidFill>
-                  <a:srgbClr val="8A92A8"/>
-                </a:solidFill>
-                <a:latin typeface="Inter"/>
-              </a:rPr>
-              <a:t>Not even 1-bit random</a:t>
-            </a:r>
-          </a:p>
-        </p:txBody>
-      </p:sp>
-      <p:pic>
-        <p:nvPicPr>
-          <p:cNvPr id="35" name="Picture 34" descr="image.png"/>
-          <p:cNvPicPr>
-            <a:picLocks noChangeAspect="1"/>
-          </p:cNvPicPr>
-          <p:nvPr/>
-        </p:nvPicPr>
-        <p:blipFill>
-          <a:blip r:embed="rId11" cstate="email">
-            <a:alphaModFix/>
-            <a:extLst>
-              <a:ext uri="{28A0092B-C50C-407E-A947-70E740481C1C}">
-                <a14:useLocalDpi xmlns:a14="http://schemas.microsoft.com/office/drawing/2010/main"/>
-              </a:ext>
-            </a:extLst>
-          </a:blip>
-          <a:stretch>
-            <a:fillRect/>
-          </a:stretch>
-        </p:blipFill>
-        <p:spPr>
-          <a:xfrm>
-            <a:off x="4590935" y="4665008"/>
-            <a:ext cx="190495" cy="156882"/>
-          </a:xfrm>
-          <a:prstGeom prst="rect">
-            <a:avLst/>
-          </a:prstGeom>
-        </p:spPr>
-      </p:pic>
-      <p:sp>
-        <p:nvSpPr>
-          <p:cNvPr id="36" name="TextBox 35"/>
-          <p:cNvSpPr txBox="1"/>
-          <p:nvPr/>
-        </p:nvSpPr>
-        <p:spPr>
-          <a:xfrm>
-            <a:off x="4857628" y="4574336"/>
-            <a:ext cx="757067" cy="357277"/>
-          </a:xfrm>
-          <a:prstGeom prst="rect">
-            <a:avLst/>
-          </a:prstGeom>
-          <a:noFill/>
-        </p:spPr>
-        <p:txBody>
-          <a:bodyPr wrap="none" lIns="73152" tIns="54864" rIns="73152" bIns="54864" anchor="ctr">
-            <a:spAutoFit/>
-          </a:bodyPr>
-          <a:lstStyle/>
-          <a:p>
-            <a:pPr algn="l">
-              <a:lnSpc>
-                <a:spcPts val="1950"/>
-              </a:lnSpc>
-              <a:spcBef>
-                <a:spcPts val="0"/>
-              </a:spcBef>
-              <a:spcAft>
-                <a:spcPts val="0"/>
-              </a:spcAft>
-            </a:pPr>
-            <a:r>
-              <a:rPr sz="1600" b="1">
-                <a:solidFill>
-                  <a:srgbClr val="FFFFFF"/>
-                </a:solidFill>
-                <a:latin typeface="Inter"/>
-              </a:rPr>
-              <a:t>Results</a:t>
-            </a:r>
-          </a:p>
-        </p:txBody>
-      </p:sp>
-      <p:sp>
-        <p:nvSpPr>
-          <p:cNvPr id="37" name="TextBox 36"/>
-          <p:cNvSpPr txBox="1"/>
-          <p:nvPr/>
-        </p:nvSpPr>
-        <p:spPr>
-          <a:xfrm>
-            <a:off x="4857628" y="4896884"/>
-            <a:ext cx="1771511" cy="331309"/>
-          </a:xfrm>
-          <a:prstGeom prst="rect">
-            <a:avLst/>
-          </a:prstGeom>
-          <a:noFill/>
-        </p:spPr>
-        <p:txBody>
-          <a:bodyPr wrap="none" lIns="73152" tIns="54864" rIns="73152" bIns="54864" anchor="ctr">
-            <a:spAutoFit/>
-          </a:bodyPr>
-          <a:lstStyle/>
-          <a:p>
-            <a:pPr algn="l">
-              <a:lnSpc>
-                <a:spcPts val="1755"/>
-              </a:lnSpc>
-              <a:spcBef>
-                <a:spcPts val="260"/>
-              </a:spcBef>
-              <a:spcAft>
-                <a:spcPts val="0"/>
-              </a:spcAft>
-            </a:pPr>
-            <a:r>
-              <a:rPr sz="1400" b="0">
-                <a:solidFill>
-                  <a:srgbClr val="8A92A8"/>
-                </a:solidFill>
-                <a:latin typeface="Inter"/>
-              </a:rPr>
-              <a:t>Cascading test failures</a:t>
-            </a:r>
-          </a:p>
-        </p:txBody>
-      </p:sp>
-      <p:sp>
-        <p:nvSpPr>
-          <p:cNvPr id="38" name="Rounded Rectangle 37"/>
-          <p:cNvSpPr/>
-          <p:nvPr/>
-        </p:nvSpPr>
-        <p:spPr>
-          <a:xfrm>
-            <a:off x="8076998" y="1114425"/>
-            <a:ext cx="3505112" cy="5143500"/>
-          </a:xfrm>
-          <a:prstGeom prst="roundRect">
-            <a:avLst>
-              <a:gd name="adj" fmla="val 4347"/>
-            </a:avLst>
-          </a:prstGeom>
-          <a:solidFill>
-            <a:srgbClr val="A855F7">
-              <a:alpha val="10000"/>
-            </a:srgbClr>
-          </a:solidFill>
-          <a:ln w="16510">
-            <a:solidFill>
-              <a:srgbClr val="A855F7"/>
-            </a:solidFill>
-          </a:ln>
-        </p:spPr>
-        <p:style>
-          <a:lnRef idx="1">
-            <a:schemeClr val="accent1"/>
-          </a:lnRef>
-          <a:fillRef idx="3">
-            <a:schemeClr val="accent1"/>
-          </a:fillRef>
-          <a:effectRef idx="2">
-            <a:schemeClr val="accent1"/>
-          </a:effectRef>
-          <a:fontRef idx="minor">
-            <a:schemeClr val="lt1"/>
-          </a:fontRef>
-        </p:style>
-        <p:txBody>
-          <a:bodyPr rtlCol="0" anchor="ctr"/>
-          <a:lstStyle/>
-          <a:p>
-            <a:pPr algn="ctr"/>
-            <a:endParaRPr sz="2800"/>
-          </a:p>
-        </p:txBody>
-      </p:sp>
-      <p:sp>
-        <p:nvSpPr>
-          <p:cNvPr id="39" name="TextBox 38"/>
-          <p:cNvSpPr txBox="1"/>
-          <p:nvPr/>
-        </p:nvSpPr>
-        <p:spPr>
-          <a:xfrm>
-            <a:off x="8324641" y="1336504"/>
-            <a:ext cx="1005660" cy="508344"/>
-          </a:xfrm>
-          <a:prstGeom prst="rect">
-            <a:avLst/>
-          </a:prstGeom>
-          <a:noFill/>
-        </p:spPr>
-        <p:txBody>
-          <a:bodyPr wrap="none" lIns="73152" tIns="54864" rIns="73152" bIns="54864" anchor="ctr">
-            <a:spAutoFit/>
-          </a:bodyPr>
-          <a:lstStyle/>
-          <a:p>
-            <a:pPr algn="l">
-              <a:lnSpc>
-                <a:spcPts val="3120"/>
-              </a:lnSpc>
-              <a:spcBef>
-                <a:spcPts val="0"/>
-              </a:spcBef>
-              <a:spcAft>
-                <a:spcPts val="0"/>
-              </a:spcAft>
-            </a:pPr>
-            <a:r>
-              <a:rPr sz="2800" b="1">
-                <a:solidFill>
-                  <a:srgbClr val="A855F7"/>
-                </a:solidFill>
-                <a:latin typeface="Space Grotesk"/>
-              </a:rPr>
-              <a:t>slatec</a:t>
-            </a:r>
-          </a:p>
-        </p:txBody>
-      </p:sp>
-      <p:pic>
-        <p:nvPicPr>
-          <p:cNvPr id="40" name="Picture 39" descr="image.png"/>
-          <p:cNvPicPr>
-            <a:picLocks noChangeAspect="1"/>
-          </p:cNvPicPr>
-          <p:nvPr/>
-        </p:nvPicPr>
-        <p:blipFill>
-          <a:blip r:embed="rId12" cstate="email">
-            <a:alphaModFix/>
-            <a:extLst>
-              <a:ext uri="{28A0092B-C50C-407E-A947-70E740481C1C}">
-                <a14:useLocalDpi xmlns:a14="http://schemas.microsoft.com/office/drawing/2010/main"/>
-              </a:ext>
-            </a:extLst>
-          </a:blip>
-          <a:stretch>
-            <a:fillRect/>
-          </a:stretch>
-        </p:blipFill>
-        <p:spPr>
-          <a:xfrm>
-            <a:off x="10953476" y="1429940"/>
-            <a:ext cx="380990" cy="321468"/>
-          </a:xfrm>
-          <a:prstGeom prst="rect">
-            <a:avLst/>
-          </a:prstGeom>
-        </p:spPr>
-      </p:pic>
-      <p:sp>
-        <p:nvSpPr>
-          <p:cNvPr id="41" name="Rounded Rectangle 40"/>
-          <p:cNvSpPr/>
-          <p:nvPr/>
-        </p:nvSpPr>
-        <p:spPr>
-          <a:xfrm>
-            <a:off x="8324641" y="1971675"/>
-            <a:ext cx="1704932" cy="361950"/>
-          </a:xfrm>
-          <a:prstGeom prst="roundRect">
-            <a:avLst>
-              <a:gd name="adj" fmla="val 52626315"/>
-            </a:avLst>
-          </a:prstGeom>
-          <a:solidFill>
-            <a:srgbClr val="A855F7">
-              <a:alpha val="20000"/>
-            </a:srgbClr>
-          </a:solidFill>
-          <a:ln>
-            <a:noFill/>
-          </a:ln>
-        </p:spPr>
-        <p:style>
-          <a:lnRef idx="1">
-            <a:schemeClr val="accent1"/>
-          </a:lnRef>
-          <a:fillRef idx="3">
-            <a:schemeClr val="accent1"/>
-          </a:fillRef>
-          <a:effectRef idx="2">
-            <a:schemeClr val="accent1"/>
-          </a:effectRef>
-          <a:fontRef idx="minor">
-            <a:schemeClr val="lt1"/>
-          </a:fontRef>
-        </p:style>
-        <p:txBody>
-          <a:bodyPr rtlCol="0" anchor="ctr"/>
-          <a:lstStyle/>
-          <a:p>
-            <a:pPr algn="ctr"/>
-            <a:endParaRPr sz="2800"/>
-          </a:p>
-        </p:txBody>
-      </p:sp>
-      <p:sp>
-        <p:nvSpPr>
-          <p:cNvPr id="42" name="TextBox 41"/>
-          <p:cNvSpPr txBox="1"/>
-          <p:nvPr/>
-        </p:nvSpPr>
-        <p:spPr>
-          <a:xfrm>
-            <a:off x="8477038" y="1974011"/>
-            <a:ext cx="1442574" cy="357277"/>
-          </a:xfrm>
-          <a:prstGeom prst="rect">
-            <a:avLst/>
-          </a:prstGeom>
-          <a:noFill/>
-        </p:spPr>
-        <p:txBody>
-          <a:bodyPr wrap="none" lIns="73152" tIns="54864" rIns="73152" bIns="54864" anchor="ctr">
-            <a:spAutoFit/>
-          </a:bodyPr>
-          <a:lstStyle/>
-          <a:p>
-            <a:pPr algn="l">
-              <a:lnSpc>
-                <a:spcPts val="1950"/>
-              </a:lnSpc>
-              <a:spcBef>
-                <a:spcPts val="0"/>
-              </a:spcBef>
-              <a:spcAft>
-                <a:spcPts val="0"/>
-              </a:spcAft>
-            </a:pPr>
-            <a:r>
-              <a:rPr sz="1600" b="1">
-                <a:solidFill>
-                  <a:srgbClr val="A855F7"/>
-                </a:solidFill>
-                <a:latin typeface="Inter"/>
-              </a:rPr>
-              <a:t>Ugly Generator</a:t>
-            </a:r>
-          </a:p>
-        </p:txBody>
-      </p:sp>
-      <p:pic>
-        <p:nvPicPr>
-          <p:cNvPr id="43" name="Picture 42" descr="image.png"/>
-          <p:cNvPicPr>
-            <a:picLocks noChangeAspect="1"/>
-          </p:cNvPicPr>
-          <p:nvPr/>
-        </p:nvPicPr>
-        <p:blipFill>
-          <a:blip r:embed="rId13" cstate="email">
-            <a:alphaModFix/>
-            <a:extLst>
-              <a:ext uri="{28A0092B-C50C-407E-A947-70E740481C1C}">
-                <a14:useLocalDpi xmlns:a14="http://schemas.microsoft.com/office/drawing/2010/main"/>
-              </a:ext>
-            </a:extLst>
-          </a:blip>
-          <a:stretch>
-            <a:fillRect/>
-          </a:stretch>
-        </p:blipFill>
-        <p:spPr>
-          <a:xfrm>
-            <a:off x="8324641" y="2588838"/>
-            <a:ext cx="190495" cy="137272"/>
-          </a:xfrm>
-          <a:prstGeom prst="rect">
-            <a:avLst/>
-          </a:prstGeom>
-        </p:spPr>
-      </p:pic>
-      <p:sp>
-        <p:nvSpPr>
-          <p:cNvPr id="44" name="TextBox 43"/>
-          <p:cNvSpPr txBox="1"/>
-          <p:nvPr/>
-        </p:nvSpPr>
-        <p:spPr>
-          <a:xfrm>
-            <a:off x="8591335" y="2488362"/>
-            <a:ext cx="671915" cy="357277"/>
-          </a:xfrm>
-          <a:prstGeom prst="rect">
-            <a:avLst/>
-          </a:prstGeom>
-          <a:noFill/>
-        </p:spPr>
-        <p:txBody>
-          <a:bodyPr wrap="none" lIns="73152" tIns="54864" rIns="73152" bIns="54864" anchor="ctr">
-            <a:spAutoFit/>
-          </a:bodyPr>
-          <a:lstStyle/>
-          <a:p>
-            <a:pPr algn="l">
-              <a:lnSpc>
-                <a:spcPts val="1950"/>
-              </a:lnSpc>
-              <a:spcBef>
-                <a:spcPts val="0"/>
-              </a:spcBef>
-              <a:spcAft>
-                <a:spcPts val="0"/>
-              </a:spcAft>
-            </a:pPr>
-            <a:r>
-              <a:rPr sz="1600" b="1">
-                <a:solidFill>
-                  <a:srgbClr val="FFFFFF"/>
-                </a:solidFill>
-                <a:latin typeface="Inter"/>
-              </a:rPr>
-              <a:t>Speed</a:t>
-            </a:r>
-          </a:p>
-        </p:txBody>
-      </p:sp>
-      <p:sp>
-        <p:nvSpPr>
-          <p:cNvPr id="45" name="TextBox 44"/>
-          <p:cNvSpPr txBox="1"/>
-          <p:nvPr/>
-        </p:nvSpPr>
-        <p:spPr>
-          <a:xfrm>
-            <a:off x="8591335" y="2810908"/>
-            <a:ext cx="1538947" cy="331309"/>
-          </a:xfrm>
-          <a:prstGeom prst="rect">
-            <a:avLst/>
-          </a:prstGeom>
-          <a:noFill/>
-        </p:spPr>
-        <p:txBody>
-          <a:bodyPr wrap="none" lIns="73152" tIns="54864" rIns="73152" bIns="54864" anchor="ctr">
-            <a:spAutoFit/>
-          </a:bodyPr>
-          <a:lstStyle/>
-          <a:p>
-            <a:pPr algn="l">
-              <a:lnSpc>
-                <a:spcPts val="1755"/>
-              </a:lnSpc>
-              <a:spcBef>
-                <a:spcPts val="260"/>
-              </a:spcBef>
-              <a:spcAft>
-                <a:spcPts val="0"/>
-              </a:spcAft>
-            </a:pPr>
-            <a:r>
-              <a:rPr sz="1400" b="0">
-                <a:solidFill>
-                  <a:srgbClr val="8A92A8"/>
-                </a:solidFill>
-                <a:latin typeface="Inter"/>
-              </a:rPr>
-              <a:t>Similar to mt19937</a:t>
-            </a:r>
-          </a:p>
-        </p:txBody>
-      </p:sp>
-      <p:pic>
-        <p:nvPicPr>
-          <p:cNvPr id="46" name="Picture 45" descr="image.png"/>
-          <p:cNvPicPr>
-            <a:picLocks noChangeAspect="1"/>
-          </p:cNvPicPr>
-          <p:nvPr/>
-        </p:nvPicPr>
-        <p:blipFill>
-          <a:blip r:embed="rId14" cstate="email">
-            <a:alphaModFix/>
-            <a:extLst>
-              <a:ext uri="{28A0092B-C50C-407E-A947-70E740481C1C}">
-                <a14:useLocalDpi xmlns:a14="http://schemas.microsoft.com/office/drawing/2010/main"/>
-              </a:ext>
-            </a:extLst>
-          </a:blip>
-          <a:stretch>
-            <a:fillRect/>
-          </a:stretch>
-        </p:blipFill>
-        <p:spPr>
-          <a:xfrm>
-            <a:off x="8324641" y="3277160"/>
-            <a:ext cx="190495" cy="151279"/>
-          </a:xfrm>
-          <a:prstGeom prst="rect">
-            <a:avLst/>
-          </a:prstGeom>
-        </p:spPr>
-      </p:pic>
-      <p:sp>
-        <p:nvSpPr>
-          <p:cNvPr id="47" name="TextBox 46"/>
-          <p:cNvSpPr txBox="1"/>
-          <p:nvPr/>
-        </p:nvSpPr>
-        <p:spPr>
-          <a:xfrm>
-            <a:off x="8591335" y="3183686"/>
-            <a:ext cx="953210" cy="357277"/>
-          </a:xfrm>
-          <a:prstGeom prst="rect">
-            <a:avLst/>
-          </a:prstGeom>
-          <a:noFill/>
-        </p:spPr>
-        <p:txBody>
-          <a:bodyPr wrap="none" lIns="73152" tIns="54864" rIns="73152" bIns="54864" anchor="ctr">
-            <a:spAutoFit/>
-          </a:bodyPr>
-          <a:lstStyle/>
-          <a:p>
-            <a:pPr algn="l">
-              <a:lnSpc>
-                <a:spcPts val="1950"/>
-              </a:lnSpc>
-              <a:spcBef>
-                <a:spcPts val="0"/>
-              </a:spcBef>
-              <a:spcAft>
-                <a:spcPts val="0"/>
-              </a:spcAft>
-            </a:pPr>
-            <a:r>
-              <a:rPr sz="1600" b="1">
-                <a:solidFill>
-                  <a:srgbClr val="FFFFFF"/>
-                </a:solidFill>
-                <a:latin typeface="Inter"/>
-              </a:rPr>
-              <a:t>Bit Depth</a:t>
-            </a:r>
-          </a:p>
-        </p:txBody>
-      </p:sp>
-      <p:sp>
-        <p:nvSpPr>
-          <p:cNvPr id="48" name="TextBox 47"/>
-          <p:cNvSpPr txBox="1"/>
-          <p:nvPr/>
-        </p:nvSpPr>
-        <p:spPr>
-          <a:xfrm>
-            <a:off x="8591335" y="3506234"/>
-            <a:ext cx="1700915" cy="331309"/>
-          </a:xfrm>
-          <a:prstGeom prst="rect">
-            <a:avLst/>
-          </a:prstGeom>
-          <a:noFill/>
-        </p:spPr>
-        <p:txBody>
-          <a:bodyPr wrap="none" lIns="73152" tIns="54864" rIns="73152" bIns="54864" anchor="ctr">
-            <a:spAutoFit/>
-          </a:bodyPr>
-          <a:lstStyle/>
-          <a:p>
-            <a:pPr algn="l">
-              <a:lnSpc>
-                <a:spcPts val="1755"/>
-              </a:lnSpc>
-              <a:spcBef>
-                <a:spcPts val="260"/>
-              </a:spcBef>
-              <a:spcAft>
-                <a:spcPts val="0"/>
-              </a:spcAft>
-            </a:pPr>
-            <a:r>
-              <a:rPr sz="1400" b="0">
-                <a:solidFill>
-                  <a:srgbClr val="8A92A8"/>
-                </a:solidFill>
-                <a:latin typeface="Inter"/>
-              </a:rPr>
-              <a:t>Only 22 bits returned</a:t>
-            </a:r>
-          </a:p>
-        </p:txBody>
-      </p:sp>
-      <p:pic>
-        <p:nvPicPr>
-          <p:cNvPr id="49" name="Picture 48" descr="image.png"/>
-          <p:cNvPicPr>
-            <a:picLocks noChangeAspect="1"/>
-          </p:cNvPicPr>
-          <p:nvPr/>
-        </p:nvPicPr>
-        <p:blipFill>
-          <a:blip r:embed="rId15" cstate="email">
-            <a:alphaModFix/>
-            <a:extLst>
-              <a:ext uri="{28A0092B-C50C-407E-A947-70E740481C1C}">
-                <a14:useLocalDpi xmlns:a14="http://schemas.microsoft.com/office/drawing/2010/main"/>
-              </a:ext>
-            </a:extLst>
-          </a:blip>
-          <a:stretch>
-            <a:fillRect/>
-          </a:stretch>
-        </p:blipFill>
-        <p:spPr>
-          <a:xfrm>
-            <a:off x="8324641" y="3986492"/>
-            <a:ext cx="190495" cy="123264"/>
-          </a:xfrm>
-          <a:prstGeom prst="rect">
-            <a:avLst/>
-          </a:prstGeom>
-        </p:spPr>
-      </p:pic>
-      <p:sp>
-        <p:nvSpPr>
-          <p:cNvPr id="50" name="TextBox 49"/>
-          <p:cNvSpPr txBox="1"/>
-          <p:nvPr/>
-        </p:nvSpPr>
-        <p:spPr>
-          <a:xfrm>
-            <a:off x="8591335" y="3879012"/>
-            <a:ext cx="1239378" cy="357277"/>
-          </a:xfrm>
-          <a:prstGeom prst="rect">
-            <a:avLst/>
-          </a:prstGeom>
-          <a:noFill/>
-        </p:spPr>
-        <p:txBody>
-          <a:bodyPr wrap="none" lIns="73152" tIns="54864" rIns="73152" bIns="54864" anchor="ctr">
-            <a:spAutoFit/>
-          </a:bodyPr>
-          <a:lstStyle/>
-          <a:p>
-            <a:pPr algn="l">
-              <a:lnSpc>
-                <a:spcPts val="1950"/>
-              </a:lnSpc>
-              <a:spcBef>
-                <a:spcPts val="0"/>
-              </a:spcBef>
-              <a:spcAft>
-                <a:spcPts val="0"/>
-              </a:spcAft>
-            </a:pPr>
-            <a:r>
-              <a:rPr sz="1600" b="1">
-                <a:solidFill>
-                  <a:srgbClr val="FFFFFF"/>
-                </a:solidFill>
-                <a:latin typeface="Inter"/>
-              </a:rPr>
-              <a:t>Randomness</a:t>
-            </a:r>
-          </a:p>
-        </p:txBody>
-      </p:sp>
-      <p:sp>
-        <p:nvSpPr>
-          <p:cNvPr id="51" name="TextBox 50"/>
-          <p:cNvSpPr txBox="1"/>
-          <p:nvPr/>
-        </p:nvSpPr>
-        <p:spPr>
-          <a:xfrm>
-            <a:off x="8591335" y="4201558"/>
-            <a:ext cx="1853456" cy="331309"/>
-          </a:xfrm>
-          <a:prstGeom prst="rect">
-            <a:avLst/>
-          </a:prstGeom>
-          <a:noFill/>
-        </p:spPr>
-        <p:txBody>
-          <a:bodyPr wrap="none" lIns="73152" tIns="54864" rIns="73152" bIns="54864" anchor="ctr">
-            <a:spAutoFit/>
-          </a:bodyPr>
-          <a:lstStyle/>
-          <a:p>
-            <a:pPr algn="l">
-              <a:lnSpc>
-                <a:spcPts val="1755"/>
-              </a:lnSpc>
-              <a:spcBef>
-                <a:spcPts val="260"/>
-              </a:spcBef>
-              <a:spcAft>
-                <a:spcPts val="0"/>
-              </a:spcAft>
-            </a:pPr>
-            <a:r>
-              <a:rPr sz="1400" b="0">
-                <a:solidFill>
-                  <a:srgbClr val="8A92A8"/>
-                </a:solidFill>
-                <a:latin typeface="Inter"/>
-              </a:rPr>
-              <a:t>Fails even 1-bit random</a:t>
-            </a:r>
-          </a:p>
-        </p:txBody>
-      </p:sp>
-      <p:pic>
-        <p:nvPicPr>
-          <p:cNvPr id="52" name="Picture 51" descr="image.png"/>
-          <p:cNvPicPr>
-            <a:picLocks noChangeAspect="1"/>
-          </p:cNvPicPr>
-          <p:nvPr/>
-        </p:nvPicPr>
-        <p:blipFill>
-          <a:blip r:embed="rId16" cstate="email">
-            <a:alphaModFix/>
-            <a:extLst>
-              <a:ext uri="{28A0092B-C50C-407E-A947-70E740481C1C}">
-                <a14:useLocalDpi xmlns:a14="http://schemas.microsoft.com/office/drawing/2010/main"/>
-              </a:ext>
-            </a:extLst>
-          </a:blip>
-          <a:stretch>
-            <a:fillRect/>
-          </a:stretch>
-        </p:blipFill>
-        <p:spPr>
-          <a:xfrm>
-            <a:off x="8324641" y="4667810"/>
-            <a:ext cx="190495" cy="151279"/>
-          </a:xfrm>
-          <a:prstGeom prst="rect">
-            <a:avLst/>
-          </a:prstGeom>
-        </p:spPr>
-      </p:pic>
-      <p:sp>
-        <p:nvSpPr>
-          <p:cNvPr id="53" name="TextBox 52"/>
-          <p:cNvSpPr txBox="1"/>
-          <p:nvPr/>
-        </p:nvSpPr>
-        <p:spPr>
-          <a:xfrm>
-            <a:off x="8591335" y="4574336"/>
-            <a:ext cx="1003352" cy="357277"/>
-          </a:xfrm>
-          <a:prstGeom prst="rect">
-            <a:avLst/>
-          </a:prstGeom>
-          <a:noFill/>
-        </p:spPr>
-        <p:txBody>
-          <a:bodyPr wrap="none" lIns="73152" tIns="54864" rIns="73152" bIns="54864" anchor="ctr">
-            <a:spAutoFit/>
-          </a:bodyPr>
-          <a:lstStyle/>
-          <a:p>
-            <a:pPr algn="l">
-              <a:lnSpc>
-                <a:spcPts val="1950"/>
-              </a:lnSpc>
-              <a:spcBef>
-                <a:spcPts val="0"/>
-              </a:spcBef>
-              <a:spcAft>
-                <a:spcPts val="0"/>
-              </a:spcAft>
-            </a:pPr>
-            <a:r>
-              <a:rPr sz="1600" b="1">
-                <a:solidFill>
-                  <a:srgbClr val="FFFFFF"/>
-                </a:solidFill>
-                <a:latin typeface="Inter"/>
-              </a:rPr>
-              <a:t>Suitability</a:t>
-            </a:r>
-          </a:p>
-        </p:txBody>
-      </p:sp>
-      <p:sp>
-        <p:nvSpPr>
-          <p:cNvPr id="54" name="TextBox 53"/>
-          <p:cNvSpPr txBox="1"/>
-          <p:nvPr/>
-        </p:nvSpPr>
-        <p:spPr>
-          <a:xfrm>
-            <a:off x="8591335" y="4896884"/>
-            <a:ext cx="2124556" cy="331309"/>
-          </a:xfrm>
-          <a:prstGeom prst="rect">
-            <a:avLst/>
-          </a:prstGeom>
-          <a:noFill/>
-        </p:spPr>
-        <p:txBody>
-          <a:bodyPr wrap="none" lIns="73152" tIns="54864" rIns="73152" bIns="54864" anchor="ctr">
-            <a:spAutoFit/>
-          </a:bodyPr>
-          <a:lstStyle/>
-          <a:p>
-            <a:pPr algn="l">
-              <a:lnSpc>
-                <a:spcPts val="1755"/>
-              </a:lnSpc>
-              <a:spcBef>
-                <a:spcPts val="260"/>
-              </a:spcBef>
-              <a:spcAft>
-                <a:spcPts val="0"/>
-              </a:spcAft>
-            </a:pPr>
-            <a:r>
-              <a:rPr sz="1400" b="0">
-                <a:solidFill>
-                  <a:srgbClr val="8A92A8"/>
-                </a:solidFill>
-                <a:latin typeface="Inter"/>
-              </a:rPr>
-              <a:t>Unsuitable for any purpose</a:t>
+              <a:t>Modern Requirements Go Beyond Statistical Testing</a:t>
             </a:r>
           </a:p>
         </p:txBody>
@@ -7494,7 +6693,7 @@
         <p:spPr>
           <a:xfrm>
             <a:off x="609584" y="114300"/>
-            <a:ext cx="5972025" cy="571500"/>
+            <a:ext cx="10191495" cy="571500"/>
           </a:xfrm>
           <a:prstGeom prst="rect">
             <a:avLst/>
@@ -7525,7 +6724,7 @@
                 </a:solidFill>
                 <a:latin typeface="Space Grotesk"/>
               </a:rPr>
-              <a:t>Modern Perspectives &amp; Critiques</a:t>
+              <a:t>Modern Security Requirements for Cryptographic RNGs</a:t>
             </a:r>
           </a:p>
         </p:txBody>
@@ -7553,8 +6752,8 @@
         </p:blipFill>
         <p:spPr>
           <a:xfrm>
-            <a:off x="609584" y="1286607"/>
-            <a:ext cx="304792" cy="246184"/>
+            <a:off x="609584" y="1189796"/>
+            <a:ext cx="266693" cy="249306"/>
           </a:xfrm>
           <a:prstGeom prst="rect">
             <a:avLst/>
@@ -7569,8 +6768,8 @@
         </p:nvSpPr>
         <p:spPr>
           <a:xfrm>
-            <a:off x="1028674" y="1169457"/>
-            <a:ext cx="6838347" cy="470963"/>
+            <a:off x="990575" y="1085927"/>
+            <a:ext cx="3003836" cy="457048"/>
           </a:xfrm>
           <a:prstGeom prst="rect">
             <a:avLst/>
@@ -7585,7 +6784,7 @@
           <a:p>
             <a:pPr algn="l">
               <a:lnSpc>
-                <a:spcPts val="2925"/>
+                <a:spcPts val="2730"/>
               </a:lnSpc>
               <a:spcBef>
                 <a:spcPts val="0"/>
@@ -7601,7 +6800,7 @@
                 </a:solidFill>
                 <a:latin typeface="Space Grotesk"/>
               </a:rPr>
-              <a:t>Critiques of Traditional Black-Box Testing (SP 800-22)</a:t>
+              <a:t>Evaluation Framework</a:t>
             </a:r>
           </a:p>
         </p:txBody>
@@ -7614,16 +6813,16 @@
         </p:nvSpPr>
         <p:spPr>
           <a:xfrm>
-            <a:off x="609584" y="1847849"/>
-            <a:ext cx="5371965" cy="1390650"/>
+            <a:off x="609584" y="1666874"/>
+            <a:ext cx="5371965" cy="942975"/>
           </a:xfrm>
           <a:prstGeom prst="roundRect">
             <a:avLst>
-              <a:gd name="adj" fmla="val 10958"/>
+              <a:gd name="adj" fmla="val 16161"/>
             </a:avLst>
           </a:prstGeom>
           <a:solidFill>
-            <a:srgbClr val="EF4444">
+            <a:srgbClr val="00D4FF">
               <a:alpha val="8000"/>
             </a:srgbClr>
           </a:solidFill>
@@ -7654,56 +6853,9 @@
           </a:p>
         </p:txBody>
       </p:sp>
-      <p:sp>
-        <p:nvSpPr>
-          <p:cNvPr id="7" name="Round Same Side Corner Rectangle 6"/>
-          <p:cNvSpPr/>
-          <p:nvPr/>
-        </p:nvSpPr>
-        <p:spPr>
-          <a:xfrm rot="16200000">
-            <a:off x="-19701" y="2477134"/>
-            <a:ext cx="1390650" cy="132080"/>
-          </a:xfrm>
-          <a:prstGeom prst="round2SameRect">
-            <a:avLst>
-              <a:gd name="adj1" fmla="val 50000"/>
-              <a:gd name="adj2" fmla="val 0"/>
-            </a:avLst>
-          </a:prstGeom>
-          <a:solidFill>
-            <a:srgbClr val="EF4444"/>
-          </a:solidFill>
-          <a:ln>
-            <a:noFill/>
-          </a:ln>
-        </p:spPr>
-        <p:style>
-          <a:lnRef idx="1">
-            <a:schemeClr val="accent1"/>
-          </a:lnRef>
-          <a:fillRef idx="3">
-            <a:schemeClr val="accent1"/>
-          </a:fillRef>
-          <a:effectRef idx="2">
-            <a:schemeClr val="accent1"/>
-          </a:effectRef>
-          <a:fontRef idx="minor">
-            <a:schemeClr val="lt1"/>
-          </a:fontRef>
-        </p:style>
-        <p:txBody>
-          <a:bodyPr rtlCol="0" anchor="ctr"/>
-          <a:lstStyle/>
-          <a:p>
-            <a:pPr algn="ctr"/>
-            <a:endParaRPr sz="2800"/>
-          </a:p>
-        </p:txBody>
-      </p:sp>
       <p:pic>
         <p:nvPicPr>
-          <p:cNvPr id="8" name="Picture 7" descr="image.png"/>
+          <p:cNvPr id="7" name="Picture 6" descr="image.png"/>
           <p:cNvPicPr>
             <a:picLocks noChangeAspect="1"/>
           </p:cNvPicPr>
@@ -7724,8 +6876,8 @@
         </p:blipFill>
         <p:spPr>
           <a:xfrm>
-            <a:off x="838179" y="2102167"/>
-            <a:ext cx="228594" cy="177164"/>
+            <a:off x="761980" y="1880029"/>
+            <a:ext cx="209544" cy="164241"/>
           </a:xfrm>
           <a:prstGeom prst="rect">
             <a:avLst/>
@@ -7734,14 +6886,14 @@
       </p:pic>
       <p:sp>
         <p:nvSpPr>
-          <p:cNvPr id="9" name="TextBox 8"/>
+          <p:cNvPr id="8" name="TextBox 7"/>
           <p:cNvSpPr txBox="1"/>
           <p:nvPr/>
         </p:nvSpPr>
         <p:spPr>
           <a:xfrm>
-            <a:off x="1181070" y="2013382"/>
-            <a:ext cx="2199961" cy="383310"/>
+            <a:off x="1047723" y="1786386"/>
+            <a:ext cx="3673121" cy="380104"/>
           </a:xfrm>
           <a:prstGeom prst="rect">
             <a:avLst/>
@@ -7756,13 +6908,13 @@
           <a:p>
             <a:pPr algn="l">
               <a:lnSpc>
-                <a:spcPts val="2210"/>
+                <a:spcPts val="2145"/>
               </a:lnSpc>
               <a:spcBef>
                 <a:spcPts val="0"/>
               </a:spcBef>
               <a:spcAft>
-                <a:spcPts val="520"/>
+                <a:spcPts val="0"/>
               </a:spcAft>
             </a:pPr>
             <a:r>
@@ -7772,21 +6924,21 @@
                 </a:solidFill>
                 <a:latin typeface="Inter"/>
               </a:rPr>
-              <a:t>Outdated Foundation</a:t>
-            </a:r>
-          </a:p>
-        </p:txBody>
-      </p:sp>
-      <p:sp>
-        <p:nvSpPr>
-          <p:cNvPr id="10" name="TextBox 9"/>
+              <a:t>Pseudorandom Generator Evaluation</a:t>
+            </a:r>
+          </a:p>
+        </p:txBody>
+      </p:sp>
+      <p:sp>
+        <p:nvSpPr>
+          <p:cNvPr id="9" name="TextBox 8"/>
           <p:cNvSpPr txBox="1"/>
           <p:nvPr/>
         </p:nvSpPr>
         <p:spPr>
           <a:xfrm>
-            <a:off x="1181070" y="2426558"/>
-            <a:ext cx="4609984" cy="623761"/>
+            <a:off x="1047723" y="2135937"/>
+            <a:ext cx="4000198" cy="357277"/>
           </a:xfrm>
           <a:prstGeom prst="rect">
             <a:avLst/>
@@ -7794,52 +6946,52 @@
           <a:noFill/>
         </p:spPr>
         <p:txBody>
-          <a:bodyPr wrap="square" lIns="73152" tIns="54864" rIns="73152" bIns="54864" anchor="ctr">
+          <a:bodyPr wrap="none" lIns="73152" tIns="54864" rIns="73152" bIns="54864" anchor="ctr">
             <a:spAutoFit/>
           </a:bodyPr>
           <a:lstStyle/>
           <a:p>
             <a:pPr algn="l">
               <a:lnSpc>
-                <a:spcPts val="2015"/>
+                <a:spcPts val="1950"/>
               </a:lnSpc>
               <a:spcBef>
-                <a:spcPts val="0"/>
+                <a:spcPts val="260"/>
               </a:spcBef>
               <a:spcAft>
                 <a:spcPts val="0"/>
               </a:spcAft>
             </a:pPr>
             <a:r>
-              <a:rPr b="0">
-                <a:solidFill>
-                  <a:srgbClr val="B0B8D4"/>
+              <a:rPr sz="1600" b="0">
+                <a:solidFill>
+                  <a:srgbClr val="8A92A8"/>
                 </a:solidFill>
                 <a:latin typeface="Inter"/>
               </a:rPr>
-              <a:t>Predates modern cryptography and information theory</a:t>
-            </a:r>
-          </a:p>
-        </p:txBody>
-      </p:sp>
-      <p:sp>
-        <p:nvSpPr>
-          <p:cNvPr id="11" name="Rounded Rectangle 10"/>
+              <a:t>Mathematical proofs linking DRBG to AES/SHA</a:t>
+            </a:r>
+          </a:p>
+        </p:txBody>
+      </p:sp>
+      <p:sp>
+        <p:nvSpPr>
+          <p:cNvPr id="10" name="Rounded Rectangle 9"/>
           <p:cNvSpPr/>
           <p:nvPr/>
         </p:nvSpPr>
         <p:spPr>
           <a:xfrm>
-            <a:off x="609584" y="3390899"/>
-            <a:ext cx="5371965" cy="1390650"/>
+            <a:off x="609584" y="2724150"/>
+            <a:ext cx="5371965" cy="942975"/>
           </a:xfrm>
           <a:prstGeom prst="roundRect">
             <a:avLst>
-              <a:gd name="adj" fmla="val 10958"/>
+              <a:gd name="adj" fmla="val 16161"/>
             </a:avLst>
           </a:prstGeom>
           <a:solidFill>
-            <a:srgbClr val="EF4444">
+            <a:srgbClr val="00D4FF">
               <a:alpha val="8000"/>
             </a:srgbClr>
           </a:solidFill>
@@ -7870,56 +7022,9 @@
           </a:p>
         </p:txBody>
       </p:sp>
-      <p:sp>
-        <p:nvSpPr>
-          <p:cNvPr id="12" name="Round Same Side Corner Rectangle 11"/>
-          <p:cNvSpPr/>
-          <p:nvPr/>
-        </p:nvSpPr>
-        <p:spPr>
-          <a:xfrm rot="16200000">
-            <a:off x="-19701" y="4020184"/>
-            <a:ext cx="1390650" cy="132080"/>
-          </a:xfrm>
-          <a:prstGeom prst="round2SameRect">
-            <a:avLst>
-              <a:gd name="adj1" fmla="val 50000"/>
-              <a:gd name="adj2" fmla="val 0"/>
-            </a:avLst>
-          </a:prstGeom>
-          <a:solidFill>
-            <a:srgbClr val="EF4444"/>
-          </a:solidFill>
-          <a:ln>
-            <a:noFill/>
-          </a:ln>
-        </p:spPr>
-        <p:style>
-          <a:lnRef idx="1">
-            <a:schemeClr val="accent1"/>
-          </a:lnRef>
-          <a:fillRef idx="3">
-            <a:schemeClr val="accent1"/>
-          </a:fillRef>
-          <a:effectRef idx="2">
-            <a:schemeClr val="accent1"/>
-          </a:effectRef>
-          <a:fontRef idx="minor">
-            <a:schemeClr val="lt1"/>
-          </a:fontRef>
-        </p:style>
-        <p:txBody>
-          <a:bodyPr rtlCol="0" anchor="ctr"/>
-          <a:lstStyle/>
-          <a:p>
-            <a:pPr algn="ctr"/>
-            <a:endParaRPr sz="2800"/>
-          </a:p>
-        </p:txBody>
-      </p:sp>
       <p:pic>
         <p:nvPicPr>
-          <p:cNvPr id="13" name="Picture 12" descr="image.png"/>
+          <p:cNvPr id="11" name="Picture 10" descr="image.png"/>
           <p:cNvPicPr>
             <a:picLocks noChangeAspect="1"/>
           </p:cNvPicPr>
@@ -7940,8 +7045,8 @@
         </p:blipFill>
         <p:spPr>
           <a:xfrm>
-            <a:off x="838179" y="3662362"/>
-            <a:ext cx="228594" cy="142875"/>
+            <a:off x="761980" y="2937304"/>
+            <a:ext cx="209544" cy="164241"/>
           </a:xfrm>
           <a:prstGeom prst="rect">
             <a:avLst/>
@@ -7950,14 +7055,14 @@
       </p:pic>
       <p:sp>
         <p:nvSpPr>
-          <p:cNvPr id="14" name="TextBox 13"/>
+          <p:cNvPr id="12" name="TextBox 11"/>
           <p:cNvSpPr txBox="1"/>
           <p:nvPr/>
         </p:nvSpPr>
         <p:spPr>
           <a:xfrm>
-            <a:off x="1181070" y="3556433"/>
-            <a:ext cx="1451744" cy="383310"/>
+            <a:off x="1047723" y="2843660"/>
+            <a:ext cx="2708818" cy="380104"/>
           </a:xfrm>
           <a:prstGeom prst="rect">
             <a:avLst/>
@@ -7972,13 +7077,13 @@
           <a:p>
             <a:pPr algn="l">
               <a:lnSpc>
-                <a:spcPts val="2210"/>
+                <a:spcPts val="2145"/>
               </a:lnSpc>
               <a:spcBef>
                 <a:spcPts val="0"/>
               </a:spcBef>
               <a:spcAft>
-                <a:spcPts val="520"/>
+                <a:spcPts val="0"/>
               </a:spcAft>
             </a:pPr>
             <a:r>
@@ -7988,21 +7093,21 @@
                 </a:solidFill>
                 <a:latin typeface="Inter"/>
               </a:rPr>
-              <a:t>Limited Focus</a:t>
-            </a:r>
-          </a:p>
-        </p:txBody>
-      </p:sp>
-      <p:sp>
-        <p:nvSpPr>
-          <p:cNvPr id="15" name="TextBox 14"/>
+              <a:t>Implementation Validation</a:t>
+            </a:r>
+          </a:p>
+        </p:txBody>
+      </p:sp>
+      <p:sp>
+        <p:nvSpPr>
+          <p:cNvPr id="13" name="TextBox 12"/>
           <p:cNvSpPr txBox="1"/>
           <p:nvPr/>
         </p:nvSpPr>
         <p:spPr>
           <a:xfrm>
-            <a:off x="1181070" y="3969607"/>
-            <a:ext cx="4609984" cy="623761"/>
+            <a:off x="1047723" y="3193212"/>
+            <a:ext cx="4192110" cy="357277"/>
           </a:xfrm>
           <a:prstGeom prst="rect">
             <a:avLst/>
@@ -8010,52 +7115,52 @@
           <a:noFill/>
         </p:spPr>
         <p:txBody>
-          <a:bodyPr wrap="square" lIns="73152" tIns="54864" rIns="73152" bIns="54864" anchor="ctr">
+          <a:bodyPr wrap="none" lIns="73152" tIns="54864" rIns="73152" bIns="54864" anchor="ctr">
             <a:spAutoFit/>
           </a:bodyPr>
           <a:lstStyle/>
           <a:p>
             <a:pPr algn="l">
               <a:lnSpc>
-                <a:spcPts val="2015"/>
+                <a:spcPts val="1950"/>
               </a:lnSpc>
               <a:spcBef>
-                <a:spcPts val="0"/>
+                <a:spcPts val="260"/>
               </a:spcBef>
               <a:spcAft>
                 <a:spcPts val="0"/>
               </a:spcAft>
             </a:pPr>
             <a:r>
-              <a:rPr b="0">
-                <a:solidFill>
-                  <a:srgbClr val="B0B8D4"/>
+              <a:rPr sz="1600" b="0">
+                <a:solidFill>
+                  <a:srgbClr val="8A92A8"/>
                 </a:solidFill>
                 <a:latin typeface="Inter"/>
               </a:rPr>
-              <a:t>Focuses on statistical properties, not cryptographic security</a:t>
-            </a:r>
-          </a:p>
-        </p:txBody>
-      </p:sp>
-      <p:sp>
-        <p:nvSpPr>
-          <p:cNvPr id="16" name="Rounded Rectangle 15"/>
+              <a:t>Known Answer Tests (KATs) with formal methods</a:t>
+            </a:r>
+          </a:p>
+        </p:txBody>
+      </p:sp>
+      <p:sp>
+        <p:nvSpPr>
+          <p:cNvPr id="14" name="Rounded Rectangle 13"/>
           <p:cNvSpPr/>
           <p:nvPr/>
         </p:nvSpPr>
         <p:spPr>
           <a:xfrm>
-            <a:off x="609584" y="4924424"/>
-            <a:ext cx="5371965" cy="1390650"/>
+            <a:off x="609584" y="3781424"/>
+            <a:ext cx="5371965" cy="942975"/>
           </a:xfrm>
           <a:prstGeom prst="roundRect">
             <a:avLst>
-              <a:gd name="adj" fmla="val 10958"/>
+              <a:gd name="adj" fmla="val 16161"/>
             </a:avLst>
           </a:prstGeom>
           <a:solidFill>
-            <a:srgbClr val="EF4444">
+            <a:srgbClr val="00D4FF">
               <a:alpha val="8000"/>
             </a:srgbClr>
           </a:solidFill>
@@ -8086,56 +7191,9 @@
           </a:p>
         </p:txBody>
       </p:sp>
-      <p:sp>
-        <p:nvSpPr>
-          <p:cNvPr id="17" name="Round Same Side Corner Rectangle 16"/>
-          <p:cNvSpPr/>
-          <p:nvPr/>
-        </p:nvSpPr>
-        <p:spPr>
-          <a:xfrm rot="16200000">
-            <a:off x="-19701" y="5553709"/>
-            <a:ext cx="1390650" cy="132080"/>
-          </a:xfrm>
-          <a:prstGeom prst="round2SameRect">
-            <a:avLst>
-              <a:gd name="adj1" fmla="val 50000"/>
-              <a:gd name="adj2" fmla="val 0"/>
-            </a:avLst>
-          </a:prstGeom>
-          <a:solidFill>
-            <a:srgbClr val="EF4444"/>
-          </a:solidFill>
-          <a:ln>
-            <a:noFill/>
-          </a:ln>
-        </p:spPr>
-        <p:style>
-          <a:lnRef idx="1">
-            <a:schemeClr val="accent1"/>
-          </a:lnRef>
-          <a:fillRef idx="3">
-            <a:schemeClr val="accent1"/>
-          </a:fillRef>
-          <a:effectRef idx="2">
-            <a:schemeClr val="accent1"/>
-          </a:effectRef>
-          <a:fontRef idx="minor">
-            <a:schemeClr val="lt1"/>
-          </a:fontRef>
-        </p:style>
-        <p:txBody>
-          <a:bodyPr rtlCol="0" anchor="ctr"/>
-          <a:lstStyle/>
-          <a:p>
-            <a:pPr algn="ctr"/>
-            <a:endParaRPr sz="2800"/>
-          </a:p>
-        </p:txBody>
-      </p:sp>
       <p:pic>
         <p:nvPicPr>
-          <p:cNvPr id="18" name="Picture 17" descr="image.png"/>
+          <p:cNvPr id="15" name="Picture 14" descr="image.png"/>
           <p:cNvPicPr>
             <a:picLocks noChangeAspect="1"/>
           </p:cNvPicPr>
@@ -8156,8 +7214,8 @@
         </p:blipFill>
         <p:spPr>
           <a:xfrm>
-            <a:off x="838179" y="5164455"/>
-            <a:ext cx="228594" cy="205739"/>
+            <a:off x="761980" y="4000242"/>
+            <a:ext cx="209544" cy="152914"/>
           </a:xfrm>
           <a:prstGeom prst="rect">
             <a:avLst/>
@@ -8166,14 +7224,14 @@
       </p:pic>
       <p:sp>
         <p:nvSpPr>
-          <p:cNvPr id="19" name="TextBox 18"/>
+          <p:cNvPr id="16" name="TextBox 15"/>
           <p:cNvSpPr txBox="1"/>
           <p:nvPr/>
         </p:nvSpPr>
         <p:spPr>
           <a:xfrm>
-            <a:off x="1181070" y="5089958"/>
-            <a:ext cx="2495620" cy="383310"/>
+            <a:off x="1047723" y="3900935"/>
+            <a:ext cx="2646750" cy="380104"/>
           </a:xfrm>
           <a:prstGeom prst="rect">
             <a:avLst/>
@@ -8188,13 +7246,13 @@
           <a:p>
             <a:pPr algn="l">
               <a:lnSpc>
-                <a:spcPts val="2210"/>
+                <a:spcPts val="2145"/>
               </a:lnSpc>
               <a:spcBef>
                 <a:spcPts val="0"/>
               </a:spcBef>
               <a:spcAft>
-                <a:spcPts val="520"/>
+                <a:spcPts val="0"/>
               </a:spcAft>
             </a:pPr>
             <a:r>
@@ -8204,21 +7262,21 @@
                 </a:solidFill>
                 <a:latin typeface="Inter"/>
               </a:rPr>
-              <a:t>Missing Security Context</a:t>
-            </a:r>
-          </a:p>
-        </p:txBody>
-      </p:sp>
-      <p:sp>
-        <p:nvSpPr>
-          <p:cNvPr id="20" name="TextBox 19"/>
+              <a:t>Entropy Source Evaluation</a:t>
+            </a:r>
+          </a:p>
+        </p:txBody>
+      </p:sp>
+      <p:sp>
+        <p:nvSpPr>
+          <p:cNvPr id="17" name="TextBox 16"/>
           <p:cNvSpPr txBox="1"/>
           <p:nvPr/>
         </p:nvSpPr>
         <p:spPr>
           <a:xfrm>
-            <a:off x="1181070" y="5512657"/>
-            <a:ext cx="4609984" cy="623761"/>
+            <a:off x="1047723" y="4250487"/>
+            <a:ext cx="3609321" cy="357277"/>
           </a:xfrm>
           <a:prstGeom prst="rect">
             <a:avLst/>
@@ -8226,52 +7284,52 @@
           <a:noFill/>
         </p:spPr>
         <p:txBody>
-          <a:bodyPr wrap="square" lIns="73152" tIns="54864" rIns="73152" bIns="54864" anchor="ctr">
+          <a:bodyPr wrap="none" lIns="73152" tIns="54864" rIns="73152" bIns="54864" anchor="ctr">
             <a:spAutoFit/>
           </a:bodyPr>
           <a:lstStyle/>
           <a:p>
             <a:pPr algn="l">
               <a:lnSpc>
-                <a:spcPts val="2015"/>
+                <a:spcPts val="1950"/>
               </a:lnSpc>
               <a:spcBef>
-                <a:spcPts val="0"/>
+                <a:spcPts val="260"/>
               </a:spcBef>
               <a:spcAft>
                 <a:spcPts val="0"/>
               </a:spcAft>
             </a:pPr>
             <a:r>
-              <a:rPr b="0">
-                <a:solidFill>
-                  <a:srgbClr val="B0B8D4"/>
+              <a:rPr sz="1600" b="0">
+                <a:solidFill>
+                  <a:srgbClr val="8A92A8"/>
                 </a:solidFill>
                 <a:latin typeface="Inter"/>
               </a:rPr>
-              <a:t>Fails to consider computational hardness of breaking generators</a:t>
-            </a:r>
-          </a:p>
-        </p:txBody>
-      </p:sp>
-      <p:sp>
-        <p:nvSpPr>
-          <p:cNvPr id="21" name="Rounded Rectangle 20"/>
+              <a:t>Stochastic modeling for expected entropy</a:t>
+            </a:r>
+          </a:p>
+        </p:txBody>
+      </p:sp>
+      <p:sp>
+        <p:nvSpPr>
+          <p:cNvPr id="18" name="Rounded Rectangle 17"/>
           <p:cNvSpPr/>
           <p:nvPr/>
         </p:nvSpPr>
         <p:spPr>
           <a:xfrm>
-            <a:off x="6210144" y="1847849"/>
-            <a:ext cx="5371965" cy="1390650"/>
+            <a:off x="609584" y="4838699"/>
+            <a:ext cx="5371965" cy="942975"/>
           </a:xfrm>
           <a:prstGeom prst="roundRect">
             <a:avLst>
-              <a:gd name="adj" fmla="val 10958"/>
+              <a:gd name="adj" fmla="val 16161"/>
             </a:avLst>
           </a:prstGeom>
           <a:solidFill>
-            <a:srgbClr val="EF4444">
+            <a:srgbClr val="00D4FF">
               <a:alpha val="8000"/>
             </a:srgbClr>
           </a:solidFill>
@@ -8302,56 +7360,9 @@
           </a:p>
         </p:txBody>
       </p:sp>
-      <p:sp>
-        <p:nvSpPr>
-          <p:cNvPr id="22" name="Round Same Side Corner Rectangle 21"/>
-          <p:cNvSpPr/>
-          <p:nvPr/>
-        </p:nvSpPr>
-        <p:spPr>
-          <a:xfrm rot="16200000">
-            <a:off x="5580859" y="2477134"/>
-            <a:ext cx="1390650" cy="132080"/>
-          </a:xfrm>
-          <a:prstGeom prst="round2SameRect">
-            <a:avLst>
-              <a:gd name="adj1" fmla="val 50000"/>
-              <a:gd name="adj2" fmla="val 0"/>
-            </a:avLst>
-          </a:prstGeom>
-          <a:solidFill>
-            <a:srgbClr val="EF4444"/>
-          </a:solidFill>
-          <a:ln>
-            <a:noFill/>
-          </a:ln>
-        </p:spPr>
-        <p:style>
-          <a:lnRef idx="1">
-            <a:schemeClr val="accent1"/>
-          </a:lnRef>
-          <a:fillRef idx="3">
-            <a:schemeClr val="accent1"/>
-          </a:fillRef>
-          <a:effectRef idx="2">
-            <a:schemeClr val="accent1"/>
-          </a:effectRef>
-          <a:fontRef idx="minor">
-            <a:schemeClr val="lt1"/>
-          </a:fontRef>
-        </p:style>
-        <p:txBody>
-          <a:bodyPr rtlCol="0" anchor="ctr"/>
-          <a:lstStyle/>
-          <a:p>
-            <a:pPr algn="ctr"/>
-            <a:endParaRPr sz="2800"/>
-          </a:p>
-        </p:txBody>
-      </p:sp>
       <p:pic>
         <p:nvPicPr>
-          <p:cNvPr id="23" name="Picture 22" descr="image.png"/>
+          <p:cNvPr id="19" name="Picture 18" descr="image.png"/>
           <p:cNvPicPr>
             <a:picLocks noChangeAspect="1"/>
           </p:cNvPicPr>
@@ -8372,8 +7383,8 @@
         </p:blipFill>
         <p:spPr>
           <a:xfrm>
-            <a:off x="6438739" y="2102167"/>
-            <a:ext cx="228594" cy="177164"/>
+            <a:off x="761980" y="5034863"/>
+            <a:ext cx="209544" cy="198222"/>
           </a:xfrm>
           <a:prstGeom prst="rect">
             <a:avLst/>
@@ -8382,14 +7393,14 @@
       </p:pic>
       <p:sp>
         <p:nvSpPr>
-          <p:cNvPr id="24" name="TextBox 23"/>
+          <p:cNvPr id="20" name="TextBox 19"/>
           <p:cNvSpPr txBox="1"/>
           <p:nvPr/>
         </p:nvSpPr>
         <p:spPr>
           <a:xfrm>
-            <a:off x="6781630" y="2013382"/>
-            <a:ext cx="1748043" cy="383310"/>
+            <a:off x="1047723" y="4958211"/>
+            <a:ext cx="2685672" cy="380104"/>
           </a:xfrm>
           <a:prstGeom prst="rect">
             <a:avLst/>
@@ -8404,13 +7415,13 @@
           <a:p>
             <a:pPr algn="l">
               <a:lnSpc>
-                <a:spcPts val="2210"/>
+                <a:spcPts val="2145"/>
               </a:lnSpc>
               <a:spcBef>
                 <a:spcPts val="0"/>
               </a:spcBef>
               <a:spcAft>
-                <a:spcPts val="520"/>
+                <a:spcPts val="0"/>
               </a:spcAft>
             </a:pPr>
             <a:r>
@@ -8420,21 +7431,21 @@
                 </a:solidFill>
                 <a:latin typeface="Inter"/>
               </a:rPr>
-              <a:t>False Confidence</a:t>
-            </a:r>
-          </a:p>
-        </p:txBody>
-      </p:sp>
-      <p:sp>
-        <p:nvSpPr>
-          <p:cNvPr id="25" name="TextBox 24"/>
+              <a:t>Physical/Interface Security</a:t>
+            </a:r>
+          </a:p>
+        </p:txBody>
+      </p:sp>
+      <p:sp>
+        <p:nvSpPr>
+          <p:cNvPr id="21" name="TextBox 20"/>
           <p:cNvSpPr txBox="1"/>
           <p:nvPr/>
         </p:nvSpPr>
         <p:spPr>
           <a:xfrm>
-            <a:off x="6781630" y="2426558"/>
-            <a:ext cx="4609984" cy="623761"/>
+            <a:off x="1047723" y="5307762"/>
+            <a:ext cx="4321504" cy="357277"/>
           </a:xfrm>
           <a:prstGeom prst="rect">
             <a:avLst/>
@@ -8442,150 +7453,37 @@
           <a:noFill/>
         </p:spPr>
         <p:txBody>
-          <a:bodyPr wrap="square" lIns="73152" tIns="54864" rIns="73152" bIns="54864" anchor="ctr">
+          <a:bodyPr wrap="none" lIns="73152" tIns="54864" rIns="73152" bIns="54864" anchor="ctr">
             <a:spAutoFit/>
           </a:bodyPr>
           <a:lstStyle/>
           <a:p>
             <a:pPr algn="l">
               <a:lnSpc>
-                <a:spcPts val="2015"/>
+                <a:spcPts val="1950"/>
               </a:lnSpc>
               <a:spcBef>
-                <a:spcPts val="0"/>
+                <a:spcPts val="260"/>
               </a:spcBef>
               <a:spcAft>
                 <a:spcPts val="0"/>
               </a:spcAft>
             </a:pPr>
             <a:r>
-              <a:rPr b="0">
-                <a:solidFill>
-                  <a:srgbClr val="B0B8D4"/>
+              <a:rPr sz="1600" b="0">
+                <a:solidFill>
+                  <a:srgbClr val="8A92A8"/>
                 </a:solidFill>
                 <a:latin typeface="Inter"/>
               </a:rPr>
-              <a:t>Weak generators can pass, creating </a:t>
-            </a:r>
-            <a:r>
-              <a:rPr b="0">
-                <a:solidFill>
-                  <a:srgbClr val="EF4444"/>
-                </a:solidFill>
-                <a:latin typeface="Inter"/>
-              </a:rPr>
-              <a:t>false confidence</a:t>
-            </a:r>
-            <a:r>
-              <a:rPr b="0">
-                <a:solidFill>
-                  <a:srgbClr val="B0B8D4"/>
-                </a:solidFill>
-                <a:latin typeface="Inter"/>
-              </a:rPr>
-              <a:t> in insecure systems</a:t>
-            </a:r>
-          </a:p>
-        </p:txBody>
-      </p:sp>
-      <p:sp>
-        <p:nvSpPr>
-          <p:cNvPr id="26" name="Rounded Rectangle 25"/>
-          <p:cNvSpPr/>
-          <p:nvPr/>
-        </p:nvSpPr>
-        <p:spPr>
-          <a:xfrm>
-            <a:off x="6210144" y="3390899"/>
-            <a:ext cx="5371965" cy="1390650"/>
-          </a:xfrm>
-          <a:prstGeom prst="roundRect">
-            <a:avLst>
-              <a:gd name="adj" fmla="val 10958"/>
-            </a:avLst>
-          </a:prstGeom>
-          <a:solidFill>
-            <a:srgbClr val="EF4444">
-              <a:alpha val="8000"/>
-            </a:srgbClr>
-          </a:solidFill>
-          <a:ln>
-            <a:noFill/>
-          </a:ln>
-        </p:spPr>
-        <p:style>
-          <a:lnRef idx="1">
-            <a:schemeClr val="accent1"/>
-          </a:lnRef>
-          <a:fillRef idx="3">
-            <a:schemeClr val="accent1"/>
-          </a:fillRef>
-          <a:effectRef idx="2">
-            <a:schemeClr val="accent1"/>
-          </a:effectRef>
-          <a:fontRef idx="minor">
-            <a:schemeClr val="lt1"/>
-          </a:fontRef>
-        </p:style>
-        <p:txBody>
-          <a:bodyPr rtlCol="0" anchor="ctr"/>
-          <a:lstStyle/>
-          <a:p>
-            <a:pPr algn="ctr"/>
-            <a:endParaRPr sz="2800"/>
-          </a:p>
-        </p:txBody>
-      </p:sp>
-      <p:sp>
-        <p:nvSpPr>
-          <p:cNvPr id="27" name="Round Same Side Corner Rectangle 26"/>
-          <p:cNvSpPr/>
-          <p:nvPr/>
-        </p:nvSpPr>
-        <p:spPr>
-          <a:xfrm rot="16200000">
-            <a:off x="5580859" y="4020184"/>
-            <a:ext cx="1390650" cy="132080"/>
-          </a:xfrm>
-          <a:prstGeom prst="round2SameRect">
-            <a:avLst>
-              <a:gd name="adj1" fmla="val 50000"/>
-              <a:gd name="adj2" fmla="val 0"/>
-            </a:avLst>
-          </a:prstGeom>
-          <a:solidFill>
-            <a:srgbClr val="EF4444"/>
-          </a:solidFill>
-          <a:ln>
-            <a:noFill/>
-          </a:ln>
-        </p:spPr>
-        <p:style>
-          <a:lnRef idx="1">
-            <a:schemeClr val="accent1"/>
-          </a:lnRef>
-          <a:fillRef idx="3">
-            <a:schemeClr val="accent1"/>
-          </a:fillRef>
-          <a:effectRef idx="2">
-            <a:schemeClr val="accent1"/>
-          </a:effectRef>
-          <a:fontRef idx="minor">
-            <a:schemeClr val="lt1"/>
-          </a:fontRef>
-        </p:style>
-        <p:txBody>
-          <a:bodyPr rtlCol="0" anchor="ctr"/>
-          <a:lstStyle/>
-          <a:p>
-            <a:pPr algn="ctr"/>
-            <a:endParaRPr sz="2800"/>
+              <a:t>Robust protection from monitoring &amp; interference</a:t>
+            </a:r>
           </a:p>
         </p:txBody>
       </p:sp>
       <p:pic>
         <p:nvPicPr>
-          <p:cNvPr id="28" name="Picture 27" descr="image.png"/>
+          <p:cNvPr id="22" name="Picture 21" descr="image.png"/>
           <p:cNvPicPr>
             <a:picLocks noChangeAspect="1"/>
           </p:cNvPicPr>
@@ -8606,8 +7504,8 @@
         </p:blipFill>
         <p:spPr>
           <a:xfrm>
-            <a:off x="6438739" y="3625215"/>
-            <a:ext cx="228594" cy="217170"/>
+            <a:off x="6210144" y="1189796"/>
+            <a:ext cx="266693" cy="249306"/>
           </a:xfrm>
           <a:prstGeom prst="rect">
             <a:avLst/>
@@ -8616,14 +7514,14 @@
       </p:pic>
       <p:sp>
         <p:nvSpPr>
-          <p:cNvPr id="29" name="TextBox 28"/>
+          <p:cNvPr id="23" name="TextBox 22"/>
           <p:cNvSpPr txBox="1"/>
           <p:nvPr/>
         </p:nvSpPr>
         <p:spPr>
           <a:xfrm>
-            <a:off x="6781630" y="3556433"/>
-            <a:ext cx="2048125" cy="383310"/>
+            <a:off x="6591135" y="1085927"/>
+            <a:ext cx="2836995" cy="457048"/>
           </a:xfrm>
           <a:prstGeom prst="rect">
             <a:avLst/>
@@ -8638,96 +7536,51 @@
           <a:p>
             <a:pPr algn="l">
               <a:lnSpc>
-                <a:spcPts val="2210"/>
+                <a:spcPts val="2730"/>
               </a:lnSpc>
               <a:spcBef>
                 <a:spcPts val="0"/>
               </a:spcBef>
               <a:spcAft>
-                <a:spcPts val="520"/>
+                <a:spcPts val="0"/>
               </a:spcAft>
             </a:pPr>
             <a:r>
-              <a:rPr b="1">
+              <a:rPr sz="2400" b="1">
                 <a:solidFill>
                   <a:srgbClr val="FFFFFF"/>
                 </a:solidFill>
-                <a:latin typeface="Inter"/>
-              </a:rPr>
-              <a:t>Incomplete Security</a:t>
-            </a:r>
-          </a:p>
-        </p:txBody>
-      </p:sp>
-      <p:sp>
-        <p:nvSpPr>
-          <p:cNvPr id="30" name="TextBox 29"/>
-          <p:cNvSpPr txBox="1"/>
-          <p:nvPr/>
-        </p:nvSpPr>
-        <p:spPr>
-          <a:xfrm>
-            <a:off x="6781630" y="3969607"/>
-            <a:ext cx="4609984" cy="623761"/>
-          </a:xfrm>
-          <a:prstGeom prst="rect">
-            <a:avLst/>
-          </a:prstGeom>
-          <a:noFill/>
-        </p:spPr>
-        <p:txBody>
-          <a:bodyPr wrap="square" lIns="73152" tIns="54864" rIns="73152" bIns="54864" anchor="ctr">
-            <a:spAutoFit/>
-          </a:bodyPr>
-          <a:lstStyle/>
-          <a:p>
-            <a:pPr algn="l">
-              <a:lnSpc>
-                <a:spcPts val="2015"/>
-              </a:lnSpc>
-              <a:spcBef>
-                <a:spcPts val="0"/>
-              </a:spcBef>
-              <a:spcAft>
-                <a:spcPts val="0"/>
-              </a:spcAft>
-            </a:pPr>
-            <a:r>
-              <a:rPr b="0">
-                <a:solidFill>
-                  <a:srgbClr val="B0B8D4"/>
-                </a:solidFill>
-                <a:latin typeface="Inter"/>
-              </a:rPr>
-              <a:t>Inadequate addressing of physical/interface security and backdoors</a:t>
-            </a:r>
-          </a:p>
-        </p:txBody>
-      </p:sp>
-      <p:sp>
-        <p:nvSpPr>
-          <p:cNvPr id="31" name="Rounded Rectangle 30"/>
+                <a:latin typeface="Space Grotesk"/>
+              </a:rPr>
+              <a:t>Resistance to Attacks</a:t>
+            </a:r>
+          </a:p>
+        </p:txBody>
+      </p:sp>
+      <p:sp>
+        <p:nvSpPr>
+          <p:cNvPr id="24" name="Rounded Rectangle 23"/>
           <p:cNvSpPr/>
           <p:nvPr/>
         </p:nvSpPr>
         <p:spPr>
           <a:xfrm>
-            <a:off x="6210144" y="4924424"/>
-            <a:ext cx="5371965" cy="1181099"/>
+            <a:off x="6210144" y="1666874"/>
+            <a:ext cx="2628834" cy="1866899"/>
           </a:xfrm>
           <a:prstGeom prst="roundRect">
             <a:avLst>
-              <a:gd name="adj" fmla="val 12903"/>
+              <a:gd name="adj" fmla="val 8163"/>
             </a:avLst>
           </a:prstGeom>
           <a:solidFill>
-            <a:srgbClr val="00D4FF">
+            <a:srgbClr val="A855F7">
               <a:alpha val="10000"/>
             </a:srgbClr>
           </a:solidFill>
           <a:ln w="16510">
             <a:solidFill>
-              <a:srgbClr val="00D4FF"/>
+              <a:srgbClr val="A855F7"/>
             </a:solidFill>
           </a:ln>
         </p:spPr>
@@ -8756,7 +7609,7 @@
       </p:sp>
       <p:pic>
         <p:nvPicPr>
-          <p:cNvPr id="32" name="Picture 31" descr="image.png"/>
+          <p:cNvPr id="25" name="Picture 24" descr="image.png"/>
           <p:cNvPicPr>
             <a:picLocks noChangeAspect="1"/>
           </p:cNvPicPr>
@@ -8777,8 +7630,8 @@
         </p:blipFill>
         <p:spPr>
           <a:xfrm>
-            <a:off x="6457788" y="5401917"/>
-            <a:ext cx="266693" cy="226115"/>
+            <a:off x="7372165" y="1896940"/>
+            <a:ext cx="304792" cy="187569"/>
           </a:xfrm>
           <a:prstGeom prst="rect">
             <a:avLst/>
@@ -8787,14 +7640,14 @@
       </p:pic>
       <p:sp>
         <p:nvSpPr>
-          <p:cNvPr id="33" name="TextBox 32"/>
+          <p:cNvPr id="26" name="TextBox 25"/>
           <p:cNvSpPr txBox="1"/>
           <p:nvPr/>
         </p:nvSpPr>
         <p:spPr>
           <a:xfrm>
-            <a:off x="6838779" y="5164623"/>
-            <a:ext cx="4495687" cy="700705"/>
+            <a:off x="6381590" y="2208945"/>
+            <a:ext cx="2285942" cy="649409"/>
           </a:xfrm>
           <a:prstGeom prst="rect">
             <a:avLst/>
@@ -8807,9 +7660,511 @@
           </a:bodyPr>
           <a:lstStyle/>
           <a:p>
+            <a:pPr algn="ctr">
+              <a:lnSpc>
+                <a:spcPts val="2145"/>
+              </a:lnSpc>
+              <a:spcBef>
+                <a:spcPts val="0"/>
+              </a:spcBef>
+              <a:spcAft>
+                <a:spcPts val="0"/>
+              </a:spcAft>
+            </a:pPr>
+            <a:r>
+              <a:rPr b="1">
+                <a:solidFill>
+                  <a:srgbClr val="FFFFFF"/>
+                </a:solidFill>
+                <a:latin typeface="Inter"/>
+              </a:rPr>
+              <a:t>Computational Indistinguishability</a:t>
+            </a:r>
+          </a:p>
+        </p:txBody>
+      </p:sp>
+      <p:sp>
+        <p:nvSpPr>
+          <p:cNvPr id="27" name="Rounded Rectangle 26"/>
+          <p:cNvSpPr/>
+          <p:nvPr/>
+        </p:nvSpPr>
+        <p:spPr>
+          <a:xfrm>
+            <a:off x="8953276" y="1666874"/>
+            <a:ext cx="2628834" cy="1866899"/>
+          </a:xfrm>
+          <a:prstGeom prst="roundRect">
+            <a:avLst>
+              <a:gd name="adj" fmla="val 8163"/>
+            </a:avLst>
+          </a:prstGeom>
+          <a:solidFill>
+            <a:srgbClr val="A855F7">
+              <a:alpha val="10000"/>
+            </a:srgbClr>
+          </a:solidFill>
+          <a:ln w="16510">
+            <a:solidFill>
+              <a:srgbClr val="A855F7"/>
+            </a:solidFill>
+          </a:ln>
+        </p:spPr>
+        <p:style>
+          <a:lnRef idx="1">
+            <a:schemeClr val="accent1"/>
+          </a:lnRef>
+          <a:fillRef idx="3">
+            <a:schemeClr val="accent1"/>
+          </a:fillRef>
+          <a:effectRef idx="2">
+            <a:schemeClr val="accent1"/>
+          </a:effectRef>
+          <a:fontRef idx="minor">
+            <a:schemeClr val="lt1"/>
+          </a:fontRef>
+        </p:style>
+        <p:txBody>
+          <a:bodyPr rtlCol="0" anchor="ctr"/>
+          <a:lstStyle/>
+          <a:p>
+            <a:pPr algn="ctr"/>
+            <a:endParaRPr sz="2800"/>
+          </a:p>
+        </p:txBody>
+      </p:sp>
+      <p:pic>
+        <p:nvPicPr>
+          <p:cNvPr id="28" name="Picture 27" descr="image.png"/>
+          <p:cNvPicPr>
+            <a:picLocks noChangeAspect="1"/>
+          </p:cNvPicPr>
+          <p:nvPr/>
+        </p:nvPicPr>
+        <p:blipFill>
+          <a:blip r:embed="rId9" cstate="email">
+            <a:alphaModFix/>
+            <a:extLst>
+              <a:ext uri="{28A0092B-C50C-407E-A947-70E740481C1C}">
+                <a14:useLocalDpi xmlns:a14="http://schemas.microsoft.com/office/drawing/2010/main"/>
+              </a:ext>
+            </a:extLst>
+          </a:blip>
+          <a:stretch>
+            <a:fillRect/>
+          </a:stretch>
+        </p:blipFill>
+        <p:spPr>
+          <a:xfrm>
+            <a:off x="10115297" y="1872028"/>
+            <a:ext cx="304792" cy="237392"/>
+          </a:xfrm>
+          <a:prstGeom prst="rect">
+            <a:avLst/>
+          </a:prstGeom>
+        </p:spPr>
+      </p:pic>
+      <p:sp>
+        <p:nvSpPr>
+          <p:cNvPr id="29" name="TextBox 28"/>
+          <p:cNvSpPr txBox="1"/>
+          <p:nvPr/>
+        </p:nvSpPr>
+        <p:spPr>
+          <a:xfrm>
+            <a:off x="9124721" y="2208945"/>
+            <a:ext cx="2285942" cy="649409"/>
+          </a:xfrm>
+          <a:prstGeom prst="rect">
+            <a:avLst/>
+          </a:prstGeom>
+          <a:noFill/>
+        </p:spPr>
+        <p:txBody>
+          <a:bodyPr wrap="square" lIns="73152" tIns="54864" rIns="73152" bIns="54864" anchor="ctr">
+            <a:spAutoFit/>
+          </a:bodyPr>
+          <a:lstStyle/>
+          <a:p>
+            <a:pPr algn="ctr">
+              <a:lnSpc>
+                <a:spcPts val="2145"/>
+              </a:lnSpc>
+              <a:spcBef>
+                <a:spcPts val="0"/>
+              </a:spcBef>
+              <a:spcAft>
+                <a:spcPts val="0"/>
+              </a:spcAft>
+            </a:pPr>
+            <a:r>
+              <a:rPr b="1">
+                <a:solidFill>
+                  <a:srgbClr val="FFFFFF"/>
+                </a:solidFill>
+                <a:latin typeface="Inter"/>
+              </a:rPr>
+              <a:t>Forward/Backward Secrecy</a:t>
+            </a:r>
+          </a:p>
+        </p:txBody>
+      </p:sp>
+      <p:sp>
+        <p:nvSpPr>
+          <p:cNvPr id="30" name="Rounded Rectangle 29"/>
+          <p:cNvSpPr/>
+          <p:nvPr/>
+        </p:nvSpPr>
+        <p:spPr>
+          <a:xfrm>
+            <a:off x="6210144" y="3648074"/>
+            <a:ext cx="2628834" cy="1866899"/>
+          </a:xfrm>
+          <a:prstGeom prst="roundRect">
+            <a:avLst>
+              <a:gd name="adj" fmla="val 8163"/>
+            </a:avLst>
+          </a:prstGeom>
+          <a:solidFill>
+            <a:srgbClr val="A855F7">
+              <a:alpha val="10000"/>
+            </a:srgbClr>
+          </a:solidFill>
+          <a:ln w="16510">
+            <a:solidFill>
+              <a:srgbClr val="A855F7"/>
+            </a:solidFill>
+          </a:ln>
+        </p:spPr>
+        <p:style>
+          <a:lnRef idx="1">
+            <a:schemeClr val="accent1"/>
+          </a:lnRef>
+          <a:fillRef idx="3">
+            <a:schemeClr val="accent1"/>
+          </a:fillRef>
+          <a:effectRef idx="2">
+            <a:schemeClr val="accent1"/>
+          </a:effectRef>
+          <a:fontRef idx="minor">
+            <a:schemeClr val="lt1"/>
+          </a:fontRef>
+        </p:style>
+        <p:txBody>
+          <a:bodyPr rtlCol="0" anchor="ctr"/>
+          <a:lstStyle/>
+          <a:p>
+            <a:pPr algn="ctr"/>
+            <a:endParaRPr sz="2800"/>
+          </a:p>
+        </p:txBody>
+      </p:sp>
+      <p:pic>
+        <p:nvPicPr>
+          <p:cNvPr id="31" name="Picture 30" descr="image.png"/>
+          <p:cNvPicPr>
+            <a:picLocks noChangeAspect="1"/>
+          </p:cNvPicPr>
+          <p:nvPr/>
+        </p:nvPicPr>
+        <p:blipFill>
+          <a:blip r:embed="rId10" cstate="email">
+            <a:alphaModFix/>
+            <a:extLst>
+              <a:ext uri="{28A0092B-C50C-407E-A947-70E740481C1C}">
+                <a14:useLocalDpi xmlns:a14="http://schemas.microsoft.com/office/drawing/2010/main"/>
+              </a:ext>
+            </a:extLst>
+          </a:blip>
+          <a:stretch>
+            <a:fillRect/>
+          </a:stretch>
+        </p:blipFill>
+        <p:spPr>
+          <a:xfrm>
+            <a:off x="7372165" y="3835644"/>
+            <a:ext cx="304792" cy="272561"/>
+          </a:xfrm>
+          <a:prstGeom prst="rect">
+            <a:avLst/>
+          </a:prstGeom>
+        </p:spPr>
+      </p:pic>
+      <p:sp>
+        <p:nvSpPr>
+          <p:cNvPr id="32" name="TextBox 31"/>
+          <p:cNvSpPr txBox="1"/>
+          <p:nvPr/>
+        </p:nvSpPr>
+        <p:spPr>
+          <a:xfrm>
+            <a:off x="6381590" y="4190145"/>
+            <a:ext cx="2285942" cy="649409"/>
+          </a:xfrm>
+          <a:prstGeom prst="rect">
+            <a:avLst/>
+          </a:prstGeom>
+          <a:noFill/>
+        </p:spPr>
+        <p:txBody>
+          <a:bodyPr wrap="square" lIns="73152" tIns="54864" rIns="73152" bIns="54864" anchor="ctr">
+            <a:spAutoFit/>
+          </a:bodyPr>
+          <a:lstStyle/>
+          <a:p>
+            <a:pPr algn="ctr">
+              <a:lnSpc>
+                <a:spcPts val="2145"/>
+              </a:lnSpc>
+              <a:spcBef>
+                <a:spcPts val="0"/>
+              </a:spcBef>
+              <a:spcAft>
+                <a:spcPts val="0"/>
+              </a:spcAft>
+            </a:pPr>
+            <a:r>
+              <a:rPr b="1">
+                <a:solidFill>
+                  <a:srgbClr val="FFFFFF"/>
+                </a:solidFill>
+                <a:latin typeface="Inter"/>
+              </a:rPr>
+              <a:t>No Backdoors/Trapdoors</a:t>
+            </a:r>
+          </a:p>
+        </p:txBody>
+      </p:sp>
+      <p:sp>
+        <p:nvSpPr>
+          <p:cNvPr id="33" name="Rounded Rectangle 32"/>
+          <p:cNvSpPr/>
+          <p:nvPr/>
+        </p:nvSpPr>
+        <p:spPr>
+          <a:xfrm>
+            <a:off x="8953276" y="3648074"/>
+            <a:ext cx="2628834" cy="1866899"/>
+          </a:xfrm>
+          <a:prstGeom prst="roundRect">
+            <a:avLst>
+              <a:gd name="adj" fmla="val 8163"/>
+            </a:avLst>
+          </a:prstGeom>
+          <a:solidFill>
+            <a:srgbClr val="A855F7">
+              <a:alpha val="10000"/>
+            </a:srgbClr>
+          </a:solidFill>
+          <a:ln w="16510">
+            <a:solidFill>
+              <a:srgbClr val="A855F7"/>
+            </a:solidFill>
+          </a:ln>
+        </p:spPr>
+        <p:style>
+          <a:lnRef idx="1">
+            <a:schemeClr val="accent1"/>
+          </a:lnRef>
+          <a:fillRef idx="3">
+            <a:schemeClr val="accent1"/>
+          </a:fillRef>
+          <a:effectRef idx="2">
+            <a:schemeClr val="accent1"/>
+          </a:effectRef>
+          <a:fontRef idx="minor">
+            <a:schemeClr val="lt1"/>
+          </a:fontRef>
+        </p:style>
+        <p:txBody>
+          <a:bodyPr rtlCol="0" anchor="ctr"/>
+          <a:lstStyle/>
+          <a:p>
+            <a:pPr algn="ctr"/>
+            <a:endParaRPr sz="2800"/>
+          </a:p>
+        </p:txBody>
+      </p:sp>
+      <p:pic>
+        <p:nvPicPr>
+          <p:cNvPr id="34" name="Picture 33" descr="image.png"/>
+          <p:cNvPicPr>
+            <a:picLocks noChangeAspect="1"/>
+          </p:cNvPicPr>
+          <p:nvPr/>
+        </p:nvPicPr>
+        <p:blipFill>
+          <a:blip r:embed="rId11" cstate="email">
+            <a:alphaModFix/>
+            <a:extLst>
+              <a:ext uri="{28A0092B-C50C-407E-A947-70E740481C1C}">
+                <a14:useLocalDpi xmlns:a14="http://schemas.microsoft.com/office/drawing/2010/main"/>
+              </a:ext>
+            </a:extLst>
+          </a:blip>
+          <a:stretch>
+            <a:fillRect/>
+          </a:stretch>
+        </p:blipFill>
+        <p:spPr>
+          <a:xfrm>
+            <a:off x="10115297" y="3863486"/>
+            <a:ext cx="304792" cy="216876"/>
+          </a:xfrm>
+          <a:prstGeom prst="rect">
+            <a:avLst/>
+          </a:prstGeom>
+        </p:spPr>
+      </p:pic>
+      <p:sp>
+        <p:nvSpPr>
+          <p:cNvPr id="35" name="TextBox 34"/>
+          <p:cNvSpPr txBox="1"/>
+          <p:nvPr/>
+        </p:nvSpPr>
+        <p:spPr>
+          <a:xfrm>
+            <a:off x="9210737" y="4167636"/>
+            <a:ext cx="2113912" cy="380104"/>
+          </a:xfrm>
+          <a:prstGeom prst="rect">
+            <a:avLst/>
+          </a:prstGeom>
+          <a:noFill/>
+        </p:spPr>
+        <p:txBody>
+          <a:bodyPr wrap="none" lIns="73152" tIns="54864" rIns="73152" bIns="54864" anchor="ctr">
+            <a:spAutoFit/>
+          </a:bodyPr>
+          <a:lstStyle/>
+          <a:p>
+            <a:pPr algn="ctr">
+              <a:lnSpc>
+                <a:spcPts val="2145"/>
+              </a:lnSpc>
+              <a:spcBef>
+                <a:spcPts val="0"/>
+              </a:spcBef>
+              <a:spcAft>
+                <a:spcPts val="0"/>
+              </a:spcAft>
+            </a:pPr>
+            <a:r>
+              <a:rPr b="1">
+                <a:solidFill>
+                  <a:srgbClr val="FFFFFF"/>
+                </a:solidFill>
+                <a:latin typeface="Inter"/>
+              </a:rPr>
+              <a:t>Quantum Resistance</a:t>
+            </a:r>
+          </a:p>
+        </p:txBody>
+      </p:sp>
+      <p:sp>
+        <p:nvSpPr>
+          <p:cNvPr id="36" name="Rounded Rectangle 35"/>
+          <p:cNvSpPr/>
+          <p:nvPr/>
+        </p:nvSpPr>
+        <p:spPr>
+          <a:xfrm>
+            <a:off x="6210144" y="5667374"/>
+            <a:ext cx="5371965" cy="590549"/>
+          </a:xfrm>
+          <a:prstGeom prst="roundRect">
+            <a:avLst>
+              <a:gd name="adj" fmla="val 25806"/>
+            </a:avLst>
+          </a:prstGeom>
+          <a:solidFill>
+            <a:srgbClr val="00D4FF">
+              <a:alpha val="12000"/>
+            </a:srgbClr>
+          </a:solidFill>
+          <a:ln>
+            <a:noFill/>
+          </a:ln>
+        </p:spPr>
+        <p:style>
+          <a:lnRef idx="1">
+            <a:schemeClr val="accent1"/>
+          </a:lnRef>
+          <a:fillRef idx="3">
+            <a:schemeClr val="accent1"/>
+          </a:fillRef>
+          <a:effectRef idx="2">
+            <a:schemeClr val="accent1"/>
+          </a:effectRef>
+          <a:fontRef idx="minor">
+            <a:schemeClr val="lt1"/>
+          </a:fontRef>
+        </p:style>
+        <p:txBody>
+          <a:bodyPr rtlCol="0" anchor="ctr"/>
+          <a:lstStyle/>
+          <a:p>
+            <a:pPr algn="ctr"/>
+            <a:endParaRPr sz="2800"/>
+          </a:p>
+        </p:txBody>
+      </p:sp>
+      <p:pic>
+        <p:nvPicPr>
+          <p:cNvPr id="37" name="Picture 36" descr="image.png"/>
+          <p:cNvPicPr>
+            <a:picLocks noChangeAspect="1"/>
+          </p:cNvPicPr>
+          <p:nvPr/>
+        </p:nvPicPr>
+        <p:blipFill>
+          <a:blip r:embed="rId12" cstate="email">
+            <a:alphaModFix/>
+            <a:extLst>
+              <a:ext uri="{28A0092B-C50C-407E-A947-70E740481C1C}">
+                <a14:useLocalDpi xmlns:a14="http://schemas.microsoft.com/office/drawing/2010/main"/>
+              </a:ext>
+            </a:extLst>
+          </a:blip>
+          <a:stretch>
+            <a:fillRect/>
+          </a:stretch>
+        </p:blipFill>
+        <p:spPr>
+          <a:xfrm>
+            <a:off x="6362540" y="5854065"/>
+            <a:ext cx="228594" cy="217170"/>
+          </a:xfrm>
+          <a:prstGeom prst="rect">
+            <a:avLst/>
+          </a:prstGeom>
+        </p:spPr>
+      </p:pic>
+      <p:sp>
+        <p:nvSpPr>
+          <p:cNvPr id="38" name="TextBox 37"/>
+          <p:cNvSpPr txBox="1"/>
+          <p:nvPr/>
+        </p:nvSpPr>
+        <p:spPr>
+          <a:xfrm>
+            <a:off x="6667333" y="5784012"/>
+            <a:ext cx="4013663" cy="357277"/>
+          </a:xfrm>
+          <a:prstGeom prst="rect">
+            <a:avLst/>
+          </a:prstGeom>
+          <a:noFill/>
+        </p:spPr>
+        <p:txBody>
+          <a:bodyPr wrap="none" lIns="73152" tIns="54864" rIns="73152" bIns="54864" anchor="ctr">
+            <a:spAutoFit/>
+          </a:bodyPr>
+          <a:lstStyle/>
+          <a:p>
             <a:pPr algn="l">
               <a:lnSpc>
-                <a:spcPts val="2340"/>
+                <a:spcPts val="1950"/>
               </a:lnSpc>
               <a:spcBef>
                 <a:spcPts val="0"/>
@@ -8819,17 +8174,48 @@
               </a:spcAft>
             </a:pPr>
             <a:r>
-              <a:rPr sz="2000" b="1">
+              <a:rPr sz="1600" b="1">
                 <a:solidFill>
                   <a:srgbClr val="00D4FF"/>
                 </a:solidFill>
                 <a:latin typeface="Inter"/>
               </a:rPr>
-              <a:t>Modern Requirements Go Beyond Statistical Testing</a:t>
-            </a:r>
-          </a:p>
-        </p:txBody>
-      </p:sp>
+              <a:t>Modern Standards: SP 800-90 Series &amp; AIS-31</a:t>
+            </a:r>
+          </a:p>
+        </p:txBody>
+      </p:sp>
+      <p:pic>
+        <p:nvPicPr>
+          <p:cNvPr id="39" name="Picture 38" descr="image.png"/>
+          <p:cNvPicPr>
+            <a:picLocks noChangeAspect="1"/>
+          </p:cNvPicPr>
+          <p:nvPr/>
+        </p:nvPicPr>
+        <p:blipFill>
+          <a:blip r:embed="rId13" cstate="email">
+            <a:alphaModFix/>
+            <a:extLst>
+              <a:ext uri="{28A0092B-C50C-407E-A947-70E740481C1C}">
+                <a14:useLocalDpi xmlns:a14="http://schemas.microsoft.com/office/drawing/2010/main"/>
+              </a:ext>
+            </a:extLst>
+          </a:blip>
+          <a:stretch>
+            <a:fillRect/>
+          </a:stretch>
+        </p:blipFill>
+        <p:spPr>
+          <a:xfrm>
+            <a:off x="11201119" y="5879782"/>
+            <a:ext cx="228594" cy="165734"/>
+          </a:xfrm>
+          <a:prstGeom prst="rect">
+            <a:avLst/>
+          </a:prstGeom>
+        </p:spPr>
+      </p:pic>
     </p:spTree>
   </p:cSld>
   <p:clrMapOvr>
@@ -8872,7 +8258,7 @@
         <p:spPr>
           <a:xfrm>
             <a:off x="0" y="0"/>
-            <a:ext cx="12191695" cy="809625"/>
+            <a:ext cx="12191695" cy="571500"/>
           </a:xfrm>
           <a:prstGeom prst="rect">
             <a:avLst/>
@@ -8917,8 +8303,8 @@
         </p:nvSpPr>
         <p:spPr>
           <a:xfrm>
-            <a:off x="609584" y="114300"/>
-            <a:ext cx="10191495" cy="571500"/>
+            <a:off x="609584" y="0"/>
+            <a:ext cx="6191095" cy="571500"/>
           </a:xfrm>
           <a:prstGeom prst="rect">
             <a:avLst/>
@@ -8949,7 +8335,7 @@
                 </a:solidFill>
                 <a:latin typeface="Space Grotesk"/>
               </a:rPr>
-              <a:t>Modern Security Requirements for Cryptographic RNGs</a:t>
+              <a:t>Testing Frameworks and Datasets</a:t>
             </a:r>
           </a:p>
         </p:txBody>
@@ -8977,8 +8363,8 @@
         </p:blipFill>
         <p:spPr>
           <a:xfrm>
-            <a:off x="609584" y="1189796"/>
-            <a:ext cx="266693" cy="249306"/>
+            <a:off x="609584" y="940316"/>
+            <a:ext cx="247643" cy="195816"/>
           </a:xfrm>
           <a:prstGeom prst="rect">
             <a:avLst/>
@@ -8993,8 +8379,8 @@
         </p:nvSpPr>
         <p:spPr>
           <a:xfrm>
-            <a:off x="990575" y="1085927"/>
-            <a:ext cx="3003836" cy="457048"/>
+            <a:off x="933426" y="809702"/>
+            <a:ext cx="3058145" cy="457048"/>
           </a:xfrm>
           <a:prstGeom prst="rect">
             <a:avLst/>
@@ -9025,7 +8411,7 @@
                 </a:solidFill>
                 <a:latin typeface="Space Grotesk"/>
               </a:rPr>
-              <a:t>Evaluation Framework</a:t>
+              <a:t>Testing Tools Overview</a:t>
             </a:r>
           </a:p>
         </p:txBody>
@@ -9038,12 +8424,12 @@
         </p:nvSpPr>
         <p:spPr>
           <a:xfrm>
-            <a:off x="609584" y="1666874"/>
-            <a:ext cx="5371965" cy="942975"/>
+            <a:off x="609584" y="1390650"/>
+            <a:ext cx="5371965" cy="1009649"/>
           </a:xfrm>
           <a:prstGeom prst="roundRect">
             <a:avLst>
-              <a:gd name="adj" fmla="val 16161"/>
+              <a:gd name="adj" fmla="val 15094"/>
             </a:avLst>
           </a:prstGeom>
           <a:solidFill>
@@ -9101,8 +8487,8 @@
         </p:blipFill>
         <p:spPr>
           <a:xfrm>
-            <a:off x="761980" y="1880029"/>
-            <a:ext cx="209544" cy="164241"/>
+            <a:off x="761980" y="1625917"/>
+            <a:ext cx="228594" cy="177164"/>
           </a:xfrm>
           <a:prstGeom prst="rect">
             <a:avLst/>
@@ -9117,8 +8503,8 @@
         </p:nvSpPr>
         <p:spPr>
           <a:xfrm>
-            <a:off x="1047723" y="1786386"/>
-            <a:ext cx="3673121" cy="380104"/>
+            <a:off x="1066773" y="1511625"/>
+            <a:ext cx="1213794" cy="405752"/>
           </a:xfrm>
           <a:prstGeom prst="rect">
             <a:avLst/>
@@ -9133,7 +8519,7 @@
           <a:p>
             <a:pPr algn="l">
               <a:lnSpc>
-                <a:spcPts val="2145"/>
+                <a:spcPts val="2340"/>
               </a:lnSpc>
               <a:spcBef>
                 <a:spcPts val="0"/>
@@ -9143,13 +8529,13 @@
               </a:spcAft>
             </a:pPr>
             <a:r>
-              <a:rPr b="1">
+              <a:rPr sz="2000" b="1">
                 <a:solidFill>
                   <a:srgbClr val="FFFFFF"/>
                 </a:solidFill>
                 <a:latin typeface="Inter"/>
               </a:rPr>
-              <a:t>Pseudorandom Generator Evaluation</a:t>
+              <a:t>Dieharder</a:t>
             </a:r>
           </a:p>
         </p:txBody>
@@ -9162,8 +8548,8 @@
         </p:nvSpPr>
         <p:spPr>
           <a:xfrm>
-            <a:off x="1047723" y="2135937"/>
-            <a:ext cx="4000198" cy="357277"/>
+            <a:off x="1066773" y="1926386"/>
+            <a:ext cx="4079258" cy="357277"/>
           </a:xfrm>
           <a:prstGeom prst="rect">
             <a:avLst/>
@@ -9181,7 +8567,7 @@
                 <a:spcPts val="1950"/>
               </a:lnSpc>
               <a:spcBef>
-                <a:spcPts val="260"/>
+                <a:spcPts val="0"/>
               </a:spcBef>
               <a:spcAft>
                 <a:spcPts val="0"/>
@@ -9194,7 +8580,7 @@
                 </a:solidFill>
                 <a:latin typeface="Inter"/>
               </a:rPr>
-              <a:t>Mathematical proofs linking DRBG to AES/SHA</a:t>
+              <a:t>Extended methodology • KS test on all P-values</a:t>
             </a:r>
           </a:p>
         </p:txBody>
@@ -9207,16 +8593,16 @@
         </p:nvSpPr>
         <p:spPr>
           <a:xfrm>
-            <a:off x="609584" y="2724150"/>
-            <a:ext cx="5371965" cy="942975"/>
+            <a:off x="609584" y="2514600"/>
+            <a:ext cx="5371965" cy="2343150"/>
           </a:xfrm>
           <a:prstGeom prst="roundRect">
             <a:avLst>
-              <a:gd name="adj" fmla="val 16161"/>
+              <a:gd name="adj" fmla="val 6504"/>
             </a:avLst>
           </a:prstGeom>
           <a:solidFill>
-            <a:srgbClr val="00D4FF">
+            <a:srgbClr val="A855F7">
               <a:alpha val="8000"/>
             </a:srgbClr>
           </a:solidFill>
@@ -9270,8 +8656,8 @@
         </p:blipFill>
         <p:spPr>
           <a:xfrm>
-            <a:off x="761980" y="2937304"/>
-            <a:ext cx="209544" cy="164241"/>
+            <a:off x="761980" y="2755582"/>
+            <a:ext cx="228594" cy="165734"/>
           </a:xfrm>
           <a:prstGeom prst="rect">
             <a:avLst/>
@@ -9286,8 +8672,8 @@
         </p:nvSpPr>
         <p:spPr>
           <a:xfrm>
-            <a:off x="1047723" y="2843660"/>
-            <a:ext cx="2708818" cy="380104"/>
+            <a:off x="1066773" y="2635575"/>
+            <a:ext cx="2354427" cy="405752"/>
           </a:xfrm>
           <a:prstGeom prst="rect">
             <a:avLst/>
@@ -9302,7 +8688,7 @@
           <a:p>
             <a:pPr algn="l">
               <a:lnSpc>
-                <a:spcPts val="2145"/>
+                <a:spcPts val="2340"/>
               </a:lnSpc>
               <a:spcBef>
                 <a:spcPts val="0"/>
@@ -9312,113 +8698,20 @@
               </a:spcAft>
             </a:pPr>
             <a:r>
-              <a:rPr b="1">
+              <a:rPr sz="2000" b="1">
                 <a:solidFill>
                   <a:srgbClr val="FFFFFF"/>
                 </a:solidFill>
                 <a:latin typeface="Inter"/>
               </a:rPr>
-              <a:t>Implementation Validation</a:t>
-            </a:r>
-          </a:p>
-        </p:txBody>
-      </p:sp>
-      <p:sp>
-        <p:nvSpPr>
-          <p:cNvPr id="13" name="TextBox 12"/>
-          <p:cNvSpPr txBox="1"/>
-          <p:nvPr/>
-        </p:nvSpPr>
-        <p:spPr>
-          <a:xfrm>
-            <a:off x="1047723" y="3193212"/>
-            <a:ext cx="4192110" cy="357277"/>
-          </a:xfrm>
-          <a:prstGeom prst="rect">
-            <a:avLst/>
-          </a:prstGeom>
-          <a:noFill/>
-        </p:spPr>
-        <p:txBody>
-          <a:bodyPr wrap="none" lIns="73152" tIns="54864" rIns="73152" bIns="54864" anchor="ctr">
-            <a:spAutoFit/>
-          </a:bodyPr>
-          <a:lstStyle/>
-          <a:p>
-            <a:pPr algn="l">
-              <a:lnSpc>
-                <a:spcPts val="1950"/>
-              </a:lnSpc>
-              <a:spcBef>
-                <a:spcPts val="260"/>
-              </a:spcBef>
-              <a:spcAft>
-                <a:spcPts val="0"/>
-              </a:spcAft>
-            </a:pPr>
-            <a:r>
-              <a:rPr sz="1600" b="0">
-                <a:solidFill>
-                  <a:srgbClr val="8A92A8"/>
-                </a:solidFill>
-                <a:latin typeface="Inter"/>
-              </a:rPr>
-              <a:t>Known Answer Tests (KATs) with formal methods</a:t>
-            </a:r>
-          </a:p>
-        </p:txBody>
-      </p:sp>
-      <p:sp>
-        <p:nvSpPr>
-          <p:cNvPr id="14" name="Rounded Rectangle 13"/>
-          <p:cNvSpPr/>
-          <p:nvPr/>
-        </p:nvSpPr>
-        <p:spPr>
-          <a:xfrm>
-            <a:off x="609584" y="3781424"/>
-            <a:ext cx="5371965" cy="942975"/>
-          </a:xfrm>
-          <a:prstGeom prst="roundRect">
-            <a:avLst>
-              <a:gd name="adj" fmla="val 16161"/>
-            </a:avLst>
-          </a:prstGeom>
-          <a:solidFill>
-            <a:srgbClr val="00D4FF">
-              <a:alpha val="8000"/>
-            </a:srgbClr>
-          </a:solidFill>
-          <a:ln>
-            <a:noFill/>
-          </a:ln>
-        </p:spPr>
-        <p:style>
-          <a:lnRef idx="1">
-            <a:schemeClr val="accent1"/>
-          </a:lnRef>
-          <a:fillRef idx="3">
-            <a:schemeClr val="accent1"/>
-          </a:fillRef>
-          <a:effectRef idx="2">
-            <a:schemeClr val="accent1"/>
-          </a:effectRef>
-          <a:fontRef idx="minor">
-            <a:schemeClr val="lt1"/>
-          </a:fontRef>
-        </p:style>
-        <p:txBody>
-          <a:bodyPr rtlCol="0" anchor="ctr"/>
-          <a:lstStyle/>
-          <a:p>
-            <a:pPr algn="ctr"/>
-            <a:endParaRPr sz="2800"/>
+              <a:t>ent (Entropy Testing)</a:t>
+            </a:r>
           </a:p>
         </p:txBody>
       </p:sp>
       <p:pic>
         <p:nvPicPr>
-          <p:cNvPr id="15" name="Picture 14" descr="image.png"/>
+          <p:cNvPr id="13" name="Picture 12" descr="image.png"/>
           <p:cNvPicPr>
             <a:picLocks noChangeAspect="1"/>
           </p:cNvPicPr>
@@ -9439,8 +8732,8 @@
         </p:blipFill>
         <p:spPr>
           <a:xfrm>
-            <a:off x="761980" y="4000242"/>
-            <a:ext cx="209544" cy="152914"/>
+            <a:off x="1066773" y="3335286"/>
+            <a:ext cx="171445" cy="149327"/>
           </a:xfrm>
           <a:prstGeom prst="rect">
             <a:avLst/>
@@ -9449,14 +8742,14 @@
       </p:pic>
       <p:sp>
         <p:nvSpPr>
-          <p:cNvPr id="16" name="TextBox 15"/>
+          <p:cNvPr id="14" name="TextBox 13"/>
           <p:cNvSpPr txBox="1"/>
           <p:nvPr/>
         </p:nvSpPr>
         <p:spPr>
           <a:xfrm>
-            <a:off x="1047723" y="3900935"/>
-            <a:ext cx="2646750" cy="380104"/>
+            <a:off x="1276318" y="3103071"/>
+            <a:ext cx="2133546" cy="613758"/>
           </a:xfrm>
           <a:prstGeom prst="rect">
             <a:avLst/>
@@ -9464,52 +8757,7 @@
           <a:noFill/>
         </p:spPr>
         <p:txBody>
-          <a:bodyPr wrap="none" lIns="73152" tIns="54864" rIns="73152" bIns="54864" anchor="ctr">
-            <a:spAutoFit/>
-          </a:bodyPr>
-          <a:lstStyle/>
-          <a:p>
-            <a:pPr algn="l">
-              <a:lnSpc>
-                <a:spcPts val="2145"/>
-              </a:lnSpc>
-              <a:spcBef>
-                <a:spcPts val="0"/>
-              </a:spcBef>
-              <a:spcAft>
-                <a:spcPts val="0"/>
-              </a:spcAft>
-            </a:pPr>
-            <a:r>
-              <a:rPr b="1">
-                <a:solidFill>
-                  <a:srgbClr val="FFFFFF"/>
-                </a:solidFill>
-                <a:latin typeface="Inter"/>
-              </a:rPr>
-              <a:t>Entropy Source Evaluation</a:t>
-            </a:r>
-          </a:p>
-        </p:txBody>
-      </p:sp>
-      <p:sp>
-        <p:nvSpPr>
-          <p:cNvPr id="17" name="TextBox 16"/>
-          <p:cNvSpPr txBox="1"/>
-          <p:nvPr/>
-        </p:nvSpPr>
-        <p:spPr>
-          <a:xfrm>
-            <a:off x="1047723" y="4250487"/>
-            <a:ext cx="3609321" cy="357277"/>
-          </a:xfrm>
-          <a:prstGeom prst="rect">
-            <a:avLst/>
-          </a:prstGeom>
-          <a:noFill/>
-        </p:spPr>
-        <p:txBody>
-          <a:bodyPr wrap="none" lIns="73152" tIns="54864" rIns="73152" bIns="54864" anchor="ctr">
+          <a:bodyPr wrap="square" lIns="73152" tIns="54864" rIns="73152" bIns="54864" anchor="ctr">
             <a:spAutoFit/>
           </a:bodyPr>
           <a:lstStyle/>
@@ -9519,7 +8767,7 @@
                 <a:spcPts val="1950"/>
               </a:lnSpc>
               <a:spcBef>
-                <a:spcPts val="260"/>
+                <a:spcPts val="0"/>
               </a:spcBef>
               <a:spcAft>
                 <a:spcPts val="0"/>
@@ -9532,25 +8780,405 @@
                 </a:solidFill>
                 <a:latin typeface="Inter"/>
               </a:rPr>
-              <a:t>Stochastic modeling for expected entropy</a:t>
-            </a:r>
-          </a:p>
-        </p:txBody>
-      </p:sp>
-      <p:sp>
-        <p:nvSpPr>
-          <p:cNvPr id="18" name="Rounded Rectangle 17"/>
+              <a:t>Entropy: 7.999994 bits/byte</a:t>
+            </a:r>
+          </a:p>
+        </p:txBody>
+      </p:sp>
+      <p:pic>
+        <p:nvPicPr>
+          <p:cNvPr id="15" name="Picture 14" descr="image.png"/>
+          <p:cNvPicPr>
+            <a:picLocks noChangeAspect="1"/>
+          </p:cNvPicPr>
+          <p:nvPr/>
+        </p:nvPicPr>
+        <p:blipFill>
+          <a:blip r:embed="rId5" cstate="email">
+            <a:alphaModFix/>
+            <a:extLst>
+              <a:ext uri="{28A0092B-C50C-407E-A947-70E740481C1C}">
+                <a14:useLocalDpi xmlns:a14="http://schemas.microsoft.com/office/drawing/2010/main"/>
+              </a:ext>
+            </a:extLst>
+          </a:blip>
+          <a:stretch>
+            <a:fillRect/>
+          </a:stretch>
+        </p:blipFill>
+        <p:spPr>
+          <a:xfrm>
+            <a:off x="3486062" y="3335286"/>
+            <a:ext cx="171445" cy="149327"/>
+          </a:xfrm>
+          <a:prstGeom prst="rect">
+            <a:avLst/>
+          </a:prstGeom>
+        </p:spPr>
+      </p:pic>
+      <p:sp>
+        <p:nvSpPr>
+          <p:cNvPr id="16" name="TextBox 15"/>
+          <p:cNvSpPr txBox="1"/>
+          <p:nvPr/>
+        </p:nvSpPr>
+        <p:spPr>
+          <a:xfrm>
+            <a:off x="3695607" y="3231312"/>
+            <a:ext cx="1584536" cy="357277"/>
+          </a:xfrm>
+          <a:prstGeom prst="rect">
+            <a:avLst/>
+          </a:prstGeom>
+          <a:noFill/>
+        </p:spPr>
+        <p:txBody>
+          <a:bodyPr wrap="none" lIns="73152" tIns="54864" rIns="73152" bIns="54864" anchor="ctr">
+            <a:spAutoFit/>
+          </a:bodyPr>
+          <a:lstStyle/>
+          <a:p>
+            <a:pPr algn="l">
+              <a:lnSpc>
+                <a:spcPts val="1950"/>
+              </a:lnSpc>
+              <a:spcBef>
+                <a:spcPts val="0"/>
+              </a:spcBef>
+              <a:spcAft>
+                <a:spcPts val="0"/>
+              </a:spcAft>
+            </a:pPr>
+            <a:r>
+              <a:rPr sz="1600" b="0">
+                <a:solidFill>
+                  <a:srgbClr val="8A92A8"/>
+                </a:solidFill>
+                <a:latin typeface="Inter"/>
+              </a:rPr>
+              <a:t>Compression: 0%</a:t>
+            </a:r>
+          </a:p>
+        </p:txBody>
+      </p:sp>
+      <p:pic>
+        <p:nvPicPr>
+          <p:cNvPr id="17" name="Picture 16" descr="image.png"/>
+          <p:cNvPicPr>
+            <a:picLocks noChangeAspect="1"/>
+          </p:cNvPicPr>
+          <p:nvPr/>
+        </p:nvPicPr>
+        <p:blipFill>
+          <a:blip r:embed="rId5" cstate="email">
+            <a:alphaModFix/>
+            <a:extLst>
+              <a:ext uri="{28A0092B-C50C-407E-A947-70E740481C1C}">
+                <a14:useLocalDpi xmlns:a14="http://schemas.microsoft.com/office/drawing/2010/main"/>
+              </a:ext>
+            </a:extLst>
+          </a:blip>
+          <a:stretch>
+            <a:fillRect/>
+          </a:stretch>
+        </p:blipFill>
+        <p:spPr>
+          <a:xfrm>
+            <a:off x="1066773" y="3982986"/>
+            <a:ext cx="171445" cy="149327"/>
+          </a:xfrm>
+          <a:prstGeom prst="rect">
+            <a:avLst/>
+          </a:prstGeom>
+        </p:spPr>
+      </p:pic>
+      <p:sp>
+        <p:nvSpPr>
+          <p:cNvPr id="18" name="TextBox 17"/>
+          <p:cNvSpPr txBox="1"/>
+          <p:nvPr/>
+        </p:nvSpPr>
+        <p:spPr>
+          <a:xfrm>
+            <a:off x="1276318" y="3879012"/>
+            <a:ext cx="2133546" cy="357277"/>
+          </a:xfrm>
+          <a:prstGeom prst="rect">
+            <a:avLst/>
+          </a:prstGeom>
+          <a:noFill/>
+        </p:spPr>
+        <p:txBody>
+          <a:bodyPr wrap="square" lIns="73152" tIns="54864" rIns="73152" bIns="54864" anchor="ctr">
+            <a:spAutoFit/>
+          </a:bodyPr>
+          <a:lstStyle/>
+          <a:p>
+            <a:pPr algn="l">
+              <a:lnSpc>
+                <a:spcPts val="1950"/>
+              </a:lnSpc>
+              <a:spcBef>
+                <a:spcPts val="0"/>
+              </a:spcBef>
+              <a:spcAft>
+                <a:spcPts val="0"/>
+              </a:spcAft>
+            </a:pPr>
+            <a:r>
+              <a:rPr sz="1600" b="0">
+                <a:solidFill>
+                  <a:srgbClr val="8A92A8"/>
+                </a:solidFill>
+                <a:latin typeface="Inter"/>
+              </a:rPr>
+              <a:t>Chi-square: p ≈ 92.73%</a:t>
+            </a:r>
+          </a:p>
+        </p:txBody>
+      </p:sp>
+      <p:pic>
+        <p:nvPicPr>
+          <p:cNvPr id="19" name="Picture 18" descr="image.png"/>
+          <p:cNvPicPr>
+            <a:picLocks noChangeAspect="1"/>
+          </p:cNvPicPr>
+          <p:nvPr/>
+        </p:nvPicPr>
+        <p:blipFill>
+          <a:blip r:embed="rId5" cstate="email">
+            <a:alphaModFix/>
+            <a:extLst>
+              <a:ext uri="{28A0092B-C50C-407E-A947-70E740481C1C}">
+                <a14:useLocalDpi xmlns:a14="http://schemas.microsoft.com/office/drawing/2010/main"/>
+              </a:ext>
+            </a:extLst>
+          </a:blip>
+          <a:stretch>
+            <a:fillRect/>
+          </a:stretch>
+        </p:blipFill>
+        <p:spPr>
+          <a:xfrm>
+            <a:off x="3486062" y="3982986"/>
+            <a:ext cx="171445" cy="149327"/>
+          </a:xfrm>
+          <a:prstGeom prst="rect">
+            <a:avLst/>
+          </a:prstGeom>
+        </p:spPr>
+      </p:pic>
+      <p:sp>
+        <p:nvSpPr>
+          <p:cNvPr id="20" name="TextBox 19"/>
+          <p:cNvSpPr txBox="1"/>
+          <p:nvPr/>
+        </p:nvSpPr>
+        <p:spPr>
+          <a:xfrm>
+            <a:off x="3695607" y="3879012"/>
+            <a:ext cx="1771575" cy="357277"/>
+          </a:xfrm>
+          <a:prstGeom prst="rect">
+            <a:avLst/>
+          </a:prstGeom>
+          <a:noFill/>
+        </p:spPr>
+        <p:txBody>
+          <a:bodyPr wrap="none" lIns="73152" tIns="54864" rIns="73152" bIns="54864" anchor="ctr">
+            <a:spAutoFit/>
+          </a:bodyPr>
+          <a:lstStyle/>
+          <a:p>
+            <a:pPr algn="l">
+              <a:lnSpc>
+                <a:spcPts val="1950"/>
+              </a:lnSpc>
+              <a:spcBef>
+                <a:spcPts val="0"/>
+              </a:spcBef>
+              <a:spcAft>
+                <a:spcPts val="0"/>
+              </a:spcAft>
+            </a:pPr>
+            <a:r>
+              <a:rPr sz="1600" b="0">
+                <a:solidFill>
+                  <a:srgbClr val="8A92A8"/>
+                </a:solidFill>
+                <a:latin typeface="Inter"/>
+              </a:rPr>
+              <a:t>Mean: 127.5 (ideal)</a:t>
+            </a:r>
+          </a:p>
+        </p:txBody>
+      </p:sp>
+      <p:pic>
+        <p:nvPicPr>
+          <p:cNvPr id="21" name="Picture 20" descr="image.png"/>
+          <p:cNvPicPr>
+            <a:picLocks noChangeAspect="1"/>
+          </p:cNvPicPr>
+          <p:nvPr/>
+        </p:nvPicPr>
+        <p:blipFill>
+          <a:blip r:embed="rId5" cstate="email">
+            <a:alphaModFix/>
+            <a:extLst>
+              <a:ext uri="{28A0092B-C50C-407E-A947-70E740481C1C}">
+                <a14:useLocalDpi xmlns:a14="http://schemas.microsoft.com/office/drawing/2010/main"/>
+              </a:ext>
+            </a:extLst>
+          </a:blip>
+          <a:stretch>
+            <a:fillRect/>
+          </a:stretch>
+        </p:blipFill>
+        <p:spPr>
+          <a:xfrm>
+            <a:off x="1066773" y="4487811"/>
+            <a:ext cx="171445" cy="149327"/>
+          </a:xfrm>
+          <a:prstGeom prst="rect">
+            <a:avLst/>
+          </a:prstGeom>
+        </p:spPr>
+      </p:pic>
+      <p:sp>
+        <p:nvSpPr>
+          <p:cNvPr id="22" name="TextBox 21"/>
+          <p:cNvSpPr txBox="1"/>
+          <p:nvPr/>
+        </p:nvSpPr>
+        <p:spPr>
+          <a:xfrm>
+            <a:off x="1276318" y="4383837"/>
+            <a:ext cx="2116092" cy="357277"/>
+          </a:xfrm>
+          <a:prstGeom prst="rect">
+            <a:avLst/>
+          </a:prstGeom>
+          <a:noFill/>
+        </p:spPr>
+        <p:txBody>
+          <a:bodyPr wrap="none" lIns="73152" tIns="54864" rIns="73152" bIns="54864" anchor="ctr">
+            <a:spAutoFit/>
+          </a:bodyPr>
+          <a:lstStyle/>
+          <a:p>
+            <a:pPr algn="l">
+              <a:lnSpc>
+                <a:spcPts val="1950"/>
+              </a:lnSpc>
+              <a:spcBef>
+                <a:spcPts val="0"/>
+              </a:spcBef>
+              <a:spcAft>
+                <a:spcPts val="0"/>
+              </a:spcAft>
+            </a:pPr>
+            <a:r>
+              <a:rPr sz="1600" b="0">
+                <a:solidFill>
+                  <a:srgbClr val="8A92A8"/>
+                </a:solidFill>
+                <a:latin typeface="Inter"/>
+              </a:rPr>
+              <a:t>π estimate: error 0.04%</a:t>
+            </a:r>
+          </a:p>
+        </p:txBody>
+      </p:sp>
+      <p:pic>
+        <p:nvPicPr>
+          <p:cNvPr id="23" name="Picture 22" descr="image.png"/>
+          <p:cNvPicPr>
+            <a:picLocks noChangeAspect="1"/>
+          </p:cNvPicPr>
+          <p:nvPr/>
+        </p:nvPicPr>
+        <p:blipFill>
+          <a:blip r:embed="rId5" cstate="email">
+            <a:alphaModFix/>
+            <a:extLst>
+              <a:ext uri="{28A0092B-C50C-407E-A947-70E740481C1C}">
+                <a14:useLocalDpi xmlns:a14="http://schemas.microsoft.com/office/drawing/2010/main"/>
+              </a:ext>
+            </a:extLst>
+          </a:blip>
+          <a:stretch>
+            <a:fillRect/>
+          </a:stretch>
+        </p:blipFill>
+        <p:spPr>
+          <a:xfrm>
+            <a:off x="3486062" y="4487811"/>
+            <a:ext cx="171445" cy="149327"/>
+          </a:xfrm>
+          <a:prstGeom prst="rect">
+            <a:avLst/>
+          </a:prstGeom>
+        </p:spPr>
+      </p:pic>
+      <p:sp>
+        <p:nvSpPr>
+          <p:cNvPr id="24" name="TextBox 23"/>
+          <p:cNvSpPr txBox="1"/>
+          <p:nvPr/>
+        </p:nvSpPr>
+        <p:spPr>
+          <a:xfrm>
+            <a:off x="3695607" y="4383837"/>
+            <a:ext cx="2017027" cy="357277"/>
+          </a:xfrm>
+          <a:prstGeom prst="rect">
+            <a:avLst/>
+          </a:prstGeom>
+          <a:noFill/>
+        </p:spPr>
+        <p:txBody>
+          <a:bodyPr wrap="none" lIns="73152" tIns="54864" rIns="73152" bIns="54864" anchor="ctr">
+            <a:spAutoFit/>
+          </a:bodyPr>
+          <a:lstStyle/>
+          <a:p>
+            <a:pPr algn="l">
+              <a:lnSpc>
+                <a:spcPts val="1950"/>
+              </a:lnSpc>
+              <a:spcBef>
+                <a:spcPts val="0"/>
+              </a:spcBef>
+              <a:spcAft>
+                <a:spcPts val="0"/>
+              </a:spcAft>
+            </a:pPr>
+            <a:r>
+              <a:rPr sz="1600" b="0">
+                <a:solidFill>
+                  <a:srgbClr val="8A92A8"/>
+                </a:solidFill>
+                <a:latin typeface="Inter"/>
+              </a:rPr>
+              <a:t>Correlation: 0.0 (ideal)</a:t>
+            </a:r>
+          </a:p>
+        </p:txBody>
+      </p:sp>
+      <p:sp>
+        <p:nvSpPr>
+          <p:cNvPr id="25" name="Rounded Rectangle 24"/>
           <p:cNvSpPr/>
           <p:nvPr/>
         </p:nvSpPr>
         <p:spPr>
           <a:xfrm>
-            <a:off x="609584" y="4838699"/>
-            <a:ext cx="5371965" cy="942975"/>
+            <a:off x="609584" y="4972050"/>
+            <a:ext cx="5371965" cy="933449"/>
           </a:xfrm>
           <a:prstGeom prst="roundRect">
             <a:avLst>
-              <a:gd name="adj" fmla="val 16161"/>
+              <a:gd name="adj" fmla="val 16326"/>
             </a:avLst>
           </a:prstGeom>
           <a:solidFill>
@@ -9587,7 +9215,7 @@
       </p:sp>
       <p:pic>
         <p:nvPicPr>
-          <p:cNvPr id="19" name="Picture 18" descr="image.png"/>
+          <p:cNvPr id="26" name="Picture 25" descr="image.png"/>
           <p:cNvPicPr>
             <a:picLocks noChangeAspect="1"/>
           </p:cNvPicPr>
@@ -9608,8 +9236,8 @@
         </p:blipFill>
         <p:spPr>
           <a:xfrm>
-            <a:off x="761980" y="5034863"/>
-            <a:ext cx="209544" cy="198222"/>
+            <a:off x="761980" y="5355907"/>
+            <a:ext cx="228594" cy="165734"/>
           </a:xfrm>
           <a:prstGeom prst="rect">
             <a:avLst/>
@@ -9618,14 +9246,14 @@
       </p:pic>
       <p:sp>
         <p:nvSpPr>
-          <p:cNvPr id="20" name="TextBox 19"/>
+          <p:cNvPr id="27" name="TextBox 26"/>
           <p:cNvSpPr txBox="1"/>
           <p:nvPr/>
         </p:nvSpPr>
         <p:spPr>
           <a:xfrm>
-            <a:off x="1047723" y="4958211"/>
-            <a:ext cx="2685672" cy="380104"/>
+            <a:off x="1066773" y="5093024"/>
+            <a:ext cx="1876476" cy="405752"/>
           </a:xfrm>
           <a:prstGeom prst="rect">
             <a:avLst/>
@@ -9640,7 +9268,7 @@
           <a:p>
             <a:pPr algn="l">
               <a:lnSpc>
-                <a:spcPts val="2145"/>
+                <a:spcPts val="2340"/>
               </a:lnSpc>
               <a:spcBef>
                 <a:spcPts val="0"/>
@@ -9650,27 +9278,27 @@
               </a:spcAft>
             </a:pPr>
             <a:r>
-              <a:rPr b="1">
+              <a:rPr sz="2000" b="1">
                 <a:solidFill>
                   <a:srgbClr val="FFFFFF"/>
                 </a:solidFill>
                 <a:latin typeface="Inter"/>
               </a:rPr>
-              <a:t>Physical/Interface Security</a:t>
-            </a:r>
-          </a:p>
-        </p:txBody>
-      </p:sp>
-      <p:sp>
-        <p:nvSpPr>
-          <p:cNvPr id="21" name="TextBox 20"/>
+              <a:t>NIST SP 800-90B</a:t>
+            </a:r>
+          </a:p>
+        </p:txBody>
+      </p:sp>
+      <p:sp>
+        <p:nvSpPr>
+          <p:cNvPr id="28" name="TextBox 27"/>
           <p:cNvSpPr txBox="1"/>
           <p:nvPr/>
         </p:nvSpPr>
         <p:spPr>
           <a:xfrm>
-            <a:off x="1047723" y="5307762"/>
-            <a:ext cx="4321504" cy="357277"/>
+            <a:off x="1066773" y="5431586"/>
+            <a:ext cx="2867645" cy="357277"/>
           </a:xfrm>
           <a:prstGeom prst="rect">
             <a:avLst/>
@@ -9688,7 +9316,7 @@
                 <a:spcPts val="1950"/>
               </a:lnSpc>
               <a:spcBef>
-                <a:spcPts val="260"/>
+                <a:spcPts val="0"/>
               </a:spcBef>
               <a:spcAft>
                 <a:spcPts val="0"/>
@@ -9701,14 +9329,14 @@
                 </a:solidFill>
                 <a:latin typeface="Inter"/>
               </a:rPr>
-              <a:t>Robust protection from monitoring &amp; interference</a:t>
+              <a:t>Entropy source assessment tools</a:t>
             </a:r>
           </a:p>
         </p:txBody>
       </p:sp>
       <p:pic>
         <p:nvPicPr>
-          <p:cNvPr id="22" name="Picture 21" descr="image.png"/>
+          <p:cNvPr id="29" name="Picture 28" descr="image.png"/>
           <p:cNvPicPr>
             <a:picLocks noChangeAspect="1"/>
           </p:cNvPicPr>
@@ -9729,1859 +9357,6 @@
         </p:blipFill>
         <p:spPr>
           <a:xfrm>
-            <a:off x="6210144" y="1189796"/>
-            <a:ext cx="266693" cy="249306"/>
-          </a:xfrm>
-          <a:prstGeom prst="rect">
-            <a:avLst/>
-          </a:prstGeom>
-        </p:spPr>
-      </p:pic>
-      <p:sp>
-        <p:nvSpPr>
-          <p:cNvPr id="23" name="TextBox 22"/>
-          <p:cNvSpPr txBox="1"/>
-          <p:nvPr/>
-        </p:nvSpPr>
-        <p:spPr>
-          <a:xfrm>
-            <a:off x="6591135" y="1085927"/>
-            <a:ext cx="2836995" cy="457048"/>
-          </a:xfrm>
-          <a:prstGeom prst="rect">
-            <a:avLst/>
-          </a:prstGeom>
-          <a:noFill/>
-        </p:spPr>
-        <p:txBody>
-          <a:bodyPr wrap="none" lIns="73152" tIns="54864" rIns="73152" bIns="54864" anchor="ctr">
-            <a:spAutoFit/>
-          </a:bodyPr>
-          <a:lstStyle/>
-          <a:p>
-            <a:pPr algn="l">
-              <a:lnSpc>
-                <a:spcPts val="2730"/>
-              </a:lnSpc>
-              <a:spcBef>
-                <a:spcPts val="0"/>
-              </a:spcBef>
-              <a:spcAft>
-                <a:spcPts val="0"/>
-              </a:spcAft>
-            </a:pPr>
-            <a:r>
-              <a:rPr sz="2400" b="1">
-                <a:solidFill>
-                  <a:srgbClr val="FFFFFF"/>
-                </a:solidFill>
-                <a:latin typeface="Space Grotesk"/>
-              </a:rPr>
-              <a:t>Resistance to Attacks</a:t>
-            </a:r>
-          </a:p>
-        </p:txBody>
-      </p:sp>
-      <p:sp>
-        <p:nvSpPr>
-          <p:cNvPr id="24" name="Rounded Rectangle 23"/>
-          <p:cNvSpPr/>
-          <p:nvPr/>
-        </p:nvSpPr>
-        <p:spPr>
-          <a:xfrm>
-            <a:off x="6210144" y="1666874"/>
-            <a:ext cx="2628834" cy="1866899"/>
-          </a:xfrm>
-          <a:prstGeom prst="roundRect">
-            <a:avLst>
-              <a:gd name="adj" fmla="val 8163"/>
-            </a:avLst>
-          </a:prstGeom>
-          <a:solidFill>
-            <a:srgbClr val="A855F7">
-              <a:alpha val="10000"/>
-            </a:srgbClr>
-          </a:solidFill>
-          <a:ln w="16510">
-            <a:solidFill>
-              <a:srgbClr val="A855F7"/>
-            </a:solidFill>
-          </a:ln>
-        </p:spPr>
-        <p:style>
-          <a:lnRef idx="1">
-            <a:schemeClr val="accent1"/>
-          </a:lnRef>
-          <a:fillRef idx="3">
-            <a:schemeClr val="accent1"/>
-          </a:fillRef>
-          <a:effectRef idx="2">
-            <a:schemeClr val="accent1"/>
-          </a:effectRef>
-          <a:fontRef idx="minor">
-            <a:schemeClr val="lt1"/>
-          </a:fontRef>
-        </p:style>
-        <p:txBody>
-          <a:bodyPr rtlCol="0" anchor="ctr"/>
-          <a:lstStyle/>
-          <a:p>
-            <a:pPr algn="ctr"/>
-            <a:endParaRPr sz="2800"/>
-          </a:p>
-        </p:txBody>
-      </p:sp>
-      <p:pic>
-        <p:nvPicPr>
-          <p:cNvPr id="25" name="Picture 24" descr="image.png"/>
-          <p:cNvPicPr>
-            <a:picLocks noChangeAspect="1"/>
-          </p:cNvPicPr>
-          <p:nvPr/>
-        </p:nvPicPr>
-        <p:blipFill>
-          <a:blip r:embed="rId8" cstate="email">
-            <a:alphaModFix/>
-            <a:extLst>
-              <a:ext uri="{28A0092B-C50C-407E-A947-70E740481C1C}">
-                <a14:useLocalDpi xmlns:a14="http://schemas.microsoft.com/office/drawing/2010/main"/>
-              </a:ext>
-            </a:extLst>
-          </a:blip>
-          <a:stretch>
-            <a:fillRect/>
-          </a:stretch>
-        </p:blipFill>
-        <p:spPr>
-          <a:xfrm>
-            <a:off x="7372165" y="1896940"/>
-            <a:ext cx="304792" cy="187569"/>
-          </a:xfrm>
-          <a:prstGeom prst="rect">
-            <a:avLst/>
-          </a:prstGeom>
-        </p:spPr>
-      </p:pic>
-      <p:sp>
-        <p:nvSpPr>
-          <p:cNvPr id="26" name="TextBox 25"/>
-          <p:cNvSpPr txBox="1"/>
-          <p:nvPr/>
-        </p:nvSpPr>
-        <p:spPr>
-          <a:xfrm>
-            <a:off x="6381590" y="2208945"/>
-            <a:ext cx="2285942" cy="649409"/>
-          </a:xfrm>
-          <a:prstGeom prst="rect">
-            <a:avLst/>
-          </a:prstGeom>
-          <a:noFill/>
-        </p:spPr>
-        <p:txBody>
-          <a:bodyPr wrap="square" lIns="73152" tIns="54864" rIns="73152" bIns="54864" anchor="ctr">
-            <a:spAutoFit/>
-          </a:bodyPr>
-          <a:lstStyle/>
-          <a:p>
-            <a:pPr algn="ctr">
-              <a:lnSpc>
-                <a:spcPts val="2145"/>
-              </a:lnSpc>
-              <a:spcBef>
-                <a:spcPts val="0"/>
-              </a:spcBef>
-              <a:spcAft>
-                <a:spcPts val="0"/>
-              </a:spcAft>
-            </a:pPr>
-            <a:r>
-              <a:rPr b="1">
-                <a:solidFill>
-                  <a:srgbClr val="FFFFFF"/>
-                </a:solidFill>
-                <a:latin typeface="Inter"/>
-              </a:rPr>
-              <a:t>Computational Indistinguishability</a:t>
-            </a:r>
-          </a:p>
-        </p:txBody>
-      </p:sp>
-      <p:sp>
-        <p:nvSpPr>
-          <p:cNvPr id="27" name="Rounded Rectangle 26"/>
-          <p:cNvSpPr/>
-          <p:nvPr/>
-        </p:nvSpPr>
-        <p:spPr>
-          <a:xfrm>
-            <a:off x="8953276" y="1666874"/>
-            <a:ext cx="2628834" cy="1866899"/>
-          </a:xfrm>
-          <a:prstGeom prst="roundRect">
-            <a:avLst>
-              <a:gd name="adj" fmla="val 8163"/>
-            </a:avLst>
-          </a:prstGeom>
-          <a:solidFill>
-            <a:srgbClr val="A855F7">
-              <a:alpha val="10000"/>
-            </a:srgbClr>
-          </a:solidFill>
-          <a:ln w="16510">
-            <a:solidFill>
-              <a:srgbClr val="A855F7"/>
-            </a:solidFill>
-          </a:ln>
-        </p:spPr>
-        <p:style>
-          <a:lnRef idx="1">
-            <a:schemeClr val="accent1"/>
-          </a:lnRef>
-          <a:fillRef idx="3">
-            <a:schemeClr val="accent1"/>
-          </a:fillRef>
-          <a:effectRef idx="2">
-            <a:schemeClr val="accent1"/>
-          </a:effectRef>
-          <a:fontRef idx="minor">
-            <a:schemeClr val="lt1"/>
-          </a:fontRef>
-        </p:style>
-        <p:txBody>
-          <a:bodyPr rtlCol="0" anchor="ctr"/>
-          <a:lstStyle/>
-          <a:p>
-            <a:pPr algn="ctr"/>
-            <a:endParaRPr sz="2800"/>
-          </a:p>
-        </p:txBody>
-      </p:sp>
-      <p:pic>
-        <p:nvPicPr>
-          <p:cNvPr id="28" name="Picture 27" descr="image.png"/>
-          <p:cNvPicPr>
-            <a:picLocks noChangeAspect="1"/>
-          </p:cNvPicPr>
-          <p:nvPr/>
-        </p:nvPicPr>
-        <p:blipFill>
-          <a:blip r:embed="rId9" cstate="email">
-            <a:alphaModFix/>
-            <a:extLst>
-              <a:ext uri="{28A0092B-C50C-407E-A947-70E740481C1C}">
-                <a14:useLocalDpi xmlns:a14="http://schemas.microsoft.com/office/drawing/2010/main"/>
-              </a:ext>
-            </a:extLst>
-          </a:blip>
-          <a:stretch>
-            <a:fillRect/>
-          </a:stretch>
-        </p:blipFill>
-        <p:spPr>
-          <a:xfrm>
-            <a:off x="10115297" y="1872028"/>
-            <a:ext cx="304792" cy="237392"/>
-          </a:xfrm>
-          <a:prstGeom prst="rect">
-            <a:avLst/>
-          </a:prstGeom>
-        </p:spPr>
-      </p:pic>
-      <p:sp>
-        <p:nvSpPr>
-          <p:cNvPr id="29" name="TextBox 28"/>
-          <p:cNvSpPr txBox="1"/>
-          <p:nvPr/>
-        </p:nvSpPr>
-        <p:spPr>
-          <a:xfrm>
-            <a:off x="9124721" y="2208945"/>
-            <a:ext cx="2285942" cy="649409"/>
-          </a:xfrm>
-          <a:prstGeom prst="rect">
-            <a:avLst/>
-          </a:prstGeom>
-          <a:noFill/>
-        </p:spPr>
-        <p:txBody>
-          <a:bodyPr wrap="square" lIns="73152" tIns="54864" rIns="73152" bIns="54864" anchor="ctr">
-            <a:spAutoFit/>
-          </a:bodyPr>
-          <a:lstStyle/>
-          <a:p>
-            <a:pPr algn="ctr">
-              <a:lnSpc>
-                <a:spcPts val="2145"/>
-              </a:lnSpc>
-              <a:spcBef>
-                <a:spcPts val="0"/>
-              </a:spcBef>
-              <a:spcAft>
-                <a:spcPts val="0"/>
-              </a:spcAft>
-            </a:pPr>
-            <a:r>
-              <a:rPr b="1">
-                <a:solidFill>
-                  <a:srgbClr val="FFFFFF"/>
-                </a:solidFill>
-                <a:latin typeface="Inter"/>
-              </a:rPr>
-              <a:t>Forward/Backward Secrecy</a:t>
-            </a:r>
-          </a:p>
-        </p:txBody>
-      </p:sp>
-      <p:sp>
-        <p:nvSpPr>
-          <p:cNvPr id="30" name="Rounded Rectangle 29"/>
-          <p:cNvSpPr/>
-          <p:nvPr/>
-        </p:nvSpPr>
-        <p:spPr>
-          <a:xfrm>
-            <a:off x="6210144" y="3648074"/>
-            <a:ext cx="2628834" cy="1866899"/>
-          </a:xfrm>
-          <a:prstGeom prst="roundRect">
-            <a:avLst>
-              <a:gd name="adj" fmla="val 8163"/>
-            </a:avLst>
-          </a:prstGeom>
-          <a:solidFill>
-            <a:srgbClr val="A855F7">
-              <a:alpha val="10000"/>
-            </a:srgbClr>
-          </a:solidFill>
-          <a:ln w="16510">
-            <a:solidFill>
-              <a:srgbClr val="A855F7"/>
-            </a:solidFill>
-          </a:ln>
-        </p:spPr>
-        <p:style>
-          <a:lnRef idx="1">
-            <a:schemeClr val="accent1"/>
-          </a:lnRef>
-          <a:fillRef idx="3">
-            <a:schemeClr val="accent1"/>
-          </a:fillRef>
-          <a:effectRef idx="2">
-            <a:schemeClr val="accent1"/>
-          </a:effectRef>
-          <a:fontRef idx="minor">
-            <a:schemeClr val="lt1"/>
-          </a:fontRef>
-        </p:style>
-        <p:txBody>
-          <a:bodyPr rtlCol="0" anchor="ctr"/>
-          <a:lstStyle/>
-          <a:p>
-            <a:pPr algn="ctr"/>
-            <a:endParaRPr sz="2800"/>
-          </a:p>
-        </p:txBody>
-      </p:sp>
-      <p:pic>
-        <p:nvPicPr>
-          <p:cNvPr id="31" name="Picture 30" descr="image.png"/>
-          <p:cNvPicPr>
-            <a:picLocks noChangeAspect="1"/>
-          </p:cNvPicPr>
-          <p:nvPr/>
-        </p:nvPicPr>
-        <p:blipFill>
-          <a:blip r:embed="rId10" cstate="email">
-            <a:alphaModFix/>
-            <a:extLst>
-              <a:ext uri="{28A0092B-C50C-407E-A947-70E740481C1C}">
-                <a14:useLocalDpi xmlns:a14="http://schemas.microsoft.com/office/drawing/2010/main"/>
-              </a:ext>
-            </a:extLst>
-          </a:blip>
-          <a:stretch>
-            <a:fillRect/>
-          </a:stretch>
-        </p:blipFill>
-        <p:spPr>
-          <a:xfrm>
-            <a:off x="7372165" y="3835644"/>
-            <a:ext cx="304792" cy="272561"/>
-          </a:xfrm>
-          <a:prstGeom prst="rect">
-            <a:avLst/>
-          </a:prstGeom>
-        </p:spPr>
-      </p:pic>
-      <p:sp>
-        <p:nvSpPr>
-          <p:cNvPr id="32" name="TextBox 31"/>
-          <p:cNvSpPr txBox="1"/>
-          <p:nvPr/>
-        </p:nvSpPr>
-        <p:spPr>
-          <a:xfrm>
-            <a:off x="6381590" y="4190145"/>
-            <a:ext cx="2285942" cy="649409"/>
-          </a:xfrm>
-          <a:prstGeom prst="rect">
-            <a:avLst/>
-          </a:prstGeom>
-          <a:noFill/>
-        </p:spPr>
-        <p:txBody>
-          <a:bodyPr wrap="square" lIns="73152" tIns="54864" rIns="73152" bIns="54864" anchor="ctr">
-            <a:spAutoFit/>
-          </a:bodyPr>
-          <a:lstStyle/>
-          <a:p>
-            <a:pPr algn="ctr">
-              <a:lnSpc>
-                <a:spcPts val="2145"/>
-              </a:lnSpc>
-              <a:spcBef>
-                <a:spcPts val="0"/>
-              </a:spcBef>
-              <a:spcAft>
-                <a:spcPts val="0"/>
-              </a:spcAft>
-            </a:pPr>
-            <a:r>
-              <a:rPr b="1">
-                <a:solidFill>
-                  <a:srgbClr val="FFFFFF"/>
-                </a:solidFill>
-                <a:latin typeface="Inter"/>
-              </a:rPr>
-              <a:t>No Backdoors/Trapdoors</a:t>
-            </a:r>
-          </a:p>
-        </p:txBody>
-      </p:sp>
-      <p:sp>
-        <p:nvSpPr>
-          <p:cNvPr id="33" name="Rounded Rectangle 32"/>
-          <p:cNvSpPr/>
-          <p:nvPr/>
-        </p:nvSpPr>
-        <p:spPr>
-          <a:xfrm>
-            <a:off x="8953276" y="3648074"/>
-            <a:ext cx="2628834" cy="1866899"/>
-          </a:xfrm>
-          <a:prstGeom prst="roundRect">
-            <a:avLst>
-              <a:gd name="adj" fmla="val 8163"/>
-            </a:avLst>
-          </a:prstGeom>
-          <a:solidFill>
-            <a:srgbClr val="A855F7">
-              <a:alpha val="10000"/>
-            </a:srgbClr>
-          </a:solidFill>
-          <a:ln w="16510">
-            <a:solidFill>
-              <a:srgbClr val="A855F7"/>
-            </a:solidFill>
-          </a:ln>
-        </p:spPr>
-        <p:style>
-          <a:lnRef idx="1">
-            <a:schemeClr val="accent1"/>
-          </a:lnRef>
-          <a:fillRef idx="3">
-            <a:schemeClr val="accent1"/>
-          </a:fillRef>
-          <a:effectRef idx="2">
-            <a:schemeClr val="accent1"/>
-          </a:effectRef>
-          <a:fontRef idx="minor">
-            <a:schemeClr val="lt1"/>
-          </a:fontRef>
-        </p:style>
-        <p:txBody>
-          <a:bodyPr rtlCol="0" anchor="ctr"/>
-          <a:lstStyle/>
-          <a:p>
-            <a:pPr algn="ctr"/>
-            <a:endParaRPr sz="2800"/>
-          </a:p>
-        </p:txBody>
-      </p:sp>
-      <p:pic>
-        <p:nvPicPr>
-          <p:cNvPr id="34" name="Picture 33" descr="image.png"/>
-          <p:cNvPicPr>
-            <a:picLocks noChangeAspect="1"/>
-          </p:cNvPicPr>
-          <p:nvPr/>
-        </p:nvPicPr>
-        <p:blipFill>
-          <a:blip r:embed="rId11" cstate="email">
-            <a:alphaModFix/>
-            <a:extLst>
-              <a:ext uri="{28A0092B-C50C-407E-A947-70E740481C1C}">
-                <a14:useLocalDpi xmlns:a14="http://schemas.microsoft.com/office/drawing/2010/main"/>
-              </a:ext>
-            </a:extLst>
-          </a:blip>
-          <a:stretch>
-            <a:fillRect/>
-          </a:stretch>
-        </p:blipFill>
-        <p:spPr>
-          <a:xfrm>
-            <a:off x="10115297" y="3863486"/>
-            <a:ext cx="304792" cy="216876"/>
-          </a:xfrm>
-          <a:prstGeom prst="rect">
-            <a:avLst/>
-          </a:prstGeom>
-        </p:spPr>
-      </p:pic>
-      <p:sp>
-        <p:nvSpPr>
-          <p:cNvPr id="35" name="TextBox 34"/>
-          <p:cNvSpPr txBox="1"/>
-          <p:nvPr/>
-        </p:nvSpPr>
-        <p:spPr>
-          <a:xfrm>
-            <a:off x="9210737" y="4167636"/>
-            <a:ext cx="2113912" cy="380104"/>
-          </a:xfrm>
-          <a:prstGeom prst="rect">
-            <a:avLst/>
-          </a:prstGeom>
-          <a:noFill/>
-        </p:spPr>
-        <p:txBody>
-          <a:bodyPr wrap="none" lIns="73152" tIns="54864" rIns="73152" bIns="54864" anchor="ctr">
-            <a:spAutoFit/>
-          </a:bodyPr>
-          <a:lstStyle/>
-          <a:p>
-            <a:pPr algn="ctr">
-              <a:lnSpc>
-                <a:spcPts val="2145"/>
-              </a:lnSpc>
-              <a:spcBef>
-                <a:spcPts val="0"/>
-              </a:spcBef>
-              <a:spcAft>
-                <a:spcPts val="0"/>
-              </a:spcAft>
-            </a:pPr>
-            <a:r>
-              <a:rPr b="1">
-                <a:solidFill>
-                  <a:srgbClr val="FFFFFF"/>
-                </a:solidFill>
-                <a:latin typeface="Inter"/>
-              </a:rPr>
-              <a:t>Quantum Resistance</a:t>
-            </a:r>
-          </a:p>
-        </p:txBody>
-      </p:sp>
-      <p:sp>
-        <p:nvSpPr>
-          <p:cNvPr id="36" name="Rounded Rectangle 35"/>
-          <p:cNvSpPr/>
-          <p:nvPr/>
-        </p:nvSpPr>
-        <p:spPr>
-          <a:xfrm>
-            <a:off x="6210144" y="5667374"/>
-            <a:ext cx="5371965" cy="590549"/>
-          </a:xfrm>
-          <a:prstGeom prst="roundRect">
-            <a:avLst>
-              <a:gd name="adj" fmla="val 25806"/>
-            </a:avLst>
-          </a:prstGeom>
-          <a:solidFill>
-            <a:srgbClr val="00D4FF">
-              <a:alpha val="12000"/>
-            </a:srgbClr>
-          </a:solidFill>
-          <a:ln>
-            <a:noFill/>
-          </a:ln>
-        </p:spPr>
-        <p:style>
-          <a:lnRef idx="1">
-            <a:schemeClr val="accent1"/>
-          </a:lnRef>
-          <a:fillRef idx="3">
-            <a:schemeClr val="accent1"/>
-          </a:fillRef>
-          <a:effectRef idx="2">
-            <a:schemeClr val="accent1"/>
-          </a:effectRef>
-          <a:fontRef idx="minor">
-            <a:schemeClr val="lt1"/>
-          </a:fontRef>
-        </p:style>
-        <p:txBody>
-          <a:bodyPr rtlCol="0" anchor="ctr"/>
-          <a:lstStyle/>
-          <a:p>
-            <a:pPr algn="ctr"/>
-            <a:endParaRPr sz="2800"/>
-          </a:p>
-        </p:txBody>
-      </p:sp>
-      <p:pic>
-        <p:nvPicPr>
-          <p:cNvPr id="37" name="Picture 36" descr="image.png"/>
-          <p:cNvPicPr>
-            <a:picLocks noChangeAspect="1"/>
-          </p:cNvPicPr>
-          <p:nvPr/>
-        </p:nvPicPr>
-        <p:blipFill>
-          <a:blip r:embed="rId12" cstate="email">
-            <a:alphaModFix/>
-            <a:extLst>
-              <a:ext uri="{28A0092B-C50C-407E-A947-70E740481C1C}">
-                <a14:useLocalDpi xmlns:a14="http://schemas.microsoft.com/office/drawing/2010/main"/>
-              </a:ext>
-            </a:extLst>
-          </a:blip>
-          <a:stretch>
-            <a:fillRect/>
-          </a:stretch>
-        </p:blipFill>
-        <p:spPr>
-          <a:xfrm>
-            <a:off x="6362540" y="5854065"/>
-            <a:ext cx="228594" cy="217170"/>
-          </a:xfrm>
-          <a:prstGeom prst="rect">
-            <a:avLst/>
-          </a:prstGeom>
-        </p:spPr>
-      </p:pic>
-      <p:sp>
-        <p:nvSpPr>
-          <p:cNvPr id="38" name="TextBox 37"/>
-          <p:cNvSpPr txBox="1"/>
-          <p:nvPr/>
-        </p:nvSpPr>
-        <p:spPr>
-          <a:xfrm>
-            <a:off x="6667333" y="5784012"/>
-            <a:ext cx="4013663" cy="357277"/>
-          </a:xfrm>
-          <a:prstGeom prst="rect">
-            <a:avLst/>
-          </a:prstGeom>
-          <a:noFill/>
-        </p:spPr>
-        <p:txBody>
-          <a:bodyPr wrap="none" lIns="73152" tIns="54864" rIns="73152" bIns="54864" anchor="ctr">
-            <a:spAutoFit/>
-          </a:bodyPr>
-          <a:lstStyle/>
-          <a:p>
-            <a:pPr algn="l">
-              <a:lnSpc>
-                <a:spcPts val="1950"/>
-              </a:lnSpc>
-              <a:spcBef>
-                <a:spcPts val="0"/>
-              </a:spcBef>
-              <a:spcAft>
-                <a:spcPts val="0"/>
-              </a:spcAft>
-            </a:pPr>
-            <a:r>
-              <a:rPr sz="1600" b="1">
-                <a:solidFill>
-                  <a:srgbClr val="00D4FF"/>
-                </a:solidFill>
-                <a:latin typeface="Inter"/>
-              </a:rPr>
-              <a:t>Modern Standards: SP 800-90 Series &amp; AIS-31</a:t>
-            </a:r>
-          </a:p>
-        </p:txBody>
-      </p:sp>
-      <p:pic>
-        <p:nvPicPr>
-          <p:cNvPr id="39" name="Picture 38" descr="image.png"/>
-          <p:cNvPicPr>
-            <a:picLocks noChangeAspect="1"/>
-          </p:cNvPicPr>
-          <p:nvPr/>
-        </p:nvPicPr>
-        <p:blipFill>
-          <a:blip r:embed="rId13" cstate="email">
-            <a:alphaModFix/>
-            <a:extLst>
-              <a:ext uri="{28A0092B-C50C-407E-A947-70E740481C1C}">
-                <a14:useLocalDpi xmlns:a14="http://schemas.microsoft.com/office/drawing/2010/main"/>
-              </a:ext>
-            </a:extLst>
-          </a:blip>
-          <a:stretch>
-            <a:fillRect/>
-          </a:stretch>
-        </p:blipFill>
-        <p:spPr>
-          <a:xfrm>
-            <a:off x="11201119" y="5879782"/>
-            <a:ext cx="228594" cy="165734"/>
-          </a:xfrm>
-          <a:prstGeom prst="rect">
-            <a:avLst/>
-          </a:prstGeom>
-        </p:spPr>
-      </p:pic>
-    </p:spTree>
-  </p:cSld>
-  <p:clrMapOvr>
-    <a:masterClrMapping/>
-  </p:clrMapOvr>
-</p:sld>
-</file>
-
-<file path=ppt/slides/slide13.xml><?xml version="1.0" encoding="utf-8"?>
-<p:sld xmlns:a="http://schemas.openxmlformats.org/drawingml/2006/main" xmlns:r="http://schemas.openxmlformats.org/officeDocument/2006/relationships" xmlns:p="http://schemas.openxmlformats.org/presentationml/2006/main">
-  <p:cSld>
-    <p:bg>
-      <p:bgPr>
-        <a:solidFill>
-          <a:srgbClr val="0A0E27"/>
-        </a:solidFill>
-        <a:effectLst/>
-      </p:bgPr>
-    </p:bg>
-    <p:spTree>
-      <p:nvGrpSpPr>
-        <p:cNvPr id="1" name=""/>
-        <p:cNvGrpSpPr/>
-        <p:nvPr/>
-      </p:nvGrpSpPr>
-      <p:grpSpPr>
-        <a:xfrm>
-          <a:off x="0" y="0"/>
-          <a:ext cx="0" cy="0"/>
-          <a:chOff x="0" y="0"/>
-          <a:chExt cx="0" cy="0"/>
-        </a:xfrm>
-      </p:grpSpPr>
-      <p:sp>
-        <p:nvSpPr>
-          <p:cNvPr id="2" name="Rectangle 1"/>
-          <p:cNvSpPr/>
-          <p:nvPr/>
-        </p:nvSpPr>
-        <p:spPr>
-          <a:xfrm>
-            <a:off x="0" y="0"/>
-            <a:ext cx="12191695" cy="571500"/>
-          </a:xfrm>
-          <a:prstGeom prst="rect">
-            <a:avLst/>
-          </a:prstGeom>
-          <a:solidFill>
-            <a:srgbClr val="00D4FF">
-              <a:alpha val="8000"/>
-            </a:srgbClr>
-          </a:solidFill>
-          <a:ln>
-            <a:noFill/>
-          </a:ln>
-        </p:spPr>
-        <p:style>
-          <a:lnRef idx="1">
-            <a:schemeClr val="accent1"/>
-          </a:lnRef>
-          <a:fillRef idx="3">
-            <a:schemeClr val="accent1"/>
-          </a:fillRef>
-          <a:effectRef idx="2">
-            <a:schemeClr val="accent1"/>
-          </a:effectRef>
-          <a:fontRef idx="minor">
-            <a:schemeClr val="lt1"/>
-          </a:fontRef>
-        </p:style>
-        <p:txBody>
-          <a:bodyPr rtlCol="0" anchor="ctr"/>
-          <a:lstStyle/>
-          <a:p>
-            <a:pPr algn="ctr"/>
-            <a:endParaRPr sz="2800"/>
-          </a:p>
-        </p:txBody>
-      </p:sp>
-      <p:sp>
-        <p:nvSpPr>
-          <p:cNvPr id="3" name="TextBox 2"/>
-          <p:cNvSpPr txBox="1"/>
-          <p:nvPr/>
-        </p:nvSpPr>
-        <p:spPr>
-          <a:xfrm>
-            <a:off x="609584" y="0"/>
-            <a:ext cx="6191095" cy="571500"/>
-          </a:xfrm>
-          <a:prstGeom prst="rect">
-            <a:avLst/>
-          </a:prstGeom>
-          <a:noFill/>
-        </p:spPr>
-        <p:txBody>
-          <a:bodyPr wrap="none" lIns="73152" tIns="54864" rIns="73152" bIns="54864" anchor="ctr">
-            <a:spAutoFit/>
-          </a:bodyPr>
-          <a:lstStyle/>
-          <a:p>
-            <a:pPr algn="l">
-              <a:lnSpc>
-                <a:spcPts val="3900"/>
-              </a:lnSpc>
-              <a:spcBef>
-                <a:spcPts val="0"/>
-              </a:spcBef>
-              <a:spcAft>
-                <a:spcPts val="0"/>
-              </a:spcAft>
-            </a:pPr>
-            <a:r>
-              <a:rPr sz="2392" b="1">
-                <a:solidFill>
-                  <a:srgbClr val="FFFFFF"/>
-                </a:solidFill>
-                <a:latin typeface="Space Grotesk"/>
-              </a:rPr>
-              <a:t>Testing Frameworks and Datasets</a:t>
-            </a:r>
-          </a:p>
-        </p:txBody>
-      </p:sp>
-      <p:pic>
-        <p:nvPicPr>
-          <p:cNvPr id="4" name="Picture 3" descr="image.png"/>
-          <p:cNvPicPr>
-            <a:picLocks noChangeAspect="1"/>
-          </p:cNvPicPr>
-          <p:nvPr/>
-        </p:nvPicPr>
-        <p:blipFill>
-          <a:blip r:embed="rId2" cstate="email">
-            <a:alphaModFix/>
-            <a:extLst>
-              <a:ext uri="{28A0092B-C50C-407E-A947-70E740481C1C}">
-                <a14:useLocalDpi xmlns:a14="http://schemas.microsoft.com/office/drawing/2010/main"/>
-              </a:ext>
-            </a:extLst>
-          </a:blip>
-          <a:stretch>
-            <a:fillRect/>
-          </a:stretch>
-        </p:blipFill>
-        <p:spPr>
-          <a:xfrm>
-            <a:off x="609584" y="940316"/>
-            <a:ext cx="247643" cy="195816"/>
-          </a:xfrm>
-          <a:prstGeom prst="rect">
-            <a:avLst/>
-          </a:prstGeom>
-        </p:spPr>
-      </p:pic>
-      <p:sp>
-        <p:nvSpPr>
-          <p:cNvPr id="5" name="TextBox 4"/>
-          <p:cNvSpPr txBox="1"/>
-          <p:nvPr/>
-        </p:nvSpPr>
-        <p:spPr>
-          <a:xfrm>
-            <a:off x="933426" y="809702"/>
-            <a:ext cx="3058145" cy="457048"/>
-          </a:xfrm>
-          <a:prstGeom prst="rect">
-            <a:avLst/>
-          </a:prstGeom>
-          <a:noFill/>
-        </p:spPr>
-        <p:txBody>
-          <a:bodyPr wrap="none" lIns="73152" tIns="54864" rIns="73152" bIns="54864" anchor="ctr">
-            <a:spAutoFit/>
-          </a:bodyPr>
-          <a:lstStyle/>
-          <a:p>
-            <a:pPr algn="l">
-              <a:lnSpc>
-                <a:spcPts val="2730"/>
-              </a:lnSpc>
-              <a:spcBef>
-                <a:spcPts val="0"/>
-              </a:spcBef>
-              <a:spcAft>
-                <a:spcPts val="0"/>
-              </a:spcAft>
-            </a:pPr>
-            <a:r>
-              <a:rPr sz="2400" b="1">
-                <a:solidFill>
-                  <a:srgbClr val="FFFFFF"/>
-                </a:solidFill>
-                <a:latin typeface="Space Grotesk"/>
-              </a:rPr>
-              <a:t>Testing Tools Overview</a:t>
-            </a:r>
-          </a:p>
-        </p:txBody>
-      </p:sp>
-      <p:sp>
-        <p:nvSpPr>
-          <p:cNvPr id="6" name="Rounded Rectangle 5"/>
-          <p:cNvSpPr/>
-          <p:nvPr/>
-        </p:nvSpPr>
-        <p:spPr>
-          <a:xfrm>
-            <a:off x="609584" y="1390650"/>
-            <a:ext cx="5371965" cy="1009649"/>
-          </a:xfrm>
-          <a:prstGeom prst="roundRect">
-            <a:avLst>
-              <a:gd name="adj" fmla="val 15094"/>
-            </a:avLst>
-          </a:prstGeom>
-          <a:solidFill>
-            <a:srgbClr val="00D4FF">
-              <a:alpha val="8000"/>
-            </a:srgbClr>
-          </a:solidFill>
-          <a:ln>
-            <a:noFill/>
-          </a:ln>
-        </p:spPr>
-        <p:style>
-          <a:lnRef idx="1">
-            <a:schemeClr val="accent1"/>
-          </a:lnRef>
-          <a:fillRef idx="3">
-            <a:schemeClr val="accent1"/>
-          </a:fillRef>
-          <a:effectRef idx="2">
-            <a:schemeClr val="accent1"/>
-          </a:effectRef>
-          <a:fontRef idx="minor">
-            <a:schemeClr val="lt1"/>
-          </a:fontRef>
-        </p:style>
-        <p:txBody>
-          <a:bodyPr rtlCol="0" anchor="ctr"/>
-          <a:lstStyle/>
-          <a:p>
-            <a:pPr algn="ctr"/>
-            <a:endParaRPr sz="2800"/>
-          </a:p>
-        </p:txBody>
-      </p:sp>
-      <p:pic>
-        <p:nvPicPr>
-          <p:cNvPr id="7" name="Picture 6" descr="image.png"/>
-          <p:cNvPicPr>
-            <a:picLocks noChangeAspect="1"/>
-          </p:cNvPicPr>
-          <p:nvPr/>
-        </p:nvPicPr>
-        <p:blipFill>
-          <a:blip r:embed="rId3" cstate="email">
-            <a:alphaModFix/>
-            <a:extLst>
-              <a:ext uri="{28A0092B-C50C-407E-A947-70E740481C1C}">
-                <a14:useLocalDpi xmlns:a14="http://schemas.microsoft.com/office/drawing/2010/main"/>
-              </a:ext>
-            </a:extLst>
-          </a:blip>
-          <a:stretch>
-            <a:fillRect/>
-          </a:stretch>
-        </p:blipFill>
-        <p:spPr>
-          <a:xfrm>
-            <a:off x="761980" y="1625917"/>
-            <a:ext cx="228594" cy="177164"/>
-          </a:xfrm>
-          <a:prstGeom prst="rect">
-            <a:avLst/>
-          </a:prstGeom>
-        </p:spPr>
-      </p:pic>
-      <p:sp>
-        <p:nvSpPr>
-          <p:cNvPr id="8" name="TextBox 7"/>
-          <p:cNvSpPr txBox="1"/>
-          <p:nvPr/>
-        </p:nvSpPr>
-        <p:spPr>
-          <a:xfrm>
-            <a:off x="1066773" y="1511625"/>
-            <a:ext cx="1213794" cy="405752"/>
-          </a:xfrm>
-          <a:prstGeom prst="rect">
-            <a:avLst/>
-          </a:prstGeom>
-          <a:noFill/>
-        </p:spPr>
-        <p:txBody>
-          <a:bodyPr wrap="none" lIns="73152" tIns="54864" rIns="73152" bIns="54864" anchor="ctr">
-            <a:spAutoFit/>
-          </a:bodyPr>
-          <a:lstStyle/>
-          <a:p>
-            <a:pPr algn="l">
-              <a:lnSpc>
-                <a:spcPts val="2340"/>
-              </a:lnSpc>
-              <a:spcBef>
-                <a:spcPts val="0"/>
-              </a:spcBef>
-              <a:spcAft>
-                <a:spcPts val="0"/>
-              </a:spcAft>
-            </a:pPr>
-            <a:r>
-              <a:rPr sz="2000" b="1">
-                <a:solidFill>
-                  <a:srgbClr val="FFFFFF"/>
-                </a:solidFill>
-                <a:latin typeface="Inter"/>
-              </a:rPr>
-              <a:t>Dieharder</a:t>
-            </a:r>
-          </a:p>
-        </p:txBody>
-      </p:sp>
-      <p:sp>
-        <p:nvSpPr>
-          <p:cNvPr id="9" name="TextBox 8"/>
-          <p:cNvSpPr txBox="1"/>
-          <p:nvPr/>
-        </p:nvSpPr>
-        <p:spPr>
-          <a:xfrm>
-            <a:off x="1066773" y="1926386"/>
-            <a:ext cx="4079258" cy="357277"/>
-          </a:xfrm>
-          <a:prstGeom prst="rect">
-            <a:avLst/>
-          </a:prstGeom>
-          <a:noFill/>
-        </p:spPr>
-        <p:txBody>
-          <a:bodyPr wrap="none" lIns="73152" tIns="54864" rIns="73152" bIns="54864" anchor="ctr">
-            <a:spAutoFit/>
-          </a:bodyPr>
-          <a:lstStyle/>
-          <a:p>
-            <a:pPr algn="l">
-              <a:lnSpc>
-                <a:spcPts val="1950"/>
-              </a:lnSpc>
-              <a:spcBef>
-                <a:spcPts val="0"/>
-              </a:spcBef>
-              <a:spcAft>
-                <a:spcPts val="0"/>
-              </a:spcAft>
-            </a:pPr>
-            <a:r>
-              <a:rPr sz="1600" b="0">
-                <a:solidFill>
-                  <a:srgbClr val="8A92A8"/>
-                </a:solidFill>
-                <a:latin typeface="Inter"/>
-              </a:rPr>
-              <a:t>Extended methodology • KS test on all P-values</a:t>
-            </a:r>
-          </a:p>
-        </p:txBody>
-      </p:sp>
-      <p:sp>
-        <p:nvSpPr>
-          <p:cNvPr id="10" name="Rounded Rectangle 9"/>
-          <p:cNvSpPr/>
-          <p:nvPr/>
-        </p:nvSpPr>
-        <p:spPr>
-          <a:xfrm>
-            <a:off x="609584" y="2514600"/>
-            <a:ext cx="5371965" cy="2343150"/>
-          </a:xfrm>
-          <a:prstGeom prst="roundRect">
-            <a:avLst>
-              <a:gd name="adj" fmla="val 6504"/>
-            </a:avLst>
-          </a:prstGeom>
-          <a:solidFill>
-            <a:srgbClr val="A855F7">
-              <a:alpha val="8000"/>
-            </a:srgbClr>
-          </a:solidFill>
-          <a:ln>
-            <a:noFill/>
-          </a:ln>
-        </p:spPr>
-        <p:style>
-          <a:lnRef idx="1">
-            <a:schemeClr val="accent1"/>
-          </a:lnRef>
-          <a:fillRef idx="3">
-            <a:schemeClr val="accent1"/>
-          </a:fillRef>
-          <a:effectRef idx="2">
-            <a:schemeClr val="accent1"/>
-          </a:effectRef>
-          <a:fontRef idx="minor">
-            <a:schemeClr val="lt1"/>
-          </a:fontRef>
-        </p:style>
-        <p:txBody>
-          <a:bodyPr rtlCol="0" anchor="ctr"/>
-          <a:lstStyle/>
-          <a:p>
-            <a:pPr algn="ctr"/>
-            <a:endParaRPr sz="2800"/>
-          </a:p>
-        </p:txBody>
-      </p:sp>
-      <p:pic>
-        <p:nvPicPr>
-          <p:cNvPr id="11" name="Picture 10" descr="image.png"/>
-          <p:cNvPicPr>
-            <a:picLocks noChangeAspect="1"/>
-          </p:cNvPicPr>
-          <p:nvPr/>
-        </p:nvPicPr>
-        <p:blipFill>
-          <a:blip r:embed="rId4" cstate="email">
-            <a:alphaModFix/>
-            <a:extLst>
-              <a:ext uri="{28A0092B-C50C-407E-A947-70E740481C1C}">
-                <a14:useLocalDpi xmlns:a14="http://schemas.microsoft.com/office/drawing/2010/main"/>
-              </a:ext>
-            </a:extLst>
-          </a:blip>
-          <a:stretch>
-            <a:fillRect/>
-          </a:stretch>
-        </p:blipFill>
-        <p:spPr>
-          <a:xfrm>
-            <a:off x="761980" y="2755582"/>
-            <a:ext cx="228594" cy="165734"/>
-          </a:xfrm>
-          <a:prstGeom prst="rect">
-            <a:avLst/>
-          </a:prstGeom>
-        </p:spPr>
-      </p:pic>
-      <p:sp>
-        <p:nvSpPr>
-          <p:cNvPr id="12" name="TextBox 11"/>
-          <p:cNvSpPr txBox="1"/>
-          <p:nvPr/>
-        </p:nvSpPr>
-        <p:spPr>
-          <a:xfrm>
-            <a:off x="1066773" y="2635575"/>
-            <a:ext cx="2354427" cy="405752"/>
-          </a:xfrm>
-          <a:prstGeom prst="rect">
-            <a:avLst/>
-          </a:prstGeom>
-          <a:noFill/>
-        </p:spPr>
-        <p:txBody>
-          <a:bodyPr wrap="none" lIns="73152" tIns="54864" rIns="73152" bIns="54864" anchor="ctr">
-            <a:spAutoFit/>
-          </a:bodyPr>
-          <a:lstStyle/>
-          <a:p>
-            <a:pPr algn="l">
-              <a:lnSpc>
-                <a:spcPts val="2340"/>
-              </a:lnSpc>
-              <a:spcBef>
-                <a:spcPts val="0"/>
-              </a:spcBef>
-              <a:spcAft>
-                <a:spcPts val="0"/>
-              </a:spcAft>
-            </a:pPr>
-            <a:r>
-              <a:rPr sz="2000" b="1">
-                <a:solidFill>
-                  <a:srgbClr val="FFFFFF"/>
-                </a:solidFill>
-                <a:latin typeface="Inter"/>
-              </a:rPr>
-              <a:t>ent (Entropy Testing)</a:t>
-            </a:r>
-          </a:p>
-        </p:txBody>
-      </p:sp>
-      <p:pic>
-        <p:nvPicPr>
-          <p:cNvPr id="13" name="Picture 12" descr="image.png"/>
-          <p:cNvPicPr>
-            <a:picLocks noChangeAspect="1"/>
-          </p:cNvPicPr>
-          <p:nvPr/>
-        </p:nvPicPr>
-        <p:blipFill>
-          <a:blip r:embed="rId5" cstate="email">
-            <a:alphaModFix/>
-            <a:extLst>
-              <a:ext uri="{28A0092B-C50C-407E-A947-70E740481C1C}">
-                <a14:useLocalDpi xmlns:a14="http://schemas.microsoft.com/office/drawing/2010/main"/>
-              </a:ext>
-            </a:extLst>
-          </a:blip>
-          <a:stretch>
-            <a:fillRect/>
-          </a:stretch>
-        </p:blipFill>
-        <p:spPr>
-          <a:xfrm>
-            <a:off x="1066773" y="3335286"/>
-            <a:ext cx="171445" cy="149327"/>
-          </a:xfrm>
-          <a:prstGeom prst="rect">
-            <a:avLst/>
-          </a:prstGeom>
-        </p:spPr>
-      </p:pic>
-      <p:sp>
-        <p:nvSpPr>
-          <p:cNvPr id="14" name="TextBox 13"/>
-          <p:cNvSpPr txBox="1"/>
-          <p:nvPr/>
-        </p:nvSpPr>
-        <p:spPr>
-          <a:xfrm>
-            <a:off x="1276318" y="3103071"/>
-            <a:ext cx="2133546" cy="613758"/>
-          </a:xfrm>
-          <a:prstGeom prst="rect">
-            <a:avLst/>
-          </a:prstGeom>
-          <a:noFill/>
-        </p:spPr>
-        <p:txBody>
-          <a:bodyPr wrap="square" lIns="73152" tIns="54864" rIns="73152" bIns="54864" anchor="ctr">
-            <a:spAutoFit/>
-          </a:bodyPr>
-          <a:lstStyle/>
-          <a:p>
-            <a:pPr algn="l">
-              <a:lnSpc>
-                <a:spcPts val="1950"/>
-              </a:lnSpc>
-              <a:spcBef>
-                <a:spcPts val="0"/>
-              </a:spcBef>
-              <a:spcAft>
-                <a:spcPts val="0"/>
-              </a:spcAft>
-            </a:pPr>
-            <a:r>
-              <a:rPr sz="1600" b="0">
-                <a:solidFill>
-                  <a:srgbClr val="8A92A8"/>
-                </a:solidFill>
-                <a:latin typeface="Inter"/>
-              </a:rPr>
-              <a:t>Entropy: 7.999994 bits/byte</a:t>
-            </a:r>
-          </a:p>
-        </p:txBody>
-      </p:sp>
-      <p:pic>
-        <p:nvPicPr>
-          <p:cNvPr id="15" name="Picture 14" descr="image.png"/>
-          <p:cNvPicPr>
-            <a:picLocks noChangeAspect="1"/>
-          </p:cNvPicPr>
-          <p:nvPr/>
-        </p:nvPicPr>
-        <p:blipFill>
-          <a:blip r:embed="rId5" cstate="email">
-            <a:alphaModFix/>
-            <a:extLst>
-              <a:ext uri="{28A0092B-C50C-407E-A947-70E740481C1C}">
-                <a14:useLocalDpi xmlns:a14="http://schemas.microsoft.com/office/drawing/2010/main"/>
-              </a:ext>
-            </a:extLst>
-          </a:blip>
-          <a:stretch>
-            <a:fillRect/>
-          </a:stretch>
-        </p:blipFill>
-        <p:spPr>
-          <a:xfrm>
-            <a:off x="3486062" y="3335286"/>
-            <a:ext cx="171445" cy="149327"/>
-          </a:xfrm>
-          <a:prstGeom prst="rect">
-            <a:avLst/>
-          </a:prstGeom>
-        </p:spPr>
-      </p:pic>
-      <p:sp>
-        <p:nvSpPr>
-          <p:cNvPr id="16" name="TextBox 15"/>
-          <p:cNvSpPr txBox="1"/>
-          <p:nvPr/>
-        </p:nvSpPr>
-        <p:spPr>
-          <a:xfrm>
-            <a:off x="3695607" y="3231312"/>
-            <a:ext cx="1584536" cy="357277"/>
-          </a:xfrm>
-          <a:prstGeom prst="rect">
-            <a:avLst/>
-          </a:prstGeom>
-          <a:noFill/>
-        </p:spPr>
-        <p:txBody>
-          <a:bodyPr wrap="none" lIns="73152" tIns="54864" rIns="73152" bIns="54864" anchor="ctr">
-            <a:spAutoFit/>
-          </a:bodyPr>
-          <a:lstStyle/>
-          <a:p>
-            <a:pPr algn="l">
-              <a:lnSpc>
-                <a:spcPts val="1950"/>
-              </a:lnSpc>
-              <a:spcBef>
-                <a:spcPts val="0"/>
-              </a:spcBef>
-              <a:spcAft>
-                <a:spcPts val="0"/>
-              </a:spcAft>
-            </a:pPr>
-            <a:r>
-              <a:rPr sz="1600" b="0">
-                <a:solidFill>
-                  <a:srgbClr val="8A92A8"/>
-                </a:solidFill>
-                <a:latin typeface="Inter"/>
-              </a:rPr>
-              <a:t>Compression: 0%</a:t>
-            </a:r>
-          </a:p>
-        </p:txBody>
-      </p:sp>
-      <p:pic>
-        <p:nvPicPr>
-          <p:cNvPr id="17" name="Picture 16" descr="image.png"/>
-          <p:cNvPicPr>
-            <a:picLocks noChangeAspect="1"/>
-          </p:cNvPicPr>
-          <p:nvPr/>
-        </p:nvPicPr>
-        <p:blipFill>
-          <a:blip r:embed="rId5" cstate="email">
-            <a:alphaModFix/>
-            <a:extLst>
-              <a:ext uri="{28A0092B-C50C-407E-A947-70E740481C1C}">
-                <a14:useLocalDpi xmlns:a14="http://schemas.microsoft.com/office/drawing/2010/main"/>
-              </a:ext>
-            </a:extLst>
-          </a:blip>
-          <a:stretch>
-            <a:fillRect/>
-          </a:stretch>
-        </p:blipFill>
-        <p:spPr>
-          <a:xfrm>
-            <a:off x="1066773" y="3982986"/>
-            <a:ext cx="171445" cy="149327"/>
-          </a:xfrm>
-          <a:prstGeom prst="rect">
-            <a:avLst/>
-          </a:prstGeom>
-        </p:spPr>
-      </p:pic>
-      <p:sp>
-        <p:nvSpPr>
-          <p:cNvPr id="18" name="TextBox 17"/>
-          <p:cNvSpPr txBox="1"/>
-          <p:nvPr/>
-        </p:nvSpPr>
-        <p:spPr>
-          <a:xfrm>
-            <a:off x="1276318" y="3879012"/>
-            <a:ext cx="2133546" cy="357277"/>
-          </a:xfrm>
-          <a:prstGeom prst="rect">
-            <a:avLst/>
-          </a:prstGeom>
-          <a:noFill/>
-        </p:spPr>
-        <p:txBody>
-          <a:bodyPr wrap="square" lIns="73152" tIns="54864" rIns="73152" bIns="54864" anchor="ctr">
-            <a:spAutoFit/>
-          </a:bodyPr>
-          <a:lstStyle/>
-          <a:p>
-            <a:pPr algn="l">
-              <a:lnSpc>
-                <a:spcPts val="1950"/>
-              </a:lnSpc>
-              <a:spcBef>
-                <a:spcPts val="0"/>
-              </a:spcBef>
-              <a:spcAft>
-                <a:spcPts val="0"/>
-              </a:spcAft>
-            </a:pPr>
-            <a:r>
-              <a:rPr sz="1600" b="0">
-                <a:solidFill>
-                  <a:srgbClr val="8A92A8"/>
-                </a:solidFill>
-                <a:latin typeface="Inter"/>
-              </a:rPr>
-              <a:t>Chi-square: p ≈ 92.73%</a:t>
-            </a:r>
-          </a:p>
-        </p:txBody>
-      </p:sp>
-      <p:pic>
-        <p:nvPicPr>
-          <p:cNvPr id="19" name="Picture 18" descr="image.png"/>
-          <p:cNvPicPr>
-            <a:picLocks noChangeAspect="1"/>
-          </p:cNvPicPr>
-          <p:nvPr/>
-        </p:nvPicPr>
-        <p:blipFill>
-          <a:blip r:embed="rId5" cstate="email">
-            <a:alphaModFix/>
-            <a:extLst>
-              <a:ext uri="{28A0092B-C50C-407E-A947-70E740481C1C}">
-                <a14:useLocalDpi xmlns:a14="http://schemas.microsoft.com/office/drawing/2010/main"/>
-              </a:ext>
-            </a:extLst>
-          </a:blip>
-          <a:stretch>
-            <a:fillRect/>
-          </a:stretch>
-        </p:blipFill>
-        <p:spPr>
-          <a:xfrm>
-            <a:off x="3486062" y="3982986"/>
-            <a:ext cx="171445" cy="149327"/>
-          </a:xfrm>
-          <a:prstGeom prst="rect">
-            <a:avLst/>
-          </a:prstGeom>
-        </p:spPr>
-      </p:pic>
-      <p:sp>
-        <p:nvSpPr>
-          <p:cNvPr id="20" name="TextBox 19"/>
-          <p:cNvSpPr txBox="1"/>
-          <p:nvPr/>
-        </p:nvSpPr>
-        <p:spPr>
-          <a:xfrm>
-            <a:off x="3695607" y="3879012"/>
-            <a:ext cx="1771575" cy="357277"/>
-          </a:xfrm>
-          <a:prstGeom prst="rect">
-            <a:avLst/>
-          </a:prstGeom>
-          <a:noFill/>
-        </p:spPr>
-        <p:txBody>
-          <a:bodyPr wrap="none" lIns="73152" tIns="54864" rIns="73152" bIns="54864" anchor="ctr">
-            <a:spAutoFit/>
-          </a:bodyPr>
-          <a:lstStyle/>
-          <a:p>
-            <a:pPr algn="l">
-              <a:lnSpc>
-                <a:spcPts val="1950"/>
-              </a:lnSpc>
-              <a:spcBef>
-                <a:spcPts val="0"/>
-              </a:spcBef>
-              <a:spcAft>
-                <a:spcPts val="0"/>
-              </a:spcAft>
-            </a:pPr>
-            <a:r>
-              <a:rPr sz="1600" b="0">
-                <a:solidFill>
-                  <a:srgbClr val="8A92A8"/>
-                </a:solidFill>
-                <a:latin typeface="Inter"/>
-              </a:rPr>
-              <a:t>Mean: 127.5 (ideal)</a:t>
-            </a:r>
-          </a:p>
-        </p:txBody>
-      </p:sp>
-      <p:pic>
-        <p:nvPicPr>
-          <p:cNvPr id="21" name="Picture 20" descr="image.png"/>
-          <p:cNvPicPr>
-            <a:picLocks noChangeAspect="1"/>
-          </p:cNvPicPr>
-          <p:nvPr/>
-        </p:nvPicPr>
-        <p:blipFill>
-          <a:blip r:embed="rId5" cstate="email">
-            <a:alphaModFix/>
-            <a:extLst>
-              <a:ext uri="{28A0092B-C50C-407E-A947-70E740481C1C}">
-                <a14:useLocalDpi xmlns:a14="http://schemas.microsoft.com/office/drawing/2010/main"/>
-              </a:ext>
-            </a:extLst>
-          </a:blip>
-          <a:stretch>
-            <a:fillRect/>
-          </a:stretch>
-        </p:blipFill>
-        <p:spPr>
-          <a:xfrm>
-            <a:off x="1066773" y="4487811"/>
-            <a:ext cx="171445" cy="149327"/>
-          </a:xfrm>
-          <a:prstGeom prst="rect">
-            <a:avLst/>
-          </a:prstGeom>
-        </p:spPr>
-      </p:pic>
-      <p:sp>
-        <p:nvSpPr>
-          <p:cNvPr id="22" name="TextBox 21"/>
-          <p:cNvSpPr txBox="1"/>
-          <p:nvPr/>
-        </p:nvSpPr>
-        <p:spPr>
-          <a:xfrm>
-            <a:off x="1276318" y="4383837"/>
-            <a:ext cx="2116092" cy="357277"/>
-          </a:xfrm>
-          <a:prstGeom prst="rect">
-            <a:avLst/>
-          </a:prstGeom>
-          <a:noFill/>
-        </p:spPr>
-        <p:txBody>
-          <a:bodyPr wrap="none" lIns="73152" tIns="54864" rIns="73152" bIns="54864" anchor="ctr">
-            <a:spAutoFit/>
-          </a:bodyPr>
-          <a:lstStyle/>
-          <a:p>
-            <a:pPr algn="l">
-              <a:lnSpc>
-                <a:spcPts val="1950"/>
-              </a:lnSpc>
-              <a:spcBef>
-                <a:spcPts val="0"/>
-              </a:spcBef>
-              <a:spcAft>
-                <a:spcPts val="0"/>
-              </a:spcAft>
-            </a:pPr>
-            <a:r>
-              <a:rPr sz="1600" b="0">
-                <a:solidFill>
-                  <a:srgbClr val="8A92A8"/>
-                </a:solidFill>
-                <a:latin typeface="Inter"/>
-              </a:rPr>
-              <a:t>π estimate: error 0.04%</a:t>
-            </a:r>
-          </a:p>
-        </p:txBody>
-      </p:sp>
-      <p:pic>
-        <p:nvPicPr>
-          <p:cNvPr id="23" name="Picture 22" descr="image.png"/>
-          <p:cNvPicPr>
-            <a:picLocks noChangeAspect="1"/>
-          </p:cNvPicPr>
-          <p:nvPr/>
-        </p:nvPicPr>
-        <p:blipFill>
-          <a:blip r:embed="rId5" cstate="email">
-            <a:alphaModFix/>
-            <a:extLst>
-              <a:ext uri="{28A0092B-C50C-407E-A947-70E740481C1C}">
-                <a14:useLocalDpi xmlns:a14="http://schemas.microsoft.com/office/drawing/2010/main"/>
-              </a:ext>
-            </a:extLst>
-          </a:blip>
-          <a:stretch>
-            <a:fillRect/>
-          </a:stretch>
-        </p:blipFill>
-        <p:spPr>
-          <a:xfrm>
-            <a:off x="3486062" y="4487811"/>
-            <a:ext cx="171445" cy="149327"/>
-          </a:xfrm>
-          <a:prstGeom prst="rect">
-            <a:avLst/>
-          </a:prstGeom>
-        </p:spPr>
-      </p:pic>
-      <p:sp>
-        <p:nvSpPr>
-          <p:cNvPr id="24" name="TextBox 23"/>
-          <p:cNvSpPr txBox="1"/>
-          <p:nvPr/>
-        </p:nvSpPr>
-        <p:spPr>
-          <a:xfrm>
-            <a:off x="3695607" y="4383837"/>
-            <a:ext cx="2017027" cy="357277"/>
-          </a:xfrm>
-          <a:prstGeom prst="rect">
-            <a:avLst/>
-          </a:prstGeom>
-          <a:noFill/>
-        </p:spPr>
-        <p:txBody>
-          <a:bodyPr wrap="none" lIns="73152" tIns="54864" rIns="73152" bIns="54864" anchor="ctr">
-            <a:spAutoFit/>
-          </a:bodyPr>
-          <a:lstStyle/>
-          <a:p>
-            <a:pPr algn="l">
-              <a:lnSpc>
-                <a:spcPts val="1950"/>
-              </a:lnSpc>
-              <a:spcBef>
-                <a:spcPts val="0"/>
-              </a:spcBef>
-              <a:spcAft>
-                <a:spcPts val="0"/>
-              </a:spcAft>
-            </a:pPr>
-            <a:r>
-              <a:rPr sz="1600" b="0">
-                <a:solidFill>
-                  <a:srgbClr val="8A92A8"/>
-                </a:solidFill>
-                <a:latin typeface="Inter"/>
-              </a:rPr>
-              <a:t>Correlation: 0.0 (ideal)</a:t>
-            </a:r>
-          </a:p>
-        </p:txBody>
-      </p:sp>
-      <p:sp>
-        <p:nvSpPr>
-          <p:cNvPr id="25" name="Rounded Rectangle 24"/>
-          <p:cNvSpPr/>
-          <p:nvPr/>
-        </p:nvSpPr>
-        <p:spPr>
-          <a:xfrm>
-            <a:off x="609584" y="4972050"/>
-            <a:ext cx="5371965" cy="933449"/>
-          </a:xfrm>
-          <a:prstGeom prst="roundRect">
-            <a:avLst>
-              <a:gd name="adj" fmla="val 16326"/>
-            </a:avLst>
-          </a:prstGeom>
-          <a:solidFill>
-            <a:srgbClr val="00D4FF">
-              <a:alpha val="8000"/>
-            </a:srgbClr>
-          </a:solidFill>
-          <a:ln>
-            <a:noFill/>
-          </a:ln>
-        </p:spPr>
-        <p:style>
-          <a:lnRef idx="1">
-            <a:schemeClr val="accent1"/>
-          </a:lnRef>
-          <a:fillRef idx="3">
-            <a:schemeClr val="accent1"/>
-          </a:fillRef>
-          <a:effectRef idx="2">
-            <a:schemeClr val="accent1"/>
-          </a:effectRef>
-          <a:fontRef idx="minor">
-            <a:schemeClr val="lt1"/>
-          </a:fontRef>
-        </p:style>
-        <p:txBody>
-          <a:bodyPr rtlCol="0" anchor="ctr"/>
-          <a:lstStyle/>
-          <a:p>
-            <a:pPr algn="ctr"/>
-            <a:endParaRPr sz="2800"/>
-          </a:p>
-        </p:txBody>
-      </p:sp>
-      <p:pic>
-        <p:nvPicPr>
-          <p:cNvPr id="26" name="Picture 25" descr="image.png"/>
-          <p:cNvPicPr>
-            <a:picLocks noChangeAspect="1"/>
-          </p:cNvPicPr>
-          <p:nvPr/>
-        </p:nvPicPr>
-        <p:blipFill>
-          <a:blip r:embed="rId6" cstate="email">
-            <a:alphaModFix/>
-            <a:extLst>
-              <a:ext uri="{28A0092B-C50C-407E-A947-70E740481C1C}">
-                <a14:useLocalDpi xmlns:a14="http://schemas.microsoft.com/office/drawing/2010/main"/>
-              </a:ext>
-            </a:extLst>
-          </a:blip>
-          <a:stretch>
-            <a:fillRect/>
-          </a:stretch>
-        </p:blipFill>
-        <p:spPr>
-          <a:xfrm>
-            <a:off x="761980" y="5355907"/>
-            <a:ext cx="228594" cy="165734"/>
-          </a:xfrm>
-          <a:prstGeom prst="rect">
-            <a:avLst/>
-          </a:prstGeom>
-        </p:spPr>
-      </p:pic>
-      <p:sp>
-        <p:nvSpPr>
-          <p:cNvPr id="27" name="TextBox 26"/>
-          <p:cNvSpPr txBox="1"/>
-          <p:nvPr/>
-        </p:nvSpPr>
-        <p:spPr>
-          <a:xfrm>
-            <a:off x="1066773" y="5093024"/>
-            <a:ext cx="1876476" cy="405752"/>
-          </a:xfrm>
-          <a:prstGeom prst="rect">
-            <a:avLst/>
-          </a:prstGeom>
-          <a:noFill/>
-        </p:spPr>
-        <p:txBody>
-          <a:bodyPr wrap="none" lIns="73152" tIns="54864" rIns="73152" bIns="54864" anchor="ctr">
-            <a:spAutoFit/>
-          </a:bodyPr>
-          <a:lstStyle/>
-          <a:p>
-            <a:pPr algn="l">
-              <a:lnSpc>
-                <a:spcPts val="2340"/>
-              </a:lnSpc>
-              <a:spcBef>
-                <a:spcPts val="0"/>
-              </a:spcBef>
-              <a:spcAft>
-                <a:spcPts val="0"/>
-              </a:spcAft>
-            </a:pPr>
-            <a:r>
-              <a:rPr sz="2000" b="1">
-                <a:solidFill>
-                  <a:srgbClr val="FFFFFF"/>
-                </a:solidFill>
-                <a:latin typeface="Inter"/>
-              </a:rPr>
-              <a:t>NIST SP 800-90B</a:t>
-            </a:r>
-          </a:p>
-        </p:txBody>
-      </p:sp>
-      <p:sp>
-        <p:nvSpPr>
-          <p:cNvPr id="28" name="TextBox 27"/>
-          <p:cNvSpPr txBox="1"/>
-          <p:nvPr/>
-        </p:nvSpPr>
-        <p:spPr>
-          <a:xfrm>
-            <a:off x="1066773" y="5431586"/>
-            <a:ext cx="2867645" cy="357277"/>
-          </a:xfrm>
-          <a:prstGeom prst="rect">
-            <a:avLst/>
-          </a:prstGeom>
-          <a:noFill/>
-        </p:spPr>
-        <p:txBody>
-          <a:bodyPr wrap="none" lIns="73152" tIns="54864" rIns="73152" bIns="54864" anchor="ctr">
-            <a:spAutoFit/>
-          </a:bodyPr>
-          <a:lstStyle/>
-          <a:p>
-            <a:pPr algn="l">
-              <a:lnSpc>
-                <a:spcPts val="1950"/>
-              </a:lnSpc>
-              <a:spcBef>
-                <a:spcPts val="0"/>
-              </a:spcBef>
-              <a:spcAft>
-                <a:spcPts val="0"/>
-              </a:spcAft>
-            </a:pPr>
-            <a:r>
-              <a:rPr sz="1600" b="0">
-                <a:solidFill>
-                  <a:srgbClr val="8A92A8"/>
-                </a:solidFill>
-                <a:latin typeface="Inter"/>
-              </a:rPr>
-              <a:t>Entropy source assessment tools</a:t>
-            </a:r>
-          </a:p>
-        </p:txBody>
-      </p:sp>
-      <p:pic>
-        <p:nvPicPr>
-          <p:cNvPr id="29" name="Picture 28" descr="image.png"/>
-          <p:cNvPicPr>
-            <a:picLocks noChangeAspect="1"/>
-          </p:cNvPicPr>
-          <p:nvPr/>
-        </p:nvPicPr>
-        <p:blipFill>
-          <a:blip r:embed="rId7" cstate="email">
-            <a:alphaModFix/>
-            <a:extLst>
-              <a:ext uri="{28A0092B-C50C-407E-A947-70E740481C1C}">
-                <a14:useLocalDpi xmlns:a14="http://schemas.microsoft.com/office/drawing/2010/main"/>
-              </a:ext>
-            </a:extLst>
-          </a:blip>
-          <a:stretch>
-            <a:fillRect/>
-          </a:stretch>
-        </p:blipFill>
-        <p:spPr>
-          <a:xfrm>
             <a:off x="6210144" y="86676"/>
             <a:ext cx="247643" cy="224612"/>
           </a:xfrm>
@@ -14012,7 +11787,7 @@
 </p:sld>
 </file>
 
-<file path=ppt/slides/slide14.xml><?xml version="1.0" encoding="utf-8"?>
+<file path=ppt/slides/slide13.xml><?xml version="1.0" encoding="utf-8"?>
 <p:sld xmlns:a="http://schemas.openxmlformats.org/drawingml/2006/main" xmlns:r="http://schemas.openxmlformats.org/officeDocument/2006/relationships" xmlns:p="http://schemas.openxmlformats.org/presentationml/2006/main">
   <p:cSld>
     <p:bg>
@@ -14248,7 +12023,7 @@
           <a:lstStyle/>
           <a:p>
             <a:pPr algn="ctr"/>
-            <a:endParaRPr sz="2800"/>
+            <a:endParaRPr sz="2000"/>
           </a:p>
         </p:txBody>
       </p:sp>
@@ -14305,21 +12080,26 @@
         </p:nvSpPr>
         <p:spPr>
           <a:xfrm>
-            <a:off x="2728669" y="826348"/>
-            <a:ext cx="4857292" cy="413255"/>
+            <a:off x="266692" y="641743"/>
+            <a:ext cx="11584882" cy="913392"/>
           </a:xfrm>
           <a:prstGeom prst="rect">
             <a:avLst/>
           </a:prstGeom>
           <a:noFill/>
-        </p:spPr>
-        <p:txBody>
-          <a:bodyPr wrap="none" lIns="73152" tIns="54864" rIns="73152" bIns="54864" anchor="ctr">
+          <a:ln w="22225">
+            <a:solidFill>
+              <a:schemeClr val="bg1"/>
+            </a:solidFill>
+          </a:ln>
+        </p:spPr>
+        <p:txBody>
+          <a:bodyPr wrap="square" lIns="73152" tIns="54864" rIns="73152" bIns="54864" anchor="ctr">
             <a:spAutoFit/>
           </a:bodyPr>
           <a:lstStyle/>
           <a:p>
-            <a:pPr algn="l">
+            <a:pPr marL="342900" indent="-342900">
               <a:lnSpc>
                 <a:spcPts val="2340"/>
               </a:lnSpc>
@@ -14329,16 +12109,84 @@
               <a:spcAft>
                 <a:spcPts val="1560"/>
               </a:spcAft>
+              <a:buFont typeface="Arial" panose="020B0604020202020204" pitchFamily="34" charset="0"/>
+              <a:buChar char="•"/>
             </a:pPr>
             <a:r>
-              <a:rPr sz="2400" b="1" dirty="0">
+              <a:rPr lang="en-US" sz="2000" b="1" dirty="0">
                 <a:solidFill>
                   <a:srgbClr val="00D4FF"/>
                 </a:solidFill>
                 <a:latin typeface="Space Grotesk"/>
               </a:rPr>
-              <a:t>Can We Generate True Randomness?</a:t>
-            </a:r>
+              <a:t>Unpredictability (deterministic - Pseudorandom) </a:t>
+            </a:r>
+            <a:r>
+              <a:rPr lang="en-US" sz="2000" b="1" dirty="0">
+                <a:solidFill>
+                  <a:schemeClr val="bg1"/>
+                </a:solidFill>
+                <a:latin typeface="Space Grotesk"/>
+              </a:rPr>
+              <a:t>is about our lack of knowledge, while </a:t>
+            </a:r>
+          </a:p>
+          <a:p>
+            <a:pPr marL="342900" indent="-342900">
+              <a:lnSpc>
+                <a:spcPts val="2340"/>
+              </a:lnSpc>
+              <a:spcBef>
+                <a:spcPts val="0"/>
+              </a:spcBef>
+              <a:spcAft>
+                <a:spcPts val="1560"/>
+              </a:spcAft>
+              <a:buFont typeface="Arial" panose="020B0604020202020204" pitchFamily="34" charset="0"/>
+              <a:buChar char="•"/>
+            </a:pPr>
+            <a:r>
+              <a:rPr lang="en-US" sz="2000" b="1" dirty="0">
+                <a:solidFill>
+                  <a:srgbClr val="00D4FF"/>
+                </a:solidFill>
+                <a:latin typeface="Space Grotesk"/>
+              </a:rPr>
+              <a:t>True Randomness (non-deterministic) </a:t>
+            </a:r>
+            <a:r>
+              <a:rPr lang="en-US" sz="2000" b="1" dirty="0">
+                <a:solidFill>
+                  <a:schemeClr val="bg1"/>
+                </a:solidFill>
+                <a:latin typeface="Space Grotesk"/>
+              </a:rPr>
+              <a:t>is about a </a:t>
+            </a:r>
+            <a:r>
+              <a:rPr lang="en-US" sz="2000" b="1" dirty="0">
+                <a:solidFill>
+                  <a:srgbClr val="00D4FF"/>
+                </a:solidFill>
+                <a:latin typeface="Space Grotesk"/>
+              </a:rPr>
+              <a:t>lack of a deterministic pattern </a:t>
+            </a:r>
+            <a:r>
+              <a:rPr lang="en-US" sz="2000" b="1" dirty="0">
+                <a:solidFill>
+                  <a:schemeClr val="bg1"/>
+                </a:solidFill>
+                <a:latin typeface="Space Grotesk"/>
+              </a:rPr>
+              <a:t>(in nature)</a:t>
+            </a:r>
+            <a:endParaRPr sz="2000" b="1" dirty="0">
+              <a:solidFill>
+                <a:schemeClr val="bg1"/>
+              </a:solidFill>
+              <a:latin typeface="Space Grotesk"/>
+            </a:endParaRPr>
           </a:p>
         </p:txBody>
       </p:sp>
@@ -14365,7 +12213,7 @@
         </p:blipFill>
         <p:spPr>
           <a:xfrm>
-            <a:off x="5858520" y="1524785"/>
+            <a:off x="5858520" y="1821660"/>
             <a:ext cx="304792" cy="216876"/>
           </a:xfrm>
           <a:prstGeom prst="rect">
@@ -14381,7 +12229,7 @@
         </p:nvSpPr>
         <p:spPr>
           <a:xfrm>
-            <a:off x="6353808" y="1418982"/>
+            <a:off x="6353808" y="1715857"/>
             <a:ext cx="2795317" cy="418961"/>
           </a:xfrm>
           <a:prstGeom prst="rect">
@@ -14426,7 +12274,7 @@
         </p:nvSpPr>
         <p:spPr>
           <a:xfrm>
-            <a:off x="6353808" y="1928499"/>
+            <a:off x="6353808" y="2023499"/>
             <a:ext cx="5629134" cy="685800"/>
           </a:xfrm>
           <a:prstGeom prst="rect">
@@ -14452,7 +12300,7 @@
               </a:spcAft>
             </a:pPr>
             <a:r>
-              <a:rPr b="0">
+              <a:rPr b="0" dirty="0">
                 <a:solidFill>
                   <a:srgbClr val="B0B8D4"/>
                 </a:solidFill>
@@ -14461,7 +12309,7 @@
               <a:t> An event can be </a:t>
             </a:r>
             <a:r>
-              <a:rPr b="0">
+              <a:rPr b="0" dirty="0">
                 <a:solidFill>
                   <a:srgbClr val="00D4FF"/>
                 </a:solidFill>
@@ -14470,7 +12318,7 @@
               <a:t>unpredictable</a:t>
             </a:r>
             <a:r>
-              <a:rPr b="0">
+              <a:rPr b="0" dirty="0">
                 <a:solidFill>
                   <a:srgbClr val="B0B8D4"/>
                 </a:solidFill>
@@ -14479,7 +12327,7 @@
               <a:t> due to insufficient data (entropy), but not necessarily </a:t>
             </a:r>
             <a:r>
-              <a:rPr b="0">
+              <a:rPr b="0" dirty="0">
                 <a:solidFill>
                   <a:srgbClr val="00D4FF"/>
                 </a:solidFill>
@@ -14488,7 +12336,7 @@
               <a:t>truly random</a:t>
             </a:r>
             <a:r>
-              <a:rPr b="0">
+              <a:rPr b="0" dirty="0">
                 <a:solidFill>
                   <a:srgbClr val="B0B8D4"/>
                 </a:solidFill>
@@ -14522,7 +12370,7 @@
         </p:blipFill>
         <p:spPr>
           <a:xfrm>
-            <a:off x="114296" y="1460052"/>
+            <a:off x="221171" y="1721302"/>
             <a:ext cx="304792" cy="246184"/>
           </a:xfrm>
           <a:prstGeom prst="rect">
@@ -14538,7 +12386,7 @@
         </p:nvSpPr>
         <p:spPr>
           <a:xfrm>
-            <a:off x="609584" y="1368903"/>
+            <a:off x="716459" y="1630153"/>
             <a:ext cx="2376805" cy="418961"/>
           </a:xfrm>
           <a:prstGeom prst="rect">
@@ -14564,7 +12412,7 @@
               </a:spcAft>
             </a:pPr>
             <a:r>
-              <a:rPr sz="2000" b="1">
+              <a:rPr sz="2000" b="1" dirty="0">
                 <a:solidFill>
                   <a:srgbClr val="FFFFFF"/>
                 </a:solidFill>
@@ -14583,7 +12431,7 @@
         </p:nvSpPr>
         <p:spPr>
           <a:xfrm>
-            <a:off x="711181" y="1870961"/>
+            <a:off x="711181" y="1965961"/>
             <a:ext cx="5629134" cy="976036"/>
           </a:xfrm>
           <a:prstGeom prst="rect">
@@ -14642,7 +12490,7 @@
         </p:blipFill>
         <p:spPr>
           <a:xfrm>
-            <a:off x="756725" y="2860535"/>
+            <a:off x="756725" y="2955535"/>
             <a:ext cx="10854703" cy="3883166"/>
           </a:xfrm>
           <a:prstGeom prst="rect">
@@ -14797,7 +12645,7 @@
         </p:blipFill>
         <p:spPr>
           <a:xfrm>
-            <a:off x="609584" y="1219970"/>
+            <a:off x="609584" y="1065595"/>
             <a:ext cx="342891" cy="289691"/>
           </a:xfrm>
           <a:prstGeom prst="rect">
@@ -14813,8 +12661,8 @@
         </p:nvSpPr>
         <p:spPr>
           <a:xfrm>
-            <a:off x="1066773" y="1110645"/>
-            <a:ext cx="1701876" cy="508344"/>
+            <a:off x="1066773" y="956270"/>
+            <a:ext cx="3911455" cy="508344"/>
           </a:xfrm>
           <a:prstGeom prst="rect">
             <a:avLst/>
@@ -14827,19 +12675,13 @@
           </a:bodyPr>
           <a:lstStyle/>
           <a:p>
-            <a:pPr algn="l">
+            <a:pPr>
               <a:lnSpc>
                 <a:spcPts val="3120"/>
               </a:lnSpc>
-              <a:spcBef>
-                <a:spcPts val="0"/>
-              </a:spcBef>
-              <a:spcAft>
-                <a:spcPts val="0"/>
-              </a:spcAft>
             </a:pPr>
             <a:r>
-              <a:rPr sz="2800" b="1">
+              <a:rPr sz="2800" b="1" dirty="0">
                 <a:solidFill>
                   <a:srgbClr val="FFFFFF"/>
                 </a:solidFill>
@@ -14847,6 +12689,39 @@
               </a:rPr>
               <a:t>True RNGs</a:t>
             </a:r>
+            <a:r>
+              <a:rPr lang="en-US" sz="2800" b="1" dirty="0">
+                <a:solidFill>
+                  <a:srgbClr val="FFFFFF"/>
+                </a:solidFill>
+                <a:latin typeface="Space Grotesk"/>
+              </a:rPr>
+              <a:t> (</a:t>
+            </a:r>
+            <a:r>
+              <a:rPr lang="en-US" sz="2800" dirty="0">
+                <a:solidFill>
+                  <a:srgbClr val="00D4FF"/>
+                </a:solidFill>
+                <a:latin typeface="Inter"/>
+              </a:rPr>
+              <a:t>truly random</a:t>
+            </a:r>
+            <a:r>
+              <a:rPr lang="en-US" sz="2800" b="1" dirty="0">
+                <a:solidFill>
+                  <a:srgbClr val="FFFFFF"/>
+                </a:solidFill>
+                <a:latin typeface="Space Grotesk"/>
+              </a:rPr>
+              <a:t>)</a:t>
+            </a:r>
+            <a:endParaRPr sz="2800" b="1" dirty="0">
+              <a:solidFill>
+                <a:srgbClr val="FFFFFF"/>
+              </a:solidFill>
+              <a:latin typeface="Space Grotesk"/>
+            </a:endParaRPr>
           </a:p>
         </p:txBody>
       </p:sp>
@@ -14873,7 +12748,7 @@
         </p:blipFill>
         <p:spPr>
           <a:xfrm>
-            <a:off x="1066773" y="1869641"/>
+            <a:off x="1066773" y="1715266"/>
             <a:ext cx="190495" cy="95249"/>
           </a:xfrm>
           <a:prstGeom prst="rect">
@@ -14889,7 +12764,7 @@
         </p:nvSpPr>
         <p:spPr>
           <a:xfrm>
-            <a:off x="1333466" y="1751027"/>
+            <a:off x="1333466" y="1596652"/>
             <a:ext cx="3406253" cy="380104"/>
           </a:xfrm>
           <a:prstGeom prst="rect">
@@ -14949,7 +12824,7 @@
         </p:blipFill>
         <p:spPr>
           <a:xfrm>
-            <a:off x="1066773" y="2288741"/>
+            <a:off x="1066773" y="2134366"/>
             <a:ext cx="190495" cy="95249"/>
           </a:xfrm>
           <a:prstGeom prst="rect">
@@ -14965,7 +12840,7 @@
         </p:nvSpPr>
         <p:spPr>
           <a:xfrm>
-            <a:off x="1333466" y="2170127"/>
+            <a:off x="1333466" y="2015752"/>
             <a:ext cx="3196644" cy="380104"/>
           </a:xfrm>
           <a:prstGeom prst="rect">
@@ -15025,7 +12900,7 @@
         </p:blipFill>
         <p:spPr>
           <a:xfrm>
-            <a:off x="1066773" y="2726891"/>
+            <a:off x="1066773" y="2572516"/>
             <a:ext cx="190495" cy="95249"/>
           </a:xfrm>
           <a:prstGeom prst="rect">
@@ -15041,7 +12916,7 @@
         </p:nvSpPr>
         <p:spPr>
           <a:xfrm>
-            <a:off x="1333466" y="2608277"/>
+            <a:off x="1333466" y="2453902"/>
             <a:ext cx="3095784" cy="380104"/>
           </a:xfrm>
           <a:prstGeom prst="rect">
@@ -15101,7 +12976,7 @@
         </p:blipFill>
         <p:spPr>
           <a:xfrm>
-            <a:off x="1066773" y="3145991"/>
+            <a:off x="1066773" y="2991616"/>
             <a:ext cx="190495" cy="95249"/>
           </a:xfrm>
           <a:prstGeom prst="rect">
@@ -15117,7 +12992,7 @@
         </p:nvSpPr>
         <p:spPr>
           <a:xfrm>
-            <a:off x="1333466" y="3027377"/>
+            <a:off x="1333466" y="2873002"/>
             <a:ext cx="2928494" cy="380104"/>
           </a:xfrm>
           <a:prstGeom prst="rect">
@@ -15177,7 +13052,7 @@
         </p:blipFill>
         <p:spPr>
           <a:xfrm>
-            <a:off x="1066773" y="3584140"/>
+            <a:off x="1066773" y="3429765"/>
             <a:ext cx="190495" cy="95249"/>
           </a:xfrm>
           <a:prstGeom prst="rect">
@@ -15193,7 +13068,7 @@
         </p:nvSpPr>
         <p:spPr>
           <a:xfrm>
-            <a:off x="1333466" y="3465526"/>
+            <a:off x="1333466" y="3311151"/>
             <a:ext cx="3446456" cy="380104"/>
           </a:xfrm>
           <a:prstGeom prst="rect">
@@ -15262,7 +13137,7 @@
         </p:blipFill>
         <p:spPr>
           <a:xfrm>
-            <a:off x="6324441" y="1072168"/>
+            <a:off x="6217566" y="1072168"/>
             <a:ext cx="342891" cy="242394"/>
           </a:xfrm>
           <a:prstGeom prst="rect">
@@ -15278,8 +13153,8 @@
         </p:nvSpPr>
         <p:spPr>
           <a:xfrm>
-            <a:off x="6781630" y="939195"/>
-            <a:ext cx="3295518" cy="508344"/>
+            <a:off x="6674755" y="939195"/>
+            <a:ext cx="5626797" cy="508344"/>
           </a:xfrm>
           <a:prstGeom prst="rect">
             <a:avLst/>
@@ -15292,19 +13167,13 @@
           </a:bodyPr>
           <a:lstStyle/>
           <a:p>
-            <a:pPr algn="l">
+            <a:pPr>
               <a:lnSpc>
                 <a:spcPts val="3120"/>
               </a:lnSpc>
-              <a:spcBef>
-                <a:spcPts val="0"/>
-              </a:spcBef>
-              <a:spcAft>
-                <a:spcPts val="0"/>
-              </a:spcAft>
             </a:pPr>
             <a:r>
-              <a:rPr sz="2800" b="1">
+              <a:rPr sz="2800" b="1" dirty="0">
                 <a:solidFill>
                   <a:srgbClr val="FFFFFF"/>
                 </a:solidFill>
@@ -15312,6 +13181,39 @@
               </a:rPr>
               <a:t>Pseudorandom RNGs</a:t>
             </a:r>
+            <a:r>
+              <a:rPr lang="en-US" sz="2800" b="1" dirty="0">
+                <a:solidFill>
+                  <a:srgbClr val="FFFFFF"/>
+                </a:solidFill>
+                <a:latin typeface="Space Grotesk"/>
+              </a:rPr>
+              <a:t> (</a:t>
+            </a:r>
+            <a:r>
+              <a:rPr lang="en-US" sz="2800" dirty="0">
+                <a:solidFill>
+                  <a:srgbClr val="00D4FF"/>
+                </a:solidFill>
+                <a:latin typeface="Inter"/>
+              </a:rPr>
+              <a:t>unpredictable</a:t>
+            </a:r>
+            <a:r>
+              <a:rPr lang="en-US" sz="2800" b="1" dirty="0">
+                <a:solidFill>
+                  <a:srgbClr val="FFFFFF"/>
+                </a:solidFill>
+                <a:latin typeface="Space Grotesk"/>
+              </a:rPr>
+              <a:t>)</a:t>
+            </a:r>
+            <a:endParaRPr sz="2800" b="1" dirty="0">
+              <a:solidFill>
+                <a:srgbClr val="FFFFFF"/>
+              </a:solidFill>
+              <a:latin typeface="Space Grotesk"/>
+            </a:endParaRPr>
           </a:p>
         </p:txBody>
       </p:sp>
@@ -15715,10 +13617,10 @@
       </p:sp>
       <p:pic>
         <p:nvPicPr>
-          <p:cNvPr id="16" name="Picture 15">
+          <p:cNvPr id="18" name="Picture 17">
             <a:extLst>
               <a:ext uri="{FF2B5EF4-FFF2-40B4-BE49-F238E27FC236}">
-                <a16:creationId xmlns:a16="http://schemas.microsoft.com/office/drawing/2014/main" id="{8A4FCB3F-3844-BA00-4384-0E239E06B5B1}"/>
+                <a16:creationId xmlns:a16="http://schemas.microsoft.com/office/drawing/2014/main" id="{732433CC-A673-FC55-CC18-C134CA89CAE1}"/>
               </a:ext>
             </a:extLst>
           </p:cNvPr>
@@ -15741,7 +13643,7 @@
         </p:blipFill>
         <p:spPr>
           <a:xfrm>
-            <a:off x="952475" y="4469695"/>
+            <a:off x="893613" y="4287379"/>
             <a:ext cx="10150954" cy="2095155"/>
           </a:xfrm>
           <a:prstGeom prst="rect">
@@ -15917,7 +13819,7 @@
           <a:lstStyle/>
           <a:p>
             <a:pPr algn="ctr"/>
-            <a:endParaRPr sz="3600"/>
+            <a:endParaRPr sz="2800"/>
           </a:p>
         </p:txBody>
       </p:sp>
@@ -15960,8 +13862,8 @@
         </p:nvSpPr>
         <p:spPr>
           <a:xfrm>
-            <a:off x="1371565" y="937600"/>
-            <a:ext cx="4357475" cy="478849"/>
+            <a:off x="1371565" y="948500"/>
+            <a:ext cx="3304110" cy="457048"/>
           </a:xfrm>
           <a:prstGeom prst="rect">
             <a:avLst/>
@@ -15986,7 +13888,7 @@
               </a:spcAft>
             </a:pPr>
             <a:r>
-              <a:rPr sz="3200" b="1">
+              <a:rPr sz="2400" b="1">
                 <a:solidFill>
                   <a:srgbClr val="FFFFFF"/>
                 </a:solidFill>
@@ -16031,7 +13933,7 @@
               </a:spcAft>
             </a:pPr>
             <a:r>
-              <a:rPr sz="2400" b="0">
+              <a:rPr b="0">
                 <a:solidFill>
                   <a:srgbClr val="B0B8D4"/>
                 </a:solidFill>
@@ -16086,7 +13988,7 @@
           <a:lstStyle/>
           <a:p>
             <a:pPr algn="ctr"/>
-            <a:endParaRPr sz="3600"/>
+            <a:endParaRPr sz="2800"/>
           </a:p>
         </p:txBody>
       </p:sp>
@@ -16129,8 +14031,8 @@
         </p:nvSpPr>
         <p:spPr>
           <a:xfrm>
-            <a:off x="1371565" y="2861651"/>
-            <a:ext cx="1314719" cy="478849"/>
+            <a:off x="1371565" y="2872551"/>
+            <a:ext cx="1024576" cy="457048"/>
           </a:xfrm>
           <a:prstGeom prst="rect">
             <a:avLst/>
@@ -16155,7 +14057,7 @@
               </a:spcAft>
             </a:pPr>
             <a:r>
-              <a:rPr sz="3200" b="1">
+              <a:rPr sz="2400" b="1">
                 <a:solidFill>
                   <a:srgbClr val="FFFFFF"/>
                 </a:solidFill>
@@ -16200,7 +14102,7 @@
               </a:spcAft>
             </a:pPr>
             <a:r>
-              <a:rPr sz="2400" b="0">
+              <a:rPr b="0">
                 <a:solidFill>
                   <a:srgbClr val="B0B8D4"/>
                 </a:solidFill>
@@ -16255,7 +14157,7 @@
           <a:lstStyle/>
           <a:p>
             <a:pPr algn="ctr"/>
-            <a:endParaRPr sz="3600"/>
+            <a:endParaRPr sz="2800"/>
           </a:p>
         </p:txBody>
       </p:sp>
@@ -16298,8 +14200,8 @@
         </p:nvSpPr>
         <p:spPr>
           <a:xfrm>
-            <a:off x="7162620" y="1109050"/>
-            <a:ext cx="2443746" cy="478849"/>
+            <a:off x="7162620" y="1119950"/>
+            <a:ext cx="1871794" cy="457048"/>
           </a:xfrm>
           <a:prstGeom prst="rect">
             <a:avLst/>
@@ -16324,7 +14226,7 @@
               </a:spcAft>
             </a:pPr>
             <a:r>
-              <a:rPr sz="3200" b="1">
+              <a:rPr sz="2400" b="1">
                 <a:solidFill>
                   <a:srgbClr val="FFFFFF"/>
                 </a:solidFill>
@@ -16343,8 +14245,8 @@
         </p:nvSpPr>
         <p:spPr>
           <a:xfrm>
-            <a:off x="7162620" y="1676608"/>
-            <a:ext cx="5420843" cy="413255"/>
+            <a:off x="7162620" y="1686771"/>
+            <a:ext cx="4113498" cy="392928"/>
           </a:xfrm>
           <a:prstGeom prst="rect">
             <a:avLst/>
@@ -16369,7 +14271,7 @@
               </a:spcAft>
             </a:pPr>
             <a:r>
-              <a:rPr sz="2400" b="0">
+              <a:rPr b="0">
                 <a:solidFill>
                   <a:srgbClr val="B0B8D4"/>
                 </a:solidFill>
@@ -16378,7 +14280,7 @@
               <a:t> </a:t>
             </a:r>
             <a:r>
-              <a:rPr sz="2400" b="0">
+              <a:rPr b="0">
                 <a:solidFill>
                   <a:srgbClr val="00D4FF"/>
                 </a:solidFill>
@@ -16387,7 +14289,7 @@
               <a:t>Fundamental basis</a:t>
             </a:r>
             <a:r>
-              <a:rPr sz="2400" b="0">
+              <a:rPr b="0">
                 <a:solidFill>
                   <a:srgbClr val="B0B8D4"/>
                 </a:solidFill>
@@ -16442,7 +14344,7 @@
           <a:lstStyle/>
           <a:p>
             <a:pPr algn="ctr"/>
-            <a:endParaRPr sz="3600"/>
+            <a:endParaRPr sz="2800"/>
           </a:p>
         </p:txBody>
       </p:sp>
@@ -16485,8 +14387,8 @@
         </p:nvSpPr>
         <p:spPr>
           <a:xfrm>
-            <a:off x="7162620" y="2690201"/>
-            <a:ext cx="4370877" cy="478849"/>
+            <a:off x="7162620" y="2701101"/>
+            <a:ext cx="3319370" cy="457048"/>
           </a:xfrm>
           <a:prstGeom prst="rect">
             <a:avLst/>
@@ -16511,7 +14413,7 @@
               </a:spcAft>
             </a:pPr>
             <a:r>
-              <a:rPr sz="3200" b="1">
+              <a:rPr sz="2400" b="1">
                 <a:solidFill>
                   <a:srgbClr val="FFFFFF"/>
                 </a:solidFill>
@@ -16556,7 +14458,7 @@
               </a:spcAft>
             </a:pPr>
             <a:r>
-              <a:rPr sz="2400" b="0">
+              <a:rPr b="0">
                 <a:solidFill>
                   <a:srgbClr val="B0B8D4"/>
                 </a:solidFill>

--- a/Presentations/4.True Randomness Testing & Random Number Generators.pptx
+++ b/Presentations/4.True Randomness Testing & Random Number Generators.pptx
@@ -15104,7 +15104,7 @@
         <p:spPr>
           <a:xfrm>
             <a:off x="1257268" y="3833883"/>
-            <a:ext cx="1431867" cy="418961"/>
+            <a:ext cx="1712072" cy="418961"/>
           </a:xfrm>
           <a:prstGeom prst="rect">
             <a:avLst/>
@@ -15129,14 +15129,20 @@
               </a:spcAft>
             </a:pPr>
             <a:r>
-              <a:rPr sz="2000" b="1">
+              <a:rPr lang="en-US" sz="2000" b="1" dirty="0">
                 <a:solidFill>
                   <a:srgbClr val="FFFFFF"/>
                 </a:solidFill>
                 <a:latin typeface="Space Grotesk"/>
               </a:rPr>
-              <a:t>Critical Goal</a:t>
-            </a:r>
+              <a:t>Very Basic Test</a:t>
+            </a:r>
+            <a:endParaRPr sz="2000" b="1" dirty="0">
+              <a:solidFill>
+                <a:srgbClr val="FFFFFF"/>
+              </a:solidFill>
+              <a:latin typeface="Space Grotesk"/>
+            </a:endParaRPr>
           </a:p>
         </p:txBody>
       </p:sp>
@@ -15148,8 +15154,8 @@
         </p:nvSpPr>
         <p:spPr>
           <a:xfrm>
-            <a:off x="876278" y="4381499"/>
-            <a:ext cx="5705332" cy="714375"/>
+            <a:off x="876278" y="4375510"/>
+            <a:ext cx="5705332" cy="726353"/>
           </a:xfrm>
           <a:prstGeom prst="rect">
             <a:avLst/>
@@ -15174,32 +15180,65 @@
               </a:spcAft>
             </a:pPr>
             <a:r>
-              <a:rPr b="0">
+              <a:rPr lang="en-US" sz="2000" dirty="0">
                 <a:solidFill>
                   <a:srgbClr val="B0B8D4"/>
                 </a:solidFill>
                 <a:latin typeface="Inter"/>
               </a:rPr>
-              <a:t> Minimize </a:t>
-            </a:r>
-            <a:r>
-              <a:rPr b="0">
-                <a:solidFill>
-                  <a:srgbClr val="00D4FF"/>
+              <a:t>O</a:t>
+            </a:r>
+            <a:r>
+              <a:rPr lang="en-US" sz="2000" b="0" dirty="0">
+                <a:solidFill>
+                  <a:srgbClr val="B0B8D4"/>
                 </a:solidFill>
                 <a:latin typeface="Inter"/>
               </a:rPr>
-              <a:t>Type II errors</a:t>
-            </a:r>
-            <a:r>
-              <a:rPr b="0">
+              <a:t>ne of the best ways to measure how </a:t>
+            </a:r>
+            <a:r>
+              <a:rPr lang="en-US" sz="2000" b="1" dirty="0">
+                <a:solidFill>
+                  <a:schemeClr val="bg1"/>
+                </a:solidFill>
+                <a:latin typeface="Inter"/>
+              </a:rPr>
+              <a:t>random</a:t>
+            </a:r>
+            <a:r>
+              <a:rPr lang="en-US" sz="2000" b="0" dirty="0">
                 <a:solidFill>
                   <a:srgbClr val="B0B8D4"/>
                 </a:solidFill>
                 <a:latin typeface="Inter"/>
               </a:rPr>
-              <a:t> — rejecting the null hypothesis when it's actually false </a:t>
-            </a:r>
+              <a:t> a file is involves trying to </a:t>
+            </a:r>
+            <a:r>
+              <a:rPr lang="en-US" sz="2000" b="1" dirty="0">
+                <a:solidFill>
+                  <a:schemeClr val="bg1"/>
+                </a:solidFill>
+                <a:latin typeface="Inter"/>
+              </a:rPr>
+              <a:t>compress</a:t>
+            </a:r>
+            <a:r>
+              <a:rPr lang="en-US" sz="2000" b="0" dirty="0">
+                <a:solidFill>
+                  <a:srgbClr val="B0B8D4"/>
+                </a:solidFill>
+                <a:latin typeface="Inter"/>
+              </a:rPr>
+              <a:t> it.</a:t>
+            </a:r>
+            <a:endParaRPr sz="2000" b="0" dirty="0">
+              <a:solidFill>
+                <a:srgbClr val="B0B8D4"/>
+              </a:solidFill>
+              <a:latin typeface="Inter"/>
+            </a:endParaRPr>
           </a:p>
         </p:txBody>
       </p:sp>

--- a/Presentations/4.True Randomness Testing & Random Number Generators.pptx
+++ b/Presentations/4.True Randomness Testing & Random Number Generators.pptx
@@ -11866,8 +11866,8 @@
         </p:nvSpPr>
         <p:spPr>
           <a:xfrm>
-            <a:off x="609584" y="116607"/>
-            <a:ext cx="3126177" cy="566886"/>
+            <a:off x="609584" y="117184"/>
+            <a:ext cx="2379113" cy="565732"/>
           </a:xfrm>
           <a:prstGeom prst="rect">
             <a:avLst/>
@@ -11880,74 +11880,735 @@
           </a:bodyPr>
           <a:lstStyle/>
           <a:p>
-            <a:pPr algn="l">
+            <a:pPr>
               <a:lnSpc>
                 <a:spcPts val="3900"/>
               </a:lnSpc>
-              <a:spcBef>
-                <a:spcPts val="0"/>
-              </a:spcBef>
-              <a:spcAft>
-                <a:spcPts val="0"/>
-              </a:spcAft>
             </a:pPr>
             <a:r>
-              <a:rPr lang="en-US" sz="2392" b="1" dirty="0">
-                <a:solidFill>
-                  <a:srgbClr val="FFFFFF"/>
-                </a:solidFill>
-                <a:latin typeface="Space Grotesk"/>
-              </a:rPr>
-              <a:t>Strategy of </a:t>
-            </a:r>
-            <a:r>
-              <a:rPr sz="2392" b="1" dirty="0">
-                <a:solidFill>
-                  <a:srgbClr val="FFFFFF"/>
-                </a:solidFill>
-                <a:latin typeface="Space Grotesk"/>
-              </a:rPr>
-              <a:t>RNG Testing</a:t>
-            </a:r>
-          </a:p>
-        </p:txBody>
-      </p:sp>
-      <p:pic>
-        <p:nvPicPr>
-          <p:cNvPr id="29" name="Picture 28">
+              <a:rPr lang="en-US" sz="2400" b="1" dirty="0">
+                <a:solidFill>
+                  <a:schemeClr val="bg1"/>
+                </a:solidFill>
+                <a:latin typeface="Menlo" panose="020B0609030804020204" pitchFamily="49" charset="0"/>
+              </a:rPr>
+              <a:t>Useful Links</a:t>
+            </a:r>
+            <a:endParaRPr sz="2392" b="1" dirty="0">
+              <a:solidFill>
+                <a:srgbClr val="FFFFFF"/>
+              </a:solidFill>
+              <a:latin typeface="Space Grotesk"/>
+            </a:endParaRPr>
+          </a:p>
+        </p:txBody>
+      </p:sp>
+      <p:sp>
+        <p:nvSpPr>
+          <p:cNvPr id="5" name="TextBox 4">
             <a:extLst>
               <a:ext uri="{FF2B5EF4-FFF2-40B4-BE49-F238E27FC236}">
-                <a16:creationId xmlns:a16="http://schemas.microsoft.com/office/drawing/2014/main" id="{FB01ED16-AAC6-1EAE-A9F5-78120C48B8A9}"/>
+                <a16:creationId xmlns:a16="http://schemas.microsoft.com/office/drawing/2014/main" id="{F9840C30-7B45-C288-3018-5068157CE3BE}"/>
               </a:ext>
             </a:extLst>
           </p:cNvPr>
-          <p:cNvPicPr>
-            <a:picLocks noChangeAspect="1"/>
-          </p:cNvPicPr>
-          <p:nvPr/>
-        </p:nvPicPr>
-        <p:blipFill>
-          <a:blip r:embed="rId2" cstate="email">
-            <a:extLst>
-              <a:ext uri="{28A0092B-C50C-407E-A947-70E740481C1C}">
-                <a14:useLocalDpi xmlns:a14="http://schemas.microsoft.com/office/drawing/2010/main"/>
-              </a:ext>
-            </a:extLst>
-          </a:blip>
-          <a:stretch>
-            <a:fillRect/>
-          </a:stretch>
-        </p:blipFill>
-        <p:spPr>
-          <a:xfrm>
-            <a:off x="471689" y="1778696"/>
-            <a:ext cx="10928455" cy="3883068"/>
-          </a:xfrm>
-          <a:prstGeom prst="rect">
-            <a:avLst/>
-          </a:prstGeom>
-        </p:spPr>
-      </p:pic>
+          <p:cNvSpPr txBox="1"/>
+          <p:nvPr/>
+        </p:nvSpPr>
+        <p:spPr>
+          <a:xfrm>
+            <a:off x="609583" y="953482"/>
+            <a:ext cx="11253865" cy="4237699"/>
+          </a:xfrm>
+          <a:prstGeom prst="rect">
+            <a:avLst/>
+          </a:prstGeom>
+          <a:noFill/>
+        </p:spPr>
+        <p:txBody>
+          <a:bodyPr wrap="square">
+            <a:spAutoFit/>
+          </a:bodyPr>
+          <a:lstStyle/>
+          <a:p>
+            <a:pPr>
+              <a:lnSpc>
+                <a:spcPts val="1350"/>
+              </a:lnSpc>
+              <a:buNone/>
+            </a:pPr>
+            <a:endParaRPr lang="en-US" b="0" dirty="0">
+              <a:solidFill>
+                <a:schemeClr val="bg1"/>
+              </a:solidFill>
+              <a:effectLst/>
+              <a:latin typeface="Calibri" panose="020F0502020204030204" pitchFamily="34" charset="0"/>
+              <a:cs typeface="Calibri" panose="020F0502020204030204" pitchFamily="34" charset="0"/>
+            </a:endParaRPr>
+          </a:p>
+          <a:p>
+            <a:pPr>
+              <a:lnSpc>
+                <a:spcPts val="1350"/>
+              </a:lnSpc>
+              <a:buNone/>
+            </a:pPr>
+            <a:br>
+              <a:rPr lang="en-US" b="0" dirty="0">
+                <a:solidFill>
+                  <a:schemeClr val="bg1"/>
+                </a:solidFill>
+                <a:effectLst/>
+                <a:latin typeface="Calibri" panose="020F0502020204030204" pitchFamily="34" charset="0"/>
+                <a:cs typeface="Calibri" panose="020F0502020204030204" pitchFamily="34" charset="0"/>
+              </a:rPr>
+            </a:br>
+            <a:endParaRPr lang="en-US" b="0" dirty="0">
+              <a:solidFill>
+                <a:schemeClr val="bg1"/>
+              </a:solidFill>
+              <a:effectLst/>
+              <a:latin typeface="Calibri" panose="020F0502020204030204" pitchFamily="34" charset="0"/>
+              <a:cs typeface="Calibri" panose="020F0502020204030204" pitchFamily="34" charset="0"/>
+            </a:endParaRPr>
+          </a:p>
+          <a:p>
+            <a:pPr>
+              <a:lnSpc>
+                <a:spcPts val="1350"/>
+              </a:lnSpc>
+              <a:buNone/>
+            </a:pPr>
+            <a:r>
+              <a:rPr lang="en-US" sz="2800" b="1" dirty="0">
+                <a:solidFill>
+                  <a:schemeClr val="bg1"/>
+                </a:solidFill>
+                <a:effectLst/>
+                <a:latin typeface="Calibri" panose="020F0502020204030204" pitchFamily="34" charset="0"/>
+                <a:cs typeface="Calibri" panose="020F0502020204030204" pitchFamily="34" charset="0"/>
+              </a:rPr>
+              <a:t>NIST-Statistical-Test-Suite</a:t>
+            </a:r>
+            <a:r>
+              <a:rPr lang="en-US" b="1" dirty="0">
+                <a:solidFill>
+                  <a:schemeClr val="bg1"/>
+                </a:solidFill>
+                <a:effectLst/>
+                <a:latin typeface="Calibri" panose="020F0502020204030204" pitchFamily="34" charset="0"/>
+                <a:cs typeface="Calibri" panose="020F0502020204030204" pitchFamily="34" charset="0"/>
+              </a:rPr>
+              <a:t> </a:t>
+            </a:r>
+            <a:endParaRPr lang="en-US" b="0" dirty="0">
+              <a:solidFill>
+                <a:schemeClr val="bg1"/>
+              </a:solidFill>
+              <a:effectLst/>
+              <a:latin typeface="Calibri" panose="020F0502020204030204" pitchFamily="34" charset="0"/>
+              <a:cs typeface="Calibri" panose="020F0502020204030204" pitchFamily="34" charset="0"/>
+            </a:endParaRPr>
+          </a:p>
+          <a:p>
+            <a:pPr>
+              <a:lnSpc>
+                <a:spcPts val="1350"/>
+              </a:lnSpc>
+              <a:buNone/>
+            </a:pPr>
+            <a:r>
+              <a:rPr lang="en-US" b="0" u="sng" dirty="0">
+                <a:solidFill>
+                  <a:schemeClr val="bg1"/>
+                </a:solidFill>
+                <a:effectLst/>
+                <a:latin typeface="Calibri" panose="020F0502020204030204" pitchFamily="34" charset="0"/>
+                <a:cs typeface="Calibri" panose="020F0502020204030204" pitchFamily="34" charset="0"/>
+              </a:rPr>
+              <a:t>https://</a:t>
+            </a:r>
+            <a:r>
+              <a:rPr lang="en-US" b="0" u="sng" dirty="0" err="1">
+                <a:solidFill>
+                  <a:schemeClr val="bg1"/>
+                </a:solidFill>
+                <a:effectLst/>
+                <a:latin typeface="Calibri" panose="020F0502020204030204" pitchFamily="34" charset="0"/>
+                <a:cs typeface="Calibri" panose="020F0502020204030204" pitchFamily="34" charset="0"/>
+              </a:rPr>
+              <a:t>csrc.nist.gov</a:t>
+            </a:r>
+            <a:r>
+              <a:rPr lang="en-US" b="0" u="sng" dirty="0">
+                <a:solidFill>
+                  <a:schemeClr val="bg1"/>
+                </a:solidFill>
+                <a:effectLst/>
+                <a:latin typeface="Calibri" panose="020F0502020204030204" pitchFamily="34" charset="0"/>
+                <a:cs typeface="Calibri" panose="020F0502020204030204" pitchFamily="34" charset="0"/>
+              </a:rPr>
+              <a:t>/Projects/random-bit-generation/Documentation-and-Software/Guide-to-the-Statistical-Tests</a:t>
+            </a:r>
+          </a:p>
+          <a:p>
+            <a:pPr>
+              <a:lnSpc>
+                <a:spcPts val="1350"/>
+              </a:lnSpc>
+              <a:buNone/>
+            </a:pPr>
+            <a:endParaRPr lang="en-US" b="0" dirty="0">
+              <a:solidFill>
+                <a:schemeClr val="bg1"/>
+              </a:solidFill>
+              <a:effectLst/>
+              <a:latin typeface="Calibri" panose="020F0502020204030204" pitchFamily="34" charset="0"/>
+              <a:cs typeface="Calibri" panose="020F0502020204030204" pitchFamily="34" charset="0"/>
+            </a:endParaRPr>
+          </a:p>
+          <a:p>
+            <a:pPr>
+              <a:lnSpc>
+                <a:spcPts val="1350"/>
+              </a:lnSpc>
+              <a:buNone/>
+            </a:pPr>
+            <a:r>
+              <a:rPr lang="en-US" b="0" u="sng" dirty="0">
+                <a:solidFill>
+                  <a:schemeClr val="bg1"/>
+                </a:solidFill>
+                <a:effectLst/>
+                <a:latin typeface="Calibri" panose="020F0502020204030204" pitchFamily="34" charset="0"/>
+                <a:cs typeface="Calibri" panose="020F0502020204030204" pitchFamily="34" charset="0"/>
+              </a:rPr>
+              <a:t>https://</a:t>
+            </a:r>
+            <a:r>
+              <a:rPr lang="en-US" b="0" u="sng" dirty="0" err="1">
+                <a:solidFill>
+                  <a:schemeClr val="bg1"/>
+                </a:solidFill>
+                <a:effectLst/>
+                <a:latin typeface="Calibri" panose="020F0502020204030204" pitchFamily="34" charset="0"/>
+                <a:cs typeface="Calibri" panose="020F0502020204030204" pitchFamily="34" charset="0"/>
+              </a:rPr>
+              <a:t>github.com</a:t>
+            </a:r>
+            <a:r>
+              <a:rPr lang="en-US" b="0" u="sng" dirty="0">
+                <a:solidFill>
+                  <a:schemeClr val="bg1"/>
+                </a:solidFill>
+                <a:effectLst/>
+                <a:latin typeface="Calibri" panose="020F0502020204030204" pitchFamily="34" charset="0"/>
+                <a:cs typeface="Calibri" panose="020F0502020204030204" pitchFamily="34" charset="0"/>
+              </a:rPr>
+              <a:t>/</a:t>
+            </a:r>
+            <a:r>
+              <a:rPr lang="en-US" b="0" u="sng" dirty="0" err="1">
+                <a:solidFill>
+                  <a:schemeClr val="bg1"/>
+                </a:solidFill>
+                <a:effectLst/>
+                <a:latin typeface="Calibri" panose="020F0502020204030204" pitchFamily="34" charset="0"/>
+                <a:cs typeface="Calibri" panose="020F0502020204030204" pitchFamily="34" charset="0"/>
+              </a:rPr>
+              <a:t>terrillmoore</a:t>
+            </a:r>
+            <a:r>
+              <a:rPr lang="en-US" b="0" u="sng" dirty="0">
+                <a:solidFill>
+                  <a:schemeClr val="bg1"/>
+                </a:solidFill>
+                <a:effectLst/>
+                <a:latin typeface="Calibri" panose="020F0502020204030204" pitchFamily="34" charset="0"/>
+                <a:cs typeface="Calibri" panose="020F0502020204030204" pitchFamily="34" charset="0"/>
+              </a:rPr>
+              <a:t>/NIST-Statistical-Test-Suite</a:t>
+            </a:r>
+          </a:p>
+          <a:p>
+            <a:pPr>
+              <a:lnSpc>
+                <a:spcPts val="1350"/>
+              </a:lnSpc>
+              <a:buNone/>
+            </a:pPr>
+            <a:br>
+              <a:rPr lang="en-US" b="0" dirty="0">
+                <a:solidFill>
+                  <a:schemeClr val="bg1"/>
+                </a:solidFill>
+                <a:effectLst/>
+                <a:latin typeface="Calibri" panose="020F0502020204030204" pitchFamily="34" charset="0"/>
+                <a:cs typeface="Calibri" panose="020F0502020204030204" pitchFamily="34" charset="0"/>
+              </a:rPr>
+            </a:br>
+            <a:endParaRPr lang="en-US" b="0" dirty="0">
+              <a:solidFill>
+                <a:schemeClr val="bg1"/>
+              </a:solidFill>
+              <a:effectLst/>
+              <a:latin typeface="Calibri" panose="020F0502020204030204" pitchFamily="34" charset="0"/>
+              <a:cs typeface="Calibri" panose="020F0502020204030204" pitchFamily="34" charset="0"/>
+            </a:endParaRPr>
+          </a:p>
+          <a:p>
+            <a:pPr>
+              <a:lnSpc>
+                <a:spcPts val="1350"/>
+              </a:lnSpc>
+              <a:buNone/>
+            </a:pPr>
+            <a:r>
+              <a:rPr lang="en-US" sz="2800" b="1" dirty="0" err="1">
+                <a:solidFill>
+                  <a:schemeClr val="bg1"/>
+                </a:solidFill>
+                <a:effectLst/>
+                <a:latin typeface="Calibri" panose="020F0502020204030204" pitchFamily="34" charset="0"/>
+                <a:cs typeface="Calibri" panose="020F0502020204030204" pitchFamily="34" charset="0"/>
+              </a:rPr>
+              <a:t>dieharder</a:t>
+            </a:r>
+            <a:r>
+              <a:rPr lang="en-US" sz="2800" b="1" dirty="0">
+                <a:solidFill>
+                  <a:schemeClr val="bg1"/>
+                </a:solidFill>
+                <a:effectLst/>
+                <a:latin typeface="Calibri" panose="020F0502020204030204" pitchFamily="34" charset="0"/>
+                <a:cs typeface="Calibri" panose="020F0502020204030204" pitchFamily="34" charset="0"/>
+              </a:rPr>
+              <a:t>-Robert G. Brown</a:t>
+            </a:r>
+            <a:endParaRPr lang="en-US" sz="2800" b="0" dirty="0">
+              <a:solidFill>
+                <a:schemeClr val="bg1"/>
+              </a:solidFill>
+              <a:effectLst/>
+              <a:latin typeface="Calibri" panose="020F0502020204030204" pitchFamily="34" charset="0"/>
+              <a:cs typeface="Calibri" panose="020F0502020204030204" pitchFamily="34" charset="0"/>
+            </a:endParaRPr>
+          </a:p>
+          <a:p>
+            <a:pPr>
+              <a:lnSpc>
+                <a:spcPts val="1350"/>
+              </a:lnSpc>
+              <a:buNone/>
+            </a:pPr>
+            <a:r>
+              <a:rPr lang="en-US" b="0" u="sng" dirty="0">
+                <a:solidFill>
+                  <a:schemeClr val="bg1"/>
+                </a:solidFill>
+                <a:effectLst/>
+                <a:latin typeface="Calibri" panose="020F0502020204030204" pitchFamily="34" charset="0"/>
+                <a:cs typeface="Calibri" panose="020F0502020204030204" pitchFamily="34" charset="0"/>
+              </a:rPr>
+              <a:t>https://</a:t>
+            </a:r>
+            <a:r>
+              <a:rPr lang="en-US" b="0" u="sng" dirty="0" err="1">
+                <a:solidFill>
+                  <a:schemeClr val="bg1"/>
+                </a:solidFill>
+                <a:effectLst/>
+                <a:latin typeface="Calibri" panose="020F0502020204030204" pitchFamily="34" charset="0"/>
+                <a:cs typeface="Calibri" panose="020F0502020204030204" pitchFamily="34" charset="0"/>
+              </a:rPr>
+              <a:t>webhome.phy.duke.edu</a:t>
+            </a:r>
+            <a:r>
+              <a:rPr lang="en-US" b="0" u="sng" dirty="0">
+                <a:solidFill>
+                  <a:schemeClr val="bg1"/>
+                </a:solidFill>
+                <a:effectLst/>
+                <a:latin typeface="Calibri" panose="020F0502020204030204" pitchFamily="34" charset="0"/>
+                <a:cs typeface="Calibri" panose="020F0502020204030204" pitchFamily="34" charset="0"/>
+              </a:rPr>
+              <a:t>/~</a:t>
+            </a:r>
+            <a:r>
+              <a:rPr lang="en-US" b="0" u="sng" dirty="0" err="1">
+                <a:solidFill>
+                  <a:schemeClr val="bg1"/>
+                </a:solidFill>
+                <a:effectLst/>
+                <a:latin typeface="Calibri" panose="020F0502020204030204" pitchFamily="34" charset="0"/>
+                <a:cs typeface="Calibri" panose="020F0502020204030204" pitchFamily="34" charset="0"/>
+              </a:rPr>
+              <a:t>rgb</a:t>
+            </a:r>
+            <a:r>
+              <a:rPr lang="en-US" b="0" u="sng" dirty="0">
+                <a:solidFill>
+                  <a:schemeClr val="bg1"/>
+                </a:solidFill>
+                <a:effectLst/>
+                <a:latin typeface="Calibri" panose="020F0502020204030204" pitchFamily="34" charset="0"/>
+                <a:cs typeface="Calibri" panose="020F0502020204030204" pitchFamily="34" charset="0"/>
+              </a:rPr>
+              <a:t>/General/</a:t>
+            </a:r>
+            <a:r>
+              <a:rPr lang="en-US" b="0" u="sng" dirty="0" err="1">
+                <a:solidFill>
+                  <a:schemeClr val="bg1"/>
+                </a:solidFill>
+                <a:effectLst/>
+                <a:latin typeface="Calibri" panose="020F0502020204030204" pitchFamily="34" charset="0"/>
+                <a:cs typeface="Calibri" panose="020F0502020204030204" pitchFamily="34" charset="0"/>
+              </a:rPr>
+              <a:t>dieharder.php</a:t>
+            </a:r>
+            <a:endParaRPr lang="en-US" b="0" u="sng" dirty="0">
+              <a:solidFill>
+                <a:schemeClr val="bg1"/>
+              </a:solidFill>
+              <a:effectLst/>
+              <a:latin typeface="Calibri" panose="020F0502020204030204" pitchFamily="34" charset="0"/>
+              <a:cs typeface="Calibri" panose="020F0502020204030204" pitchFamily="34" charset="0"/>
+            </a:endParaRPr>
+          </a:p>
+          <a:p>
+            <a:pPr>
+              <a:lnSpc>
+                <a:spcPts val="1350"/>
+              </a:lnSpc>
+              <a:buNone/>
+            </a:pPr>
+            <a:endParaRPr lang="en-US" b="0" u="sng" dirty="0">
+              <a:solidFill>
+                <a:schemeClr val="bg1"/>
+              </a:solidFill>
+              <a:effectLst/>
+              <a:latin typeface="Calibri" panose="020F0502020204030204" pitchFamily="34" charset="0"/>
+              <a:cs typeface="Calibri" panose="020F0502020204030204" pitchFamily="34" charset="0"/>
+            </a:endParaRPr>
+          </a:p>
+          <a:p>
+            <a:pPr>
+              <a:lnSpc>
+                <a:spcPts val="1350"/>
+              </a:lnSpc>
+              <a:buNone/>
+            </a:pPr>
+            <a:r>
+              <a:rPr lang="en-US" b="0" u="sng" dirty="0">
+                <a:solidFill>
+                  <a:schemeClr val="bg1"/>
+                </a:solidFill>
+                <a:effectLst/>
+                <a:latin typeface="Calibri" panose="020F0502020204030204" pitchFamily="34" charset="0"/>
+                <a:cs typeface="Calibri" panose="020F0502020204030204" pitchFamily="34" charset="0"/>
+              </a:rPr>
+              <a:t>https://</a:t>
+            </a:r>
+            <a:r>
+              <a:rPr lang="en-US" b="0" u="sng" dirty="0" err="1">
+                <a:solidFill>
+                  <a:schemeClr val="bg1"/>
+                </a:solidFill>
+                <a:effectLst/>
+                <a:latin typeface="Calibri" panose="020F0502020204030204" pitchFamily="34" charset="0"/>
+                <a:cs typeface="Calibri" panose="020F0502020204030204" pitchFamily="34" charset="0"/>
+              </a:rPr>
+              <a:t>github.com</a:t>
+            </a:r>
+            <a:r>
+              <a:rPr lang="en-US" b="0" u="sng" dirty="0">
+                <a:solidFill>
+                  <a:schemeClr val="bg1"/>
+                </a:solidFill>
+                <a:effectLst/>
+                <a:latin typeface="Calibri" panose="020F0502020204030204" pitchFamily="34" charset="0"/>
+                <a:cs typeface="Calibri" panose="020F0502020204030204" pitchFamily="34" charset="0"/>
+              </a:rPr>
+              <a:t>/</a:t>
+            </a:r>
+            <a:r>
+              <a:rPr lang="en-US" b="0" u="sng" dirty="0" err="1">
+                <a:solidFill>
+                  <a:schemeClr val="bg1"/>
+                </a:solidFill>
+                <a:effectLst/>
+                <a:latin typeface="Calibri" panose="020F0502020204030204" pitchFamily="34" charset="0"/>
+                <a:cs typeface="Calibri" panose="020F0502020204030204" pitchFamily="34" charset="0"/>
+              </a:rPr>
+              <a:t>seehuhn</a:t>
+            </a:r>
+            <a:r>
+              <a:rPr lang="en-US" b="0" u="sng" dirty="0">
+                <a:solidFill>
+                  <a:schemeClr val="bg1"/>
+                </a:solidFill>
+                <a:effectLst/>
+                <a:latin typeface="Calibri" panose="020F0502020204030204" pitchFamily="34" charset="0"/>
+                <a:cs typeface="Calibri" panose="020F0502020204030204" pitchFamily="34" charset="0"/>
+              </a:rPr>
+              <a:t>/</a:t>
+            </a:r>
+            <a:r>
+              <a:rPr lang="en-US" b="0" u="sng" dirty="0" err="1">
+                <a:solidFill>
+                  <a:schemeClr val="bg1"/>
+                </a:solidFill>
+                <a:effectLst/>
+                <a:latin typeface="Calibri" panose="020F0502020204030204" pitchFamily="34" charset="0"/>
+                <a:cs typeface="Calibri" panose="020F0502020204030204" pitchFamily="34" charset="0"/>
+              </a:rPr>
+              <a:t>dieharder</a:t>
+            </a:r>
+            <a:endParaRPr lang="en-US" b="0" u="sng" dirty="0">
+              <a:solidFill>
+                <a:schemeClr val="bg1"/>
+              </a:solidFill>
+              <a:effectLst/>
+              <a:latin typeface="Calibri" panose="020F0502020204030204" pitchFamily="34" charset="0"/>
+              <a:cs typeface="Calibri" panose="020F0502020204030204" pitchFamily="34" charset="0"/>
+            </a:endParaRPr>
+          </a:p>
+          <a:p>
+            <a:pPr>
+              <a:lnSpc>
+                <a:spcPts val="1350"/>
+              </a:lnSpc>
+              <a:buNone/>
+            </a:pPr>
+            <a:br>
+              <a:rPr lang="en-US" b="0" dirty="0">
+                <a:solidFill>
+                  <a:schemeClr val="bg1"/>
+                </a:solidFill>
+                <a:effectLst/>
+                <a:latin typeface="Calibri" panose="020F0502020204030204" pitchFamily="34" charset="0"/>
+                <a:cs typeface="Calibri" panose="020F0502020204030204" pitchFamily="34" charset="0"/>
+              </a:rPr>
+            </a:br>
+            <a:endParaRPr lang="en-US" b="0" dirty="0">
+              <a:solidFill>
+                <a:schemeClr val="bg1"/>
+              </a:solidFill>
+              <a:effectLst/>
+              <a:latin typeface="Calibri" panose="020F0502020204030204" pitchFamily="34" charset="0"/>
+              <a:cs typeface="Calibri" panose="020F0502020204030204" pitchFamily="34" charset="0"/>
+            </a:endParaRPr>
+          </a:p>
+          <a:p>
+            <a:pPr>
+              <a:lnSpc>
+                <a:spcPts val="1350"/>
+              </a:lnSpc>
+              <a:buNone/>
+            </a:pPr>
+            <a:r>
+              <a:rPr lang="en-US" sz="2400" b="1" dirty="0">
+                <a:solidFill>
+                  <a:schemeClr val="bg1"/>
+                </a:solidFill>
+                <a:effectLst/>
+                <a:latin typeface="Calibri" panose="020F0502020204030204" pitchFamily="34" charset="0"/>
+                <a:cs typeface="Calibri" panose="020F0502020204030204" pitchFamily="34" charset="0"/>
+              </a:rPr>
+              <a:t>RANDOM.ORG offers true random numbers to anyone on the Internet</a:t>
+            </a:r>
+            <a:endParaRPr lang="en-US" sz="2400" b="0" dirty="0">
+              <a:solidFill>
+                <a:schemeClr val="bg1"/>
+              </a:solidFill>
+              <a:effectLst/>
+              <a:latin typeface="Calibri" panose="020F0502020204030204" pitchFamily="34" charset="0"/>
+              <a:cs typeface="Calibri" panose="020F0502020204030204" pitchFamily="34" charset="0"/>
+            </a:endParaRPr>
+          </a:p>
+          <a:p>
+            <a:pPr>
+              <a:lnSpc>
+                <a:spcPts val="1350"/>
+              </a:lnSpc>
+              <a:buNone/>
+            </a:pPr>
+            <a:r>
+              <a:rPr lang="en-US" b="0" u="sng" dirty="0">
+                <a:solidFill>
+                  <a:schemeClr val="bg1"/>
+                </a:solidFill>
+                <a:effectLst/>
+                <a:latin typeface="Calibri" panose="020F0502020204030204" pitchFamily="34" charset="0"/>
+                <a:cs typeface="Calibri" panose="020F0502020204030204" pitchFamily="34" charset="0"/>
+              </a:rPr>
+              <a:t>https://</a:t>
+            </a:r>
+            <a:r>
+              <a:rPr lang="en-US" b="0" u="sng" dirty="0" err="1">
+                <a:solidFill>
+                  <a:schemeClr val="bg1"/>
+                </a:solidFill>
+                <a:effectLst/>
+                <a:latin typeface="Calibri" panose="020F0502020204030204" pitchFamily="34" charset="0"/>
+                <a:cs typeface="Calibri" panose="020F0502020204030204" pitchFamily="34" charset="0"/>
+              </a:rPr>
+              <a:t>www.random.org</a:t>
+            </a:r>
+            <a:r>
+              <a:rPr lang="en-US" b="0" u="sng" dirty="0">
+                <a:solidFill>
+                  <a:schemeClr val="bg1"/>
+                </a:solidFill>
+                <a:effectLst/>
+                <a:latin typeface="Calibri" panose="020F0502020204030204" pitchFamily="34" charset="0"/>
+                <a:cs typeface="Calibri" panose="020F0502020204030204" pitchFamily="34" charset="0"/>
+              </a:rPr>
+              <a:t>/</a:t>
+            </a:r>
+          </a:p>
+          <a:p>
+            <a:pPr>
+              <a:lnSpc>
+                <a:spcPts val="1350"/>
+              </a:lnSpc>
+              <a:buNone/>
+            </a:pPr>
+            <a:br>
+              <a:rPr lang="en-US" b="0" dirty="0">
+                <a:solidFill>
+                  <a:schemeClr val="bg1"/>
+                </a:solidFill>
+                <a:effectLst/>
+                <a:latin typeface="Calibri" panose="020F0502020204030204" pitchFamily="34" charset="0"/>
+                <a:cs typeface="Calibri" panose="020F0502020204030204" pitchFamily="34" charset="0"/>
+              </a:rPr>
+            </a:br>
+            <a:endParaRPr lang="en-US" b="0" dirty="0">
+              <a:solidFill>
+                <a:schemeClr val="bg1"/>
+              </a:solidFill>
+              <a:effectLst/>
+              <a:latin typeface="Calibri" panose="020F0502020204030204" pitchFamily="34" charset="0"/>
+              <a:cs typeface="Calibri" panose="020F0502020204030204" pitchFamily="34" charset="0"/>
+            </a:endParaRPr>
+          </a:p>
+          <a:p>
+            <a:pPr>
+              <a:lnSpc>
+                <a:spcPts val="1350"/>
+              </a:lnSpc>
+              <a:buNone/>
+            </a:pPr>
+            <a:r>
+              <a:rPr lang="en-US" sz="2800" b="1" dirty="0">
+                <a:solidFill>
+                  <a:schemeClr val="bg1"/>
+                </a:solidFill>
+                <a:effectLst/>
+                <a:latin typeface="Calibri" panose="020F0502020204030204" pitchFamily="34" charset="0"/>
+                <a:cs typeface="Calibri" panose="020F0502020204030204" pitchFamily="34" charset="0"/>
+              </a:rPr>
+              <a:t>DIY - Build your own TRNG</a:t>
+            </a:r>
+            <a:endParaRPr lang="en-US" sz="2800" b="0" dirty="0">
+              <a:solidFill>
+                <a:schemeClr val="bg1"/>
+              </a:solidFill>
+              <a:effectLst/>
+              <a:latin typeface="Calibri" panose="020F0502020204030204" pitchFamily="34" charset="0"/>
+              <a:cs typeface="Calibri" panose="020F0502020204030204" pitchFamily="34" charset="0"/>
+            </a:endParaRPr>
+          </a:p>
+          <a:p>
+            <a:pPr>
+              <a:lnSpc>
+                <a:spcPts val="1350"/>
+              </a:lnSpc>
+              <a:buNone/>
+            </a:pPr>
+            <a:r>
+              <a:rPr lang="en-US" b="0" u="sng" dirty="0">
+                <a:solidFill>
+                  <a:schemeClr val="bg1"/>
+                </a:solidFill>
+                <a:effectLst/>
+                <a:latin typeface="Calibri" panose="020F0502020204030204" pitchFamily="34" charset="0"/>
+                <a:cs typeface="Calibri" panose="020F0502020204030204" pitchFamily="34" charset="0"/>
+              </a:rPr>
+              <a:t>http://</a:t>
+            </a:r>
+            <a:r>
+              <a:rPr lang="en-US" b="0" u="sng" dirty="0" err="1">
+                <a:solidFill>
+                  <a:schemeClr val="bg1"/>
+                </a:solidFill>
+                <a:effectLst/>
+                <a:latin typeface="Calibri" panose="020F0502020204030204" pitchFamily="34" charset="0"/>
+                <a:cs typeface="Calibri" panose="020F0502020204030204" pitchFamily="34" charset="0"/>
+              </a:rPr>
+              <a:t>www.reallyreallyrandom.com</a:t>
+            </a:r>
+            <a:r>
+              <a:rPr lang="en-US" b="0" u="sng" dirty="0">
+                <a:solidFill>
+                  <a:schemeClr val="bg1"/>
+                </a:solidFill>
+                <a:effectLst/>
+                <a:latin typeface="Calibri" panose="020F0502020204030204" pitchFamily="34" charset="0"/>
+                <a:cs typeface="Calibri" panose="020F0502020204030204" pitchFamily="34" charset="0"/>
+              </a:rPr>
+              <a:t>/</a:t>
+            </a:r>
+            <a:r>
+              <a:rPr lang="en-US" b="0" u="sng" dirty="0" err="1">
+                <a:solidFill>
+                  <a:schemeClr val="bg1"/>
+                </a:solidFill>
+                <a:effectLst/>
+                <a:latin typeface="Calibri" panose="020F0502020204030204" pitchFamily="34" charset="0"/>
+                <a:cs typeface="Calibri" panose="020F0502020204030204" pitchFamily="34" charset="0"/>
+              </a:rPr>
+              <a:t>index.html</a:t>
+            </a:r>
+            <a:endParaRPr lang="en-US" b="0" u="sng" dirty="0">
+              <a:solidFill>
+                <a:schemeClr val="bg1"/>
+              </a:solidFill>
+              <a:effectLst/>
+              <a:latin typeface="Calibri" panose="020F0502020204030204" pitchFamily="34" charset="0"/>
+              <a:cs typeface="Calibri" panose="020F0502020204030204" pitchFamily="34" charset="0"/>
+            </a:endParaRPr>
+          </a:p>
+          <a:p>
+            <a:pPr>
+              <a:lnSpc>
+                <a:spcPts val="1350"/>
+              </a:lnSpc>
+              <a:buNone/>
+            </a:pPr>
+            <a:br>
+              <a:rPr lang="en-US" b="0" dirty="0">
+                <a:solidFill>
+                  <a:schemeClr val="bg1"/>
+                </a:solidFill>
+                <a:effectLst/>
+                <a:latin typeface="Calibri" panose="020F0502020204030204" pitchFamily="34" charset="0"/>
+                <a:cs typeface="Calibri" panose="020F0502020204030204" pitchFamily="34" charset="0"/>
+              </a:rPr>
+            </a:br>
+            <a:endParaRPr lang="en-US" b="0" dirty="0">
+              <a:solidFill>
+                <a:schemeClr val="bg1"/>
+              </a:solidFill>
+              <a:effectLst/>
+              <a:latin typeface="Calibri" panose="020F0502020204030204" pitchFamily="34" charset="0"/>
+              <a:cs typeface="Calibri" panose="020F0502020204030204" pitchFamily="34" charset="0"/>
+            </a:endParaRPr>
+          </a:p>
+        </p:txBody>
+      </p:sp>
     </p:spTree>
   </p:cSld>
   <p:clrMapOvr>

--- a/Presentations/4.True Randomness Testing & Random Number Generators.pptx
+++ b/Presentations/4.True Randomness Testing & Random Number Generators.pptx
@@ -11917,8 +11917,8 @@
         </p:nvSpPr>
         <p:spPr>
           <a:xfrm>
-            <a:off x="609583" y="953482"/>
-            <a:ext cx="11253865" cy="4237699"/>
+            <a:off x="609583" y="858482"/>
+            <a:ext cx="11253865" cy="6398931"/>
           </a:xfrm>
           <a:prstGeom prst="rect">
             <a:avLst/>
@@ -11937,7 +11937,145 @@
               </a:lnSpc>
               <a:buNone/>
             </a:pPr>
-            <a:endParaRPr lang="en-US" b="0" dirty="0">
+            <a:r>
+              <a:rPr lang="en-US" sz="2000" b="1" dirty="0">
+                <a:solidFill>
+                  <a:schemeClr val="bg1"/>
+                </a:solidFill>
+                <a:latin typeface="Calibri" panose="020F0502020204030204" pitchFamily="34" charset="0"/>
+                <a:cs typeface="Calibri" panose="020F0502020204030204" pitchFamily="34" charset="0"/>
+              </a:rPr>
+              <a:t>- Entropy Test (</a:t>
+            </a:r>
+            <a:r>
+              <a:rPr lang="en-US" sz="2000" b="1" dirty="0" err="1">
+                <a:solidFill>
+                  <a:schemeClr val="bg1"/>
+                </a:solidFill>
+                <a:latin typeface="Calibri" panose="020F0502020204030204" pitchFamily="34" charset="0"/>
+                <a:cs typeface="Calibri" panose="020F0502020204030204" pitchFamily="34" charset="0"/>
+              </a:rPr>
+              <a:t>ent</a:t>
+            </a:r>
+            <a:r>
+              <a:rPr lang="en-US" sz="2000" b="1" dirty="0">
+                <a:solidFill>
+                  <a:schemeClr val="bg1"/>
+                </a:solidFill>
+                <a:latin typeface="Calibri" panose="020F0502020204030204" pitchFamily="34" charset="0"/>
+                <a:cs typeface="Calibri" panose="020F0502020204030204" pitchFamily="34" charset="0"/>
+              </a:rPr>
+              <a:t>) </a:t>
+            </a:r>
+          </a:p>
+          <a:p>
+            <a:pPr>
+              <a:lnSpc>
+                <a:spcPts val="1350"/>
+              </a:lnSpc>
+              <a:buNone/>
+            </a:pPr>
+            <a:endParaRPr lang="en-US" sz="2000" dirty="0">
+              <a:solidFill>
+                <a:schemeClr val="bg1"/>
+              </a:solidFill>
+              <a:latin typeface="Calibri" panose="020F0502020204030204" pitchFamily="34" charset="0"/>
+              <a:cs typeface="Calibri" panose="020F0502020204030204" pitchFamily="34" charset="0"/>
+            </a:endParaRPr>
+          </a:p>
+          <a:p>
+            <a:pPr lvl="1">
+              <a:lnSpc>
+                <a:spcPts val="1350"/>
+              </a:lnSpc>
+            </a:pPr>
+            <a:r>
+              <a:rPr lang="en-US" u="sng" dirty="0">
+                <a:solidFill>
+                  <a:schemeClr val="accent1"/>
+                </a:solidFill>
+                <a:latin typeface="Calibri" panose="020F0502020204030204" pitchFamily="34" charset="0"/>
+                <a:cs typeface="Calibri" panose="020F0502020204030204" pitchFamily="34" charset="0"/>
+              </a:rPr>
+              <a:t>https://</a:t>
+            </a:r>
+            <a:r>
+              <a:rPr lang="en-US" u="sng" dirty="0" err="1">
+                <a:solidFill>
+                  <a:schemeClr val="accent1"/>
+                </a:solidFill>
+                <a:latin typeface="Calibri" panose="020F0502020204030204" pitchFamily="34" charset="0"/>
+                <a:cs typeface="Calibri" panose="020F0502020204030204" pitchFamily="34" charset="0"/>
+              </a:rPr>
+              <a:t>www.fourmilab.ch</a:t>
+            </a:r>
+            <a:r>
+              <a:rPr lang="en-US" u="sng" dirty="0">
+                <a:solidFill>
+                  <a:schemeClr val="accent1"/>
+                </a:solidFill>
+                <a:latin typeface="Calibri" panose="020F0502020204030204" pitchFamily="34" charset="0"/>
+                <a:cs typeface="Calibri" panose="020F0502020204030204" pitchFamily="34" charset="0"/>
+              </a:rPr>
+              <a:t>/random/</a:t>
+            </a:r>
+          </a:p>
+          <a:p>
+            <a:pPr lvl="1">
+              <a:lnSpc>
+                <a:spcPts val="1350"/>
+              </a:lnSpc>
+            </a:pPr>
+            <a:endParaRPr lang="en-US" dirty="0">
+              <a:solidFill>
+                <a:schemeClr val="bg1"/>
+              </a:solidFill>
+              <a:latin typeface="Calibri" panose="020F0502020204030204" pitchFamily="34" charset="0"/>
+              <a:cs typeface="Calibri" panose="020F0502020204030204" pitchFamily="34" charset="0"/>
+            </a:endParaRPr>
+          </a:p>
+          <a:p>
+            <a:pPr lvl="1">
+              <a:lnSpc>
+                <a:spcPts val="1350"/>
+              </a:lnSpc>
+            </a:pPr>
+            <a:r>
+              <a:rPr lang="en-US" dirty="0">
+                <a:solidFill>
+                  <a:schemeClr val="bg1"/>
+                </a:solidFill>
+                <a:latin typeface="Calibri" panose="020F0502020204030204" pitchFamily="34" charset="0"/>
+                <a:cs typeface="Calibri" panose="020F0502020204030204" pitchFamily="34" charset="0"/>
+              </a:rPr>
+              <a:t>Usage: dd if=/dev/random  count=8192 | </a:t>
+            </a:r>
+            <a:r>
+              <a:rPr lang="en-US" dirty="0" err="1">
+                <a:solidFill>
+                  <a:schemeClr val="bg1"/>
+                </a:solidFill>
+                <a:latin typeface="Calibri" panose="020F0502020204030204" pitchFamily="34" charset="0"/>
+                <a:cs typeface="Calibri" panose="020F0502020204030204" pitchFamily="34" charset="0"/>
+              </a:rPr>
+              <a:t>ent</a:t>
+            </a:r>
+            <a:endParaRPr lang="en-US" dirty="0">
+              <a:solidFill>
+                <a:schemeClr val="bg1"/>
+              </a:solidFill>
+              <a:latin typeface="Calibri" panose="020F0502020204030204" pitchFamily="34" charset="0"/>
+              <a:cs typeface="Calibri" panose="020F0502020204030204" pitchFamily="34" charset="0"/>
+            </a:endParaRPr>
+          </a:p>
+          <a:p>
+            <a:pPr>
+              <a:lnSpc>
+                <a:spcPts val="1350"/>
+              </a:lnSpc>
+              <a:buNone/>
+            </a:pPr>
+            <a:endParaRPr lang="en-US" sz="2000" b="0" dirty="0">
               <a:solidFill>
                 <a:schemeClr val="bg1"/>
               </a:solidFill>
@@ -11954,7 +12092,7 @@
               <a:buNone/>
             </a:pPr>
             <a:br>
-              <a:rPr lang="en-US" b="0" dirty="0">
+              <a:rPr lang="en-US" sz="2000" b="0" dirty="0">
                 <a:solidFill>
                   <a:schemeClr val="bg1"/>
                 </a:solidFill>
@@ -11963,7 +12101,7 @@
                 <a:cs typeface="Calibri" panose="020F0502020204030204" pitchFamily="34" charset="0"/>
               </a:rPr>
             </a:br>
-            <a:endParaRPr lang="en-US" b="0" dirty="0">
+            <a:endParaRPr lang="en-US" sz="2000" b="0" dirty="0">
               <a:solidFill>
                 <a:schemeClr val="bg1"/>
               </a:solidFill>
@@ -11980,7 +12118,7 @@
               <a:buNone/>
             </a:pPr>
             <a:r>
-              <a:rPr lang="en-US" sz="2800" b="1" dirty="0">
+              <a:rPr lang="en-US" sz="2000" b="1" dirty="0">
                 <a:solidFill>
                   <a:schemeClr val="bg1"/>
                 </a:solidFill>
@@ -11988,20 +12126,9 @@
                 <a:latin typeface="Calibri" panose="020F0502020204030204" pitchFamily="34" charset="0"/>
                 <a:cs typeface="Calibri" panose="020F0502020204030204" pitchFamily="34" charset="0"/>
               </a:rPr>
-              <a:t>NIST-Statistical-Test-Suite</a:t>
-            </a:r>
-            <a:r>
-              <a:rPr lang="en-US" b="1" dirty="0">
-                <a:solidFill>
-                  <a:schemeClr val="bg1"/>
-                </a:solidFill>
-                <a:effectLst/>
-                <a:latin typeface="Calibri" panose="020F0502020204030204" pitchFamily="34" charset="0"/>
-                <a:cs typeface="Calibri" panose="020F0502020204030204" pitchFamily="34" charset="0"/>
-              </a:rPr>
-              <a:t> </a:t>
-            </a:r>
-            <a:endParaRPr lang="en-US" b="0" dirty="0">
+              <a:t>- NIST-Statistical-Test-Suite </a:t>
+            </a:r>
+            <a:endParaRPr lang="en-US" sz="2000" b="0" dirty="0">
               <a:solidFill>
                 <a:schemeClr val="bg1"/>
               </a:solidFill>
@@ -12017,10 +12144,25 @@
               </a:lnSpc>
               <a:buNone/>
             </a:pPr>
+            <a:endParaRPr lang="en-US" sz="2000" b="0" u="sng" dirty="0">
+              <a:solidFill>
+                <a:schemeClr val="accent1"/>
+              </a:solidFill>
+              <a:effectLst/>
+              <a:latin typeface="Calibri" panose="020F0502020204030204" pitchFamily="34" charset="0"/>
+              <a:cs typeface="Calibri" panose="020F0502020204030204" pitchFamily="34" charset="0"/>
+            </a:endParaRPr>
+          </a:p>
+          <a:p>
+            <a:pPr lvl="1">
+              <a:lnSpc>
+                <a:spcPts val="1350"/>
+              </a:lnSpc>
+            </a:pPr>
             <a:r>
               <a:rPr lang="en-US" b="0" u="sng" dirty="0">
                 <a:solidFill>
-                  <a:schemeClr val="bg1"/>
+                  <a:schemeClr val="accent1"/>
                 </a:solidFill>
                 <a:effectLst/>
                 <a:latin typeface="Calibri" panose="020F0502020204030204" pitchFamily="34" charset="0"/>
@@ -12031,7 +12173,7 @@
             <a:r>
               <a:rPr lang="en-US" b="0" u="sng" dirty="0" err="1">
                 <a:solidFill>
-                  <a:schemeClr val="bg1"/>
+                  <a:schemeClr val="accent1"/>
                 </a:solidFill>
                 <a:effectLst/>
                 <a:latin typeface="Calibri" panose="020F0502020204030204" pitchFamily="34" charset="0"/>
@@ -12042,13 +12184,98 @@
             <a:r>
               <a:rPr lang="en-US" b="0" u="sng" dirty="0">
                 <a:solidFill>
-                  <a:schemeClr val="bg1"/>
+                  <a:schemeClr val="accent1"/>
                 </a:solidFill>
                 <a:effectLst/>
                 <a:latin typeface="Calibri" panose="020F0502020204030204" pitchFamily="34" charset="0"/>
                 <a:cs typeface="Calibri" panose="020F0502020204030204" pitchFamily="34" charset="0"/>
               </a:rPr>
               <a:t>/Projects/random-bit-generation/Documentation-and-Software/Guide-to-the-Statistical-Tests</a:t>
+            </a:r>
+            <a:endParaRPr lang="en-US" b="0" dirty="0">
+              <a:solidFill>
+                <a:schemeClr val="accent1"/>
+              </a:solidFill>
+              <a:effectLst/>
+              <a:latin typeface="Calibri" panose="020F0502020204030204" pitchFamily="34" charset="0"/>
+              <a:cs typeface="Calibri" panose="020F0502020204030204" pitchFamily="34" charset="0"/>
+            </a:endParaRPr>
+          </a:p>
+          <a:p>
+            <a:pPr lvl="1">
+              <a:lnSpc>
+                <a:spcPts val="1350"/>
+              </a:lnSpc>
+            </a:pPr>
+            <a:endParaRPr lang="en-US" b="0" u="sng" dirty="0">
+              <a:solidFill>
+                <a:schemeClr val="accent1"/>
+              </a:solidFill>
+              <a:effectLst/>
+              <a:latin typeface="Calibri" panose="020F0502020204030204" pitchFamily="34" charset="0"/>
+              <a:cs typeface="Calibri" panose="020F0502020204030204" pitchFamily="34" charset="0"/>
+            </a:endParaRPr>
+          </a:p>
+          <a:p>
+            <a:pPr lvl="1">
+              <a:lnSpc>
+                <a:spcPts val="1350"/>
+              </a:lnSpc>
+            </a:pPr>
+            <a:r>
+              <a:rPr lang="en-US" b="0" u="sng" dirty="0">
+                <a:solidFill>
+                  <a:schemeClr val="accent1"/>
+                </a:solidFill>
+                <a:effectLst/>
+                <a:latin typeface="Calibri" panose="020F0502020204030204" pitchFamily="34" charset="0"/>
+                <a:cs typeface="Calibri" panose="020F0502020204030204" pitchFamily="34" charset="0"/>
+              </a:rPr>
+              <a:t>https://</a:t>
+            </a:r>
+            <a:r>
+              <a:rPr lang="en-US" b="0" u="sng" dirty="0" err="1">
+                <a:solidFill>
+                  <a:schemeClr val="accent1"/>
+                </a:solidFill>
+                <a:effectLst/>
+                <a:latin typeface="Calibri" panose="020F0502020204030204" pitchFamily="34" charset="0"/>
+                <a:cs typeface="Calibri" panose="020F0502020204030204" pitchFamily="34" charset="0"/>
+              </a:rPr>
+              <a:t>github.com</a:t>
+            </a:r>
+            <a:r>
+              <a:rPr lang="en-US" b="0" u="sng" dirty="0">
+                <a:solidFill>
+                  <a:schemeClr val="accent1"/>
+                </a:solidFill>
+                <a:effectLst/>
+                <a:latin typeface="Calibri" panose="020F0502020204030204" pitchFamily="34" charset="0"/>
+                <a:cs typeface="Calibri" panose="020F0502020204030204" pitchFamily="34" charset="0"/>
+              </a:rPr>
+              <a:t>/</a:t>
+            </a:r>
+            <a:r>
+              <a:rPr lang="en-US" b="0" u="sng" dirty="0" err="1">
+                <a:solidFill>
+                  <a:schemeClr val="accent1"/>
+                </a:solidFill>
+                <a:effectLst/>
+                <a:latin typeface="Calibri" panose="020F0502020204030204" pitchFamily="34" charset="0"/>
+                <a:cs typeface="Calibri" panose="020F0502020204030204" pitchFamily="34" charset="0"/>
+              </a:rPr>
+              <a:t>terrillmoore</a:t>
+            </a:r>
+            <a:r>
+              <a:rPr lang="en-US" b="0" u="sng" dirty="0">
+                <a:solidFill>
+                  <a:schemeClr val="accent1"/>
+                </a:solidFill>
+                <a:effectLst/>
+                <a:latin typeface="Calibri" panose="020F0502020204030204" pitchFamily="34" charset="0"/>
+                <a:cs typeface="Calibri" panose="020F0502020204030204" pitchFamily="34" charset="0"/>
+              </a:rPr>
+              <a:t>/NIST-Statistical-Test-Suite</a:t>
             </a:r>
           </a:p>
           <a:p>
@@ -12058,7 +12285,17 @@
               </a:lnSpc>
               <a:buNone/>
             </a:pPr>
-            <a:endParaRPr lang="en-US" b="0" dirty="0">
+            <a:br>
+              <a:rPr lang="en-US" sz="2000" b="0" dirty="0">
+                <a:solidFill>
+                  <a:schemeClr val="bg1"/>
+                </a:solidFill>
+                <a:effectLst/>
+                <a:latin typeface="Calibri" panose="020F0502020204030204" pitchFamily="34" charset="0"/>
+                <a:cs typeface="Calibri" panose="020F0502020204030204" pitchFamily="34" charset="0"/>
+              </a:rPr>
+            </a:br>
+            <a:endParaRPr lang="en-US" sz="2000" b="0" dirty="0">
               <a:solidFill>
                 <a:schemeClr val="bg1"/>
               </a:solidFill>
@@ -12075,7 +12312,7 @@
               <a:buNone/>
             </a:pPr>
             <a:r>
-              <a:rPr lang="en-US" b="0" u="sng" dirty="0">
+              <a:rPr lang="en-US" sz="2000" b="1" dirty="0">
                 <a:solidFill>
                   <a:schemeClr val="bg1"/>
                 </a:solidFill>
@@ -12083,10 +12320,10 @@
                 <a:latin typeface="Calibri" panose="020F0502020204030204" pitchFamily="34" charset="0"/>
                 <a:cs typeface="Calibri" panose="020F0502020204030204" pitchFamily="34" charset="0"/>
               </a:rPr>
-              <a:t>https://</a:t>
-            </a:r>
-            <a:r>
-              <a:rPr lang="en-US" b="0" u="sng" dirty="0" err="1">
+              <a:t>- </a:t>
+            </a:r>
+            <a:r>
+              <a:rPr lang="en-US" sz="2000" b="1" dirty="0" err="1">
                 <a:solidFill>
                   <a:schemeClr val="bg1"/>
                 </a:solidFill>
@@ -12094,10 +12331,10 @@
                 <a:latin typeface="Calibri" panose="020F0502020204030204" pitchFamily="34" charset="0"/>
                 <a:cs typeface="Calibri" panose="020F0502020204030204" pitchFamily="34" charset="0"/>
               </a:rPr>
-              <a:t>github.com</a:t>
-            </a:r>
-            <a:r>
-              <a:rPr lang="en-US" b="0" u="sng" dirty="0">
+              <a:t>Dieharder</a:t>
+            </a:r>
+            <a:r>
+              <a:rPr lang="en-US" sz="2000" b="1" dirty="0">
                 <a:solidFill>
                   <a:schemeClr val="bg1"/>
                 </a:solidFill>
@@ -12105,29 +12342,263 @@
                 <a:latin typeface="Calibri" panose="020F0502020204030204" pitchFamily="34" charset="0"/>
                 <a:cs typeface="Calibri" panose="020F0502020204030204" pitchFamily="34" charset="0"/>
               </a:rPr>
-              <a:t>/</a:t>
-            </a:r>
-            <a:r>
-              <a:rPr lang="en-US" b="0" u="sng" dirty="0" err="1">
-                <a:solidFill>
-                  <a:schemeClr val="bg1"/>
+              <a:t> - Robert G. Brown</a:t>
+            </a:r>
+            <a:endParaRPr lang="en-US" sz="2000" b="0" dirty="0">
+              <a:solidFill>
+                <a:schemeClr val="bg1"/>
+              </a:solidFill>
+              <a:effectLst/>
+              <a:latin typeface="Calibri" panose="020F0502020204030204" pitchFamily="34" charset="0"/>
+              <a:cs typeface="Calibri" panose="020F0502020204030204" pitchFamily="34" charset="0"/>
+            </a:endParaRPr>
+          </a:p>
+          <a:p>
+            <a:pPr>
+              <a:lnSpc>
+                <a:spcPts val="1350"/>
+              </a:lnSpc>
+              <a:buNone/>
+            </a:pPr>
+            <a:endParaRPr lang="en-US" sz="2000" b="0" u="sng" dirty="0">
+              <a:solidFill>
+                <a:schemeClr val="accent1"/>
+              </a:solidFill>
+              <a:effectLst/>
+              <a:latin typeface="Calibri" panose="020F0502020204030204" pitchFamily="34" charset="0"/>
+              <a:cs typeface="Calibri" panose="020F0502020204030204" pitchFamily="34" charset="0"/>
+            </a:endParaRPr>
+          </a:p>
+          <a:p>
+            <a:pPr lvl="1">
+              <a:lnSpc>
+                <a:spcPts val="1350"/>
+              </a:lnSpc>
+            </a:pPr>
+            <a:r>
+              <a:rPr lang="en-US" b="0" u="sng" dirty="0">
+                <a:solidFill>
+                  <a:schemeClr val="accent1"/>
                 </a:solidFill>
                 <a:effectLst/>
                 <a:latin typeface="Calibri" panose="020F0502020204030204" pitchFamily="34" charset="0"/>
                 <a:cs typeface="Calibri" panose="020F0502020204030204" pitchFamily="34" charset="0"/>
               </a:rPr>
-              <a:t>terrillmoore</a:t>
-            </a:r>
-            <a:r>
-              <a:rPr lang="en-US" b="0" u="sng" dirty="0">
-                <a:solidFill>
-                  <a:schemeClr val="bg1"/>
+              <a:t>https://</a:t>
+            </a:r>
+            <a:r>
+              <a:rPr lang="en-US" b="0" u="sng" dirty="0" err="1">
+                <a:solidFill>
+                  <a:schemeClr val="accent1"/>
                 </a:solidFill>
                 <a:effectLst/>
                 <a:latin typeface="Calibri" panose="020F0502020204030204" pitchFamily="34" charset="0"/>
                 <a:cs typeface="Calibri" panose="020F0502020204030204" pitchFamily="34" charset="0"/>
               </a:rPr>
-              <a:t>/NIST-Statistical-Test-Suite</a:t>
+              <a:t>webhome.phy.duke.edu</a:t>
+            </a:r>
+            <a:r>
+              <a:rPr lang="en-US" b="0" u="sng" dirty="0">
+                <a:solidFill>
+                  <a:schemeClr val="accent1"/>
+                </a:solidFill>
+                <a:effectLst/>
+                <a:latin typeface="Calibri" panose="020F0502020204030204" pitchFamily="34" charset="0"/>
+                <a:cs typeface="Calibri" panose="020F0502020204030204" pitchFamily="34" charset="0"/>
+              </a:rPr>
+              <a:t>/~</a:t>
+            </a:r>
+            <a:r>
+              <a:rPr lang="en-US" b="0" u="sng" dirty="0" err="1">
+                <a:solidFill>
+                  <a:schemeClr val="accent1"/>
+                </a:solidFill>
+                <a:effectLst/>
+                <a:latin typeface="Calibri" panose="020F0502020204030204" pitchFamily="34" charset="0"/>
+                <a:cs typeface="Calibri" panose="020F0502020204030204" pitchFamily="34" charset="0"/>
+              </a:rPr>
+              <a:t>rgb</a:t>
+            </a:r>
+            <a:r>
+              <a:rPr lang="en-US" b="0" u="sng" dirty="0">
+                <a:solidFill>
+                  <a:schemeClr val="accent1"/>
+                </a:solidFill>
+                <a:effectLst/>
+                <a:latin typeface="Calibri" panose="020F0502020204030204" pitchFamily="34" charset="0"/>
+                <a:cs typeface="Calibri" panose="020F0502020204030204" pitchFamily="34" charset="0"/>
+              </a:rPr>
+              <a:t>/General/</a:t>
+            </a:r>
+            <a:r>
+              <a:rPr lang="en-US" b="0" u="sng" dirty="0" err="1">
+                <a:solidFill>
+                  <a:schemeClr val="accent1"/>
+                </a:solidFill>
+                <a:effectLst/>
+                <a:latin typeface="Calibri" panose="020F0502020204030204" pitchFamily="34" charset="0"/>
+                <a:cs typeface="Calibri" panose="020F0502020204030204" pitchFamily="34" charset="0"/>
+              </a:rPr>
+              <a:t>dieharder.php</a:t>
+            </a:r>
+            <a:endParaRPr lang="en-US" b="0" u="sng" dirty="0">
+              <a:solidFill>
+                <a:schemeClr val="accent1"/>
+              </a:solidFill>
+              <a:effectLst/>
+              <a:latin typeface="Calibri" panose="020F0502020204030204" pitchFamily="34" charset="0"/>
+              <a:cs typeface="Calibri" panose="020F0502020204030204" pitchFamily="34" charset="0"/>
+            </a:endParaRPr>
+          </a:p>
+          <a:p>
+            <a:pPr lvl="1">
+              <a:lnSpc>
+                <a:spcPts val="1350"/>
+              </a:lnSpc>
+            </a:pPr>
+            <a:endParaRPr lang="en-US" b="0" u="sng" dirty="0">
+              <a:solidFill>
+                <a:schemeClr val="accent1"/>
+              </a:solidFill>
+              <a:effectLst/>
+              <a:latin typeface="Calibri" panose="020F0502020204030204" pitchFamily="34" charset="0"/>
+              <a:cs typeface="Calibri" panose="020F0502020204030204" pitchFamily="34" charset="0"/>
+            </a:endParaRPr>
+          </a:p>
+          <a:p>
+            <a:pPr lvl="1">
+              <a:lnSpc>
+                <a:spcPts val="1350"/>
+              </a:lnSpc>
+            </a:pPr>
+            <a:r>
+              <a:rPr lang="en-US" b="0" u="sng" dirty="0">
+                <a:solidFill>
+                  <a:schemeClr val="accent1"/>
+                </a:solidFill>
+                <a:effectLst/>
+                <a:latin typeface="Calibri" panose="020F0502020204030204" pitchFamily="34" charset="0"/>
+                <a:cs typeface="Calibri" panose="020F0502020204030204" pitchFamily="34" charset="0"/>
+              </a:rPr>
+              <a:t>https://</a:t>
+            </a:r>
+            <a:r>
+              <a:rPr lang="en-US" b="0" u="sng" dirty="0" err="1">
+                <a:solidFill>
+                  <a:schemeClr val="accent1"/>
+                </a:solidFill>
+                <a:effectLst/>
+                <a:latin typeface="Calibri" panose="020F0502020204030204" pitchFamily="34" charset="0"/>
+                <a:cs typeface="Calibri" panose="020F0502020204030204" pitchFamily="34" charset="0"/>
+              </a:rPr>
+              <a:t>github.com</a:t>
+            </a:r>
+            <a:r>
+              <a:rPr lang="en-US" b="0" u="sng" dirty="0">
+                <a:solidFill>
+                  <a:schemeClr val="accent1"/>
+                </a:solidFill>
+                <a:effectLst/>
+                <a:latin typeface="Calibri" panose="020F0502020204030204" pitchFamily="34" charset="0"/>
+                <a:cs typeface="Calibri" panose="020F0502020204030204" pitchFamily="34" charset="0"/>
+              </a:rPr>
+              <a:t>/</a:t>
+            </a:r>
+            <a:r>
+              <a:rPr lang="en-US" b="0" u="sng" dirty="0" err="1">
+                <a:solidFill>
+                  <a:schemeClr val="accent1"/>
+                </a:solidFill>
+                <a:effectLst/>
+                <a:latin typeface="Calibri" panose="020F0502020204030204" pitchFamily="34" charset="0"/>
+                <a:cs typeface="Calibri" panose="020F0502020204030204" pitchFamily="34" charset="0"/>
+              </a:rPr>
+              <a:t>seehuhn</a:t>
+            </a:r>
+            <a:r>
+              <a:rPr lang="en-US" b="0" u="sng" dirty="0">
+                <a:solidFill>
+                  <a:schemeClr val="accent1"/>
+                </a:solidFill>
+                <a:effectLst/>
+                <a:latin typeface="Calibri" panose="020F0502020204030204" pitchFamily="34" charset="0"/>
+                <a:cs typeface="Calibri" panose="020F0502020204030204" pitchFamily="34" charset="0"/>
+              </a:rPr>
+              <a:t>/</a:t>
+            </a:r>
+            <a:r>
+              <a:rPr lang="en-US" b="0" u="sng" dirty="0" err="1">
+                <a:solidFill>
+                  <a:schemeClr val="accent1"/>
+                </a:solidFill>
+                <a:effectLst/>
+                <a:latin typeface="Calibri" panose="020F0502020204030204" pitchFamily="34" charset="0"/>
+                <a:cs typeface="Calibri" panose="020F0502020204030204" pitchFamily="34" charset="0"/>
+              </a:rPr>
+              <a:t>dieharder</a:t>
+            </a:r>
+            <a:endParaRPr lang="en-US" b="0" u="sng" dirty="0">
+              <a:solidFill>
+                <a:schemeClr val="accent1"/>
+              </a:solidFill>
+              <a:effectLst/>
+              <a:latin typeface="Calibri" panose="020F0502020204030204" pitchFamily="34" charset="0"/>
+              <a:cs typeface="Calibri" panose="020F0502020204030204" pitchFamily="34" charset="0"/>
+            </a:endParaRPr>
+          </a:p>
+          <a:p>
+            <a:pPr lvl="1">
+              <a:lnSpc>
+                <a:spcPts val="1350"/>
+              </a:lnSpc>
+            </a:pPr>
+            <a:endParaRPr lang="en-US" b="0" u="sng" dirty="0">
+              <a:solidFill>
+                <a:schemeClr val="accent1"/>
+              </a:solidFill>
+              <a:effectLst/>
+              <a:latin typeface="Calibri" panose="020F0502020204030204" pitchFamily="34" charset="0"/>
+              <a:cs typeface="Calibri" panose="020F0502020204030204" pitchFamily="34" charset="0"/>
+            </a:endParaRPr>
+          </a:p>
+          <a:p>
+            <a:pPr lvl="1">
+              <a:lnSpc>
+                <a:spcPts val="1350"/>
+              </a:lnSpc>
+            </a:pPr>
+            <a:r>
+              <a:rPr lang="en-US" b="0" dirty="0">
+                <a:solidFill>
+                  <a:schemeClr val="bg1"/>
+                </a:solidFill>
+                <a:effectLst/>
+                <a:latin typeface="Calibri" panose="020F0502020204030204" pitchFamily="34" charset="0"/>
+                <a:cs typeface="Calibri" panose="020F0502020204030204" pitchFamily="34" charset="0"/>
+              </a:rPr>
+              <a:t>Usage: dd if=/dev/random  count=8192 | </a:t>
+            </a:r>
+            <a:r>
+              <a:rPr lang="en-US" b="0" dirty="0" err="1">
+                <a:solidFill>
+                  <a:schemeClr val="bg1"/>
+                </a:solidFill>
+                <a:effectLst/>
+                <a:latin typeface="Calibri" panose="020F0502020204030204" pitchFamily="34" charset="0"/>
+                <a:cs typeface="Calibri" panose="020F0502020204030204" pitchFamily="34" charset="0"/>
+              </a:rPr>
+              <a:t>dieharder</a:t>
+            </a:r>
+            <a:r>
+              <a:rPr lang="en-US" b="0" dirty="0">
+                <a:solidFill>
+                  <a:schemeClr val="bg1"/>
+                </a:solidFill>
+                <a:effectLst/>
+                <a:latin typeface="Calibri" panose="020F0502020204030204" pitchFamily="34" charset="0"/>
+                <a:cs typeface="Calibri" panose="020F0502020204030204" pitchFamily="34" charset="0"/>
+              </a:rPr>
+              <a:t> -a </a:t>
             </a:r>
           </a:p>
           <a:p>
@@ -12138,7 +12609,7 @@
               <a:buNone/>
             </a:pPr>
             <a:br>
-              <a:rPr lang="en-US" b="0" dirty="0">
+              <a:rPr lang="en-US" sz="2000" b="0" dirty="0">
                 <a:solidFill>
                   <a:schemeClr val="bg1"/>
                 </a:solidFill>
@@ -12147,7 +12618,7 @@
                 <a:cs typeface="Calibri" panose="020F0502020204030204" pitchFamily="34" charset="0"/>
               </a:rPr>
             </a:br>
-            <a:endParaRPr lang="en-US" b="0" dirty="0">
+            <a:endParaRPr lang="en-US" sz="2000" b="0" dirty="0">
               <a:solidFill>
                 <a:schemeClr val="bg1"/>
               </a:solidFill>
@@ -12164,7 +12635,7 @@
               <a:buNone/>
             </a:pPr>
             <a:r>
-              <a:rPr lang="en-US" sz="2800" b="1" dirty="0" err="1">
+              <a:rPr lang="en-US" sz="2000" b="1" dirty="0">
                 <a:solidFill>
                   <a:schemeClr val="bg1"/>
                 </a:solidFill>
@@ -12172,20 +12643,9 @@
                 <a:latin typeface="Calibri" panose="020F0502020204030204" pitchFamily="34" charset="0"/>
                 <a:cs typeface="Calibri" panose="020F0502020204030204" pitchFamily="34" charset="0"/>
               </a:rPr>
-              <a:t>dieharder</a:t>
-            </a:r>
-            <a:r>
-              <a:rPr lang="en-US" sz="2800" b="1" dirty="0">
-                <a:solidFill>
-                  <a:schemeClr val="bg1"/>
-                </a:solidFill>
-                <a:effectLst/>
-                <a:latin typeface="Calibri" panose="020F0502020204030204" pitchFamily="34" charset="0"/>
-                <a:cs typeface="Calibri" panose="020F0502020204030204" pitchFamily="34" charset="0"/>
-              </a:rPr>
-              <a:t>-Robert G. Brown</a:t>
-            </a:r>
-            <a:endParaRPr lang="en-US" sz="2800" b="0" dirty="0">
+              <a:t>- RANDOM.ORG offers true random numbers to anyone on the Internet</a:t>
+            </a:r>
+            <a:endParaRPr lang="en-US" sz="2000" b="0" dirty="0">
               <a:solidFill>
                 <a:schemeClr val="bg1"/>
               </a:solidFill>
@@ -12201,10 +12661,25 @@
               </a:lnSpc>
               <a:buNone/>
             </a:pPr>
+            <a:endParaRPr lang="en-US" sz="2000" b="0" u="sng" dirty="0">
+              <a:solidFill>
+                <a:schemeClr val="accent1"/>
+              </a:solidFill>
+              <a:effectLst/>
+              <a:latin typeface="Calibri" panose="020F0502020204030204" pitchFamily="34" charset="0"/>
+              <a:cs typeface="Calibri" panose="020F0502020204030204" pitchFamily="34" charset="0"/>
+            </a:endParaRPr>
+          </a:p>
+          <a:p>
+            <a:pPr lvl="1">
+              <a:lnSpc>
+                <a:spcPts val="1350"/>
+              </a:lnSpc>
+            </a:pPr>
             <a:r>
               <a:rPr lang="en-US" b="0" u="sng" dirty="0">
                 <a:solidFill>
-                  <a:schemeClr val="bg1"/>
+                  <a:schemeClr val="accent1"/>
                 </a:solidFill>
                 <a:effectLst/>
                 <a:latin typeface="Calibri" panose="020F0502020204030204" pitchFamily="34" charset="0"/>
@@ -12215,27 +12690,35 @@
             <a:r>
               <a:rPr lang="en-US" b="0" u="sng" dirty="0" err="1">
                 <a:solidFill>
-                  <a:schemeClr val="bg1"/>
+                  <a:schemeClr val="accent1"/>
                 </a:solidFill>
                 <a:effectLst/>
                 <a:latin typeface="Calibri" panose="020F0502020204030204" pitchFamily="34" charset="0"/>
                 <a:cs typeface="Calibri" panose="020F0502020204030204" pitchFamily="34" charset="0"/>
               </a:rPr>
-              <a:t>webhome.phy.duke.edu</a:t>
+              <a:t>www.random.org</a:t>
             </a:r>
             <a:r>
               <a:rPr lang="en-US" b="0" u="sng" dirty="0">
                 <a:solidFill>
-                  <a:schemeClr val="bg1"/>
+                  <a:schemeClr val="accent1"/>
                 </a:solidFill>
                 <a:effectLst/>
                 <a:latin typeface="Calibri" panose="020F0502020204030204" pitchFamily="34" charset="0"/>
                 <a:cs typeface="Calibri" panose="020F0502020204030204" pitchFamily="34" charset="0"/>
               </a:rPr>
-              <a:t>/~</a:t>
-            </a:r>
-            <a:r>
-              <a:rPr lang="en-US" b="0" u="sng" dirty="0" err="1">
+              <a:t>/</a:t>
+            </a:r>
+          </a:p>
+          <a:p>
+            <a:pPr>
+              <a:lnSpc>
+                <a:spcPts val="1350"/>
+              </a:lnSpc>
+              <a:buNone/>
+            </a:pPr>
+            <a:br>
+              <a:rPr lang="en-US" sz="2000" b="0" dirty="0">
                 <a:solidFill>
                   <a:schemeClr val="bg1"/>
                 </a:solidFill>
@@ -12243,31 +12726,8 @@
                 <a:latin typeface="Calibri" panose="020F0502020204030204" pitchFamily="34" charset="0"/>
                 <a:cs typeface="Calibri" panose="020F0502020204030204" pitchFamily="34" charset="0"/>
               </a:rPr>
-              <a:t>rgb</a:t>
-            </a:r>
-            <a:r>
-              <a:rPr lang="en-US" b="0" u="sng" dirty="0">
-                <a:solidFill>
-                  <a:schemeClr val="bg1"/>
-                </a:solidFill>
-                <a:effectLst/>
-                <a:latin typeface="Calibri" panose="020F0502020204030204" pitchFamily="34" charset="0"/>
-                <a:cs typeface="Calibri" panose="020F0502020204030204" pitchFamily="34" charset="0"/>
-              </a:rPr>
-              <a:t>/General/</a:t>
-            </a:r>
-            <a:r>
-              <a:rPr lang="en-US" b="0" u="sng" dirty="0" err="1">
-                <a:solidFill>
-                  <a:schemeClr val="bg1"/>
-                </a:solidFill>
-                <a:effectLst/>
-                <a:latin typeface="Calibri" panose="020F0502020204030204" pitchFamily="34" charset="0"/>
-                <a:cs typeface="Calibri" panose="020F0502020204030204" pitchFamily="34" charset="0"/>
-              </a:rPr>
-              <a:t>dieharder.php</a:t>
-            </a:r>
-            <a:endParaRPr lang="en-US" b="0" u="sng" dirty="0">
+            </a:br>
+            <a:endParaRPr lang="en-US" sz="2000" b="0" dirty="0">
               <a:solidFill>
                 <a:schemeClr val="bg1"/>
               </a:solidFill>
@@ -12283,7 +12743,18 @@
               </a:lnSpc>
               <a:buNone/>
             </a:pPr>
-            <a:endParaRPr lang="en-US" b="0" u="sng" dirty="0">
+            <a:r>
+              <a:rPr lang="en-US" sz="2000" b="1" dirty="0">
+                <a:solidFill>
+                  <a:schemeClr val="bg1"/>
+                </a:solidFill>
+                <a:effectLst/>
+                <a:latin typeface="Calibri" panose="020F0502020204030204" pitchFamily="34" charset="0"/>
+                <a:cs typeface="Calibri" panose="020F0502020204030204" pitchFamily="34" charset="0"/>
+              </a:rPr>
+              <a:t>- DIY - Build your own TRNG</a:t>
+            </a:r>
+            <a:endParaRPr lang="en-US" sz="2000" b="0" dirty="0">
               <a:solidFill>
                 <a:schemeClr val="bg1"/>
               </a:solidFill>
@@ -12299,32 +12770,47 @@
               </a:lnSpc>
               <a:buNone/>
             </a:pPr>
+            <a:endParaRPr lang="en-US" sz="2000" b="0" u="sng" dirty="0">
+              <a:solidFill>
+                <a:schemeClr val="accent1"/>
+              </a:solidFill>
+              <a:effectLst/>
+              <a:latin typeface="Calibri" panose="020F0502020204030204" pitchFamily="34" charset="0"/>
+              <a:cs typeface="Calibri" panose="020F0502020204030204" pitchFamily="34" charset="0"/>
+            </a:endParaRPr>
+          </a:p>
+          <a:p>
+            <a:pPr lvl="1">
+              <a:lnSpc>
+                <a:spcPts val="1350"/>
+              </a:lnSpc>
+            </a:pPr>
             <a:r>
               <a:rPr lang="en-US" b="0" u="sng" dirty="0">
                 <a:solidFill>
-                  <a:schemeClr val="bg1"/>
+                  <a:schemeClr val="accent1"/>
                 </a:solidFill>
                 <a:effectLst/>
                 <a:latin typeface="Calibri" panose="020F0502020204030204" pitchFamily="34" charset="0"/>
                 <a:cs typeface="Calibri" panose="020F0502020204030204" pitchFamily="34" charset="0"/>
               </a:rPr>
-              <a:t>https://</a:t>
+              <a:t>http://</a:t>
             </a:r>
             <a:r>
               <a:rPr lang="en-US" b="0" u="sng" dirty="0" err="1">
                 <a:solidFill>
-                  <a:schemeClr val="bg1"/>
+                  <a:schemeClr val="accent1"/>
                 </a:solidFill>
                 <a:effectLst/>
                 <a:latin typeface="Calibri" panose="020F0502020204030204" pitchFamily="34" charset="0"/>
                 <a:cs typeface="Calibri" panose="020F0502020204030204" pitchFamily="34" charset="0"/>
               </a:rPr>
-              <a:t>github.com</a:t>
+              <a:t>www.reallyreallyrandom.com</a:t>
             </a:r>
             <a:r>
               <a:rPr lang="en-US" b="0" u="sng" dirty="0">
                 <a:solidFill>
-                  <a:schemeClr val="bg1"/>
+                  <a:schemeClr val="accent1"/>
                 </a:solidFill>
                 <a:effectLst/>
                 <a:latin typeface="Calibri" panose="020F0502020204030204" pitchFamily="34" charset="0"/>
@@ -12335,39 +12821,17 @@
             <a:r>
               <a:rPr lang="en-US" b="0" u="sng" dirty="0" err="1">
                 <a:solidFill>
-                  <a:schemeClr val="bg1"/>
+                  <a:schemeClr val="accent1"/>
                 </a:solidFill>
                 <a:effectLst/>
                 <a:latin typeface="Calibri" panose="020F0502020204030204" pitchFamily="34" charset="0"/>
                 <a:cs typeface="Calibri" panose="020F0502020204030204" pitchFamily="34" charset="0"/>
               </a:rPr>
-              <a:t>seehuhn</a:t>
-            </a:r>
-            <a:r>
-              <a:rPr lang="en-US" b="0" u="sng" dirty="0">
-                <a:solidFill>
-                  <a:schemeClr val="bg1"/>
-                </a:solidFill>
-                <a:effectLst/>
-                <a:latin typeface="Calibri" panose="020F0502020204030204" pitchFamily="34" charset="0"/>
-                <a:cs typeface="Calibri" panose="020F0502020204030204" pitchFamily="34" charset="0"/>
-              </a:rPr>
-              <a:t>/</a:t>
-            </a:r>
-            <a:r>
-              <a:rPr lang="en-US" b="0" u="sng" dirty="0" err="1">
-                <a:solidFill>
-                  <a:schemeClr val="bg1"/>
-                </a:solidFill>
-                <a:effectLst/>
-                <a:latin typeface="Calibri" panose="020F0502020204030204" pitchFamily="34" charset="0"/>
-                <a:cs typeface="Calibri" panose="020F0502020204030204" pitchFamily="34" charset="0"/>
-              </a:rPr>
-              <a:t>dieharder</a:t>
+              <a:t>index.html</a:t>
             </a:r>
             <a:endParaRPr lang="en-US" b="0" u="sng" dirty="0">
               <a:solidFill>
-                <a:schemeClr val="bg1"/>
+                <a:schemeClr val="accent1"/>
               </a:solidFill>
               <a:effectLst/>
               <a:latin typeface="Calibri" panose="020F0502020204030204" pitchFamily="34" charset="0"/>
@@ -12382,7 +12846,7 @@
               <a:buNone/>
             </a:pPr>
             <a:br>
-              <a:rPr lang="en-US" b="0" dirty="0">
+              <a:rPr lang="en-US" sz="2000" b="0" dirty="0">
                 <a:solidFill>
                   <a:schemeClr val="bg1"/>
                 </a:solidFill>
@@ -12391,214 +12855,7 @@
                 <a:cs typeface="Calibri" panose="020F0502020204030204" pitchFamily="34" charset="0"/>
               </a:rPr>
             </a:br>
-            <a:endParaRPr lang="en-US" b="0" dirty="0">
-              <a:solidFill>
-                <a:schemeClr val="bg1"/>
-              </a:solidFill>
-              <a:effectLst/>
-              <a:latin typeface="Calibri" panose="020F0502020204030204" pitchFamily="34" charset="0"/>
-              <a:cs typeface="Calibri" panose="020F0502020204030204" pitchFamily="34" charset="0"/>
-            </a:endParaRPr>
-          </a:p>
-          <a:p>
-            <a:pPr>
-              <a:lnSpc>
-                <a:spcPts val="1350"/>
-              </a:lnSpc>
-              <a:buNone/>
-            </a:pPr>
-            <a:r>
-              <a:rPr lang="en-US" sz="2400" b="1" dirty="0">
-                <a:solidFill>
-                  <a:schemeClr val="bg1"/>
-                </a:solidFill>
-                <a:effectLst/>
-                <a:latin typeface="Calibri" panose="020F0502020204030204" pitchFamily="34" charset="0"/>
-                <a:cs typeface="Calibri" panose="020F0502020204030204" pitchFamily="34" charset="0"/>
-              </a:rPr>
-              <a:t>RANDOM.ORG offers true random numbers to anyone on the Internet</a:t>
-            </a:r>
-            <a:endParaRPr lang="en-US" sz="2400" b="0" dirty="0">
-              <a:solidFill>
-                <a:schemeClr val="bg1"/>
-              </a:solidFill>
-              <a:effectLst/>
-              <a:latin typeface="Calibri" panose="020F0502020204030204" pitchFamily="34" charset="0"/>
-              <a:cs typeface="Calibri" panose="020F0502020204030204" pitchFamily="34" charset="0"/>
-            </a:endParaRPr>
-          </a:p>
-          <a:p>
-            <a:pPr>
-              <a:lnSpc>
-                <a:spcPts val="1350"/>
-              </a:lnSpc>
-              <a:buNone/>
-            </a:pPr>
-            <a:r>
-              <a:rPr lang="en-US" b="0" u="sng" dirty="0">
-                <a:solidFill>
-                  <a:schemeClr val="bg1"/>
-                </a:solidFill>
-                <a:effectLst/>
-                <a:latin typeface="Calibri" panose="020F0502020204030204" pitchFamily="34" charset="0"/>
-                <a:cs typeface="Calibri" panose="020F0502020204030204" pitchFamily="34" charset="0"/>
-              </a:rPr>
-              <a:t>https://</a:t>
-            </a:r>
-            <a:r>
-              <a:rPr lang="en-US" b="0" u="sng" dirty="0" err="1">
-                <a:solidFill>
-                  <a:schemeClr val="bg1"/>
-                </a:solidFill>
-                <a:effectLst/>
-                <a:latin typeface="Calibri" panose="020F0502020204030204" pitchFamily="34" charset="0"/>
-                <a:cs typeface="Calibri" panose="020F0502020204030204" pitchFamily="34" charset="0"/>
-              </a:rPr>
-              <a:t>www.random.org</a:t>
-            </a:r>
-            <a:r>
-              <a:rPr lang="en-US" b="0" u="sng" dirty="0">
-                <a:solidFill>
-                  <a:schemeClr val="bg1"/>
-                </a:solidFill>
-                <a:effectLst/>
-                <a:latin typeface="Calibri" panose="020F0502020204030204" pitchFamily="34" charset="0"/>
-                <a:cs typeface="Calibri" panose="020F0502020204030204" pitchFamily="34" charset="0"/>
-              </a:rPr>
-              <a:t>/</a:t>
-            </a:r>
-          </a:p>
-          <a:p>
-            <a:pPr>
-              <a:lnSpc>
-                <a:spcPts val="1350"/>
-              </a:lnSpc>
-              <a:buNone/>
-            </a:pPr>
-            <a:br>
-              <a:rPr lang="en-US" b="0" dirty="0">
-                <a:solidFill>
-                  <a:schemeClr val="bg1"/>
-                </a:solidFill>
-                <a:effectLst/>
-                <a:latin typeface="Calibri" panose="020F0502020204030204" pitchFamily="34" charset="0"/>
-                <a:cs typeface="Calibri" panose="020F0502020204030204" pitchFamily="34" charset="0"/>
-              </a:rPr>
-            </a:br>
-            <a:endParaRPr lang="en-US" b="0" dirty="0">
-              <a:solidFill>
-                <a:schemeClr val="bg1"/>
-              </a:solidFill>
-              <a:effectLst/>
-              <a:latin typeface="Calibri" panose="020F0502020204030204" pitchFamily="34" charset="0"/>
-              <a:cs typeface="Calibri" panose="020F0502020204030204" pitchFamily="34" charset="0"/>
-            </a:endParaRPr>
-          </a:p>
-          <a:p>
-            <a:pPr>
-              <a:lnSpc>
-                <a:spcPts val="1350"/>
-              </a:lnSpc>
-              <a:buNone/>
-            </a:pPr>
-            <a:r>
-              <a:rPr lang="en-US" sz="2800" b="1" dirty="0">
-                <a:solidFill>
-                  <a:schemeClr val="bg1"/>
-                </a:solidFill>
-                <a:effectLst/>
-                <a:latin typeface="Calibri" panose="020F0502020204030204" pitchFamily="34" charset="0"/>
-                <a:cs typeface="Calibri" panose="020F0502020204030204" pitchFamily="34" charset="0"/>
-              </a:rPr>
-              <a:t>DIY - Build your own TRNG</a:t>
-            </a:r>
-            <a:endParaRPr lang="en-US" sz="2800" b="0" dirty="0">
-              <a:solidFill>
-                <a:schemeClr val="bg1"/>
-              </a:solidFill>
-              <a:effectLst/>
-              <a:latin typeface="Calibri" panose="020F0502020204030204" pitchFamily="34" charset="0"/>
-              <a:cs typeface="Calibri" panose="020F0502020204030204" pitchFamily="34" charset="0"/>
-            </a:endParaRPr>
-          </a:p>
-          <a:p>
-            <a:pPr>
-              <a:lnSpc>
-                <a:spcPts val="1350"/>
-              </a:lnSpc>
-              <a:buNone/>
-            </a:pPr>
-            <a:r>
-              <a:rPr lang="en-US" b="0" u="sng" dirty="0">
-                <a:solidFill>
-                  <a:schemeClr val="bg1"/>
-                </a:solidFill>
-                <a:effectLst/>
-                <a:latin typeface="Calibri" panose="020F0502020204030204" pitchFamily="34" charset="0"/>
-                <a:cs typeface="Calibri" panose="020F0502020204030204" pitchFamily="34" charset="0"/>
-              </a:rPr>
-              <a:t>http://</a:t>
-            </a:r>
-            <a:r>
-              <a:rPr lang="en-US" b="0" u="sng" dirty="0" err="1">
-                <a:solidFill>
-                  <a:schemeClr val="bg1"/>
-                </a:solidFill>
-                <a:effectLst/>
-                <a:latin typeface="Calibri" panose="020F0502020204030204" pitchFamily="34" charset="0"/>
-                <a:cs typeface="Calibri" panose="020F0502020204030204" pitchFamily="34" charset="0"/>
-              </a:rPr>
-              <a:t>www.reallyreallyrandom.com</a:t>
-            </a:r>
-            <a:r>
-              <a:rPr lang="en-US" b="0" u="sng" dirty="0">
-                <a:solidFill>
-                  <a:schemeClr val="bg1"/>
-                </a:solidFill>
-                <a:effectLst/>
-                <a:latin typeface="Calibri" panose="020F0502020204030204" pitchFamily="34" charset="0"/>
-                <a:cs typeface="Calibri" panose="020F0502020204030204" pitchFamily="34" charset="0"/>
-              </a:rPr>
-              <a:t>/</a:t>
-            </a:r>
-            <a:r>
-              <a:rPr lang="en-US" b="0" u="sng" dirty="0" err="1">
-                <a:solidFill>
-                  <a:schemeClr val="bg1"/>
-                </a:solidFill>
-                <a:effectLst/>
-                <a:latin typeface="Calibri" panose="020F0502020204030204" pitchFamily="34" charset="0"/>
-                <a:cs typeface="Calibri" panose="020F0502020204030204" pitchFamily="34" charset="0"/>
-              </a:rPr>
-              <a:t>index.html</a:t>
-            </a:r>
-            <a:endParaRPr lang="en-US" b="0" u="sng" dirty="0">
-              <a:solidFill>
-                <a:schemeClr val="bg1"/>
-              </a:solidFill>
-              <a:effectLst/>
-              <a:latin typeface="Calibri" panose="020F0502020204030204" pitchFamily="34" charset="0"/>
-              <a:cs typeface="Calibri" panose="020F0502020204030204" pitchFamily="34" charset="0"/>
-            </a:endParaRPr>
-          </a:p>
-          <a:p>
-            <a:pPr>
-              <a:lnSpc>
-                <a:spcPts val="1350"/>
-              </a:lnSpc>
-              <a:buNone/>
-            </a:pPr>
-            <a:br>
-              <a:rPr lang="en-US" b="0" dirty="0">
-                <a:solidFill>
-                  <a:schemeClr val="bg1"/>
-                </a:solidFill>
-                <a:effectLst/>
-                <a:latin typeface="Calibri" panose="020F0502020204030204" pitchFamily="34" charset="0"/>
-                <a:cs typeface="Calibri" panose="020F0502020204030204" pitchFamily="34" charset="0"/>
-              </a:rPr>
-            </a:br>
-            <a:endParaRPr lang="en-US" b="0" dirty="0">
+            <a:endParaRPr lang="en-US" sz="2000" b="0" dirty="0">
               <a:solidFill>
                 <a:schemeClr val="bg1"/>
               </a:solidFill>
